--- a/Module 5/class_5.2/deep_learning_course_class_5.2.pptx
+++ b/Module 5/class_5.2/deep_learning_course_class_5.2.pptx
@@ -25,16 +25,17 @@
     <p:sldId id="270" r:id="rId20"/>
     <p:sldId id="271" r:id="rId21"/>
     <p:sldId id="272" r:id="rId22"/>
+    <p:sldId id="273" r:id="rId23"/>
   </p:sldIdLst>
   <p:sldSz cy="5143500" cx="9144000"/>
   <p:notesSz cx="6858000" cy="9144000"/>
   <p:embeddedFontLst>
     <p:embeddedFont>
       <p:font typeface="Roboto Mono"/>
-      <p:regular r:id="rId23"/>
-      <p:bold r:id="rId24"/>
-      <p:italic r:id="rId25"/>
-      <p:boldItalic r:id="rId26"/>
+      <p:regular r:id="rId24"/>
+      <p:bold r:id="rId25"/>
+      <p:italic r:id="rId26"/>
+      <p:boldItalic r:id="rId27"/>
     </p:embeddedFont>
   </p:embeddedFontLst>
   <p:defaultTextStyle>
@@ -815,7 +816,7 @@
   <p:cSld>
     <p:spTree>
       <p:nvGrpSpPr>
-        <p:cNvPr id="121" name="Shape 121"/>
+        <p:cNvPr id="124" name="Shape 124"/>
         <p:cNvGrpSpPr/>
         <p:nvPr/>
       </p:nvGrpSpPr>
@@ -829,7 +830,7 @@
       </p:grpSpPr>
       <p:sp>
         <p:nvSpPr>
-          <p:cNvPr id="122" name="Google Shape;122;g3942b738061_0_1:notes"/>
+          <p:cNvPr id="125" name="Google Shape;125;g3942b738061_0_39:notes"/>
           <p:cNvSpPr/>
           <p:nvPr>
             <p:ph idx="2" type="sldImg"/>
@@ -864,7 +865,7 @@
       </p:sp>
       <p:sp>
         <p:nvSpPr>
-          <p:cNvPr id="123" name="Google Shape;123;g3942b738061_0_1:notes"/>
+          <p:cNvPr id="126" name="Google Shape;126;g3942b738061_0_39:notes"/>
           <p:cNvSpPr txBox="1"/>
           <p:nvPr>
             <p:ph idx="1" type="body"/>
@@ -914,7 +915,7 @@
   <p:cSld>
     <p:spTree>
       <p:nvGrpSpPr>
-        <p:cNvPr id="129" name="Shape 129"/>
+        <p:cNvPr id="131" name="Shape 131"/>
         <p:cNvGrpSpPr/>
         <p:nvPr/>
       </p:nvGrpSpPr>
@@ -928,7 +929,7 @@
       </p:grpSpPr>
       <p:sp>
         <p:nvSpPr>
-          <p:cNvPr id="130" name="Google Shape;130;g3942b738061_0_33:notes"/>
+          <p:cNvPr id="132" name="Google Shape;132;g3942b738061_0_1:notes"/>
           <p:cNvSpPr/>
           <p:nvPr>
             <p:ph idx="2" type="sldImg"/>
@@ -963,7 +964,7 @@
       </p:sp>
       <p:sp>
         <p:nvSpPr>
-          <p:cNvPr id="131" name="Google Shape;131;g3942b738061_0_33:notes"/>
+          <p:cNvPr id="133" name="Google Shape;133;g3942b738061_0_1:notes"/>
           <p:cNvSpPr txBox="1"/>
           <p:nvPr>
             <p:ph idx="1" type="body"/>
@@ -1013,7 +1014,7 @@
   <p:cSld>
     <p:spTree>
       <p:nvGrpSpPr>
-        <p:cNvPr id="135" name="Shape 135"/>
+        <p:cNvPr id="139" name="Shape 139"/>
         <p:cNvGrpSpPr/>
         <p:nvPr/>
       </p:nvGrpSpPr>
@@ -1027,7 +1028,7 @@
       </p:grpSpPr>
       <p:sp>
         <p:nvSpPr>
-          <p:cNvPr id="136" name="Google Shape;136;g3942b738061_0_46:notes"/>
+          <p:cNvPr id="140" name="Google Shape;140;g3942b738061_0_33:notes"/>
           <p:cNvSpPr/>
           <p:nvPr>
             <p:ph idx="2" type="sldImg"/>
@@ -1062,7 +1063,7 @@
       </p:sp>
       <p:sp>
         <p:nvSpPr>
-          <p:cNvPr id="137" name="Google Shape;137;g3942b738061_0_46:notes"/>
+          <p:cNvPr id="141" name="Google Shape;141;g3942b738061_0_33:notes"/>
           <p:cNvSpPr txBox="1"/>
           <p:nvPr>
             <p:ph idx="1" type="body"/>
@@ -1112,7 +1113,7 @@
   <p:cSld>
     <p:spTree>
       <p:nvGrpSpPr>
-        <p:cNvPr id="141" name="Shape 141"/>
+        <p:cNvPr id="145" name="Shape 145"/>
         <p:cNvGrpSpPr/>
         <p:nvPr/>
       </p:nvGrpSpPr>
@@ -1126,7 +1127,7 @@
       </p:grpSpPr>
       <p:sp>
         <p:nvSpPr>
-          <p:cNvPr id="142" name="Google Shape;142;g3942b738061_0_51:notes"/>
+          <p:cNvPr id="146" name="Google Shape;146;g3942b738061_0_46:notes"/>
           <p:cNvSpPr/>
           <p:nvPr>
             <p:ph idx="2" type="sldImg"/>
@@ -1161,7 +1162,7 @@
       </p:sp>
       <p:sp>
         <p:nvSpPr>
-          <p:cNvPr id="143" name="Google Shape;143;g3942b738061_0_51:notes"/>
+          <p:cNvPr id="147" name="Google Shape;147;g3942b738061_0_46:notes"/>
           <p:cNvSpPr txBox="1"/>
           <p:nvPr>
             <p:ph idx="1" type="body"/>
@@ -1211,7 +1212,7 @@
   <p:cSld>
     <p:spTree>
       <p:nvGrpSpPr>
-        <p:cNvPr id="148" name="Shape 148"/>
+        <p:cNvPr id="151" name="Shape 151"/>
         <p:cNvGrpSpPr/>
         <p:nvPr/>
       </p:nvGrpSpPr>
@@ -1225,7 +1226,7 @@
       </p:grpSpPr>
       <p:sp>
         <p:nvSpPr>
-          <p:cNvPr id="149" name="Google Shape;149;g3943fdd8e6c_0_0:notes"/>
+          <p:cNvPr id="152" name="Google Shape;152;g3942b738061_0_51:notes"/>
           <p:cNvSpPr/>
           <p:nvPr>
             <p:ph idx="2" type="sldImg"/>
@@ -1260,7 +1261,7 @@
       </p:sp>
       <p:sp>
         <p:nvSpPr>
-          <p:cNvPr id="150" name="Google Shape;150;g3943fdd8e6c_0_0:notes"/>
+          <p:cNvPr id="153" name="Google Shape;153;g3942b738061_0_51:notes"/>
           <p:cNvSpPr txBox="1"/>
           <p:nvPr>
             <p:ph idx="1" type="body"/>
@@ -1310,7 +1311,7 @@
   <p:cSld>
     <p:spTree>
       <p:nvGrpSpPr>
-        <p:cNvPr id="185" name="Shape 185"/>
+        <p:cNvPr id="158" name="Shape 158"/>
         <p:cNvGrpSpPr/>
         <p:nvPr/>
       </p:nvGrpSpPr>
@@ -1324,7 +1325,7 @@
       </p:grpSpPr>
       <p:sp>
         <p:nvSpPr>
-          <p:cNvPr id="186" name="Google Shape;186;g3957f4c9d0f_0_0:notes"/>
+          <p:cNvPr id="159" name="Google Shape;159;g3943fdd8e6c_0_0:notes"/>
           <p:cNvSpPr/>
           <p:nvPr>
             <p:ph idx="2" type="sldImg"/>
@@ -1359,7 +1360,7 @@
       </p:sp>
       <p:sp>
         <p:nvSpPr>
-          <p:cNvPr id="187" name="Google Shape;187;g3957f4c9d0f_0_0:notes"/>
+          <p:cNvPr id="160" name="Google Shape;160;g3943fdd8e6c_0_0:notes"/>
           <p:cNvSpPr txBox="1"/>
           <p:nvPr>
             <p:ph idx="1" type="body"/>
@@ -1409,7 +1410,7 @@
   <p:cSld>
     <p:spTree>
       <p:nvGrpSpPr>
-        <p:cNvPr id="191" name="Shape 191"/>
+        <p:cNvPr id="195" name="Shape 195"/>
         <p:cNvGrpSpPr/>
         <p:nvPr/>
       </p:nvGrpSpPr>
@@ -1423,7 +1424,7 @@
       </p:grpSpPr>
       <p:sp>
         <p:nvSpPr>
-          <p:cNvPr id="192" name="Google Shape;192;g3957f86a122_1_0:notes"/>
+          <p:cNvPr id="196" name="Google Shape;196;g3957f86a122_1_0:notes"/>
           <p:cNvSpPr/>
           <p:nvPr>
             <p:ph idx="2" type="sldImg"/>
@@ -1458,7 +1459,7 @@
       </p:sp>
       <p:sp>
         <p:nvSpPr>
-          <p:cNvPr id="193" name="Google Shape;193;g3957f86a122_1_0:notes"/>
+          <p:cNvPr id="197" name="Google Shape;197;g3957f86a122_1_0:notes"/>
           <p:cNvSpPr txBox="1"/>
           <p:nvPr>
             <p:ph idx="1" type="body"/>
@@ -1508,7 +1509,7 @@
   <p:cSld>
     <p:spTree>
       <p:nvGrpSpPr>
-        <p:cNvPr id="201" name="Shape 201"/>
+        <p:cNvPr id="205" name="Shape 205"/>
         <p:cNvGrpSpPr/>
         <p:nvPr/>
       </p:nvGrpSpPr>
@@ -1522,7 +1523,7 @@
       </p:grpSpPr>
       <p:sp>
         <p:nvSpPr>
-          <p:cNvPr id="202" name="Google Shape;202;g3957f86a122_1_12:notes"/>
+          <p:cNvPr id="206" name="Google Shape;206;g3957f4c9d0f_0_0:notes"/>
           <p:cNvSpPr/>
           <p:nvPr>
             <p:ph idx="2" type="sldImg"/>
@@ -1557,7 +1558,106 @@
       </p:sp>
       <p:sp>
         <p:nvSpPr>
-          <p:cNvPr id="203" name="Google Shape;203;g3957f86a122_1_12:notes"/>
+          <p:cNvPr id="207" name="Google Shape;207;g3957f4c9d0f_0_0:notes"/>
+          <p:cNvSpPr txBox="1"/>
+          <p:nvPr>
+            <p:ph idx="1" type="body"/>
+          </p:nvPr>
+        </p:nvSpPr>
+        <p:spPr>
+          <a:xfrm>
+            <a:off x="685800" y="4343400"/>
+            <a:ext cx="5486400" cy="4114800"/>
+          </a:xfrm>
+          <a:prstGeom prst="rect">
+            <a:avLst/>
+          </a:prstGeom>
+        </p:spPr>
+        <p:txBody>
+          <a:bodyPr anchorCtr="0" anchor="t" bIns="91425" lIns="91425" spcFirstLastPara="1" rIns="91425" wrap="square" tIns="91425">
+            <a:noAutofit/>
+          </a:bodyPr>
+          <a:lstStyle/>
+          <a:p>
+            <a:pPr indent="0" lvl="0" marL="0" rtl="0" algn="l">
+              <a:spcBef>
+                <a:spcPts val="0"/>
+              </a:spcBef>
+              <a:spcAft>
+                <a:spcPts val="0"/>
+              </a:spcAft>
+              <a:buNone/>
+            </a:pPr>
+            <a:r>
+              <a:t/>
+            </a:r>
+            <a:endParaRPr/>
+          </a:p>
+        </p:txBody>
+      </p:sp>
+    </p:spTree>
+  </p:cSld>
+  <p:clrMapOvr>
+    <a:masterClrMapping/>
+  </p:clrMapOvr>
+</p:notes>
+</file>
+
+<file path=ppt/notesSlides/notesSlide18.xml><?xml version="1.0" encoding="utf-8"?>
+<p:notes xmlns:a="http://schemas.openxmlformats.org/drawingml/2006/main" xmlns:r="http://schemas.openxmlformats.org/officeDocument/2006/relationships" xmlns:mc="http://schemas.openxmlformats.org/markup-compatibility/2006" xmlns:mv="urn:schemas-microsoft-com:mac:vml" xmlns:p="http://schemas.openxmlformats.org/presentationml/2006/main" xmlns:c="http://schemas.openxmlformats.org/drawingml/2006/chart" xmlns:dgm="http://schemas.openxmlformats.org/drawingml/2006/diagram" xmlns:o="urn:schemas-microsoft-com:office:office" xmlns:v="urn:schemas-microsoft-com:vml" xmlns:pvml="urn:schemas-microsoft-com:office:powerpoint" xmlns:com="http://schemas.openxmlformats.org/drawingml/2006/compatibility" xmlns:p14="http://schemas.microsoft.com/office/powerpoint/2010/main" xmlns:p15="http://schemas.microsoft.com/office/powerpoint/2012/main" xmlns:ahyp="http://schemas.microsoft.com/office/drawing/2018/hyperlinkcolor" showMasterPhAnim="0" showMasterSp="0">
+  <p:cSld>
+    <p:spTree>
+      <p:nvGrpSpPr>
+        <p:cNvPr id="211" name="Shape 211"/>
+        <p:cNvGrpSpPr/>
+        <p:nvPr/>
+      </p:nvGrpSpPr>
+      <p:grpSpPr>
+        <a:xfrm>
+          <a:off x="0" y="0"/>
+          <a:ext cx="0" cy="0"/>
+          <a:chOff x="0" y="0"/>
+          <a:chExt cx="0" cy="0"/>
+        </a:xfrm>
+      </p:grpSpPr>
+      <p:sp>
+        <p:nvSpPr>
+          <p:cNvPr id="212" name="Google Shape;212;g3957f86a122_1_12:notes"/>
+          <p:cNvSpPr/>
+          <p:nvPr>
+            <p:ph idx="2" type="sldImg"/>
+          </p:nvPr>
+        </p:nvSpPr>
+        <p:spPr>
+          <a:xfrm>
+            <a:off x="381300" y="685800"/>
+            <a:ext cx="6096000" cy="3429000"/>
+          </a:xfrm>
+          <a:custGeom>
+            <a:rect b="b" l="l" r="r" t="t"/>
+            <a:pathLst>
+              <a:path extrusionOk="0" h="120000" w="120000">
+                <a:moveTo>
+                  <a:pt x="0" y="0"/>
+                </a:moveTo>
+                <a:lnTo>
+                  <a:pt x="120000" y="0"/>
+                </a:lnTo>
+                <a:lnTo>
+                  <a:pt x="120000" y="120000"/>
+                </a:lnTo>
+                <a:lnTo>
+                  <a:pt x="0" y="120000"/>
+                </a:lnTo>
+                <a:close/>
+              </a:path>
+            </a:pathLst>
+          </a:custGeom>
+        </p:spPr>
+      </p:sp>
+      <p:sp>
+        <p:nvSpPr>
+          <p:cNvPr id="213" name="Google Shape;213;g3957f86a122_1_12:notes"/>
           <p:cNvSpPr txBox="1"/>
           <p:nvPr>
             <p:ph idx="1" type="body"/>
@@ -1819,7 +1919,7 @@
       </p:grpSpPr>
       <p:sp>
         <p:nvSpPr>
-          <p:cNvPr id="69" name="Google Shape;69;g3942b738061_0_16:notes"/>
+          <p:cNvPr id="69" name="Google Shape;69;g395cb806990_0_6:notes"/>
           <p:cNvSpPr/>
           <p:nvPr>
             <p:ph idx="2" type="sldImg"/>
@@ -1854,7 +1954,7 @@
       </p:sp>
       <p:sp>
         <p:nvSpPr>
-          <p:cNvPr id="70" name="Google Shape;70;g3942b738061_0_16:notes"/>
+          <p:cNvPr id="70" name="Google Shape;70;g395cb806990_0_6:notes"/>
           <p:cNvSpPr txBox="1"/>
           <p:nvPr>
             <p:ph idx="1" type="body"/>
@@ -1904,7 +2004,7 @@
   <p:cSld>
     <p:spTree>
       <p:nvGrpSpPr>
-        <p:cNvPr id="85" name="Shape 85"/>
+        <p:cNvPr id="77" name="Shape 77"/>
         <p:cNvGrpSpPr/>
         <p:nvPr/>
       </p:nvGrpSpPr>
@@ -1918,7 +2018,7 @@
       </p:grpSpPr>
       <p:sp>
         <p:nvSpPr>
-          <p:cNvPr id="86" name="Google Shape;86;g3941961b849_0_0:notes"/>
+          <p:cNvPr id="78" name="Google Shape;78;g3942b738061_0_16:notes"/>
           <p:cNvSpPr/>
           <p:nvPr>
             <p:ph idx="2" type="sldImg"/>
@@ -1953,7 +2053,7 @@
       </p:sp>
       <p:sp>
         <p:nvSpPr>
-          <p:cNvPr id="87" name="Google Shape;87;g3941961b849_0_0:notes"/>
+          <p:cNvPr id="79" name="Google Shape;79;g3942b738061_0_16:notes"/>
           <p:cNvSpPr txBox="1"/>
           <p:nvPr>
             <p:ph idx="1" type="body"/>
@@ -2003,7 +2103,7 @@
   <p:cSld>
     <p:spTree>
       <p:nvGrpSpPr>
-        <p:cNvPr id="93" name="Shape 93"/>
+        <p:cNvPr id="94" name="Shape 94"/>
         <p:cNvGrpSpPr/>
         <p:nvPr/>
       </p:nvGrpSpPr>
@@ -2017,7 +2117,7 @@
       </p:grpSpPr>
       <p:sp>
         <p:nvSpPr>
-          <p:cNvPr id="94" name="Google Shape;94;g3941961b849_0_5:notes"/>
+          <p:cNvPr id="95" name="Google Shape;95;g3941961b849_0_0:notes"/>
           <p:cNvSpPr/>
           <p:nvPr>
             <p:ph idx="2" type="sldImg"/>
@@ -2052,7 +2152,7 @@
       </p:sp>
       <p:sp>
         <p:nvSpPr>
-          <p:cNvPr id="95" name="Google Shape;95;g3941961b849_0_5:notes"/>
+          <p:cNvPr id="96" name="Google Shape;96;g3941961b849_0_0:notes"/>
           <p:cNvSpPr txBox="1"/>
           <p:nvPr>
             <p:ph idx="1" type="body"/>
@@ -2102,7 +2202,7 @@
   <p:cSld>
     <p:spTree>
       <p:nvGrpSpPr>
-        <p:cNvPr id="99" name="Shape 99"/>
+        <p:cNvPr id="102" name="Shape 102"/>
         <p:cNvGrpSpPr/>
         <p:nvPr/>
       </p:nvGrpSpPr>
@@ -2116,7 +2216,7 @@
       </p:grpSpPr>
       <p:sp>
         <p:nvSpPr>
-          <p:cNvPr id="100" name="Google Shape;100;g3941961b849_0_10:notes"/>
+          <p:cNvPr id="103" name="Google Shape;103;g3941961b849_0_5:notes"/>
           <p:cNvSpPr/>
           <p:nvPr>
             <p:ph idx="2" type="sldImg"/>
@@ -2151,7 +2251,7 @@
       </p:sp>
       <p:sp>
         <p:nvSpPr>
-          <p:cNvPr id="101" name="Google Shape;101;g3941961b849_0_10:notes"/>
+          <p:cNvPr id="104" name="Google Shape;104;g3941961b849_0_5:notes"/>
           <p:cNvSpPr txBox="1"/>
           <p:nvPr>
             <p:ph idx="1" type="body"/>
@@ -2201,7 +2301,7 @@
   <p:cSld>
     <p:spTree>
       <p:nvGrpSpPr>
-        <p:cNvPr id="106" name="Shape 106"/>
+        <p:cNvPr id="108" name="Shape 108"/>
         <p:cNvGrpSpPr/>
         <p:nvPr/>
       </p:nvGrpSpPr>
@@ -2215,7 +2315,7 @@
       </p:grpSpPr>
       <p:sp>
         <p:nvSpPr>
-          <p:cNvPr id="107" name="Google Shape;107;g3941961b849_0_15:notes"/>
+          <p:cNvPr id="109" name="Google Shape;109;g3941961b849_0_10:notes"/>
           <p:cNvSpPr/>
           <p:nvPr>
             <p:ph idx="2" type="sldImg"/>
@@ -2250,7 +2350,7 @@
       </p:sp>
       <p:sp>
         <p:nvSpPr>
-          <p:cNvPr id="108" name="Google Shape;108;g3941961b849_0_15:notes"/>
+          <p:cNvPr id="110" name="Google Shape;110;g3941961b849_0_10:notes"/>
           <p:cNvSpPr txBox="1"/>
           <p:nvPr>
             <p:ph idx="1" type="body"/>
@@ -2300,7 +2400,7 @@
   <p:cSld>
     <p:spTree>
       <p:nvGrpSpPr>
-        <p:cNvPr id="114" name="Shape 114"/>
+        <p:cNvPr id="116" name="Shape 116"/>
         <p:cNvGrpSpPr/>
         <p:nvPr/>
       </p:nvGrpSpPr>
@@ -2314,7 +2414,7 @@
       </p:grpSpPr>
       <p:sp>
         <p:nvSpPr>
-          <p:cNvPr id="115" name="Google Shape;115;g3942b738061_0_39:notes"/>
+          <p:cNvPr id="117" name="Google Shape;117;g3941961b849_0_15:notes"/>
           <p:cNvSpPr/>
           <p:nvPr>
             <p:ph idx="2" type="sldImg"/>
@@ -2349,7 +2449,7 @@
       </p:sp>
       <p:sp>
         <p:nvSpPr>
-          <p:cNvPr id="116" name="Google Shape;116;g3942b738061_0_39:notes"/>
+          <p:cNvPr id="118" name="Google Shape;118;g3941961b849_0_15:notes"/>
           <p:cNvSpPr txBox="1"/>
           <p:nvPr>
             <p:ph idx="1" type="body"/>
@@ -7184,7 +7284,7 @@
   <p:cSld>
     <p:spTree>
       <p:nvGrpSpPr>
-        <p:cNvPr id="124" name="Shape 124"/>
+        <p:cNvPr id="127" name="Shape 127"/>
         <p:cNvGrpSpPr/>
         <p:nvPr/>
       </p:nvGrpSpPr>
@@ -7198,7 +7298,7 @@
       </p:grpSpPr>
       <p:sp>
         <p:nvSpPr>
-          <p:cNvPr id="125" name="Google Shape;125;p22"/>
+          <p:cNvPr id="128" name="Google Shape;128;p22"/>
           <p:cNvSpPr txBox="1"/>
           <p:nvPr>
             <p:ph type="title"/>
@@ -7230,55 +7330,30 @@
             </a:pPr>
             <a:r>
               <a:rPr lang="en"/>
-              <a:t>Layer Normalization	</a:t>
+              <a:t>Batch normalization: Calculating gradients</a:t>
+            </a:r>
+            <a:endParaRPr/>
+          </a:p>
+          <a:p>
+            <a:pPr indent="0" lvl="0" marL="0" rtl="0" algn="l">
+              <a:spcBef>
+                <a:spcPts val="0"/>
+              </a:spcBef>
+              <a:spcAft>
+                <a:spcPts val="0"/>
+              </a:spcAft>
+              <a:buNone/>
+            </a:pPr>
+            <a:r>
+              <a:t/>
             </a:r>
             <a:endParaRPr/>
           </a:p>
         </p:txBody>
       </p:sp>
-      <p:sp>
-        <p:nvSpPr>
-          <p:cNvPr id="126" name="Google Shape;126;p22"/>
-          <p:cNvSpPr txBox="1"/>
-          <p:nvPr>
-            <p:ph idx="1" type="body"/>
-          </p:nvPr>
-        </p:nvSpPr>
-        <p:spPr>
-          <a:xfrm>
-            <a:off x="311700" y="1152475"/>
-            <a:ext cx="8520600" cy="990300"/>
-          </a:xfrm>
-          <a:prstGeom prst="rect">
-            <a:avLst/>
-          </a:prstGeom>
-        </p:spPr>
-        <p:txBody>
-          <a:bodyPr anchorCtr="0" anchor="t" bIns="91425" lIns="91425" spcFirstLastPara="1" rIns="91425" wrap="square" tIns="91425">
-            <a:normAutofit lnSpcReduction="20000"/>
-          </a:bodyPr>
-          <a:lstStyle/>
-          <a:p>
-            <a:pPr indent="0" lvl="0" marL="0" rtl="0" algn="l">
-              <a:spcBef>
-                <a:spcPts val="0"/>
-              </a:spcBef>
-              <a:spcAft>
-                <a:spcPts val="1200"/>
-              </a:spcAft>
-              <a:buNone/>
-            </a:pPr>
-            <a:r>
-              <a:rPr lang="en"/>
-              <a:t>In layer normalization, we normalize across features of each input. This works well across any batch size and is the default in Transformer models. Same computation during training and inference, no need to save any running stats</a:t>
-            </a:r>
-            <a:endParaRPr/>
-          </a:p>
-        </p:txBody>
-      </p:sp>
       <p:pic>
         <p:nvPicPr>
-          <p:cNvPr descr="{&quot;id&quot;:&quot;7&quot;,&quot;backgroundColorModified&quot;:false,&quot;font&quot;:{&quot;color&quot;:&quot;#000000&quot;,&quot;family&quot;:&quot;Arial&quot;,&quot;size&quot;:12},&quot;code&quot;:&quot;\\begin{gather*}\n{\\text{For}\\;\\text{eac}\\text{h}\\;\\text{sample}\\;x_{b}\\,\\text{(a}\\;\\text{D}\\;\\text{dimensional}\\;\\text{vector)}\\;\\text{in}\\;\\text{a}\\;\\text{batch}\\;\\text{of}\\;\\text{size}\\;\\text{B,}\\text{}}\\\\\n{\\mu_{b}=\\frac{1}{D}\\sum_{i=1}^{D}x_{bi}}\\\\\n{\\sigma_{b}^{2}=\\frac{1}{D}\\sum_{i=1}^{D}\\left(x_{bi}-\\mu_{b}\\right)^{2}}\\\\\n{s_{b}={\\sqrt[]{\\sigma_{b}^{2}+\\epsilon}}}\\\\\n{\\text{Normalized}\\;\\text{coordinates:}}\\\\\n{y_{bi}=\\lambda_{i}\\frac{x_{bi}-\\mu_{b}}{s_{b}}+\\beta_{i}}\t\n\\end{gather*}&quot;,&quot;type&quot;:&quot;gather*&quot;,&quot;backgroundColor&quot;:&quot;#FFFFFF&quot;,&quot;aid&quot;:null,&quot;ts&quot;:1771800474498,&quot;cs&quot;:&quot;uImiBUdoYJgCBCQOjjM4ug==&quot;,&quot;size&quot;:{&quot;width&quot;:524.5,&quot;height&quot;:252}}" id="127" name="Google Shape;127;p22"/>
+          <p:cNvPr descr="{&quot;type&quot;:&quot;gather*&quot;,&quot;code&quot;:&quot;\\begin{gather*}\n{\\pdf{L}{x_{i}}=\\frac{\\lambda}{Bs}\\left(g_{i}B-\\sum_{j=1}^{B}g_{j}\\,-\\frac{1}{s^{2}}\\sum_{j=1}^{B}\\left(x_{i}-\\mu\\right)\\left(x_{j}-\\mu\\right)g_{j}\\right)}\\\\\n{\\text{Define:}}\\\\\n{\\hat{x_{i}}=\\frac{x_{i}-\\mu}{s},\\,\\hat{g}_{i}=g_{i}\\lambda ,\\,S_{1}=\\sum_{j=1}^{B}\\hat{g_{j}},\\,S_{2}=\\sum_{j=1}^{B}\\hat{x}_{j}\\hat{g_{j}}}\\\\\n{\\pdf{L}{x_{i}}=\\frac{1}{Bs}\\left(\\hat{g_{i}}B-S_{1}\\,-\\hat{x_{i}}S_{2}\\right)}\t\n\\end{gather*}&quot;,&quot;backgroundColorModified&quot;:false,&quot;font&quot;:{&quot;size&quot;:10,&quot;color&quot;:&quot;#000000&quot;,&quot;family&quot;:&quot;Arial&quot;},&quot;backgroundColor&quot;:&quot;#FFFFFF&quot;,&quot;id&quot;:&quot;4&quot;,&quot;aid&quot;:null,&quot;ts&quot;:1771850130071,&quot;cs&quot;:&quot;V8qI+O0+2d/ZTpcwMgzhOg==&quot;,&quot;size&quot;:{&quot;width&quot;:375,&quot;height&quot;:161}}" id="129" name="Google Shape;129;p22"/>
           <p:cNvPicPr preferRelativeResize="0"/>
           <p:nvPr/>
         </p:nvPicPr>
@@ -7292,8 +7367,8 @@
         </p:blipFill>
         <p:spPr>
           <a:xfrm>
-            <a:off x="311704" y="2400825"/>
-            <a:ext cx="4995863" cy="2400300"/>
+            <a:off x="530673" y="1346911"/>
+            <a:ext cx="3571875" cy="1533525"/>
           </a:xfrm>
           <a:prstGeom prst="rect">
             <a:avLst/>
@@ -7304,24 +7379,16 @@
           </a:ln>
         </p:spPr>
       </p:pic>
-      <p:pic>
-        <p:nvPicPr>
-          <p:cNvPr descr="{&quot;code&quot;:&quot;\\begin{gather*}\n{\\text{In}\\;\\text{transformers,}\\;\\text{layer}\\;\\text{normalization}\\;\\text{is}\\;\\text{applied}\\;\\text{per}\\;\\text{token}}\\\\\n{\\text{across}\\;\\text{the}\\;\\text{hidden}\\;\\text{dimension}}\\\\\n{X:\\,B\\times T\\times D}\\\\\n{\\mu,\\,\\sigma\\,\\text{are}\\;\\text{computed}\\;\\text{for}\\;\\text{each}\\;\\text{(b,}\\;\\text{t)}\\;\\text{across}\\;\\text{D}}\\\\\n{\\lambda,\\,\\beta\\,\\text{are}\\;\\text{dimension}\\;\\text{(D,)}\\;\\text{and}\\;\\text{broadcast}\\;\\text{across}\\;\\text{B,}\\;\\text{T}}\\\\\n{\\text{}\\text{Thus,}\\;\\text{for}\\;\\text{a}\\;\\text{hidden}\\;\\text{state}\\;\\text{of}\\;\\text{dimension}\\;\\text{D,}\\;\\text{LN}\\;\\text{adds}}\\\\\n{2D\\,\\text{learnable}\\;\\text{parameters}}\t\n\\end{gather*}&quot;,&quot;font&quot;:{&quot;color&quot;:&quot;#000000&quot;,&quot;family&quot;:&quot;Arial&quot;,&quot;size&quot;:12},&quot;backgroundColorModified&quot;:false,&quot;type&quot;:&quot;gather*&quot;,&quot;aid&quot;:null,&quot;id&quot;:&quot;10&quot;,&quot;backgroundColor&quot;:&quot;#FFFFFF&quot;,&quot;ts&quot;:1771801188976,&quot;cs&quot;:&quot;ZIrzPw+Vj53NM2EWCC5ytg==&quot;,&quot;size&quot;:{&quot;width&quot;:458,&quot;height&quot;:163.66666666666666}}" id="128" name="Google Shape;128;p22"/>
-          <p:cNvPicPr preferRelativeResize="0"/>
+      <p:sp>
+        <p:nvSpPr>
+          <p:cNvPr id="130" name="Google Shape;130;p22"/>
+          <p:cNvSpPr txBox="1"/>
           <p:nvPr/>
-        </p:nvPicPr>
-        <p:blipFill>
-          <a:blip r:embed="rId4">
-            <a:alphaModFix/>
-          </a:blip>
-          <a:stretch>
-            <a:fillRect/>
-          </a:stretch>
-        </p:blipFill>
-        <p:spPr>
-          <a:xfrm>
-            <a:off x="4823275" y="2877225"/>
-            <a:ext cx="4362450" cy="1558925"/>
+        </p:nvSpPr>
+        <p:spPr>
+          <a:xfrm>
+            <a:off x="46175" y="4755650"/>
+            <a:ext cx="3000000" cy="338700"/>
           </a:xfrm>
           <a:prstGeom prst="rect">
             <a:avLst/>
@@ -7331,7 +7398,37 @@
             <a:noFill/>
           </a:ln>
         </p:spPr>
-      </p:pic>
+        <p:txBody>
+          <a:bodyPr anchorCtr="0" anchor="t" bIns="91425" lIns="91425" spcFirstLastPara="1" rIns="91425" wrap="square" tIns="91425">
+            <a:spAutoFit/>
+          </a:bodyPr>
+          <a:lstStyle/>
+          <a:p>
+            <a:pPr indent="0" lvl="0" marL="0" rtl="0" algn="l">
+              <a:spcBef>
+                <a:spcPts val="0"/>
+              </a:spcBef>
+              <a:spcAft>
+                <a:spcPts val="0"/>
+              </a:spcAft>
+              <a:buNone/>
+            </a:pPr>
+            <a:r>
+              <a:rPr lang="en" sz="1000">
+                <a:solidFill>
+                  <a:schemeClr val="dk1"/>
+                </a:solidFill>
+              </a:rPr>
+              <a:t>batch_norm_derivatives.py</a:t>
+            </a:r>
+            <a:endParaRPr sz="1000">
+              <a:solidFill>
+                <a:schemeClr val="dk1"/>
+              </a:solidFill>
+            </a:endParaRPr>
+          </a:p>
+        </p:txBody>
+      </p:sp>
     </p:spTree>
   </p:cSld>
   <p:clrMapOvr>
@@ -7345,7 +7442,7 @@
   <p:cSld>
     <p:spTree>
       <p:nvGrpSpPr>
-        <p:cNvPr id="132" name="Shape 132"/>
+        <p:cNvPr id="134" name="Shape 134"/>
         <p:cNvGrpSpPr/>
         <p:nvPr/>
       </p:nvGrpSpPr>
@@ -7359,7 +7456,7 @@
       </p:grpSpPr>
       <p:sp>
         <p:nvSpPr>
-          <p:cNvPr id="133" name="Google Shape;133;p23"/>
+          <p:cNvPr id="135" name="Google Shape;135;p23"/>
           <p:cNvSpPr txBox="1"/>
           <p:nvPr>
             <p:ph type="title"/>
@@ -7391,15 +7488,55 @@
             </a:pPr>
             <a:r>
               <a:rPr lang="en"/>
-              <a:t>Layer normalization: Gradients</a:t>
+              <a:t>Layer Normalization	</a:t>
             </a:r>
             <a:endParaRPr/>
           </a:p>
         </p:txBody>
       </p:sp>
+      <p:sp>
+        <p:nvSpPr>
+          <p:cNvPr id="136" name="Google Shape;136;p23"/>
+          <p:cNvSpPr txBox="1"/>
+          <p:nvPr>
+            <p:ph idx="1" type="body"/>
+          </p:nvPr>
+        </p:nvSpPr>
+        <p:spPr>
+          <a:xfrm>
+            <a:off x="311700" y="1152475"/>
+            <a:ext cx="8520600" cy="990300"/>
+          </a:xfrm>
+          <a:prstGeom prst="rect">
+            <a:avLst/>
+          </a:prstGeom>
+        </p:spPr>
+        <p:txBody>
+          <a:bodyPr anchorCtr="0" anchor="t" bIns="91425" lIns="91425" spcFirstLastPara="1" rIns="91425" wrap="square" tIns="91425">
+            <a:normAutofit lnSpcReduction="20000"/>
+          </a:bodyPr>
+          <a:lstStyle/>
+          <a:p>
+            <a:pPr indent="0" lvl="0" marL="0" rtl="0" algn="l">
+              <a:spcBef>
+                <a:spcPts val="0"/>
+              </a:spcBef>
+              <a:spcAft>
+                <a:spcPts val="1200"/>
+              </a:spcAft>
+              <a:buNone/>
+            </a:pPr>
+            <a:r>
+              <a:rPr lang="en"/>
+              <a:t>In layer normalization, we normalize across features of each input. This works well across any batch size and is the default in Transformer models. Same computation during training and inference, no need to save any running stats</a:t>
+            </a:r>
+            <a:endParaRPr/>
+          </a:p>
+        </p:txBody>
+      </p:sp>
       <p:pic>
         <p:nvPicPr>
-          <p:cNvPr descr="{&quot;type&quot;:&quot;gather*&quot;,&quot;font&quot;:{&quot;family&quot;:&quot;Arial&quot;,&quot;size&quot;:12,&quot;color&quot;:&quot;#000000&quot;},&quot;code&quot;:&quot;\\begin{gather*}\n{\\text{Let}\\;X\\,\\in B\\times D\\,\\left(\\text{MLP}\\right)}\\\\\n{\\text{and}\\;x_{i}\\,\\text{represent}\\;\\text{the}\\;i^{th}\\,\\text{coordinate}\\;\\text{of}\\;\\text{the}\\;b^{th}\\,\\text{batch}\\;\\text{element}}\\\\\n{\\mu\\;\\text{and}\\;\\sigma^{2}\\,\\text{are}\\;\\text{the}\\;\\text{LN}\\;\\text{stats}\\;\\text{of}\\;\\text{the}\\;b^{th}\\,\\text{batch}\\;\\text{element}\\;}\\\\\n{\\text{Then}\\;\\text{the}\\;\\text{normalized}\\;\\text{coordinate}\\;\\text{is:}}\\\\\n{\\hat{x_{i}}=\\frac{x_{i}-\\mu}{s},\\,s={\\sqrt[]{\\sigma^{2}+\\epsilon}}}\\\\\n{\\text{After}\\;\\text{rescaling}\\;\\text{by}\\;\\lambda,\\,\\beta}\\\\\n{y_{i}=\\lambda_{i}\\hat{x_{i}}+\\beta_{i}}\\\\\n{\\;\\lambda_{i}\\,\\text{and}\\;\\beta_{i}\\,\\text{are}\\;\\text{shared}\\;\\text{across}\\;\\text{all}\\;\\text{batch}\\;\\text{elements,}\\;\\text{and}\\;\\text{hence}\\text{}}\\\\\n{\\text{affect}\\;\\text{the}\\;\\text{loss}\\;\\text{through}\\;\\text{batch}\\;\\text{elements.}\\;\\text{The}\\;\\text{gradient}\\;\\text{of}\\;\\text{loss}\\;\\text{wrt}\\;\\lambda_{i}\\,\\text{and}\\;\\beta_{i}\\,}\\\\\n{\\text{is}\\;\\text{therefore}\\;\\text{identical}\\;\\text{to}\\;\\text{BN}}\\\\\n{\\pdf{L}{\\lambda_{i}}=\\sum_{j=1}^{B}\\pdf{L}{y_{ji}}\\hat{x}_{ji},\\,\\pdf{L}{\\beta_{i}}=\\sum_{j=1}^{B}\\pdf{L}{y_{ji}}}\\\\\n{\\text{For}\\;\\text{transformers,}\\;X:\\,B\\times T\\times D,\\,\\text{and}\\;\\lambda\\,\\text{and}\\;\\beta\\,\\text{are}\\;\\text{shared}\\;\\text{across}\\;B\\,\\text{and}\\;T\\,\\text{dimensions,}}\\\\\n{\\text{so}\\;\\text{the}\\;\\text{expression}\\;\\text{for}\\;\\text{the}\\text{ir}\\;\\text{gradients}\\;\\text{involves}\\;\\text{sum}\\;\\text{over}\\;T\\,\\text{as}\\;\\text{well}}\\\\\n{\\text{While}\\;\\text{calculating}\\;\\pdf{L}{x_{i}},\\,\\text{the}\\;\\text{sums}\\;\\text{are}\\;\\text{over}\\;\\text{feature}\\;\\text{dimension}}\\\\\n{}\\\\\n{}\t\n\\end{gather*}&quot;,&quot;backgroundColorModified&quot;:false,&quot;backgroundColor&quot;:&quot;#FFFFFF&quot;,&quot;aid&quot;:null,&quot;id&quot;:&quot;11&quot;,&quot;ts&quot;:1771848830894,&quot;cs&quot;:&quot;rgVT6KUaUBBINI67b5utkQ==&quot;,&quot;size&quot;:{&quot;width&quot;:688.5,&quot;height&quot;:423}}" id="134" name="Google Shape;134;p23"/>
+          <p:cNvPr descr="{&quot;id&quot;:&quot;7&quot;,&quot;backgroundColorModified&quot;:false,&quot;font&quot;:{&quot;color&quot;:&quot;#000000&quot;,&quot;family&quot;:&quot;Arial&quot;,&quot;size&quot;:12},&quot;code&quot;:&quot;\\begin{gather*}\n{\\text{For}\\;\\text{eac}\\text{h}\\;\\text{sample}\\;x_{b}\\,\\text{(a}\\;\\text{D}\\;\\text{dimensional}\\;\\text{vector)}\\;\\text{in}\\;\\text{a}\\;\\text{batch}\\;\\text{of}\\;\\text{size}\\;\\text{B,}\\text{}}\\\\\n{\\mu_{b}=\\frac{1}{D}\\sum_{i=1}^{D}x_{bi}}\\\\\n{\\sigma_{b}^{2}=\\frac{1}{D}\\sum_{i=1}^{D}\\left(x_{bi}-\\mu_{b}\\right)^{2}}\\\\\n{s_{b}={\\sqrt[]{\\sigma_{b}^{2}+\\epsilon}}}\\\\\n{\\text{Normalized}\\;\\text{coordinates:}}\\\\\n{y_{bi}=\\lambda_{i}\\frac{x_{bi}-\\mu_{b}}{s_{b}}+\\beta_{i}}\t\n\\end{gather*}&quot;,&quot;type&quot;:&quot;gather*&quot;,&quot;backgroundColor&quot;:&quot;#FFFFFF&quot;,&quot;aid&quot;:null,&quot;ts&quot;:1771800474498,&quot;cs&quot;:&quot;uImiBUdoYJgCBCQOjjM4ug==&quot;,&quot;size&quot;:{&quot;width&quot;:524.5,&quot;height&quot;:252}}" id="137" name="Google Shape;137;p23"/>
           <p:cNvPicPr preferRelativeResize="0"/>
           <p:nvPr/>
         </p:nvPicPr>
@@ -7413,8 +7550,36 @@
         </p:blipFill>
         <p:spPr>
           <a:xfrm>
-            <a:off x="426900" y="1166650"/>
-            <a:ext cx="5958599" cy="3660849"/>
+            <a:off x="311704" y="2400825"/>
+            <a:ext cx="4995863" cy="2400300"/>
+          </a:xfrm>
+          <a:prstGeom prst="rect">
+            <a:avLst/>
+          </a:prstGeom>
+          <a:noFill/>
+          <a:ln>
+            <a:noFill/>
+          </a:ln>
+        </p:spPr>
+      </p:pic>
+      <p:pic>
+        <p:nvPicPr>
+          <p:cNvPr descr="{&quot;code&quot;:&quot;\\begin{gather*}\n{\\text{In}\\;\\text{transformers,}\\;\\text{layer}\\;\\text{normalization}\\;\\text{is}\\;\\text{applied}\\;\\text{per}\\;\\text{token}}\\\\\n{\\text{across}\\;\\text{the}\\;\\text{hidden}\\;\\text{dimension}}\\\\\n{X:\\,B\\times T\\times D}\\\\\n{\\mu,\\,\\sigma\\,\\text{are}\\;\\text{computed}\\;\\text{for}\\;\\text{each}\\;\\text{(b,}\\;\\text{t)}\\;\\text{across}\\;\\text{D}}\\\\\n{\\lambda,\\,\\beta\\,\\text{are}\\;\\text{dimension}\\;\\text{(D,)}\\;\\text{and}\\;\\text{broadcast}\\;\\text{across}\\;\\text{B,}\\;\\text{T}}\\\\\n{\\text{}\\text{Thus,}\\;\\text{for}\\;\\text{a}\\;\\text{hidden}\\;\\text{state}\\;\\text{of}\\;\\text{dimension}\\;\\text{D,}\\;\\text{LN}\\;\\text{adds}}\\\\\n{2D\\,\\text{learnable}\\;\\text{parameters}}\t\n\\end{gather*}&quot;,&quot;font&quot;:{&quot;color&quot;:&quot;#000000&quot;,&quot;family&quot;:&quot;Arial&quot;,&quot;size&quot;:12},&quot;backgroundColorModified&quot;:false,&quot;type&quot;:&quot;gather*&quot;,&quot;aid&quot;:null,&quot;id&quot;:&quot;10&quot;,&quot;backgroundColor&quot;:&quot;#FFFFFF&quot;,&quot;ts&quot;:1771801188976,&quot;cs&quot;:&quot;ZIrzPw+Vj53NM2EWCC5ytg==&quot;,&quot;size&quot;:{&quot;width&quot;:458,&quot;height&quot;:163.66666666666666}}" id="138" name="Google Shape;138;p23"/>
+          <p:cNvPicPr preferRelativeResize="0"/>
+          <p:nvPr/>
+        </p:nvPicPr>
+        <p:blipFill>
+          <a:blip r:embed="rId4">
+            <a:alphaModFix/>
+          </a:blip>
+          <a:stretch>
+            <a:fillRect/>
+          </a:stretch>
+        </p:blipFill>
+        <p:spPr>
+          <a:xfrm>
+            <a:off x="4823275" y="2877225"/>
+            <a:ext cx="4362450" cy="1558925"/>
           </a:xfrm>
           <a:prstGeom prst="rect">
             <a:avLst/>
@@ -7438,7 +7603,7 @@
   <p:cSld>
     <p:spTree>
       <p:nvGrpSpPr>
-        <p:cNvPr id="138" name="Shape 138"/>
+        <p:cNvPr id="142" name="Shape 142"/>
         <p:cNvGrpSpPr/>
         <p:nvPr/>
       </p:nvGrpSpPr>
@@ -7452,7 +7617,7 @@
       </p:grpSpPr>
       <p:sp>
         <p:nvSpPr>
-          <p:cNvPr id="139" name="Google Shape;139;p24"/>
+          <p:cNvPr id="143" name="Google Shape;143;p24"/>
           <p:cNvSpPr txBox="1"/>
           <p:nvPr>
             <p:ph type="title"/>
@@ -7484,159 +7649,40 @@
             </a:pPr>
             <a:r>
               <a:rPr lang="en"/>
-              <a:t>Residual Learning (skip connections)</a:t>
+              <a:t>Layer normalization: Gradients</a:t>
             </a:r>
             <a:endParaRPr/>
           </a:p>
         </p:txBody>
       </p:sp>
-      <p:sp>
-        <p:nvSpPr>
-          <p:cNvPr id="140" name="Google Shape;140;p24"/>
-          <p:cNvSpPr txBox="1"/>
-          <p:nvPr>
-            <p:ph idx="1" type="body"/>
-          </p:nvPr>
-        </p:nvSpPr>
-        <p:spPr>
-          <a:xfrm>
-            <a:off x="311700" y="1152475"/>
-            <a:ext cx="8520600" cy="3801900"/>
+      <p:pic>
+        <p:nvPicPr>
+          <p:cNvPr descr="{&quot;type&quot;:&quot;gather*&quot;,&quot;font&quot;:{&quot;family&quot;:&quot;Arial&quot;,&quot;size&quot;:12,&quot;color&quot;:&quot;#000000&quot;},&quot;code&quot;:&quot;\\begin{gather*}\n{\\text{Let}\\;X\\,\\in B\\times D\\,\\left(\\text{MLP}\\right)}\\\\\n{\\text{and}\\;x_{i}\\,\\text{represent}\\;\\text{the}\\;i^{th}\\,\\text{coordinate}\\;\\text{of}\\;\\text{the}\\;b^{th}\\,\\text{batch}\\;\\text{element}}\\\\\n{\\mu\\;\\text{and}\\;\\sigma^{2}\\,\\text{are}\\;\\text{the}\\;\\text{LN}\\;\\text{stats}\\;\\text{of}\\;\\text{the}\\;b^{th}\\,\\text{batch}\\;\\text{element}\\;}\\\\\n{\\text{Then}\\;\\text{the}\\;\\text{normalized}\\;\\text{coordinate}\\;\\text{is:}}\\\\\n{\\hat{x_{i}}=\\frac{x_{i}-\\mu}{s},\\,s={\\sqrt[]{\\sigma^{2}+\\epsilon}}}\\\\\n{\\text{After}\\;\\text{rescaling}\\;\\text{by}\\;\\lambda,\\,\\beta}\\\\\n{y_{i}=\\lambda_{i}\\hat{x_{i}}+\\beta_{i}}\\\\\n{\\;\\lambda_{i}\\,\\text{and}\\;\\beta_{i}\\,\\text{are}\\;\\text{shared}\\;\\text{across}\\;\\text{all}\\;\\text{batch}\\;\\text{elements,}\\;\\text{and}\\;\\text{hence}\\text{}}\\\\\n{\\text{affect}\\;\\text{the}\\;\\text{loss}\\;\\text{through}\\;\\text{batch}\\;\\text{elements.}\\;\\text{The}\\;\\text{gradient}\\;\\text{of}\\;\\text{loss}\\;\\text{wrt}\\;\\lambda_{i}\\,\\text{and}\\;\\beta_{i}\\,}\\\\\n{\\text{is}\\;\\text{therefore}\\;\\text{identical}\\;\\text{to}\\;\\text{BN}}\\\\\n{\\pdf{L}{\\lambda_{i}}=\\sum_{j=1}^{B}\\pdf{L}{y_{ji}}\\hat{x}_{ji},\\,\\pdf{L}{\\beta_{i}}=\\sum_{j=1}^{B}\\pdf{L}{y_{ji}}}\\\\\n{\\text{For}\\;\\text{transformers,}\\;X:\\,B\\times T\\times D,\\,\\text{and}\\;\\lambda\\,\\text{and}\\;\\beta\\,\\text{are}\\;\\text{shared}\\;\\text{across}\\;B\\,\\text{and}\\;T\\,\\text{dimensions,}}\\\\\n{\\text{so}\\;\\text{the}\\;\\text{expression}\\;\\text{for}\\;\\text{the}\\text{ir}\\;\\text{gradients}\\;\\text{involves}\\;\\text{sum}\\;\\text{over}\\;T\\,\\text{as}\\;\\text{well}}\\\\\n{\\text{While}\\;\\text{calculating}\\;\\pdf{L}{x_{i}},\\,\\text{the}\\;\\text{sums}\\;\\text{are}\\;\\text{over}\\;\\text{feature}\\;\\text{dimension}}\\\\\n{}\\\\\n{}\t\n\\end{gather*}&quot;,&quot;backgroundColorModified&quot;:false,&quot;backgroundColor&quot;:&quot;#FFFFFF&quot;,&quot;aid&quot;:null,&quot;id&quot;:&quot;11&quot;,&quot;ts&quot;:1771848830894,&quot;cs&quot;:&quot;rgVT6KUaUBBINI67b5utkQ==&quot;,&quot;size&quot;:{&quot;width&quot;:688.5,&quot;height&quot;:423}}" id="144" name="Google Shape;144;p24"/>
+          <p:cNvPicPr preferRelativeResize="0"/>
+          <p:nvPr/>
+        </p:nvPicPr>
+        <p:blipFill>
+          <a:blip r:embed="rId3">
+            <a:alphaModFix/>
+          </a:blip>
+          <a:stretch>
+            <a:fillRect/>
+          </a:stretch>
+        </p:blipFill>
+        <p:spPr>
+          <a:xfrm>
+            <a:off x="426900" y="1166650"/>
+            <a:ext cx="5958599" cy="3660849"/>
           </a:xfrm>
           <a:prstGeom prst="rect">
             <a:avLst/>
           </a:prstGeom>
-        </p:spPr>
-        <p:txBody>
-          <a:bodyPr anchorCtr="0" anchor="t" bIns="91425" lIns="91425" spcFirstLastPara="1" rIns="91425" wrap="square" tIns="91425">
-            <a:normAutofit fontScale="85000" lnSpcReduction="20000"/>
-          </a:bodyPr>
-          <a:lstStyle/>
-          <a:p>
-            <a:pPr indent="0" lvl="0" marL="0" rtl="0" algn="l">
-              <a:spcBef>
-                <a:spcPts val="0"/>
-              </a:spcBef>
-              <a:spcAft>
-                <a:spcPts val="0"/>
-              </a:spcAft>
-              <a:buNone/>
-            </a:pPr>
-            <a:r>
-              <a:rPr lang="en"/>
-              <a:t>Core idea: Instead of asking a layer to learn a full transformation H(x), residual learning asks it to learn a correction to the input</a:t>
-            </a:r>
-            <a:endParaRPr/>
-          </a:p>
-          <a:p>
-            <a:pPr indent="0" lvl="0" marL="0" rtl="0" algn="l">
-              <a:spcBef>
-                <a:spcPts val="1200"/>
-              </a:spcBef>
-              <a:spcAft>
-                <a:spcPts val="0"/>
-              </a:spcAft>
-              <a:buNone/>
-            </a:pPr>
-            <a:r>
-              <a:rPr lang="en"/>
-              <a:t>				</a:t>
-            </a:r>
-            <a:r>
-              <a:rPr lang="en"/>
-              <a:t>y</a:t>
-            </a:r>
-            <a:r>
-              <a:rPr lang="en"/>
-              <a:t> = x + F(x)</a:t>
-            </a:r>
-            <a:endParaRPr/>
-          </a:p>
-          <a:p>
-            <a:pPr indent="0" lvl="0" marL="0" rtl="0" algn="l">
-              <a:spcBef>
-                <a:spcPts val="1200"/>
-              </a:spcBef>
-              <a:spcAft>
-                <a:spcPts val="0"/>
-              </a:spcAft>
-              <a:buNone/>
-            </a:pPr>
-            <a:r>
-              <a:rPr lang="en"/>
-              <a:t>x</a:t>
-            </a:r>
-            <a:r>
-              <a:rPr lang="en"/>
-              <a:t>: The input</a:t>
-            </a:r>
-            <a:br>
-              <a:rPr lang="en"/>
-            </a:br>
-            <a:r>
-              <a:rPr lang="en"/>
-              <a:t>F(x): Output of some stack of layers (Conv + Norm + Relu in CNN, Attention + MLP in Transformers..)</a:t>
-            </a:r>
-            <a:endParaRPr/>
-          </a:p>
-          <a:p>
-            <a:pPr indent="0" lvl="0" marL="0" rtl="0" algn="l">
-              <a:spcBef>
-                <a:spcPts val="1200"/>
-              </a:spcBef>
-              <a:spcAft>
-                <a:spcPts val="0"/>
-              </a:spcAft>
-              <a:buNone/>
-            </a:pPr>
-            <a:r>
-              <a:rPr lang="en"/>
-              <a:t>If F(x) = 0, the layers becomes the identity map y = x. That makes it easier for deep layers to not break learning. </a:t>
-            </a:r>
-            <a:endParaRPr/>
-          </a:p>
-          <a:p>
-            <a:pPr indent="0" lvl="0" marL="0" rtl="0" algn="l">
-              <a:spcBef>
-                <a:spcPts val="1200"/>
-              </a:spcBef>
-              <a:spcAft>
-                <a:spcPts val="0"/>
-              </a:spcAft>
-              <a:buNone/>
-            </a:pPr>
-            <a:r>
-              <a:rPr lang="en"/>
-              <a:t>Intuition: Layers of a neural network learn different representations of the input. Many useful transformations are “small edits” to a representation, rather than totally different </a:t>
-            </a:r>
-            <a:r>
-              <a:rPr lang="en"/>
-              <a:t>representation</a:t>
-            </a:r>
-            <a:r>
-              <a:rPr lang="en"/>
-              <a:t> every layer. With residual learning, the model can start near identity and gradually refine. </a:t>
-            </a:r>
-            <a:endParaRPr/>
-          </a:p>
-          <a:p>
-            <a:pPr indent="0" lvl="0" marL="0" rtl="0" algn="l">
-              <a:spcBef>
-                <a:spcPts val="1200"/>
-              </a:spcBef>
-              <a:spcAft>
-                <a:spcPts val="1200"/>
-              </a:spcAft>
-              <a:buNone/>
-            </a:pPr>
-            <a:r>
-              <a:rPr lang="en"/>
-              <a:t>Residual learning allows a layer to “do nothing”, if needed.  </a:t>
-            </a:r>
-            <a:endParaRPr/>
-          </a:p>
-        </p:txBody>
-      </p:sp>
+          <a:noFill/>
+          <a:ln>
+            <a:noFill/>
+          </a:ln>
+        </p:spPr>
+      </p:pic>
     </p:spTree>
   </p:cSld>
   <p:clrMapOvr>
@@ -7650,7 +7696,7 @@
   <p:cSld>
     <p:spTree>
       <p:nvGrpSpPr>
-        <p:cNvPr id="144" name="Shape 144"/>
+        <p:cNvPr id="148" name="Shape 148"/>
         <p:cNvGrpSpPr/>
         <p:nvPr/>
       </p:nvGrpSpPr>
@@ -7664,7 +7710,7 @@
       </p:grpSpPr>
       <p:sp>
         <p:nvSpPr>
-          <p:cNvPr id="145" name="Google Shape;145;p25"/>
+          <p:cNvPr id="149" name="Google Shape;149;p25"/>
           <p:cNvSpPr txBox="1"/>
           <p:nvPr>
             <p:ph type="title"/>
@@ -7696,7 +7742,7 @@
             </a:pPr>
             <a:r>
               <a:rPr lang="en"/>
-              <a:t>Residual Learning: Better gradient flow</a:t>
+              <a:t>Residual Learning (skip connections)</a:t>
             </a:r>
             <a:endParaRPr/>
           </a:p>
@@ -7704,7 +7750,7 @@
       </p:sp>
       <p:sp>
         <p:nvSpPr>
-          <p:cNvPr id="146" name="Google Shape;146;p25"/>
+          <p:cNvPr id="150" name="Google Shape;150;p25"/>
           <p:cNvSpPr txBox="1"/>
           <p:nvPr>
             <p:ph idx="1" type="body"/>
@@ -7713,7 +7759,7 @@
         <p:spPr>
           <a:xfrm>
             <a:off x="311700" y="1152475"/>
-            <a:ext cx="8520600" cy="982200"/>
+            <a:ext cx="8520600" cy="3801900"/>
           </a:xfrm>
           <a:prstGeom prst="rect">
             <a:avLst/>
@@ -7721,7 +7767,7 @@
         </p:spPr>
         <p:txBody>
           <a:bodyPr anchorCtr="0" anchor="t" bIns="91425" lIns="91425" spcFirstLastPara="1" rIns="91425" wrap="square" tIns="91425">
-            <a:normAutofit/>
+            <a:normAutofit fontScale="85000" lnSpcReduction="20000"/>
           </a:bodyPr>
           <a:lstStyle/>
           <a:p>
@@ -7730,54 +7776,125 @@
                 <a:spcPts val="0"/>
               </a:spcBef>
               <a:spcAft>
+                <a:spcPts val="0"/>
+              </a:spcAft>
+              <a:buNone/>
+            </a:pPr>
+            <a:r>
+              <a:rPr lang="en"/>
+              <a:t>Core idea: Instead of asking a layer to learn a full transformation H(x), residual learning asks it to learn a correction to the input</a:t>
+            </a:r>
+            <a:endParaRPr/>
+          </a:p>
+          <a:p>
+            <a:pPr indent="0" lvl="0" marL="0" rtl="0" algn="l">
+              <a:spcBef>
                 <a:spcPts val="1200"/>
+              </a:spcBef>
+              <a:spcAft>
+                <a:spcPts val="0"/>
               </a:spcAft>
               <a:buNone/>
             </a:pPr>
             <a:r>
               <a:rPr lang="en"/>
-              <a:t>Residual learning results in better gradient flow and reduces </a:t>
+              <a:t>				</a:t>
             </a:r>
             <a:r>
               <a:rPr lang="en"/>
-              <a:t>vanishing/exploding gradients</a:t>
+              <a:t>y</a:t>
             </a:r>
             <a:r>
               <a:rPr lang="en"/>
-              <a:t> </a:t>
+              <a:t> = x + F(x)</a:t>
+            </a:r>
+            <a:endParaRPr/>
+          </a:p>
+          <a:p>
+            <a:pPr indent="0" lvl="0" marL="0" rtl="0" algn="l">
+              <a:spcBef>
+                <a:spcPts val="1200"/>
+              </a:spcBef>
+              <a:spcAft>
+                <a:spcPts val="0"/>
+              </a:spcAft>
+              <a:buNone/>
+            </a:pPr>
+            <a:r>
+              <a:rPr lang="en"/>
+              <a:t>x</a:t>
+            </a:r>
+            <a:r>
+              <a:rPr lang="en"/>
+              <a:t>: The input</a:t>
+            </a:r>
+            <a:br>
+              <a:rPr lang="en"/>
+            </a:br>
+            <a:r>
+              <a:rPr lang="en"/>
+              <a:t>F(x): Output of some stack of layers (Conv + Norm + Relu in CNN, Attention + MLP in Transformers..)</a:t>
+            </a:r>
+            <a:endParaRPr/>
+          </a:p>
+          <a:p>
+            <a:pPr indent="0" lvl="0" marL="0" rtl="0" algn="l">
+              <a:spcBef>
+                <a:spcPts val="1200"/>
+              </a:spcBef>
+              <a:spcAft>
+                <a:spcPts val="0"/>
+              </a:spcAft>
+              <a:buNone/>
+            </a:pPr>
+            <a:r>
+              <a:rPr lang="en"/>
+              <a:t>If F(x) = 0, the layers becomes the identity map y = x. That makes it easier for deep layers to not break learning. </a:t>
+            </a:r>
+            <a:endParaRPr/>
+          </a:p>
+          <a:p>
+            <a:pPr indent="0" lvl="0" marL="0" rtl="0" algn="l">
+              <a:spcBef>
+                <a:spcPts val="1200"/>
+              </a:spcBef>
+              <a:spcAft>
+                <a:spcPts val="0"/>
+              </a:spcAft>
+              <a:buNone/>
+            </a:pPr>
+            <a:r>
+              <a:rPr lang="en"/>
+              <a:t>Intuition: Layers of a neural network learn different representations of the input. Many useful transformations are “small edits” to a representation, rather than totally different </a:t>
+            </a:r>
+            <a:r>
+              <a:rPr lang="en"/>
+              <a:t>representation</a:t>
+            </a:r>
+            <a:r>
+              <a:rPr lang="en"/>
+              <a:t> every layer. With residual learning, the model can start near identity and gradually refine. </a:t>
+            </a:r>
+            <a:endParaRPr/>
+          </a:p>
+          <a:p>
+            <a:pPr indent="0" lvl="0" marL="0" rtl="0" algn="l">
+              <a:spcBef>
+                <a:spcPts val="1200"/>
+              </a:spcBef>
+              <a:spcAft>
+                <a:spcPts val="1200"/>
+              </a:spcAft>
+              <a:buNone/>
+            </a:pPr>
+            <a:r>
+              <a:rPr lang="en"/>
+              <a:t>Residual learning allows a layer to “do nothing”, if needed.  </a:t>
             </a:r>
             <a:endParaRPr/>
           </a:p>
         </p:txBody>
       </p:sp>
-      <p:pic>
-        <p:nvPicPr>
-          <p:cNvPr descr="{&quot;backgroundColorModified&quot;:false,&quot;id&quot;:&quot;12&quot;,&quot;font&quot;:{&quot;color&quot;:&quot;#595959&quot;,&quot;family&quot;:&quot;Arial&quot;,&quot;size&quot;:16.5},&quot;type&quot;:&quot;gather*&quot;,&quot;code&quot;:&quot;\\begin{gather*}\n{\\text{Let}\\;\\text{a}\\;\\text{block}\\;\\text{be}}\\\\\n{y=x+F\\left(x\\right)}\\\\\n{\\text{For}\\;\\text{a}\\;\\text{loss}\\;\\text{L,}}\\\\\n{\\pdf{L}{x}=\\pdf{L}{y}+\\pdf{L}{y}\\pdf{F}{x}}\\\\\n{=\\,\\pdf{L}{y}\\left(I\\,+\\pdf{F}{x}\\,\\right)}\\\\\n{\\text{So}\\;\\text{even}\\;\\text{if}\\;\\text{the}\\,\\text{gradient}\\;\\text{through}\\;\\text{the}\\;\\text{layer}\\;\\pdf{F}{x}\\,\\text{becomes}\\;\\text{small}\\;\\text{or}\\;\\text{unstable,}}\\\\\n{\\text{the}\\;\\text{full}\\;\\text{gradient}\\;\\text{has}\\;\\text{a}\\;\\text{direct}\\;\\text{path}\\;\\text{via}\\;\\text{the}\\;\\text{skip}\\;\\text{connection}\\;\\text{term.}}\t\n\\end{gather*}&quot;,&quot;aid&quot;:null,&quot;backgroundColor&quot;:&quot;#FFFFFF&quot;,&quot;ts&quot;:1771857863497,&quot;cs&quot;:&quot;8EqzERljDWE0R2gf0l1Xrw==&quot;,&quot;size&quot;:{&quot;width&quot;:806.1312976377952,&quot;height&quot;:323.92388871391074}}" id="147" name="Google Shape;147;p25"/>
-          <p:cNvPicPr preferRelativeResize="0"/>
-          <p:nvPr/>
-        </p:nvPicPr>
-        <p:blipFill>
-          <a:blip r:embed="rId3">
-            <a:alphaModFix/>
-          </a:blip>
-          <a:stretch>
-            <a:fillRect/>
-          </a:stretch>
-        </p:blipFill>
-        <p:spPr>
-          <a:xfrm>
-            <a:off x="1059375" y="1962550"/>
-            <a:ext cx="5995624" cy="2409200"/>
-          </a:xfrm>
-          <a:prstGeom prst="rect">
-            <a:avLst/>
-          </a:prstGeom>
-          <a:noFill/>
-          <a:ln>
-            <a:noFill/>
-          </a:ln>
-        </p:spPr>
-      </p:pic>
     </p:spTree>
   </p:cSld>
   <p:clrMapOvr>
@@ -7791,7 +7908,7 @@
   <p:cSld>
     <p:spTree>
       <p:nvGrpSpPr>
-        <p:cNvPr id="151" name="Shape 151"/>
+        <p:cNvPr id="154" name="Shape 154"/>
         <p:cNvGrpSpPr/>
         <p:nvPr/>
       </p:nvGrpSpPr>
@@ -7805,7 +7922,7 @@
       </p:grpSpPr>
       <p:sp>
         <p:nvSpPr>
-          <p:cNvPr id="152" name="Google Shape;152;p26"/>
+          <p:cNvPr id="155" name="Google Shape;155;p26"/>
           <p:cNvSpPr txBox="1"/>
           <p:nvPr>
             <p:ph type="title"/>
@@ -7837,7 +7954,7 @@
             </a:pPr>
             <a:r>
               <a:rPr lang="en"/>
-              <a:t>Common patterns</a:t>
+              <a:t>Residual Learning: Better gradient flow</a:t>
             </a:r>
             <a:endParaRPr/>
           </a:p>
@@ -7845,317 +7962,70 @@
       </p:sp>
       <p:sp>
         <p:nvSpPr>
-          <p:cNvPr id="153" name="Google Shape;153;p26"/>
-          <p:cNvSpPr/>
-          <p:nvPr/>
-        </p:nvSpPr>
-        <p:spPr>
-          <a:xfrm>
-            <a:off x="1043525" y="2567125"/>
-            <a:ext cx="882000" cy="595500"/>
+          <p:cNvPr id="156" name="Google Shape;156;p26"/>
+          <p:cNvSpPr txBox="1"/>
+          <p:nvPr>
+            <p:ph idx="1" type="body"/>
+          </p:nvPr>
+        </p:nvSpPr>
+        <p:spPr>
+          <a:xfrm>
+            <a:off x="311700" y="1152475"/>
+            <a:ext cx="8520600" cy="982200"/>
           </a:xfrm>
           <a:prstGeom prst="rect">
             <a:avLst/>
           </a:prstGeom>
-          <a:solidFill>
-            <a:schemeClr val="lt2"/>
-          </a:solidFill>
-          <a:ln cap="flat" cmpd="sng" w="9525">
-            <a:solidFill>
-              <a:schemeClr val="dk2"/>
-            </a:solidFill>
-            <a:prstDash val="solid"/>
-            <a:round/>
-            <a:headEnd len="sm" w="sm" type="none"/>
-            <a:tailEnd len="sm" w="sm" type="none"/>
-          </a:ln>
         </p:spPr>
         <p:txBody>
-          <a:bodyPr anchorCtr="0" anchor="ctr" bIns="91425" lIns="91425" spcFirstLastPara="1" rIns="91425" wrap="square" tIns="91425">
-            <a:noAutofit/>
+          <a:bodyPr anchorCtr="0" anchor="t" bIns="91425" lIns="91425" spcFirstLastPara="1" rIns="91425" wrap="square" tIns="91425">
+            <a:normAutofit/>
           </a:bodyPr>
           <a:lstStyle/>
           <a:p>
-            <a:pPr indent="0" lvl="0" marL="0" rtl="0" algn="ctr">
-              <a:spcBef>
-                <a:spcPts val="0"/>
-              </a:spcBef>
-              <a:spcAft>
-                <a:spcPts val="0"/>
+            <a:pPr indent="0" lvl="0" marL="0" rtl="0" algn="l">
+              <a:spcBef>
+                <a:spcPts val="0"/>
+              </a:spcBef>
+              <a:spcAft>
+                <a:spcPts val="1200"/>
               </a:spcAft>
               <a:buNone/>
             </a:pPr>
             <a:r>
               <a:rPr lang="en"/>
-              <a:t>Conv1</a:t>
+              <a:t>Residual learning results in better gradient flow and reduces </a:t>
+            </a:r>
+            <a:r>
+              <a:rPr lang="en"/>
+              <a:t>vanishing/exploding gradients</a:t>
+            </a:r>
+            <a:r>
+              <a:rPr lang="en"/>
+              <a:t> </a:t>
             </a:r>
             <a:endParaRPr/>
           </a:p>
         </p:txBody>
       </p:sp>
-      <p:sp>
-        <p:nvSpPr>
-          <p:cNvPr id="154" name="Google Shape;154;p26"/>
-          <p:cNvSpPr/>
+      <p:pic>
+        <p:nvPicPr>
+          <p:cNvPr descr="{&quot;backgroundColorModified&quot;:false,&quot;id&quot;:&quot;12&quot;,&quot;font&quot;:{&quot;color&quot;:&quot;#595959&quot;,&quot;family&quot;:&quot;Arial&quot;,&quot;size&quot;:16.5},&quot;type&quot;:&quot;gather*&quot;,&quot;code&quot;:&quot;\\begin{gather*}\n{\\text{Let}\\;\\text{a}\\;\\text{block}\\;\\text{be}}\\\\\n{y=x+F\\left(x\\right)}\\\\\n{\\text{For}\\;\\text{a}\\;\\text{loss}\\;\\text{L,}}\\\\\n{\\pdf{L}{x}=\\pdf{L}{y}+\\pdf{L}{y}\\pdf{F}{x}}\\\\\n{=\\,\\pdf{L}{y}\\left(I\\,+\\pdf{F}{x}\\,\\right)}\\\\\n{\\text{So}\\;\\text{even}\\;\\text{if}\\;\\text{the}\\,\\text{gradient}\\;\\text{through}\\;\\text{the}\\;\\text{layer}\\;\\pdf{F}{x}\\,\\text{becomes}\\;\\text{small}\\;\\text{or}\\;\\text{unstable,}}\\\\\n{\\text{the}\\;\\text{full}\\;\\text{gradient}\\;\\text{has}\\;\\text{a}\\;\\text{direct}\\;\\text{path}\\;\\text{via}\\;\\text{the}\\;\\text{skip}\\;\\text{connection}\\;\\text{term.}}\t\n\\end{gather*}&quot;,&quot;aid&quot;:null,&quot;backgroundColor&quot;:&quot;#FFFFFF&quot;,&quot;ts&quot;:1771857863497,&quot;cs&quot;:&quot;8EqzERljDWE0R2gf0l1Xrw==&quot;,&quot;size&quot;:{&quot;width&quot;:806.1312976377952,&quot;height&quot;:323.92388871391074}}" id="157" name="Google Shape;157;p26"/>
+          <p:cNvPicPr preferRelativeResize="0"/>
           <p:nvPr/>
-        </p:nvSpPr>
-        <p:spPr>
-          <a:xfrm>
-            <a:off x="2327125" y="2567125"/>
-            <a:ext cx="951000" cy="595500"/>
-          </a:xfrm>
-          <a:prstGeom prst="rect">
-            <a:avLst/>
-          </a:prstGeom>
-          <a:solidFill>
-            <a:schemeClr val="lt2"/>
-          </a:solidFill>
-          <a:ln cap="flat" cmpd="sng" w="9525">
-            <a:solidFill>
-              <a:schemeClr val="dk2"/>
-            </a:solidFill>
-            <a:prstDash val="solid"/>
-            <a:round/>
-            <a:headEnd len="sm" w="sm" type="none"/>
-            <a:tailEnd len="sm" w="sm" type="none"/>
-          </a:ln>
-        </p:spPr>
-        <p:txBody>
-          <a:bodyPr anchorCtr="0" anchor="ctr" bIns="91425" lIns="91425" spcFirstLastPara="1" rIns="91425" wrap="square" tIns="91425">
-            <a:noAutofit/>
-          </a:bodyPr>
-          <a:lstStyle/>
-          <a:p>
-            <a:pPr indent="0" lvl="0" marL="0" rtl="0" algn="ctr">
-              <a:spcBef>
-                <a:spcPts val="0"/>
-              </a:spcBef>
-              <a:spcAft>
-                <a:spcPts val="0"/>
-              </a:spcAft>
-              <a:buNone/>
-            </a:pPr>
-            <a:r>
-              <a:rPr lang="en"/>
-              <a:t>Batch Norm</a:t>
-            </a:r>
-            <a:endParaRPr/>
-          </a:p>
-        </p:txBody>
-      </p:sp>
-      <p:sp>
-        <p:nvSpPr>
-          <p:cNvPr id="155" name="Google Shape;155;p26"/>
-          <p:cNvSpPr/>
-          <p:nvPr/>
-        </p:nvSpPr>
-        <p:spPr>
-          <a:xfrm>
-            <a:off x="3569175" y="2567125"/>
-            <a:ext cx="951000" cy="595500"/>
-          </a:xfrm>
-          <a:prstGeom prst="rect">
-            <a:avLst/>
-          </a:prstGeom>
-          <a:solidFill>
-            <a:schemeClr val="lt2"/>
-          </a:solidFill>
-          <a:ln cap="flat" cmpd="sng" w="9525">
-            <a:solidFill>
-              <a:schemeClr val="dk2"/>
-            </a:solidFill>
-            <a:prstDash val="solid"/>
-            <a:round/>
-            <a:headEnd len="sm" w="sm" type="none"/>
-            <a:tailEnd len="sm" w="sm" type="none"/>
-          </a:ln>
-        </p:spPr>
-        <p:txBody>
-          <a:bodyPr anchorCtr="0" anchor="ctr" bIns="91425" lIns="91425" spcFirstLastPara="1" rIns="91425" wrap="square" tIns="91425">
-            <a:noAutofit/>
-          </a:bodyPr>
-          <a:lstStyle/>
-          <a:p>
-            <a:pPr indent="0" lvl="0" marL="0" rtl="0" algn="ctr">
-              <a:spcBef>
-                <a:spcPts val="0"/>
-              </a:spcBef>
-              <a:spcAft>
-                <a:spcPts val="0"/>
-              </a:spcAft>
-              <a:buNone/>
-            </a:pPr>
-            <a:r>
-              <a:rPr lang="en"/>
-              <a:t>Non</a:t>
-            </a:r>
-            <a:endParaRPr/>
-          </a:p>
-          <a:p>
-            <a:pPr indent="0" lvl="0" marL="0" rtl="0" algn="ctr">
-              <a:spcBef>
-                <a:spcPts val="0"/>
-              </a:spcBef>
-              <a:spcAft>
-                <a:spcPts val="0"/>
-              </a:spcAft>
-              <a:buNone/>
-            </a:pPr>
-            <a:r>
-              <a:rPr lang="en"/>
-              <a:t>Linearity</a:t>
-            </a:r>
-            <a:endParaRPr/>
-          </a:p>
-        </p:txBody>
-      </p:sp>
-      <p:sp>
-        <p:nvSpPr>
-          <p:cNvPr id="156" name="Google Shape;156;p26"/>
-          <p:cNvSpPr/>
-          <p:nvPr/>
-        </p:nvSpPr>
-        <p:spPr>
-          <a:xfrm>
-            <a:off x="4861975" y="2567125"/>
-            <a:ext cx="951000" cy="595500"/>
-          </a:xfrm>
-          <a:prstGeom prst="rect">
-            <a:avLst/>
-          </a:prstGeom>
-          <a:solidFill>
-            <a:schemeClr val="lt2"/>
-          </a:solidFill>
-          <a:ln cap="flat" cmpd="sng" w="9525">
-            <a:solidFill>
-              <a:schemeClr val="dk2"/>
-            </a:solidFill>
-            <a:prstDash val="solid"/>
-            <a:round/>
-            <a:headEnd len="sm" w="sm" type="none"/>
-            <a:tailEnd len="sm" w="sm" type="none"/>
-          </a:ln>
-        </p:spPr>
-        <p:txBody>
-          <a:bodyPr anchorCtr="0" anchor="ctr" bIns="91425" lIns="91425" spcFirstLastPara="1" rIns="91425" wrap="square" tIns="91425">
-            <a:noAutofit/>
-          </a:bodyPr>
-          <a:lstStyle/>
-          <a:p>
-            <a:pPr indent="0" lvl="0" marL="0" rtl="0" algn="ctr">
-              <a:spcBef>
-                <a:spcPts val="0"/>
-              </a:spcBef>
-              <a:spcAft>
-                <a:spcPts val="0"/>
-              </a:spcAft>
-              <a:buNone/>
-            </a:pPr>
-            <a:r>
-              <a:rPr lang="en"/>
-              <a:t>Conv2</a:t>
-            </a:r>
-            <a:endParaRPr/>
-          </a:p>
-        </p:txBody>
-      </p:sp>
-      <p:cxnSp>
-        <p:nvCxnSpPr>
-          <p:cNvPr id="157" name="Google Shape;157;p26"/>
-          <p:cNvCxnSpPr>
-            <a:stCxn id="153" idx="3"/>
-            <a:endCxn id="154" idx="1"/>
-          </p:cNvCxnSpPr>
-          <p:nvPr/>
-        </p:nvCxnSpPr>
-        <p:spPr>
-          <a:xfrm>
-            <a:off x="1925525" y="2864875"/>
-            <a:ext cx="401700" cy="0"/>
-          </a:xfrm>
-          <a:prstGeom prst="straightConnector1">
-            <a:avLst/>
-          </a:prstGeom>
-          <a:noFill/>
-          <a:ln cap="flat" cmpd="sng" w="9525">
-            <a:solidFill>
-              <a:schemeClr val="dk2"/>
-            </a:solidFill>
-            <a:prstDash val="solid"/>
-            <a:round/>
-            <a:headEnd len="med" w="med" type="none"/>
-            <a:tailEnd len="med" w="med" type="triangle"/>
-          </a:ln>
-        </p:spPr>
-      </p:cxnSp>
-      <p:cxnSp>
-        <p:nvCxnSpPr>
-          <p:cNvPr id="158" name="Google Shape;158;p26"/>
-          <p:cNvCxnSpPr>
-            <a:stCxn id="154" idx="3"/>
-            <a:endCxn id="155" idx="1"/>
-          </p:cNvCxnSpPr>
-          <p:nvPr/>
-        </p:nvCxnSpPr>
-        <p:spPr>
-          <a:xfrm>
-            <a:off x="3278125" y="2864875"/>
-            <a:ext cx="291000" cy="0"/>
-          </a:xfrm>
-          <a:prstGeom prst="straightConnector1">
-            <a:avLst/>
-          </a:prstGeom>
-          <a:noFill/>
-          <a:ln cap="flat" cmpd="sng" w="9525">
-            <a:solidFill>
-              <a:schemeClr val="dk2"/>
-            </a:solidFill>
-            <a:prstDash val="solid"/>
-            <a:round/>
-            <a:headEnd len="med" w="med" type="none"/>
-            <a:tailEnd len="med" w="med" type="triangle"/>
-          </a:ln>
-        </p:spPr>
-      </p:cxnSp>
-      <p:cxnSp>
-        <p:nvCxnSpPr>
-          <p:cNvPr id="159" name="Google Shape;159;p26"/>
-          <p:cNvCxnSpPr>
-            <a:stCxn id="155" idx="3"/>
-            <a:endCxn id="156" idx="1"/>
-          </p:cNvCxnSpPr>
-          <p:nvPr/>
-        </p:nvCxnSpPr>
-        <p:spPr>
-          <a:xfrm>
-            <a:off x="4520175" y="2864875"/>
-            <a:ext cx="341700" cy="0"/>
-          </a:xfrm>
-          <a:prstGeom prst="straightConnector1">
-            <a:avLst/>
-          </a:prstGeom>
-          <a:noFill/>
-          <a:ln cap="flat" cmpd="sng" w="9525">
-            <a:solidFill>
-              <a:schemeClr val="dk2"/>
-            </a:solidFill>
-            <a:prstDash val="solid"/>
-            <a:round/>
-            <a:headEnd len="med" w="med" type="none"/>
-            <a:tailEnd len="med" w="med" type="triangle"/>
-          </a:ln>
-        </p:spPr>
-      </p:cxnSp>
-      <p:sp>
-        <p:nvSpPr>
-          <p:cNvPr id="160" name="Google Shape;160;p26"/>
-          <p:cNvSpPr txBox="1"/>
-          <p:nvPr/>
-        </p:nvSpPr>
-        <p:spPr>
-          <a:xfrm>
-            <a:off x="364800" y="2634025"/>
-            <a:ext cx="341700" cy="461700"/>
+        </p:nvPicPr>
+        <p:blipFill>
+          <a:blip r:embed="rId3">
+            <a:alphaModFix/>
+          </a:blip>
+          <a:stretch>
+            <a:fillRect/>
+          </a:stretch>
+        </p:blipFill>
+        <p:spPr>
+          <a:xfrm>
+            <a:off x="1059375" y="1962550"/>
+            <a:ext cx="5995624" cy="2409200"/>
           </a:xfrm>
           <a:prstGeom prst="rect">
             <a:avLst/>
@@ -8165,978 +8035,7 @@
             <a:noFill/>
           </a:ln>
         </p:spPr>
-        <p:txBody>
-          <a:bodyPr anchorCtr="0" anchor="t" bIns="91425" lIns="91425" spcFirstLastPara="1" rIns="91425" wrap="square" tIns="91425">
-            <a:spAutoFit/>
-          </a:bodyPr>
-          <a:lstStyle/>
-          <a:p>
-            <a:pPr indent="0" lvl="0" marL="0" rtl="0" algn="l">
-              <a:spcBef>
-                <a:spcPts val="0"/>
-              </a:spcBef>
-              <a:spcAft>
-                <a:spcPts val="0"/>
-              </a:spcAft>
-              <a:buNone/>
-            </a:pPr>
-            <a:r>
-              <a:rPr lang="en" sz="1800">
-                <a:solidFill>
-                  <a:schemeClr val="dk2"/>
-                </a:solidFill>
-              </a:rPr>
-              <a:t>x</a:t>
-            </a:r>
-            <a:endParaRPr sz="1800">
-              <a:solidFill>
-                <a:schemeClr val="dk2"/>
-              </a:solidFill>
-            </a:endParaRPr>
-          </a:p>
-        </p:txBody>
-      </p:sp>
-      <p:cxnSp>
-        <p:nvCxnSpPr>
-          <p:cNvPr id="161" name="Google Shape;161;p26"/>
-          <p:cNvCxnSpPr>
-            <a:stCxn id="160" idx="3"/>
-            <a:endCxn id="153" idx="1"/>
-          </p:cNvCxnSpPr>
-          <p:nvPr/>
-        </p:nvCxnSpPr>
-        <p:spPr>
-          <a:xfrm>
-            <a:off x="706500" y="2864875"/>
-            <a:ext cx="336900" cy="0"/>
-          </a:xfrm>
-          <a:prstGeom prst="straightConnector1">
-            <a:avLst/>
-          </a:prstGeom>
-          <a:noFill/>
-          <a:ln cap="flat" cmpd="sng" w="9525">
-            <a:solidFill>
-              <a:schemeClr val="dk2"/>
-            </a:solidFill>
-            <a:prstDash val="solid"/>
-            <a:round/>
-            <a:headEnd len="med" w="med" type="none"/>
-            <a:tailEnd len="med" w="med" type="triangle"/>
-          </a:ln>
-        </p:spPr>
-      </p:cxnSp>
-      <p:sp>
-        <p:nvSpPr>
-          <p:cNvPr id="162" name="Google Shape;162;p26"/>
-          <p:cNvSpPr/>
-          <p:nvPr/>
-        </p:nvSpPr>
-        <p:spPr>
-          <a:xfrm>
-            <a:off x="7447575" y="2740225"/>
-            <a:ext cx="254100" cy="249300"/>
-          </a:xfrm>
-          <a:prstGeom prst="flowChartOr">
-            <a:avLst/>
-          </a:prstGeom>
-          <a:solidFill>
-            <a:schemeClr val="lt2"/>
-          </a:solidFill>
-          <a:ln cap="flat" cmpd="sng" w="9525">
-            <a:solidFill>
-              <a:schemeClr val="dk2"/>
-            </a:solidFill>
-            <a:prstDash val="solid"/>
-            <a:round/>
-            <a:headEnd len="sm" w="sm" type="none"/>
-            <a:tailEnd len="sm" w="sm" type="none"/>
-          </a:ln>
-        </p:spPr>
-        <p:txBody>
-          <a:bodyPr anchorCtr="0" anchor="ctr" bIns="91425" lIns="91425" spcFirstLastPara="1" rIns="91425" wrap="square" tIns="91425">
-            <a:noAutofit/>
-          </a:bodyPr>
-          <a:lstStyle/>
-          <a:p>
-            <a:pPr indent="0" lvl="0" marL="0" rtl="0" algn="ctr">
-              <a:spcBef>
-                <a:spcPts val="0"/>
-              </a:spcBef>
-              <a:spcAft>
-                <a:spcPts val="0"/>
-              </a:spcAft>
-              <a:buNone/>
-            </a:pPr>
-            <a:r>
-              <a:t/>
-            </a:r>
-            <a:endParaRPr/>
-          </a:p>
-        </p:txBody>
-      </p:sp>
-      <p:cxnSp>
-        <p:nvCxnSpPr>
-          <p:cNvPr id="163" name="Google Shape;163;p26"/>
-          <p:cNvCxnSpPr/>
-          <p:nvPr/>
-        </p:nvCxnSpPr>
-        <p:spPr>
-          <a:xfrm>
-            <a:off x="5812975" y="2864875"/>
-            <a:ext cx="341700" cy="0"/>
-          </a:xfrm>
-          <a:prstGeom prst="straightConnector1">
-            <a:avLst/>
-          </a:prstGeom>
-          <a:noFill/>
-          <a:ln cap="flat" cmpd="sng" w="9525">
-            <a:solidFill>
-              <a:schemeClr val="dk2"/>
-            </a:solidFill>
-            <a:prstDash val="solid"/>
-            <a:round/>
-            <a:headEnd len="med" w="med" type="none"/>
-            <a:tailEnd len="med" w="med" type="triangle"/>
-          </a:ln>
-        </p:spPr>
-      </p:cxnSp>
-      <p:cxnSp>
-        <p:nvCxnSpPr>
-          <p:cNvPr id="164" name="Google Shape;164;p26"/>
-          <p:cNvCxnSpPr>
-            <a:endCxn id="165" idx="1"/>
-          </p:cNvCxnSpPr>
-          <p:nvPr/>
-        </p:nvCxnSpPr>
-        <p:spPr>
-          <a:xfrm flipH="1" rot="10800000">
-            <a:off x="849675" y="2066150"/>
-            <a:ext cx="2719500" cy="796500"/>
-          </a:xfrm>
-          <a:prstGeom prst="bentConnector3">
-            <a:avLst>
-              <a:gd fmla="val 167" name="adj1"/>
-            </a:avLst>
-          </a:prstGeom>
-          <a:noFill/>
-          <a:ln cap="flat" cmpd="sng" w="9525">
-            <a:solidFill>
-              <a:schemeClr val="dk2"/>
-            </a:solidFill>
-            <a:prstDash val="solid"/>
-            <a:round/>
-            <a:headEnd len="med" w="med" type="none"/>
-            <a:tailEnd len="med" w="med" type="triangle"/>
-          </a:ln>
-        </p:spPr>
-      </p:cxnSp>
-      <p:sp>
-        <p:nvSpPr>
-          <p:cNvPr id="166" name="Google Shape;166;p26"/>
-          <p:cNvSpPr/>
-          <p:nvPr/>
-        </p:nvSpPr>
-        <p:spPr>
-          <a:xfrm>
-            <a:off x="1043525" y="4016950"/>
-            <a:ext cx="882000" cy="595500"/>
-          </a:xfrm>
-          <a:prstGeom prst="rect">
-            <a:avLst/>
-          </a:prstGeom>
-          <a:solidFill>
-            <a:schemeClr val="lt2"/>
-          </a:solidFill>
-          <a:ln cap="flat" cmpd="sng" w="9525">
-            <a:solidFill>
-              <a:schemeClr val="dk2"/>
-            </a:solidFill>
-            <a:prstDash val="solid"/>
-            <a:round/>
-            <a:headEnd len="sm" w="sm" type="none"/>
-            <a:tailEnd len="sm" w="sm" type="none"/>
-          </a:ln>
-        </p:spPr>
-        <p:txBody>
-          <a:bodyPr anchorCtr="0" anchor="ctr" bIns="91425" lIns="91425" spcFirstLastPara="1" rIns="91425" wrap="square" tIns="91425">
-            <a:noAutofit/>
-          </a:bodyPr>
-          <a:lstStyle/>
-          <a:p>
-            <a:pPr indent="0" lvl="0" marL="0" rtl="0" algn="ctr">
-              <a:spcBef>
-                <a:spcPts val="0"/>
-              </a:spcBef>
-              <a:spcAft>
-                <a:spcPts val="0"/>
-              </a:spcAft>
-              <a:buNone/>
-            </a:pPr>
-            <a:r>
-              <a:rPr lang="en"/>
-              <a:t>Layer</a:t>
-            </a:r>
-            <a:endParaRPr/>
-          </a:p>
-          <a:p>
-            <a:pPr indent="0" lvl="0" marL="0" rtl="0" algn="ctr">
-              <a:spcBef>
-                <a:spcPts val="0"/>
-              </a:spcBef>
-              <a:spcAft>
-                <a:spcPts val="0"/>
-              </a:spcAft>
-              <a:buNone/>
-            </a:pPr>
-            <a:r>
-              <a:rPr lang="en"/>
-              <a:t>Norm</a:t>
-            </a:r>
-            <a:endParaRPr/>
-          </a:p>
-        </p:txBody>
-      </p:sp>
-      <p:sp>
-        <p:nvSpPr>
-          <p:cNvPr id="167" name="Google Shape;167;p26"/>
-          <p:cNvSpPr/>
-          <p:nvPr/>
-        </p:nvSpPr>
-        <p:spPr>
-          <a:xfrm>
-            <a:off x="2327125" y="4016950"/>
-            <a:ext cx="951000" cy="595500"/>
-          </a:xfrm>
-          <a:prstGeom prst="rect">
-            <a:avLst/>
-          </a:prstGeom>
-          <a:solidFill>
-            <a:schemeClr val="lt2"/>
-          </a:solidFill>
-          <a:ln cap="flat" cmpd="sng" w="9525">
-            <a:solidFill>
-              <a:schemeClr val="dk2"/>
-            </a:solidFill>
-            <a:prstDash val="solid"/>
-            <a:round/>
-            <a:headEnd len="sm" w="sm" type="none"/>
-            <a:tailEnd len="sm" w="sm" type="none"/>
-          </a:ln>
-        </p:spPr>
-        <p:txBody>
-          <a:bodyPr anchorCtr="0" anchor="ctr" bIns="91425" lIns="91425" spcFirstLastPara="1" rIns="91425" wrap="square" tIns="91425">
-            <a:noAutofit/>
-          </a:bodyPr>
-          <a:lstStyle/>
-          <a:p>
-            <a:pPr indent="0" lvl="0" marL="0" rtl="0" algn="ctr">
-              <a:spcBef>
-                <a:spcPts val="0"/>
-              </a:spcBef>
-              <a:spcAft>
-                <a:spcPts val="0"/>
-              </a:spcAft>
-              <a:buNone/>
-            </a:pPr>
-            <a:r>
-              <a:rPr lang="en"/>
-              <a:t>Attn</a:t>
-            </a:r>
-            <a:endParaRPr/>
-          </a:p>
-        </p:txBody>
-      </p:sp>
-      <p:sp>
-        <p:nvSpPr>
-          <p:cNvPr id="168" name="Google Shape;168;p26"/>
-          <p:cNvSpPr/>
-          <p:nvPr/>
-        </p:nvSpPr>
-        <p:spPr>
-          <a:xfrm>
-            <a:off x="3952475" y="4016950"/>
-            <a:ext cx="951000" cy="595500"/>
-          </a:xfrm>
-          <a:prstGeom prst="rect">
-            <a:avLst/>
-          </a:prstGeom>
-          <a:solidFill>
-            <a:schemeClr val="lt2"/>
-          </a:solidFill>
-          <a:ln cap="flat" cmpd="sng" w="9525">
-            <a:solidFill>
-              <a:schemeClr val="dk2"/>
-            </a:solidFill>
-            <a:prstDash val="solid"/>
-            <a:round/>
-            <a:headEnd len="sm" w="sm" type="none"/>
-            <a:tailEnd len="sm" w="sm" type="none"/>
-          </a:ln>
-        </p:spPr>
-        <p:txBody>
-          <a:bodyPr anchorCtr="0" anchor="ctr" bIns="91425" lIns="91425" spcFirstLastPara="1" rIns="91425" wrap="square" tIns="91425">
-            <a:noAutofit/>
-          </a:bodyPr>
-          <a:lstStyle/>
-          <a:p>
-            <a:pPr indent="0" lvl="0" marL="0" rtl="0" algn="ctr">
-              <a:spcBef>
-                <a:spcPts val="0"/>
-              </a:spcBef>
-              <a:spcAft>
-                <a:spcPts val="0"/>
-              </a:spcAft>
-              <a:buNone/>
-            </a:pPr>
-            <a:r>
-              <a:rPr lang="en"/>
-              <a:t>Layer Norm</a:t>
-            </a:r>
-            <a:endParaRPr/>
-          </a:p>
-        </p:txBody>
-      </p:sp>
-      <p:sp>
-        <p:nvSpPr>
-          <p:cNvPr id="169" name="Google Shape;169;p26"/>
-          <p:cNvSpPr/>
-          <p:nvPr/>
-        </p:nvSpPr>
-        <p:spPr>
-          <a:xfrm>
-            <a:off x="5351625" y="4016950"/>
-            <a:ext cx="951000" cy="595500"/>
-          </a:xfrm>
-          <a:prstGeom prst="rect">
-            <a:avLst/>
-          </a:prstGeom>
-          <a:solidFill>
-            <a:schemeClr val="lt2"/>
-          </a:solidFill>
-          <a:ln cap="flat" cmpd="sng" w="9525">
-            <a:solidFill>
-              <a:schemeClr val="dk2"/>
-            </a:solidFill>
-            <a:prstDash val="solid"/>
-            <a:round/>
-            <a:headEnd len="sm" w="sm" type="none"/>
-            <a:tailEnd len="sm" w="sm" type="none"/>
-          </a:ln>
-        </p:spPr>
-        <p:txBody>
-          <a:bodyPr anchorCtr="0" anchor="ctr" bIns="91425" lIns="91425" spcFirstLastPara="1" rIns="91425" wrap="square" tIns="91425">
-            <a:noAutofit/>
-          </a:bodyPr>
-          <a:lstStyle/>
-          <a:p>
-            <a:pPr indent="0" lvl="0" marL="0" rtl="0" algn="ctr">
-              <a:spcBef>
-                <a:spcPts val="0"/>
-              </a:spcBef>
-              <a:spcAft>
-                <a:spcPts val="0"/>
-              </a:spcAft>
-              <a:buNone/>
-            </a:pPr>
-            <a:r>
-              <a:rPr lang="en"/>
-              <a:t>MLP</a:t>
-            </a:r>
-            <a:endParaRPr/>
-          </a:p>
-        </p:txBody>
-      </p:sp>
-      <p:cxnSp>
-        <p:nvCxnSpPr>
-          <p:cNvPr id="170" name="Google Shape;170;p26"/>
-          <p:cNvCxnSpPr>
-            <a:stCxn id="166" idx="3"/>
-            <a:endCxn id="167" idx="1"/>
-          </p:cNvCxnSpPr>
-          <p:nvPr/>
-        </p:nvCxnSpPr>
-        <p:spPr>
-          <a:xfrm>
-            <a:off x="1925525" y="4314700"/>
-            <a:ext cx="401700" cy="0"/>
-          </a:xfrm>
-          <a:prstGeom prst="straightConnector1">
-            <a:avLst/>
-          </a:prstGeom>
-          <a:noFill/>
-          <a:ln cap="flat" cmpd="sng" w="9525">
-            <a:solidFill>
-              <a:schemeClr val="dk2"/>
-            </a:solidFill>
-            <a:prstDash val="solid"/>
-            <a:round/>
-            <a:headEnd len="med" w="med" type="none"/>
-            <a:tailEnd len="med" w="med" type="triangle"/>
-          </a:ln>
-        </p:spPr>
-      </p:cxnSp>
-      <p:cxnSp>
-        <p:nvCxnSpPr>
-          <p:cNvPr id="171" name="Google Shape;171;p26"/>
-          <p:cNvCxnSpPr>
-            <a:stCxn id="167" idx="3"/>
-          </p:cNvCxnSpPr>
-          <p:nvPr/>
-        </p:nvCxnSpPr>
-        <p:spPr>
-          <a:xfrm flipH="1" rot="10800000">
-            <a:off x="3278125" y="4312300"/>
-            <a:ext cx="194100" cy="2400"/>
-          </a:xfrm>
-          <a:prstGeom prst="straightConnector1">
-            <a:avLst/>
-          </a:prstGeom>
-          <a:noFill/>
-          <a:ln cap="flat" cmpd="sng" w="9525">
-            <a:solidFill>
-              <a:schemeClr val="dk2"/>
-            </a:solidFill>
-            <a:prstDash val="solid"/>
-            <a:round/>
-            <a:headEnd len="med" w="med" type="none"/>
-            <a:tailEnd len="med" w="med" type="triangle"/>
-          </a:ln>
-        </p:spPr>
-      </p:cxnSp>
-      <p:cxnSp>
-        <p:nvCxnSpPr>
-          <p:cNvPr id="172" name="Google Shape;172;p26"/>
-          <p:cNvCxnSpPr>
-            <a:stCxn id="168" idx="3"/>
-            <a:endCxn id="169" idx="1"/>
-          </p:cNvCxnSpPr>
-          <p:nvPr/>
-        </p:nvCxnSpPr>
-        <p:spPr>
-          <a:xfrm>
-            <a:off x="4903475" y="4314700"/>
-            <a:ext cx="448200" cy="0"/>
-          </a:xfrm>
-          <a:prstGeom prst="straightConnector1">
-            <a:avLst/>
-          </a:prstGeom>
-          <a:noFill/>
-          <a:ln cap="flat" cmpd="sng" w="9525">
-            <a:solidFill>
-              <a:schemeClr val="dk2"/>
-            </a:solidFill>
-            <a:prstDash val="solid"/>
-            <a:round/>
-            <a:headEnd len="med" w="med" type="none"/>
-            <a:tailEnd len="med" w="med" type="triangle"/>
-          </a:ln>
-        </p:spPr>
-      </p:cxnSp>
-      <p:sp>
-        <p:nvSpPr>
-          <p:cNvPr id="173" name="Google Shape;173;p26"/>
-          <p:cNvSpPr txBox="1"/>
-          <p:nvPr/>
-        </p:nvSpPr>
-        <p:spPr>
-          <a:xfrm>
-            <a:off x="364800" y="4083850"/>
-            <a:ext cx="341700" cy="461700"/>
-          </a:xfrm>
-          <a:prstGeom prst="rect">
-            <a:avLst/>
-          </a:prstGeom>
-          <a:noFill/>
-          <a:ln>
-            <a:noFill/>
-          </a:ln>
-        </p:spPr>
-        <p:txBody>
-          <a:bodyPr anchorCtr="0" anchor="t" bIns="91425" lIns="91425" spcFirstLastPara="1" rIns="91425" wrap="square" tIns="91425">
-            <a:spAutoFit/>
-          </a:bodyPr>
-          <a:lstStyle/>
-          <a:p>
-            <a:pPr indent="0" lvl="0" marL="0" rtl="0" algn="l">
-              <a:spcBef>
-                <a:spcPts val="0"/>
-              </a:spcBef>
-              <a:spcAft>
-                <a:spcPts val="0"/>
-              </a:spcAft>
-              <a:buNone/>
-            </a:pPr>
-            <a:r>
-              <a:rPr lang="en" sz="1800">
-                <a:solidFill>
-                  <a:schemeClr val="dk2"/>
-                </a:solidFill>
-              </a:rPr>
-              <a:t>x</a:t>
-            </a:r>
-            <a:endParaRPr sz="1800">
-              <a:solidFill>
-                <a:schemeClr val="dk2"/>
-              </a:solidFill>
-            </a:endParaRPr>
-          </a:p>
-        </p:txBody>
-      </p:sp>
-      <p:cxnSp>
-        <p:nvCxnSpPr>
-          <p:cNvPr id="174" name="Google Shape;174;p26"/>
-          <p:cNvCxnSpPr>
-            <a:stCxn id="173" idx="3"/>
-            <a:endCxn id="166" idx="1"/>
-          </p:cNvCxnSpPr>
-          <p:nvPr/>
-        </p:nvCxnSpPr>
-        <p:spPr>
-          <a:xfrm>
-            <a:off x="706500" y="4314700"/>
-            <a:ext cx="336900" cy="0"/>
-          </a:xfrm>
-          <a:prstGeom prst="straightConnector1">
-            <a:avLst/>
-          </a:prstGeom>
-          <a:noFill/>
-          <a:ln cap="flat" cmpd="sng" w="9525">
-            <a:solidFill>
-              <a:schemeClr val="dk2"/>
-            </a:solidFill>
-            <a:prstDash val="solid"/>
-            <a:round/>
-            <a:headEnd len="med" w="med" type="none"/>
-            <a:tailEnd len="med" w="med" type="triangle"/>
-          </a:ln>
-        </p:spPr>
-      </p:cxnSp>
-      <p:sp>
-        <p:nvSpPr>
-          <p:cNvPr id="175" name="Google Shape;175;p26"/>
-          <p:cNvSpPr/>
-          <p:nvPr/>
-        </p:nvSpPr>
-        <p:spPr>
-          <a:xfrm>
-            <a:off x="6667175" y="4188850"/>
-            <a:ext cx="254100" cy="249300"/>
-          </a:xfrm>
-          <a:prstGeom prst="flowChartOr">
-            <a:avLst/>
-          </a:prstGeom>
-          <a:solidFill>
-            <a:schemeClr val="lt2"/>
-          </a:solidFill>
-          <a:ln cap="flat" cmpd="sng" w="9525">
-            <a:solidFill>
-              <a:schemeClr val="dk2"/>
-            </a:solidFill>
-            <a:prstDash val="solid"/>
-            <a:round/>
-            <a:headEnd len="sm" w="sm" type="none"/>
-            <a:tailEnd len="sm" w="sm" type="none"/>
-          </a:ln>
-        </p:spPr>
-        <p:txBody>
-          <a:bodyPr anchorCtr="0" anchor="ctr" bIns="91425" lIns="91425" spcFirstLastPara="1" rIns="91425" wrap="square" tIns="91425">
-            <a:noAutofit/>
-          </a:bodyPr>
-          <a:lstStyle/>
-          <a:p>
-            <a:pPr indent="0" lvl="0" marL="0" rtl="0" algn="ctr">
-              <a:spcBef>
-                <a:spcPts val="0"/>
-              </a:spcBef>
-              <a:spcAft>
-                <a:spcPts val="0"/>
-              </a:spcAft>
-              <a:buNone/>
-            </a:pPr>
-            <a:r>
-              <a:t/>
-            </a:r>
-            <a:endParaRPr/>
-          </a:p>
-        </p:txBody>
-      </p:sp>
-      <p:cxnSp>
-        <p:nvCxnSpPr>
-          <p:cNvPr id="176" name="Google Shape;176;p26"/>
-          <p:cNvCxnSpPr>
-            <a:stCxn id="169" idx="3"/>
-          </p:cNvCxnSpPr>
-          <p:nvPr/>
-        </p:nvCxnSpPr>
-        <p:spPr>
-          <a:xfrm flipH="1" rot="10800000">
-            <a:off x="6302625" y="4313500"/>
-            <a:ext cx="364500" cy="1200"/>
-          </a:xfrm>
-          <a:prstGeom prst="straightConnector1">
-            <a:avLst/>
-          </a:prstGeom>
-          <a:noFill/>
-          <a:ln cap="flat" cmpd="sng" w="9525">
-            <a:solidFill>
-              <a:schemeClr val="dk2"/>
-            </a:solidFill>
-            <a:prstDash val="solid"/>
-            <a:round/>
-            <a:headEnd len="med" w="med" type="none"/>
-            <a:tailEnd len="med" w="med" type="triangle"/>
-          </a:ln>
-        </p:spPr>
-      </p:cxnSp>
-      <p:cxnSp>
-        <p:nvCxnSpPr>
-          <p:cNvPr id="177" name="Google Shape;177;p26"/>
-          <p:cNvCxnSpPr>
-            <a:endCxn id="178" idx="0"/>
-          </p:cNvCxnSpPr>
-          <p:nvPr/>
-        </p:nvCxnSpPr>
-        <p:spPr>
-          <a:xfrm flipH="1" rot="10800000">
-            <a:off x="817075" y="4190050"/>
-            <a:ext cx="2782200" cy="122400"/>
-          </a:xfrm>
-          <a:prstGeom prst="bentConnector4">
-            <a:avLst>
-              <a:gd fmla="val 5" name="adj1"/>
-              <a:gd fmla="val 396119" name="adj2"/>
-            </a:avLst>
-          </a:prstGeom>
-          <a:noFill/>
-          <a:ln cap="flat" cmpd="sng" w="9525">
-            <a:solidFill>
-              <a:schemeClr val="dk2"/>
-            </a:solidFill>
-            <a:prstDash val="solid"/>
-            <a:round/>
-            <a:headEnd len="med" w="med" type="none"/>
-            <a:tailEnd len="med" w="med" type="triangle"/>
-          </a:ln>
-        </p:spPr>
-      </p:cxnSp>
-      <p:sp>
-        <p:nvSpPr>
-          <p:cNvPr id="178" name="Google Shape;178;p26"/>
-          <p:cNvSpPr/>
-          <p:nvPr/>
-        </p:nvSpPr>
-        <p:spPr>
-          <a:xfrm>
-            <a:off x="3472225" y="4190050"/>
-            <a:ext cx="254100" cy="249300"/>
-          </a:xfrm>
-          <a:prstGeom prst="flowChartOr">
-            <a:avLst/>
-          </a:prstGeom>
-          <a:solidFill>
-            <a:schemeClr val="lt2"/>
-          </a:solidFill>
-          <a:ln cap="flat" cmpd="sng" w="9525">
-            <a:solidFill>
-              <a:schemeClr val="dk2"/>
-            </a:solidFill>
-            <a:prstDash val="solid"/>
-            <a:round/>
-            <a:headEnd len="sm" w="sm" type="none"/>
-            <a:tailEnd len="sm" w="sm" type="none"/>
-          </a:ln>
-        </p:spPr>
-        <p:txBody>
-          <a:bodyPr anchorCtr="0" anchor="ctr" bIns="91425" lIns="91425" spcFirstLastPara="1" rIns="91425" wrap="square" tIns="91425">
-            <a:noAutofit/>
-          </a:bodyPr>
-          <a:lstStyle/>
-          <a:p>
-            <a:pPr indent="0" lvl="0" marL="0" rtl="0" algn="ctr">
-              <a:spcBef>
-                <a:spcPts val="0"/>
-              </a:spcBef>
-              <a:spcAft>
-                <a:spcPts val="0"/>
-              </a:spcAft>
-              <a:buNone/>
-            </a:pPr>
-            <a:r>
-              <a:t/>
-            </a:r>
-            <a:endParaRPr/>
-          </a:p>
-        </p:txBody>
-      </p:sp>
-      <p:cxnSp>
-        <p:nvCxnSpPr>
-          <p:cNvPr id="179" name="Google Shape;179;p26"/>
-          <p:cNvCxnSpPr>
-            <a:stCxn id="178" idx="6"/>
-            <a:endCxn id="168" idx="1"/>
-          </p:cNvCxnSpPr>
-          <p:nvPr/>
-        </p:nvCxnSpPr>
-        <p:spPr>
-          <a:xfrm>
-            <a:off x="3726325" y="4314700"/>
-            <a:ext cx="226200" cy="0"/>
-          </a:xfrm>
-          <a:prstGeom prst="straightConnector1">
-            <a:avLst/>
-          </a:prstGeom>
-          <a:noFill/>
-          <a:ln cap="flat" cmpd="sng" w="9525">
-            <a:solidFill>
-              <a:schemeClr val="dk2"/>
-            </a:solidFill>
-            <a:prstDash val="solid"/>
-            <a:round/>
-            <a:headEnd len="med" w="med" type="none"/>
-            <a:tailEnd len="med" w="med" type="triangle"/>
-          </a:ln>
-        </p:spPr>
-      </p:cxnSp>
-      <p:cxnSp>
-        <p:nvCxnSpPr>
-          <p:cNvPr id="180" name="Google Shape;180;p26"/>
-          <p:cNvCxnSpPr>
-            <a:stCxn id="178" idx="6"/>
-            <a:endCxn id="175" idx="0"/>
-          </p:cNvCxnSpPr>
-          <p:nvPr/>
-        </p:nvCxnSpPr>
-        <p:spPr>
-          <a:xfrm flipH="1" rot="10800000">
-            <a:off x="3726325" y="4189000"/>
-            <a:ext cx="3067800" cy="125700"/>
-          </a:xfrm>
-          <a:prstGeom prst="bentConnector4">
-            <a:avLst>
-              <a:gd fmla="val 3001" name="adj1"/>
-              <a:gd fmla="val 394849" name="adj2"/>
-            </a:avLst>
-          </a:prstGeom>
-          <a:noFill/>
-          <a:ln cap="flat" cmpd="sng" w="9525">
-            <a:solidFill>
-              <a:schemeClr val="dk2"/>
-            </a:solidFill>
-            <a:prstDash val="solid"/>
-            <a:round/>
-            <a:headEnd len="med" w="med" type="none"/>
-            <a:tailEnd len="med" w="med" type="triangle"/>
-          </a:ln>
-        </p:spPr>
-      </p:cxnSp>
-      <p:sp>
-        <p:nvSpPr>
-          <p:cNvPr id="181" name="Google Shape;181;p26"/>
-          <p:cNvSpPr/>
-          <p:nvPr/>
-        </p:nvSpPr>
-        <p:spPr>
-          <a:xfrm>
-            <a:off x="6154775" y="2567125"/>
-            <a:ext cx="951000" cy="595500"/>
-          </a:xfrm>
-          <a:prstGeom prst="rect">
-            <a:avLst/>
-          </a:prstGeom>
-          <a:solidFill>
-            <a:schemeClr val="lt2"/>
-          </a:solidFill>
-          <a:ln cap="flat" cmpd="sng" w="9525">
-            <a:solidFill>
-              <a:schemeClr val="dk2"/>
-            </a:solidFill>
-            <a:prstDash val="solid"/>
-            <a:round/>
-            <a:headEnd len="sm" w="sm" type="none"/>
-            <a:tailEnd len="sm" w="sm" type="none"/>
-          </a:ln>
-        </p:spPr>
-        <p:txBody>
-          <a:bodyPr anchorCtr="0" anchor="ctr" bIns="91425" lIns="91425" spcFirstLastPara="1" rIns="91425" wrap="square" tIns="91425">
-            <a:noAutofit/>
-          </a:bodyPr>
-          <a:lstStyle/>
-          <a:p>
-            <a:pPr indent="0" lvl="0" marL="0" rtl="0" algn="ctr">
-              <a:spcBef>
-                <a:spcPts val="0"/>
-              </a:spcBef>
-              <a:spcAft>
-                <a:spcPts val="0"/>
-              </a:spcAft>
-              <a:buNone/>
-            </a:pPr>
-            <a:r>
-              <a:rPr lang="en"/>
-              <a:t>Batch Norm</a:t>
-            </a:r>
-            <a:endParaRPr/>
-          </a:p>
-        </p:txBody>
-      </p:sp>
-      <p:cxnSp>
-        <p:nvCxnSpPr>
-          <p:cNvPr id="182" name="Google Shape;182;p26"/>
-          <p:cNvCxnSpPr>
-            <a:stCxn id="181" idx="3"/>
-            <a:endCxn id="162" idx="2"/>
-          </p:cNvCxnSpPr>
-          <p:nvPr/>
-        </p:nvCxnSpPr>
-        <p:spPr>
-          <a:xfrm>
-            <a:off x="7105775" y="2864875"/>
-            <a:ext cx="341700" cy="0"/>
-          </a:xfrm>
-          <a:prstGeom prst="straightConnector1">
-            <a:avLst/>
-          </a:prstGeom>
-          <a:noFill/>
-          <a:ln cap="flat" cmpd="sng" w="9525">
-            <a:solidFill>
-              <a:schemeClr val="dk2"/>
-            </a:solidFill>
-            <a:prstDash val="solid"/>
-            <a:round/>
-            <a:headEnd len="med" w="med" type="none"/>
-            <a:tailEnd len="med" w="med" type="triangle"/>
-          </a:ln>
-        </p:spPr>
-      </p:cxnSp>
-      <p:sp>
-        <p:nvSpPr>
-          <p:cNvPr id="165" name="Google Shape;165;p26"/>
-          <p:cNvSpPr/>
-          <p:nvPr/>
-        </p:nvSpPr>
-        <p:spPr>
-          <a:xfrm>
-            <a:off x="3569175" y="1768400"/>
-            <a:ext cx="951000" cy="595500"/>
-          </a:xfrm>
-          <a:prstGeom prst="rect">
-            <a:avLst/>
-          </a:prstGeom>
-          <a:solidFill>
-            <a:schemeClr val="lt2"/>
-          </a:solidFill>
-          <a:ln cap="flat" cmpd="sng" w="9525">
-            <a:solidFill>
-              <a:schemeClr val="dk2"/>
-            </a:solidFill>
-            <a:prstDash val="solid"/>
-            <a:round/>
-            <a:headEnd len="sm" w="sm" type="none"/>
-            <a:tailEnd len="sm" w="sm" type="none"/>
-          </a:ln>
-        </p:spPr>
-        <p:txBody>
-          <a:bodyPr anchorCtr="0" anchor="ctr" bIns="91425" lIns="91425" spcFirstLastPara="1" rIns="91425" wrap="square" tIns="91425">
-            <a:noAutofit/>
-          </a:bodyPr>
-          <a:lstStyle/>
-          <a:p>
-            <a:pPr indent="0" lvl="0" marL="0" rtl="0" algn="ctr">
-              <a:spcBef>
-                <a:spcPts val="0"/>
-              </a:spcBef>
-              <a:spcAft>
-                <a:spcPts val="0"/>
-              </a:spcAft>
-              <a:buNone/>
-            </a:pPr>
-            <a:r>
-              <a:rPr lang="en"/>
-              <a:t>1D conv</a:t>
-            </a:r>
-            <a:endParaRPr/>
-          </a:p>
-        </p:txBody>
-      </p:sp>
-      <p:cxnSp>
-        <p:nvCxnSpPr>
-          <p:cNvPr id="183" name="Google Shape;183;p26"/>
-          <p:cNvCxnSpPr>
-            <a:stCxn id="165" idx="3"/>
-            <a:endCxn id="162" idx="0"/>
-          </p:cNvCxnSpPr>
-          <p:nvPr/>
-        </p:nvCxnSpPr>
-        <p:spPr>
-          <a:xfrm>
-            <a:off x="4520175" y="2066150"/>
-            <a:ext cx="3054600" cy="674100"/>
-          </a:xfrm>
-          <a:prstGeom prst="bentConnector2">
-            <a:avLst/>
-          </a:prstGeom>
-          <a:noFill/>
-          <a:ln cap="flat" cmpd="sng" w="9525">
-            <a:solidFill>
-              <a:schemeClr val="dk2"/>
-            </a:solidFill>
-            <a:prstDash val="solid"/>
-            <a:round/>
-            <a:headEnd len="med" w="med" type="none"/>
-            <a:tailEnd len="med" w="med" type="triangle"/>
-          </a:ln>
-        </p:spPr>
-      </p:cxnSp>
-      <p:sp>
-        <p:nvSpPr>
-          <p:cNvPr id="184" name="Google Shape;184;p26"/>
-          <p:cNvSpPr txBox="1"/>
-          <p:nvPr/>
-        </p:nvSpPr>
-        <p:spPr>
-          <a:xfrm>
-            <a:off x="2779550" y="1214300"/>
-            <a:ext cx="2659500" cy="554100"/>
-          </a:xfrm>
-          <a:prstGeom prst="rect">
-            <a:avLst/>
-          </a:prstGeom>
-          <a:noFill/>
-          <a:ln>
-            <a:noFill/>
-          </a:ln>
-        </p:spPr>
-        <p:txBody>
-          <a:bodyPr anchorCtr="0" anchor="t" bIns="91425" lIns="91425" spcFirstLastPara="1" rIns="91425" wrap="square" tIns="91425">
-            <a:spAutoFit/>
-          </a:bodyPr>
-          <a:lstStyle/>
-          <a:p>
-            <a:pPr indent="0" lvl="0" marL="0" rtl="0" algn="ctr">
-              <a:spcBef>
-                <a:spcPts val="0"/>
-              </a:spcBef>
-              <a:spcAft>
-                <a:spcPts val="0"/>
-              </a:spcAft>
-              <a:buNone/>
-            </a:pPr>
-            <a:r>
-              <a:rPr lang="en" sz="1200">
-                <a:solidFill>
-                  <a:schemeClr val="dk2"/>
-                </a:solidFill>
-              </a:rPr>
-              <a:t>Shortcut with 1D conv, if spatial dimension change</a:t>
-            </a:r>
-            <a:endParaRPr sz="1200">
-              <a:solidFill>
-                <a:schemeClr val="dk2"/>
-              </a:solidFill>
-            </a:endParaRPr>
-          </a:p>
-        </p:txBody>
-      </p:sp>
+      </p:pic>
     </p:spTree>
   </p:cSld>
   <p:clrMapOvr>
@@ -9150,7 +8049,7 @@
   <p:cSld>
     <p:spTree>
       <p:nvGrpSpPr>
-        <p:cNvPr id="188" name="Shape 188"/>
+        <p:cNvPr id="161" name="Shape 161"/>
         <p:cNvGrpSpPr/>
         <p:nvPr/>
       </p:nvGrpSpPr>
@@ -9164,7 +8063,7 @@
       </p:grpSpPr>
       <p:sp>
         <p:nvSpPr>
-          <p:cNvPr id="189" name="Google Shape;189;p27"/>
+          <p:cNvPr id="162" name="Google Shape;162;p27"/>
           <p:cNvSpPr txBox="1"/>
           <p:nvPr>
             <p:ph type="title"/>
@@ -9196,7 +8095,7 @@
             </a:pPr>
             <a:r>
               <a:rPr lang="en"/>
-              <a:t>Common tricks..</a:t>
+              <a:t>Common patterns</a:t>
             </a:r>
             <a:endParaRPr/>
           </a:p>
@@ -9204,109 +8103,1295 @@
       </p:sp>
       <p:sp>
         <p:nvSpPr>
-          <p:cNvPr id="190" name="Google Shape;190;p27"/>
-          <p:cNvSpPr txBox="1"/>
-          <p:nvPr>
-            <p:ph idx="1" type="body"/>
-          </p:nvPr>
-        </p:nvSpPr>
-        <p:spPr>
-          <a:xfrm>
-            <a:off x="311700" y="1152475"/>
-            <a:ext cx="8520600" cy="3416400"/>
+          <p:cNvPr id="163" name="Google Shape;163;p27"/>
+          <p:cNvSpPr/>
+          <p:nvPr/>
+        </p:nvSpPr>
+        <p:spPr>
+          <a:xfrm>
+            <a:off x="1043525" y="2567125"/>
+            <a:ext cx="882000" cy="595500"/>
           </a:xfrm>
           <a:prstGeom prst="rect">
             <a:avLst/>
           </a:prstGeom>
+          <a:solidFill>
+            <a:schemeClr val="lt2"/>
+          </a:solidFill>
+          <a:ln cap="flat" cmpd="sng" w="9525">
+            <a:solidFill>
+              <a:schemeClr val="dk2"/>
+            </a:solidFill>
+            <a:prstDash val="solid"/>
+            <a:round/>
+            <a:headEnd len="sm" w="sm" type="none"/>
+            <a:tailEnd len="sm" w="sm" type="none"/>
+          </a:ln>
         </p:spPr>
         <p:txBody>
-          <a:bodyPr anchorCtr="0" anchor="t" bIns="91425" lIns="91425" spcFirstLastPara="1" rIns="91425" wrap="square" tIns="91425">
-            <a:normAutofit/>
+          <a:bodyPr anchorCtr="0" anchor="ctr" bIns="91425" lIns="91425" spcFirstLastPara="1" rIns="91425" wrap="square" tIns="91425">
+            <a:noAutofit/>
           </a:bodyPr>
           <a:lstStyle/>
           <a:p>
-            <a:pPr indent="-342900" lvl="0" marL="457200" rtl="0" algn="l">
-              <a:spcBef>
-                <a:spcPts val="0"/>
-              </a:spcBef>
-              <a:spcAft>
-                <a:spcPts val="0"/>
-              </a:spcAft>
-              <a:buSzPts val="1800"/>
-              <a:buChar char="-"/>
+            <a:pPr indent="0" lvl="0" marL="0" rtl="0" algn="ctr">
+              <a:spcBef>
+                <a:spcPts val="0"/>
+              </a:spcBef>
+              <a:spcAft>
+                <a:spcPts val="0"/>
+              </a:spcAft>
+              <a:buNone/>
             </a:pPr>
             <a:r>
               <a:rPr lang="en"/>
-              <a:t>Data augmentation</a:t>
+              <a:t>Conv1</a:t>
+            </a:r>
+            <a:endParaRPr/>
+          </a:p>
+        </p:txBody>
+      </p:sp>
+      <p:sp>
+        <p:nvSpPr>
+          <p:cNvPr id="164" name="Google Shape;164;p27"/>
+          <p:cNvSpPr/>
+          <p:nvPr/>
+        </p:nvSpPr>
+        <p:spPr>
+          <a:xfrm>
+            <a:off x="2327125" y="2567125"/>
+            <a:ext cx="951000" cy="595500"/>
+          </a:xfrm>
+          <a:prstGeom prst="rect">
+            <a:avLst/>
+          </a:prstGeom>
+          <a:solidFill>
+            <a:schemeClr val="lt2"/>
+          </a:solidFill>
+          <a:ln cap="flat" cmpd="sng" w="9525">
+            <a:solidFill>
+              <a:schemeClr val="dk2"/>
+            </a:solidFill>
+            <a:prstDash val="solid"/>
+            <a:round/>
+            <a:headEnd len="sm" w="sm" type="none"/>
+            <a:tailEnd len="sm" w="sm" type="none"/>
+          </a:ln>
+        </p:spPr>
+        <p:txBody>
+          <a:bodyPr anchorCtr="0" anchor="ctr" bIns="91425" lIns="91425" spcFirstLastPara="1" rIns="91425" wrap="square" tIns="91425">
+            <a:noAutofit/>
+          </a:bodyPr>
+          <a:lstStyle/>
+          <a:p>
+            <a:pPr indent="0" lvl="0" marL="0" rtl="0" algn="ctr">
+              <a:spcBef>
+                <a:spcPts val="0"/>
+              </a:spcBef>
+              <a:spcAft>
+                <a:spcPts val="0"/>
+              </a:spcAft>
+              <a:buNone/>
+            </a:pPr>
+            <a:r>
+              <a:rPr lang="en"/>
+              <a:t>Batch Norm</a:t>
+            </a:r>
+            <a:endParaRPr/>
+          </a:p>
+        </p:txBody>
+      </p:sp>
+      <p:sp>
+        <p:nvSpPr>
+          <p:cNvPr id="165" name="Google Shape;165;p27"/>
+          <p:cNvSpPr/>
+          <p:nvPr/>
+        </p:nvSpPr>
+        <p:spPr>
+          <a:xfrm>
+            <a:off x="3569175" y="2567125"/>
+            <a:ext cx="951000" cy="595500"/>
+          </a:xfrm>
+          <a:prstGeom prst="rect">
+            <a:avLst/>
+          </a:prstGeom>
+          <a:solidFill>
+            <a:schemeClr val="lt2"/>
+          </a:solidFill>
+          <a:ln cap="flat" cmpd="sng" w="9525">
+            <a:solidFill>
+              <a:schemeClr val="dk2"/>
+            </a:solidFill>
+            <a:prstDash val="solid"/>
+            <a:round/>
+            <a:headEnd len="sm" w="sm" type="none"/>
+            <a:tailEnd len="sm" w="sm" type="none"/>
+          </a:ln>
+        </p:spPr>
+        <p:txBody>
+          <a:bodyPr anchorCtr="0" anchor="ctr" bIns="91425" lIns="91425" spcFirstLastPara="1" rIns="91425" wrap="square" tIns="91425">
+            <a:noAutofit/>
+          </a:bodyPr>
+          <a:lstStyle/>
+          <a:p>
+            <a:pPr indent="0" lvl="0" marL="0" rtl="0" algn="ctr">
+              <a:spcBef>
+                <a:spcPts val="0"/>
+              </a:spcBef>
+              <a:spcAft>
+                <a:spcPts val="0"/>
+              </a:spcAft>
+              <a:buNone/>
+            </a:pPr>
+            <a:r>
+              <a:rPr lang="en"/>
+              <a:t>Non</a:t>
             </a:r>
             <a:endParaRPr/>
           </a:p>
           <a:p>
-            <a:pPr indent="-342900" lvl="0" marL="457200" rtl="0" algn="l">
-              <a:spcBef>
-                <a:spcPts val="0"/>
-              </a:spcBef>
-              <a:spcAft>
-                <a:spcPts val="0"/>
-              </a:spcAft>
-              <a:buSzPts val="1800"/>
-              <a:buChar char="-"/>
+            <a:pPr indent="0" lvl="0" marL="0" rtl="0" algn="ctr">
+              <a:spcBef>
+                <a:spcPts val="0"/>
+              </a:spcBef>
+              <a:spcAft>
+                <a:spcPts val="0"/>
+              </a:spcAft>
+              <a:buNone/>
             </a:pPr>
             <a:r>
               <a:rPr lang="en"/>
-              <a:t>Setting up a convolutional network with downsampling points (using striding) accompanied by increase in channels</a:t>
+              <a:t>Linearity</a:t>
+            </a:r>
+            <a:endParaRPr/>
+          </a:p>
+        </p:txBody>
+      </p:sp>
+      <p:sp>
+        <p:nvSpPr>
+          <p:cNvPr id="166" name="Google Shape;166;p27"/>
+          <p:cNvSpPr/>
+          <p:nvPr/>
+        </p:nvSpPr>
+        <p:spPr>
+          <a:xfrm>
+            <a:off x="4861975" y="2567125"/>
+            <a:ext cx="951000" cy="595500"/>
+          </a:xfrm>
+          <a:prstGeom prst="rect">
+            <a:avLst/>
+          </a:prstGeom>
+          <a:solidFill>
+            <a:schemeClr val="lt2"/>
+          </a:solidFill>
+          <a:ln cap="flat" cmpd="sng" w="9525">
+            <a:solidFill>
+              <a:schemeClr val="dk2"/>
+            </a:solidFill>
+            <a:prstDash val="solid"/>
+            <a:round/>
+            <a:headEnd len="sm" w="sm" type="none"/>
+            <a:tailEnd len="sm" w="sm" type="none"/>
+          </a:ln>
+        </p:spPr>
+        <p:txBody>
+          <a:bodyPr anchorCtr="0" anchor="ctr" bIns="91425" lIns="91425" spcFirstLastPara="1" rIns="91425" wrap="square" tIns="91425">
+            <a:noAutofit/>
+          </a:bodyPr>
+          <a:lstStyle/>
+          <a:p>
+            <a:pPr indent="0" lvl="0" marL="0" rtl="0" algn="ctr">
+              <a:spcBef>
+                <a:spcPts val="0"/>
+              </a:spcBef>
+              <a:spcAft>
+                <a:spcPts val="0"/>
+              </a:spcAft>
+              <a:buNone/>
+            </a:pPr>
+            <a:r>
+              <a:rPr lang="en"/>
+              <a:t>Conv2</a:t>
+            </a:r>
+            <a:endParaRPr/>
+          </a:p>
+        </p:txBody>
+      </p:sp>
+      <p:cxnSp>
+        <p:nvCxnSpPr>
+          <p:cNvPr id="167" name="Google Shape;167;p27"/>
+          <p:cNvCxnSpPr>
+            <a:stCxn id="163" idx="3"/>
+            <a:endCxn id="164" idx="1"/>
+          </p:cNvCxnSpPr>
+          <p:nvPr/>
+        </p:nvCxnSpPr>
+        <p:spPr>
+          <a:xfrm>
+            <a:off x="1925525" y="2864875"/>
+            <a:ext cx="401700" cy="0"/>
+          </a:xfrm>
+          <a:prstGeom prst="straightConnector1">
+            <a:avLst/>
+          </a:prstGeom>
+          <a:noFill/>
+          <a:ln cap="flat" cmpd="sng" w="9525">
+            <a:solidFill>
+              <a:schemeClr val="dk2"/>
+            </a:solidFill>
+            <a:prstDash val="solid"/>
+            <a:round/>
+            <a:headEnd len="med" w="med" type="none"/>
+            <a:tailEnd len="med" w="med" type="triangle"/>
+          </a:ln>
+        </p:spPr>
+      </p:cxnSp>
+      <p:cxnSp>
+        <p:nvCxnSpPr>
+          <p:cNvPr id="168" name="Google Shape;168;p27"/>
+          <p:cNvCxnSpPr>
+            <a:stCxn id="164" idx="3"/>
+            <a:endCxn id="165" idx="1"/>
+          </p:cNvCxnSpPr>
+          <p:nvPr/>
+        </p:nvCxnSpPr>
+        <p:spPr>
+          <a:xfrm>
+            <a:off x="3278125" y="2864875"/>
+            <a:ext cx="291000" cy="0"/>
+          </a:xfrm>
+          <a:prstGeom prst="straightConnector1">
+            <a:avLst/>
+          </a:prstGeom>
+          <a:noFill/>
+          <a:ln cap="flat" cmpd="sng" w="9525">
+            <a:solidFill>
+              <a:schemeClr val="dk2"/>
+            </a:solidFill>
+            <a:prstDash val="solid"/>
+            <a:round/>
+            <a:headEnd len="med" w="med" type="none"/>
+            <a:tailEnd len="med" w="med" type="triangle"/>
+          </a:ln>
+        </p:spPr>
+      </p:cxnSp>
+      <p:cxnSp>
+        <p:nvCxnSpPr>
+          <p:cNvPr id="169" name="Google Shape;169;p27"/>
+          <p:cNvCxnSpPr>
+            <a:stCxn id="165" idx="3"/>
+            <a:endCxn id="166" idx="1"/>
+          </p:cNvCxnSpPr>
+          <p:nvPr/>
+        </p:nvCxnSpPr>
+        <p:spPr>
+          <a:xfrm>
+            <a:off x="4520175" y="2864875"/>
+            <a:ext cx="341700" cy="0"/>
+          </a:xfrm>
+          <a:prstGeom prst="straightConnector1">
+            <a:avLst/>
+          </a:prstGeom>
+          <a:noFill/>
+          <a:ln cap="flat" cmpd="sng" w="9525">
+            <a:solidFill>
+              <a:schemeClr val="dk2"/>
+            </a:solidFill>
+            <a:prstDash val="solid"/>
+            <a:round/>
+            <a:headEnd len="med" w="med" type="none"/>
+            <a:tailEnd len="med" w="med" type="triangle"/>
+          </a:ln>
+        </p:spPr>
+      </p:cxnSp>
+      <p:sp>
+        <p:nvSpPr>
+          <p:cNvPr id="170" name="Google Shape;170;p27"/>
+          <p:cNvSpPr txBox="1"/>
+          <p:nvPr/>
+        </p:nvSpPr>
+        <p:spPr>
+          <a:xfrm>
+            <a:off x="364800" y="2634025"/>
+            <a:ext cx="341700" cy="461700"/>
+          </a:xfrm>
+          <a:prstGeom prst="rect">
+            <a:avLst/>
+          </a:prstGeom>
+          <a:noFill/>
+          <a:ln>
+            <a:noFill/>
+          </a:ln>
+        </p:spPr>
+        <p:txBody>
+          <a:bodyPr anchorCtr="0" anchor="t" bIns="91425" lIns="91425" spcFirstLastPara="1" rIns="91425" wrap="square" tIns="91425">
+            <a:spAutoFit/>
+          </a:bodyPr>
+          <a:lstStyle/>
+          <a:p>
+            <a:pPr indent="0" lvl="0" marL="0" rtl="0" algn="l">
+              <a:spcBef>
+                <a:spcPts val="0"/>
+              </a:spcBef>
+              <a:spcAft>
+                <a:spcPts val="0"/>
+              </a:spcAft>
+              <a:buNone/>
+            </a:pPr>
+            <a:r>
+              <a:rPr lang="en" sz="1800">
+                <a:solidFill>
+                  <a:schemeClr val="dk2"/>
+                </a:solidFill>
+              </a:rPr>
+              <a:t>x</a:t>
+            </a:r>
+            <a:endParaRPr sz="1800">
+              <a:solidFill>
+                <a:schemeClr val="dk2"/>
+              </a:solidFill>
+            </a:endParaRPr>
+          </a:p>
+        </p:txBody>
+      </p:sp>
+      <p:cxnSp>
+        <p:nvCxnSpPr>
+          <p:cNvPr id="171" name="Google Shape;171;p27"/>
+          <p:cNvCxnSpPr>
+            <a:stCxn id="170" idx="3"/>
+            <a:endCxn id="163" idx="1"/>
+          </p:cNvCxnSpPr>
+          <p:nvPr/>
+        </p:nvCxnSpPr>
+        <p:spPr>
+          <a:xfrm>
+            <a:off x="706500" y="2864875"/>
+            <a:ext cx="336900" cy="0"/>
+          </a:xfrm>
+          <a:prstGeom prst="straightConnector1">
+            <a:avLst/>
+          </a:prstGeom>
+          <a:noFill/>
+          <a:ln cap="flat" cmpd="sng" w="9525">
+            <a:solidFill>
+              <a:schemeClr val="dk2"/>
+            </a:solidFill>
+            <a:prstDash val="solid"/>
+            <a:round/>
+            <a:headEnd len="med" w="med" type="none"/>
+            <a:tailEnd len="med" w="med" type="triangle"/>
+          </a:ln>
+        </p:spPr>
+      </p:cxnSp>
+      <p:sp>
+        <p:nvSpPr>
+          <p:cNvPr id="172" name="Google Shape;172;p27"/>
+          <p:cNvSpPr/>
+          <p:nvPr/>
+        </p:nvSpPr>
+        <p:spPr>
+          <a:xfrm>
+            <a:off x="7447575" y="2740225"/>
+            <a:ext cx="254100" cy="249300"/>
+          </a:xfrm>
+          <a:prstGeom prst="flowChartOr">
+            <a:avLst/>
+          </a:prstGeom>
+          <a:solidFill>
+            <a:schemeClr val="lt2"/>
+          </a:solidFill>
+          <a:ln cap="flat" cmpd="sng" w="9525">
+            <a:solidFill>
+              <a:schemeClr val="dk2"/>
+            </a:solidFill>
+            <a:prstDash val="solid"/>
+            <a:round/>
+            <a:headEnd len="sm" w="sm" type="none"/>
+            <a:tailEnd len="sm" w="sm" type="none"/>
+          </a:ln>
+        </p:spPr>
+        <p:txBody>
+          <a:bodyPr anchorCtr="0" anchor="ctr" bIns="91425" lIns="91425" spcFirstLastPara="1" rIns="91425" wrap="square" tIns="91425">
+            <a:noAutofit/>
+          </a:bodyPr>
+          <a:lstStyle/>
+          <a:p>
+            <a:pPr indent="0" lvl="0" marL="0" rtl="0" algn="ctr">
+              <a:spcBef>
+                <a:spcPts val="0"/>
+              </a:spcBef>
+              <a:spcAft>
+                <a:spcPts val="0"/>
+              </a:spcAft>
+              <a:buNone/>
+            </a:pPr>
+            <a:r>
+              <a:t/>
+            </a:r>
+            <a:endParaRPr/>
+          </a:p>
+        </p:txBody>
+      </p:sp>
+      <p:cxnSp>
+        <p:nvCxnSpPr>
+          <p:cNvPr id="173" name="Google Shape;173;p27"/>
+          <p:cNvCxnSpPr/>
+          <p:nvPr/>
+        </p:nvCxnSpPr>
+        <p:spPr>
+          <a:xfrm>
+            <a:off x="5812975" y="2864875"/>
+            <a:ext cx="341700" cy="0"/>
+          </a:xfrm>
+          <a:prstGeom prst="straightConnector1">
+            <a:avLst/>
+          </a:prstGeom>
+          <a:noFill/>
+          <a:ln cap="flat" cmpd="sng" w="9525">
+            <a:solidFill>
+              <a:schemeClr val="dk2"/>
+            </a:solidFill>
+            <a:prstDash val="solid"/>
+            <a:round/>
+            <a:headEnd len="med" w="med" type="none"/>
+            <a:tailEnd len="med" w="med" type="triangle"/>
+          </a:ln>
+        </p:spPr>
+      </p:cxnSp>
+      <p:cxnSp>
+        <p:nvCxnSpPr>
+          <p:cNvPr id="174" name="Google Shape;174;p27"/>
+          <p:cNvCxnSpPr>
+            <a:endCxn id="175" idx="1"/>
+          </p:cNvCxnSpPr>
+          <p:nvPr/>
+        </p:nvCxnSpPr>
+        <p:spPr>
+          <a:xfrm flipH="1" rot="10800000">
+            <a:off x="849675" y="2066150"/>
+            <a:ext cx="2719500" cy="796500"/>
+          </a:xfrm>
+          <a:prstGeom prst="bentConnector3">
+            <a:avLst>
+              <a:gd fmla="val 167" name="adj1"/>
+            </a:avLst>
+          </a:prstGeom>
+          <a:noFill/>
+          <a:ln cap="flat" cmpd="sng" w="9525">
+            <a:solidFill>
+              <a:schemeClr val="dk2"/>
+            </a:solidFill>
+            <a:prstDash val="solid"/>
+            <a:round/>
+            <a:headEnd len="med" w="med" type="none"/>
+            <a:tailEnd len="med" w="med" type="triangle"/>
+          </a:ln>
+        </p:spPr>
+      </p:cxnSp>
+      <p:sp>
+        <p:nvSpPr>
+          <p:cNvPr id="176" name="Google Shape;176;p27"/>
+          <p:cNvSpPr/>
+          <p:nvPr/>
+        </p:nvSpPr>
+        <p:spPr>
+          <a:xfrm>
+            <a:off x="1043525" y="4016950"/>
+            <a:ext cx="882000" cy="595500"/>
+          </a:xfrm>
+          <a:prstGeom prst="rect">
+            <a:avLst/>
+          </a:prstGeom>
+          <a:solidFill>
+            <a:schemeClr val="lt2"/>
+          </a:solidFill>
+          <a:ln cap="flat" cmpd="sng" w="9525">
+            <a:solidFill>
+              <a:schemeClr val="dk2"/>
+            </a:solidFill>
+            <a:prstDash val="solid"/>
+            <a:round/>
+            <a:headEnd len="sm" w="sm" type="none"/>
+            <a:tailEnd len="sm" w="sm" type="none"/>
+          </a:ln>
+        </p:spPr>
+        <p:txBody>
+          <a:bodyPr anchorCtr="0" anchor="ctr" bIns="91425" lIns="91425" spcFirstLastPara="1" rIns="91425" wrap="square" tIns="91425">
+            <a:noAutofit/>
+          </a:bodyPr>
+          <a:lstStyle/>
+          <a:p>
+            <a:pPr indent="0" lvl="0" marL="0" rtl="0" algn="ctr">
+              <a:spcBef>
+                <a:spcPts val="0"/>
+              </a:spcBef>
+              <a:spcAft>
+                <a:spcPts val="0"/>
+              </a:spcAft>
+              <a:buNone/>
+            </a:pPr>
+            <a:r>
+              <a:rPr lang="en"/>
+              <a:t>Layer</a:t>
             </a:r>
             <a:endParaRPr/>
           </a:p>
           <a:p>
-            <a:pPr indent="-342900" lvl="0" marL="457200" rtl="0" algn="l">
-              <a:spcBef>
-                <a:spcPts val="0"/>
-              </a:spcBef>
-              <a:spcAft>
-                <a:spcPts val="0"/>
-              </a:spcAft>
-              <a:buSzPts val="1800"/>
-              <a:buChar char="-"/>
+            <a:pPr indent="0" lvl="0" marL="0" rtl="0" algn="ctr">
+              <a:spcBef>
+                <a:spcPts val="0"/>
+              </a:spcBef>
+              <a:spcAft>
+                <a:spcPts val="0"/>
+              </a:spcAft>
+              <a:buNone/>
             </a:pPr>
             <a:r>
               <a:rPr lang="en"/>
-              <a:t>In the </a:t>
-            </a:r>
-            <a:r>
-              <a:rPr lang="en"/>
-              <a:t>batch</a:t>
-            </a:r>
-            <a:r>
-              <a:rPr lang="en"/>
-              <a:t> normalization + residual connection implementation, using the concept of blocks. Each block has several convolutional layers. First convolutional layer halves the spatial dimension and doubles the number of channels.</a:t>
+              <a:t>Norm</a:t>
             </a:r>
             <a:endParaRPr/>
           </a:p>
+        </p:txBody>
+      </p:sp>
+      <p:sp>
+        <p:nvSpPr>
+          <p:cNvPr id="177" name="Google Shape;177;p27"/>
+          <p:cNvSpPr/>
+          <p:nvPr/>
+        </p:nvSpPr>
+        <p:spPr>
+          <a:xfrm>
+            <a:off x="2327125" y="4016950"/>
+            <a:ext cx="951000" cy="595500"/>
+          </a:xfrm>
+          <a:prstGeom prst="rect">
+            <a:avLst/>
+          </a:prstGeom>
+          <a:solidFill>
+            <a:schemeClr val="lt2"/>
+          </a:solidFill>
+          <a:ln cap="flat" cmpd="sng" w="9525">
+            <a:solidFill>
+              <a:schemeClr val="dk2"/>
+            </a:solidFill>
+            <a:prstDash val="solid"/>
+            <a:round/>
+            <a:headEnd len="sm" w="sm" type="none"/>
+            <a:tailEnd len="sm" w="sm" type="none"/>
+          </a:ln>
+        </p:spPr>
+        <p:txBody>
+          <a:bodyPr anchorCtr="0" anchor="ctr" bIns="91425" lIns="91425" spcFirstLastPara="1" rIns="91425" wrap="square" tIns="91425">
+            <a:noAutofit/>
+          </a:bodyPr>
+          <a:lstStyle/>
           <a:p>
-            <a:pPr indent="-342900" lvl="0" marL="457200" rtl="0" algn="l">
-              <a:spcBef>
-                <a:spcPts val="0"/>
-              </a:spcBef>
-              <a:spcAft>
-                <a:spcPts val="0"/>
-              </a:spcAft>
-              <a:buSzPts val="1800"/>
-              <a:buChar char="-"/>
+            <a:pPr indent="0" lvl="0" marL="0" rtl="0" algn="ctr">
+              <a:spcBef>
+                <a:spcPts val="0"/>
+              </a:spcBef>
+              <a:spcAft>
+                <a:spcPts val="0"/>
+              </a:spcAft>
+              <a:buNone/>
             </a:pPr>
             <a:r>
               <a:rPr lang="en"/>
-              <a:t>In the </a:t>
-            </a:r>
+              <a:t>Attn</a:t>
+            </a:r>
+            <a:endParaRPr/>
+          </a:p>
+        </p:txBody>
+      </p:sp>
+      <p:sp>
+        <p:nvSpPr>
+          <p:cNvPr id="178" name="Google Shape;178;p27"/>
+          <p:cNvSpPr/>
+          <p:nvPr/>
+        </p:nvSpPr>
+        <p:spPr>
+          <a:xfrm>
+            <a:off x="3952475" y="4016950"/>
+            <a:ext cx="951000" cy="595500"/>
+          </a:xfrm>
+          <a:prstGeom prst="rect">
+            <a:avLst/>
+          </a:prstGeom>
+          <a:solidFill>
+            <a:schemeClr val="lt2"/>
+          </a:solidFill>
+          <a:ln cap="flat" cmpd="sng" w="9525">
+            <a:solidFill>
+              <a:schemeClr val="dk2"/>
+            </a:solidFill>
+            <a:prstDash val="solid"/>
+            <a:round/>
+            <a:headEnd len="sm" w="sm" type="none"/>
+            <a:tailEnd len="sm" w="sm" type="none"/>
+          </a:ln>
+        </p:spPr>
+        <p:txBody>
+          <a:bodyPr anchorCtr="0" anchor="ctr" bIns="91425" lIns="91425" spcFirstLastPara="1" rIns="91425" wrap="square" tIns="91425">
+            <a:noAutofit/>
+          </a:bodyPr>
+          <a:lstStyle/>
+          <a:p>
+            <a:pPr indent="0" lvl="0" marL="0" rtl="0" algn="ctr">
+              <a:spcBef>
+                <a:spcPts val="0"/>
+              </a:spcBef>
+              <a:spcAft>
+                <a:spcPts val="0"/>
+              </a:spcAft>
+              <a:buNone/>
+            </a:pPr>
             <a:r>
               <a:rPr lang="en"/>
-              <a:t>residual</a:t>
-            </a:r>
+              <a:t>Layer Norm</a:t>
+            </a:r>
+            <a:endParaRPr/>
+          </a:p>
+        </p:txBody>
+      </p:sp>
+      <p:sp>
+        <p:nvSpPr>
+          <p:cNvPr id="179" name="Google Shape;179;p27"/>
+          <p:cNvSpPr/>
+          <p:nvPr/>
+        </p:nvSpPr>
+        <p:spPr>
+          <a:xfrm>
+            <a:off x="5351625" y="4016950"/>
+            <a:ext cx="951000" cy="595500"/>
+          </a:xfrm>
+          <a:prstGeom prst="rect">
+            <a:avLst/>
+          </a:prstGeom>
+          <a:solidFill>
+            <a:schemeClr val="lt2"/>
+          </a:solidFill>
+          <a:ln cap="flat" cmpd="sng" w="9525">
+            <a:solidFill>
+              <a:schemeClr val="dk2"/>
+            </a:solidFill>
+            <a:prstDash val="solid"/>
+            <a:round/>
+            <a:headEnd len="sm" w="sm" type="none"/>
+            <a:tailEnd len="sm" w="sm" type="none"/>
+          </a:ln>
+        </p:spPr>
+        <p:txBody>
+          <a:bodyPr anchorCtr="0" anchor="ctr" bIns="91425" lIns="91425" spcFirstLastPara="1" rIns="91425" wrap="square" tIns="91425">
+            <a:noAutofit/>
+          </a:bodyPr>
+          <a:lstStyle/>
+          <a:p>
+            <a:pPr indent="0" lvl="0" marL="0" rtl="0" algn="ctr">
+              <a:spcBef>
+                <a:spcPts val="0"/>
+              </a:spcBef>
+              <a:spcAft>
+                <a:spcPts val="0"/>
+              </a:spcAft>
+              <a:buNone/>
+            </a:pPr>
             <a:r>
               <a:rPr lang="en"/>
-              <a:t> connection, add a 1d conv if spatial dimension change</a:t>
+              <a:t>MLP</a:t>
             </a:r>
             <a:endParaRPr/>
+          </a:p>
+        </p:txBody>
+      </p:sp>
+      <p:cxnSp>
+        <p:nvCxnSpPr>
+          <p:cNvPr id="180" name="Google Shape;180;p27"/>
+          <p:cNvCxnSpPr>
+            <a:stCxn id="176" idx="3"/>
+            <a:endCxn id="177" idx="1"/>
+          </p:cNvCxnSpPr>
+          <p:nvPr/>
+        </p:nvCxnSpPr>
+        <p:spPr>
+          <a:xfrm>
+            <a:off x="1925525" y="4314700"/>
+            <a:ext cx="401700" cy="0"/>
+          </a:xfrm>
+          <a:prstGeom prst="straightConnector1">
+            <a:avLst/>
+          </a:prstGeom>
+          <a:noFill/>
+          <a:ln cap="flat" cmpd="sng" w="9525">
+            <a:solidFill>
+              <a:schemeClr val="dk2"/>
+            </a:solidFill>
+            <a:prstDash val="solid"/>
+            <a:round/>
+            <a:headEnd len="med" w="med" type="none"/>
+            <a:tailEnd len="med" w="med" type="triangle"/>
+          </a:ln>
+        </p:spPr>
+      </p:cxnSp>
+      <p:cxnSp>
+        <p:nvCxnSpPr>
+          <p:cNvPr id="181" name="Google Shape;181;p27"/>
+          <p:cNvCxnSpPr>
+            <a:stCxn id="177" idx="3"/>
+          </p:cNvCxnSpPr>
+          <p:nvPr/>
+        </p:nvCxnSpPr>
+        <p:spPr>
+          <a:xfrm flipH="1" rot="10800000">
+            <a:off x="3278125" y="4312300"/>
+            <a:ext cx="194100" cy="2400"/>
+          </a:xfrm>
+          <a:prstGeom prst="straightConnector1">
+            <a:avLst/>
+          </a:prstGeom>
+          <a:noFill/>
+          <a:ln cap="flat" cmpd="sng" w="9525">
+            <a:solidFill>
+              <a:schemeClr val="dk2"/>
+            </a:solidFill>
+            <a:prstDash val="solid"/>
+            <a:round/>
+            <a:headEnd len="med" w="med" type="none"/>
+            <a:tailEnd len="med" w="med" type="triangle"/>
+          </a:ln>
+        </p:spPr>
+      </p:cxnSp>
+      <p:cxnSp>
+        <p:nvCxnSpPr>
+          <p:cNvPr id="182" name="Google Shape;182;p27"/>
+          <p:cNvCxnSpPr>
+            <a:stCxn id="178" idx="3"/>
+            <a:endCxn id="179" idx="1"/>
+          </p:cNvCxnSpPr>
+          <p:nvPr/>
+        </p:nvCxnSpPr>
+        <p:spPr>
+          <a:xfrm>
+            <a:off x="4903475" y="4314700"/>
+            <a:ext cx="448200" cy="0"/>
+          </a:xfrm>
+          <a:prstGeom prst="straightConnector1">
+            <a:avLst/>
+          </a:prstGeom>
+          <a:noFill/>
+          <a:ln cap="flat" cmpd="sng" w="9525">
+            <a:solidFill>
+              <a:schemeClr val="dk2"/>
+            </a:solidFill>
+            <a:prstDash val="solid"/>
+            <a:round/>
+            <a:headEnd len="med" w="med" type="none"/>
+            <a:tailEnd len="med" w="med" type="triangle"/>
+          </a:ln>
+        </p:spPr>
+      </p:cxnSp>
+      <p:sp>
+        <p:nvSpPr>
+          <p:cNvPr id="183" name="Google Shape;183;p27"/>
+          <p:cNvSpPr txBox="1"/>
+          <p:nvPr/>
+        </p:nvSpPr>
+        <p:spPr>
+          <a:xfrm>
+            <a:off x="364800" y="4083850"/>
+            <a:ext cx="341700" cy="461700"/>
+          </a:xfrm>
+          <a:prstGeom prst="rect">
+            <a:avLst/>
+          </a:prstGeom>
+          <a:noFill/>
+          <a:ln>
+            <a:noFill/>
+          </a:ln>
+        </p:spPr>
+        <p:txBody>
+          <a:bodyPr anchorCtr="0" anchor="t" bIns="91425" lIns="91425" spcFirstLastPara="1" rIns="91425" wrap="square" tIns="91425">
+            <a:spAutoFit/>
+          </a:bodyPr>
+          <a:lstStyle/>
+          <a:p>
+            <a:pPr indent="0" lvl="0" marL="0" rtl="0" algn="l">
+              <a:spcBef>
+                <a:spcPts val="0"/>
+              </a:spcBef>
+              <a:spcAft>
+                <a:spcPts val="0"/>
+              </a:spcAft>
+              <a:buNone/>
+            </a:pPr>
+            <a:r>
+              <a:rPr lang="en" sz="1800">
+                <a:solidFill>
+                  <a:schemeClr val="dk2"/>
+                </a:solidFill>
+              </a:rPr>
+              <a:t>x</a:t>
+            </a:r>
+            <a:endParaRPr sz="1800">
+              <a:solidFill>
+                <a:schemeClr val="dk2"/>
+              </a:solidFill>
+            </a:endParaRPr>
+          </a:p>
+        </p:txBody>
+      </p:sp>
+      <p:cxnSp>
+        <p:nvCxnSpPr>
+          <p:cNvPr id="184" name="Google Shape;184;p27"/>
+          <p:cNvCxnSpPr>
+            <a:stCxn id="183" idx="3"/>
+            <a:endCxn id="176" idx="1"/>
+          </p:cNvCxnSpPr>
+          <p:nvPr/>
+        </p:nvCxnSpPr>
+        <p:spPr>
+          <a:xfrm>
+            <a:off x="706500" y="4314700"/>
+            <a:ext cx="336900" cy="0"/>
+          </a:xfrm>
+          <a:prstGeom prst="straightConnector1">
+            <a:avLst/>
+          </a:prstGeom>
+          <a:noFill/>
+          <a:ln cap="flat" cmpd="sng" w="9525">
+            <a:solidFill>
+              <a:schemeClr val="dk2"/>
+            </a:solidFill>
+            <a:prstDash val="solid"/>
+            <a:round/>
+            <a:headEnd len="med" w="med" type="none"/>
+            <a:tailEnd len="med" w="med" type="triangle"/>
+          </a:ln>
+        </p:spPr>
+      </p:cxnSp>
+      <p:sp>
+        <p:nvSpPr>
+          <p:cNvPr id="185" name="Google Shape;185;p27"/>
+          <p:cNvSpPr/>
+          <p:nvPr/>
+        </p:nvSpPr>
+        <p:spPr>
+          <a:xfrm>
+            <a:off x="6667175" y="4188850"/>
+            <a:ext cx="254100" cy="249300"/>
+          </a:xfrm>
+          <a:prstGeom prst="flowChartOr">
+            <a:avLst/>
+          </a:prstGeom>
+          <a:solidFill>
+            <a:schemeClr val="lt2"/>
+          </a:solidFill>
+          <a:ln cap="flat" cmpd="sng" w="9525">
+            <a:solidFill>
+              <a:schemeClr val="dk2"/>
+            </a:solidFill>
+            <a:prstDash val="solid"/>
+            <a:round/>
+            <a:headEnd len="sm" w="sm" type="none"/>
+            <a:tailEnd len="sm" w="sm" type="none"/>
+          </a:ln>
+        </p:spPr>
+        <p:txBody>
+          <a:bodyPr anchorCtr="0" anchor="ctr" bIns="91425" lIns="91425" spcFirstLastPara="1" rIns="91425" wrap="square" tIns="91425">
+            <a:noAutofit/>
+          </a:bodyPr>
+          <a:lstStyle/>
+          <a:p>
+            <a:pPr indent="0" lvl="0" marL="0" rtl="0" algn="ctr">
+              <a:spcBef>
+                <a:spcPts val="0"/>
+              </a:spcBef>
+              <a:spcAft>
+                <a:spcPts val="0"/>
+              </a:spcAft>
+              <a:buNone/>
+            </a:pPr>
+            <a:r>
+              <a:t/>
+            </a:r>
+            <a:endParaRPr/>
+          </a:p>
+        </p:txBody>
+      </p:sp>
+      <p:cxnSp>
+        <p:nvCxnSpPr>
+          <p:cNvPr id="186" name="Google Shape;186;p27"/>
+          <p:cNvCxnSpPr>
+            <a:stCxn id="179" idx="3"/>
+          </p:cNvCxnSpPr>
+          <p:nvPr/>
+        </p:nvCxnSpPr>
+        <p:spPr>
+          <a:xfrm flipH="1" rot="10800000">
+            <a:off x="6302625" y="4313500"/>
+            <a:ext cx="364500" cy="1200"/>
+          </a:xfrm>
+          <a:prstGeom prst="straightConnector1">
+            <a:avLst/>
+          </a:prstGeom>
+          <a:noFill/>
+          <a:ln cap="flat" cmpd="sng" w="9525">
+            <a:solidFill>
+              <a:schemeClr val="dk2"/>
+            </a:solidFill>
+            <a:prstDash val="solid"/>
+            <a:round/>
+            <a:headEnd len="med" w="med" type="none"/>
+            <a:tailEnd len="med" w="med" type="triangle"/>
+          </a:ln>
+        </p:spPr>
+      </p:cxnSp>
+      <p:cxnSp>
+        <p:nvCxnSpPr>
+          <p:cNvPr id="187" name="Google Shape;187;p27"/>
+          <p:cNvCxnSpPr>
+            <a:endCxn id="188" idx="0"/>
+          </p:cNvCxnSpPr>
+          <p:nvPr/>
+        </p:nvCxnSpPr>
+        <p:spPr>
+          <a:xfrm flipH="1" rot="10800000">
+            <a:off x="817075" y="4190050"/>
+            <a:ext cx="2782200" cy="122400"/>
+          </a:xfrm>
+          <a:prstGeom prst="bentConnector4">
+            <a:avLst>
+              <a:gd fmla="val 5" name="adj1"/>
+              <a:gd fmla="val 396119" name="adj2"/>
+            </a:avLst>
+          </a:prstGeom>
+          <a:noFill/>
+          <a:ln cap="flat" cmpd="sng" w="9525">
+            <a:solidFill>
+              <a:schemeClr val="dk2"/>
+            </a:solidFill>
+            <a:prstDash val="solid"/>
+            <a:round/>
+            <a:headEnd len="med" w="med" type="none"/>
+            <a:tailEnd len="med" w="med" type="triangle"/>
+          </a:ln>
+        </p:spPr>
+      </p:cxnSp>
+      <p:sp>
+        <p:nvSpPr>
+          <p:cNvPr id="188" name="Google Shape;188;p27"/>
+          <p:cNvSpPr/>
+          <p:nvPr/>
+        </p:nvSpPr>
+        <p:spPr>
+          <a:xfrm>
+            <a:off x="3472225" y="4190050"/>
+            <a:ext cx="254100" cy="249300"/>
+          </a:xfrm>
+          <a:prstGeom prst="flowChartOr">
+            <a:avLst/>
+          </a:prstGeom>
+          <a:solidFill>
+            <a:schemeClr val="lt2"/>
+          </a:solidFill>
+          <a:ln cap="flat" cmpd="sng" w="9525">
+            <a:solidFill>
+              <a:schemeClr val="dk2"/>
+            </a:solidFill>
+            <a:prstDash val="solid"/>
+            <a:round/>
+            <a:headEnd len="sm" w="sm" type="none"/>
+            <a:tailEnd len="sm" w="sm" type="none"/>
+          </a:ln>
+        </p:spPr>
+        <p:txBody>
+          <a:bodyPr anchorCtr="0" anchor="ctr" bIns="91425" lIns="91425" spcFirstLastPara="1" rIns="91425" wrap="square" tIns="91425">
+            <a:noAutofit/>
+          </a:bodyPr>
+          <a:lstStyle/>
+          <a:p>
+            <a:pPr indent="0" lvl="0" marL="0" rtl="0" algn="ctr">
+              <a:spcBef>
+                <a:spcPts val="0"/>
+              </a:spcBef>
+              <a:spcAft>
+                <a:spcPts val="0"/>
+              </a:spcAft>
+              <a:buNone/>
+            </a:pPr>
+            <a:r>
+              <a:t/>
+            </a:r>
+            <a:endParaRPr/>
+          </a:p>
+        </p:txBody>
+      </p:sp>
+      <p:cxnSp>
+        <p:nvCxnSpPr>
+          <p:cNvPr id="189" name="Google Shape;189;p27"/>
+          <p:cNvCxnSpPr>
+            <a:stCxn id="188" idx="6"/>
+            <a:endCxn id="178" idx="1"/>
+          </p:cNvCxnSpPr>
+          <p:nvPr/>
+        </p:nvCxnSpPr>
+        <p:spPr>
+          <a:xfrm>
+            <a:off x="3726325" y="4314700"/>
+            <a:ext cx="226200" cy="0"/>
+          </a:xfrm>
+          <a:prstGeom prst="straightConnector1">
+            <a:avLst/>
+          </a:prstGeom>
+          <a:noFill/>
+          <a:ln cap="flat" cmpd="sng" w="9525">
+            <a:solidFill>
+              <a:schemeClr val="dk2"/>
+            </a:solidFill>
+            <a:prstDash val="solid"/>
+            <a:round/>
+            <a:headEnd len="med" w="med" type="none"/>
+            <a:tailEnd len="med" w="med" type="triangle"/>
+          </a:ln>
+        </p:spPr>
+      </p:cxnSp>
+      <p:cxnSp>
+        <p:nvCxnSpPr>
+          <p:cNvPr id="190" name="Google Shape;190;p27"/>
+          <p:cNvCxnSpPr>
+            <a:stCxn id="188" idx="6"/>
+            <a:endCxn id="185" idx="0"/>
+          </p:cNvCxnSpPr>
+          <p:nvPr/>
+        </p:nvCxnSpPr>
+        <p:spPr>
+          <a:xfrm flipH="1" rot="10800000">
+            <a:off x="3726325" y="4189000"/>
+            <a:ext cx="3067800" cy="125700"/>
+          </a:xfrm>
+          <a:prstGeom prst="bentConnector4">
+            <a:avLst>
+              <a:gd fmla="val 3001" name="adj1"/>
+              <a:gd fmla="val 394849" name="adj2"/>
+            </a:avLst>
+          </a:prstGeom>
+          <a:noFill/>
+          <a:ln cap="flat" cmpd="sng" w="9525">
+            <a:solidFill>
+              <a:schemeClr val="dk2"/>
+            </a:solidFill>
+            <a:prstDash val="solid"/>
+            <a:round/>
+            <a:headEnd len="med" w="med" type="none"/>
+            <a:tailEnd len="med" w="med" type="triangle"/>
+          </a:ln>
+        </p:spPr>
+      </p:cxnSp>
+      <p:sp>
+        <p:nvSpPr>
+          <p:cNvPr id="191" name="Google Shape;191;p27"/>
+          <p:cNvSpPr/>
+          <p:nvPr/>
+        </p:nvSpPr>
+        <p:spPr>
+          <a:xfrm>
+            <a:off x="6154775" y="2567125"/>
+            <a:ext cx="951000" cy="595500"/>
+          </a:xfrm>
+          <a:prstGeom prst="rect">
+            <a:avLst/>
+          </a:prstGeom>
+          <a:solidFill>
+            <a:schemeClr val="lt2"/>
+          </a:solidFill>
+          <a:ln cap="flat" cmpd="sng" w="9525">
+            <a:solidFill>
+              <a:schemeClr val="dk2"/>
+            </a:solidFill>
+            <a:prstDash val="solid"/>
+            <a:round/>
+            <a:headEnd len="sm" w="sm" type="none"/>
+            <a:tailEnd len="sm" w="sm" type="none"/>
+          </a:ln>
+        </p:spPr>
+        <p:txBody>
+          <a:bodyPr anchorCtr="0" anchor="ctr" bIns="91425" lIns="91425" spcFirstLastPara="1" rIns="91425" wrap="square" tIns="91425">
+            <a:noAutofit/>
+          </a:bodyPr>
+          <a:lstStyle/>
+          <a:p>
+            <a:pPr indent="0" lvl="0" marL="0" rtl="0" algn="ctr">
+              <a:spcBef>
+                <a:spcPts val="0"/>
+              </a:spcBef>
+              <a:spcAft>
+                <a:spcPts val="0"/>
+              </a:spcAft>
+              <a:buNone/>
+            </a:pPr>
+            <a:r>
+              <a:rPr lang="en"/>
+              <a:t>Batch Norm</a:t>
+            </a:r>
+            <a:endParaRPr/>
+          </a:p>
+        </p:txBody>
+      </p:sp>
+      <p:cxnSp>
+        <p:nvCxnSpPr>
+          <p:cNvPr id="192" name="Google Shape;192;p27"/>
+          <p:cNvCxnSpPr>
+            <a:stCxn id="191" idx="3"/>
+            <a:endCxn id="172" idx="2"/>
+          </p:cNvCxnSpPr>
+          <p:nvPr/>
+        </p:nvCxnSpPr>
+        <p:spPr>
+          <a:xfrm>
+            <a:off x="7105775" y="2864875"/>
+            <a:ext cx="341700" cy="0"/>
+          </a:xfrm>
+          <a:prstGeom prst="straightConnector1">
+            <a:avLst/>
+          </a:prstGeom>
+          <a:noFill/>
+          <a:ln cap="flat" cmpd="sng" w="9525">
+            <a:solidFill>
+              <a:schemeClr val="dk2"/>
+            </a:solidFill>
+            <a:prstDash val="solid"/>
+            <a:round/>
+            <a:headEnd len="med" w="med" type="none"/>
+            <a:tailEnd len="med" w="med" type="triangle"/>
+          </a:ln>
+        </p:spPr>
+      </p:cxnSp>
+      <p:sp>
+        <p:nvSpPr>
+          <p:cNvPr id="175" name="Google Shape;175;p27"/>
+          <p:cNvSpPr/>
+          <p:nvPr/>
+        </p:nvSpPr>
+        <p:spPr>
+          <a:xfrm>
+            <a:off x="3569175" y="1768400"/>
+            <a:ext cx="951000" cy="595500"/>
+          </a:xfrm>
+          <a:prstGeom prst="rect">
+            <a:avLst/>
+          </a:prstGeom>
+          <a:solidFill>
+            <a:schemeClr val="lt2"/>
+          </a:solidFill>
+          <a:ln cap="flat" cmpd="sng" w="9525">
+            <a:solidFill>
+              <a:schemeClr val="dk2"/>
+            </a:solidFill>
+            <a:prstDash val="solid"/>
+            <a:round/>
+            <a:headEnd len="sm" w="sm" type="none"/>
+            <a:tailEnd len="sm" w="sm" type="none"/>
+          </a:ln>
+        </p:spPr>
+        <p:txBody>
+          <a:bodyPr anchorCtr="0" anchor="ctr" bIns="91425" lIns="91425" spcFirstLastPara="1" rIns="91425" wrap="square" tIns="91425">
+            <a:noAutofit/>
+          </a:bodyPr>
+          <a:lstStyle/>
+          <a:p>
+            <a:pPr indent="0" lvl="0" marL="0" rtl="0" algn="ctr">
+              <a:spcBef>
+                <a:spcPts val="0"/>
+              </a:spcBef>
+              <a:spcAft>
+                <a:spcPts val="0"/>
+              </a:spcAft>
+              <a:buNone/>
+            </a:pPr>
+            <a:r>
+              <a:rPr lang="en"/>
+              <a:t>1D conv</a:t>
+            </a:r>
+            <a:endParaRPr/>
+          </a:p>
+        </p:txBody>
+      </p:sp>
+      <p:cxnSp>
+        <p:nvCxnSpPr>
+          <p:cNvPr id="193" name="Google Shape;193;p27"/>
+          <p:cNvCxnSpPr>
+            <a:stCxn id="175" idx="3"/>
+            <a:endCxn id="172" idx="0"/>
+          </p:cNvCxnSpPr>
+          <p:nvPr/>
+        </p:nvCxnSpPr>
+        <p:spPr>
+          <a:xfrm>
+            <a:off x="4520175" y="2066150"/>
+            <a:ext cx="3054600" cy="674100"/>
+          </a:xfrm>
+          <a:prstGeom prst="bentConnector2">
+            <a:avLst/>
+          </a:prstGeom>
+          <a:noFill/>
+          <a:ln cap="flat" cmpd="sng" w="9525">
+            <a:solidFill>
+              <a:schemeClr val="dk2"/>
+            </a:solidFill>
+            <a:prstDash val="solid"/>
+            <a:round/>
+            <a:headEnd len="med" w="med" type="none"/>
+            <a:tailEnd len="med" w="med" type="triangle"/>
+          </a:ln>
+        </p:spPr>
+      </p:cxnSp>
+      <p:sp>
+        <p:nvSpPr>
+          <p:cNvPr id="194" name="Google Shape;194;p27"/>
+          <p:cNvSpPr txBox="1"/>
+          <p:nvPr/>
+        </p:nvSpPr>
+        <p:spPr>
+          <a:xfrm>
+            <a:off x="2779550" y="1214300"/>
+            <a:ext cx="2659500" cy="554100"/>
+          </a:xfrm>
+          <a:prstGeom prst="rect">
+            <a:avLst/>
+          </a:prstGeom>
+          <a:noFill/>
+          <a:ln>
+            <a:noFill/>
+          </a:ln>
+        </p:spPr>
+        <p:txBody>
+          <a:bodyPr anchorCtr="0" anchor="t" bIns="91425" lIns="91425" spcFirstLastPara="1" rIns="91425" wrap="square" tIns="91425">
+            <a:spAutoFit/>
+          </a:bodyPr>
+          <a:lstStyle/>
+          <a:p>
+            <a:pPr indent="0" lvl="0" marL="0" rtl="0" algn="ctr">
+              <a:spcBef>
+                <a:spcPts val="0"/>
+              </a:spcBef>
+              <a:spcAft>
+                <a:spcPts val="0"/>
+              </a:spcAft>
+              <a:buNone/>
+            </a:pPr>
+            <a:r>
+              <a:rPr lang="en" sz="1200">
+                <a:solidFill>
+                  <a:schemeClr val="dk2"/>
+                </a:solidFill>
+              </a:rPr>
+              <a:t>Shortcut with 1D conv, if spatial dimension change</a:t>
+            </a:r>
+            <a:endParaRPr sz="1200">
+              <a:solidFill>
+                <a:schemeClr val="dk2"/>
+              </a:solidFill>
+            </a:endParaRPr>
           </a:p>
         </p:txBody>
       </p:sp>
@@ -9323,7 +9408,7 @@
   <p:cSld>
     <p:spTree>
       <p:nvGrpSpPr>
-        <p:cNvPr id="194" name="Shape 194"/>
+        <p:cNvPr id="198" name="Shape 198"/>
         <p:cNvGrpSpPr/>
         <p:nvPr/>
       </p:nvGrpSpPr>
@@ -9337,7 +9422,7 @@
       </p:grpSpPr>
       <p:sp>
         <p:nvSpPr>
-          <p:cNvPr id="195" name="Google Shape;195;p28"/>
+          <p:cNvPr id="199" name="Google Shape;199;p28"/>
           <p:cNvSpPr txBox="1"/>
           <p:nvPr>
             <p:ph type="title"/>
@@ -9378,7 +9463,7 @@
       </p:sp>
       <p:sp>
         <p:nvSpPr>
-          <p:cNvPr id="196" name="Google Shape;196;p28"/>
+          <p:cNvPr id="200" name="Google Shape;200;p28"/>
           <p:cNvSpPr txBox="1"/>
           <p:nvPr/>
         </p:nvSpPr>
@@ -9444,7 +9529,7 @@
       </p:sp>
       <p:pic>
         <p:nvPicPr>
-          <p:cNvPr id="197" name="Google Shape;197;p28"/>
+          <p:cNvPr id="201" name="Google Shape;201;p28"/>
           <p:cNvPicPr preferRelativeResize="0"/>
           <p:nvPr/>
         </p:nvPicPr>
@@ -9472,7 +9557,7 @@
       </p:pic>
       <p:pic>
         <p:nvPicPr>
-          <p:cNvPr id="198" name="Google Shape;198;p28"/>
+          <p:cNvPr id="202" name="Google Shape;202;p28"/>
           <p:cNvPicPr preferRelativeResize="0"/>
           <p:nvPr/>
         </p:nvPicPr>
@@ -9500,7 +9585,7 @@
       </p:pic>
       <p:pic>
         <p:nvPicPr>
-          <p:cNvPr id="199" name="Google Shape;199;p28"/>
+          <p:cNvPr id="203" name="Google Shape;203;p28"/>
           <p:cNvPicPr preferRelativeResize="0"/>
           <p:nvPr/>
         </p:nvPicPr>
@@ -9528,7 +9613,7 @@
       </p:pic>
       <p:sp>
         <p:nvSpPr>
-          <p:cNvPr id="200" name="Google Shape;200;p28"/>
+          <p:cNvPr id="204" name="Google Shape;204;p28"/>
           <p:cNvSpPr txBox="1"/>
           <p:nvPr/>
         </p:nvSpPr>
@@ -9589,7 +9674,7 @@
   <p:cSld>
     <p:spTree>
       <p:nvGrpSpPr>
-        <p:cNvPr id="204" name="Shape 204"/>
+        <p:cNvPr id="208" name="Shape 208"/>
         <p:cNvGrpSpPr/>
         <p:nvPr/>
       </p:nvGrpSpPr>
@@ -9603,7 +9688,7 @@
       </p:grpSpPr>
       <p:sp>
         <p:nvSpPr>
-          <p:cNvPr id="205" name="Google Shape;205;p29"/>
+          <p:cNvPr id="209" name="Google Shape;209;p29"/>
           <p:cNvSpPr txBox="1"/>
           <p:nvPr>
             <p:ph type="title"/>
@@ -9635,15 +9720,7 @@
             </a:pPr>
             <a:r>
               <a:rPr lang="en"/>
-              <a:t>Using lower precision data types in the </a:t>
-            </a:r>
-            <a:r>
-              <a:rPr lang="en"/>
-              <a:t>training</a:t>
-            </a:r>
-            <a:r>
-              <a:rPr lang="en"/>
-              <a:t> loop</a:t>
+              <a:t>Common tricks..</a:t>
             </a:r>
             <a:endParaRPr/>
           </a:p>
@@ -9651,7 +9728,188 @@
       </p:sp>
       <p:sp>
         <p:nvSpPr>
-          <p:cNvPr id="206" name="Google Shape;206;p29"/>
+          <p:cNvPr id="210" name="Google Shape;210;p29"/>
+          <p:cNvSpPr txBox="1"/>
+          <p:nvPr>
+            <p:ph idx="1" type="body"/>
+          </p:nvPr>
+        </p:nvSpPr>
+        <p:spPr>
+          <a:xfrm>
+            <a:off x="311700" y="1152475"/>
+            <a:ext cx="8520600" cy="3416400"/>
+          </a:xfrm>
+          <a:prstGeom prst="rect">
+            <a:avLst/>
+          </a:prstGeom>
+        </p:spPr>
+        <p:txBody>
+          <a:bodyPr anchorCtr="0" anchor="t" bIns="91425" lIns="91425" spcFirstLastPara="1" rIns="91425" wrap="square" tIns="91425">
+            <a:normAutofit/>
+          </a:bodyPr>
+          <a:lstStyle/>
+          <a:p>
+            <a:pPr indent="-342900" lvl="0" marL="457200" rtl="0" algn="l">
+              <a:spcBef>
+                <a:spcPts val="0"/>
+              </a:spcBef>
+              <a:spcAft>
+                <a:spcPts val="0"/>
+              </a:spcAft>
+              <a:buSzPts val="1800"/>
+              <a:buChar char="-"/>
+            </a:pPr>
+            <a:r>
+              <a:rPr lang="en"/>
+              <a:t>Data augmentation</a:t>
+            </a:r>
+            <a:endParaRPr/>
+          </a:p>
+          <a:p>
+            <a:pPr indent="-342900" lvl="0" marL="457200" rtl="0" algn="l">
+              <a:spcBef>
+                <a:spcPts val="0"/>
+              </a:spcBef>
+              <a:spcAft>
+                <a:spcPts val="0"/>
+              </a:spcAft>
+              <a:buSzPts val="1800"/>
+              <a:buChar char="-"/>
+            </a:pPr>
+            <a:r>
+              <a:rPr lang="en"/>
+              <a:t>Setting up a convolutional network with downsampling points (using striding) accompanied by increase in channels</a:t>
+            </a:r>
+            <a:endParaRPr/>
+          </a:p>
+          <a:p>
+            <a:pPr indent="-342900" lvl="0" marL="457200" rtl="0" algn="l">
+              <a:spcBef>
+                <a:spcPts val="0"/>
+              </a:spcBef>
+              <a:spcAft>
+                <a:spcPts val="0"/>
+              </a:spcAft>
+              <a:buSzPts val="1800"/>
+              <a:buChar char="-"/>
+            </a:pPr>
+            <a:r>
+              <a:rPr lang="en"/>
+              <a:t>In the </a:t>
+            </a:r>
+            <a:r>
+              <a:rPr lang="en"/>
+              <a:t>batch</a:t>
+            </a:r>
+            <a:r>
+              <a:rPr lang="en"/>
+              <a:t> normalization + residual connection implementation, using the concept of blocks. Each block has several convolutional layers. First convolutional layer halves the spatial dimension and doubles the number of channels.</a:t>
+            </a:r>
+            <a:endParaRPr/>
+          </a:p>
+          <a:p>
+            <a:pPr indent="-342900" lvl="0" marL="457200" rtl="0" algn="l">
+              <a:spcBef>
+                <a:spcPts val="0"/>
+              </a:spcBef>
+              <a:spcAft>
+                <a:spcPts val="0"/>
+              </a:spcAft>
+              <a:buSzPts val="1800"/>
+              <a:buChar char="-"/>
+            </a:pPr>
+            <a:r>
+              <a:rPr lang="en"/>
+              <a:t>In the </a:t>
+            </a:r>
+            <a:r>
+              <a:rPr lang="en"/>
+              <a:t>residual</a:t>
+            </a:r>
+            <a:r>
+              <a:rPr lang="en"/>
+              <a:t> connection, add a 1d conv if spatial dimension change</a:t>
+            </a:r>
+            <a:endParaRPr/>
+          </a:p>
+        </p:txBody>
+      </p:sp>
+    </p:spTree>
+  </p:cSld>
+  <p:clrMapOvr>
+    <a:masterClrMapping/>
+  </p:clrMapOvr>
+</p:sld>
+</file>
+
+<file path=ppt/slides/slide18.xml><?xml version="1.0" encoding="utf-8"?>
+<p:sld xmlns:a="http://schemas.openxmlformats.org/drawingml/2006/main" xmlns:r="http://schemas.openxmlformats.org/officeDocument/2006/relationships" xmlns:mc="http://schemas.openxmlformats.org/markup-compatibility/2006" xmlns:mv="urn:schemas-microsoft-com:mac:vml" xmlns:p="http://schemas.openxmlformats.org/presentationml/2006/main" xmlns:c="http://schemas.openxmlformats.org/drawingml/2006/chart" xmlns:dgm="http://schemas.openxmlformats.org/drawingml/2006/diagram" xmlns:o="urn:schemas-microsoft-com:office:office" xmlns:v="urn:schemas-microsoft-com:vml" xmlns:pvml="urn:schemas-microsoft-com:office:powerpoint" xmlns:com="http://schemas.openxmlformats.org/drawingml/2006/compatibility" xmlns:p14="http://schemas.microsoft.com/office/powerpoint/2010/main" xmlns:p15="http://schemas.microsoft.com/office/powerpoint/2012/main" xmlns:ahyp="http://schemas.microsoft.com/office/drawing/2018/hyperlinkcolor">
+  <p:cSld>
+    <p:spTree>
+      <p:nvGrpSpPr>
+        <p:cNvPr id="214" name="Shape 214"/>
+        <p:cNvGrpSpPr/>
+        <p:nvPr/>
+      </p:nvGrpSpPr>
+      <p:grpSpPr>
+        <a:xfrm>
+          <a:off x="0" y="0"/>
+          <a:ext cx="0" cy="0"/>
+          <a:chOff x="0" y="0"/>
+          <a:chExt cx="0" cy="0"/>
+        </a:xfrm>
+      </p:grpSpPr>
+      <p:sp>
+        <p:nvSpPr>
+          <p:cNvPr id="215" name="Google Shape;215;p30"/>
+          <p:cNvSpPr txBox="1"/>
+          <p:nvPr>
+            <p:ph type="title"/>
+          </p:nvPr>
+        </p:nvSpPr>
+        <p:spPr>
+          <a:xfrm>
+            <a:off x="311700" y="445025"/>
+            <a:ext cx="8520600" cy="572700"/>
+          </a:xfrm>
+          <a:prstGeom prst="rect">
+            <a:avLst/>
+          </a:prstGeom>
+        </p:spPr>
+        <p:txBody>
+          <a:bodyPr anchorCtr="0" anchor="t" bIns="91425" lIns="91425" spcFirstLastPara="1" rIns="91425" wrap="square" tIns="91425">
+            <a:normAutofit fontScale="90000"/>
+          </a:bodyPr>
+          <a:lstStyle/>
+          <a:p>
+            <a:pPr indent="0" lvl="0" marL="0" rtl="0" algn="l">
+              <a:spcBef>
+                <a:spcPts val="0"/>
+              </a:spcBef>
+              <a:spcAft>
+                <a:spcPts val="0"/>
+              </a:spcAft>
+              <a:buNone/>
+            </a:pPr>
+            <a:r>
+              <a:rPr lang="en"/>
+              <a:t>Using lower precision data types in the </a:t>
+            </a:r>
+            <a:r>
+              <a:rPr lang="en"/>
+              <a:t>training</a:t>
+            </a:r>
+            <a:r>
+              <a:rPr lang="en"/>
+              <a:t> loop</a:t>
+            </a:r>
+            <a:endParaRPr/>
+          </a:p>
+        </p:txBody>
+      </p:sp>
+      <p:sp>
+        <p:nvSpPr>
+          <p:cNvPr id="216" name="Google Shape;216;p30"/>
           <p:cNvSpPr txBox="1"/>
           <p:nvPr/>
         </p:nvSpPr>
@@ -9721,7 +9979,7 @@
       </p:sp>
       <p:sp>
         <p:nvSpPr>
-          <p:cNvPr id="207" name="Google Shape;207;p29"/>
+          <p:cNvPr id="217" name="Google Shape;217;p30"/>
           <p:cNvSpPr txBox="1"/>
           <p:nvPr/>
         </p:nvSpPr>
@@ -9767,7 +10025,7 @@
       </p:sp>
       <p:sp>
         <p:nvSpPr>
-          <p:cNvPr id="208" name="Google Shape;208;p29"/>
+          <p:cNvPr id="218" name="Google Shape;218;p30"/>
           <p:cNvSpPr txBox="1"/>
           <p:nvPr/>
         </p:nvSpPr>
@@ -9813,7 +10071,7 @@
       </p:sp>
       <p:sp>
         <p:nvSpPr>
-          <p:cNvPr id="209" name="Google Shape;209;p29"/>
+          <p:cNvPr id="219" name="Google Shape;219;p30"/>
           <p:cNvSpPr txBox="1"/>
           <p:nvPr/>
         </p:nvSpPr>
@@ -9887,7 +10145,7 @@
       </p:sp>
       <p:sp>
         <p:nvSpPr>
-          <p:cNvPr id="210" name="Google Shape;210;p29"/>
+          <p:cNvPr id="220" name="Google Shape;220;p30"/>
           <p:cNvSpPr txBox="1"/>
           <p:nvPr/>
         </p:nvSpPr>
@@ -9961,7 +10219,7 @@
       </p:sp>
       <p:sp>
         <p:nvSpPr>
-          <p:cNvPr id="211" name="Google Shape;211;p29"/>
+          <p:cNvPr id="221" name="Google Shape;221;p30"/>
           <p:cNvSpPr txBox="1"/>
           <p:nvPr/>
         </p:nvSpPr>
@@ -10103,7 +10361,7 @@
       </p:sp>
       <p:pic>
         <p:nvPicPr>
-          <p:cNvPr id="212" name="Google Shape;212;p29"/>
+          <p:cNvPr id="222" name="Google Shape;222;p30"/>
           <p:cNvPicPr preferRelativeResize="0"/>
           <p:nvPr/>
         </p:nvPicPr>
@@ -10131,9 +10389,9 @@
       </p:pic>
       <p:cxnSp>
         <p:nvCxnSpPr>
-          <p:cNvPr id="213" name="Google Shape;213;p29"/>
+          <p:cNvPr id="223" name="Google Shape;223;p30"/>
           <p:cNvCxnSpPr>
-            <a:stCxn id="206" idx="1"/>
+            <a:stCxn id="216" idx="1"/>
           </p:cNvCxnSpPr>
           <p:nvPr/>
         </p:nvCxnSpPr>
@@ -10159,7 +10417,7 @@
       </p:cxnSp>
       <p:cxnSp>
         <p:nvCxnSpPr>
-          <p:cNvPr id="214" name="Google Shape;214;p29"/>
+          <p:cNvPr id="224" name="Google Shape;224;p30"/>
           <p:cNvCxnSpPr/>
           <p:nvPr/>
         </p:nvCxnSpPr>
@@ -10185,7 +10443,7 @@
       </p:cxnSp>
       <p:cxnSp>
         <p:nvCxnSpPr>
-          <p:cNvPr id="215" name="Google Shape;215;p29"/>
+          <p:cNvPr id="225" name="Google Shape;225;p30"/>
           <p:cNvCxnSpPr/>
           <p:nvPr/>
         </p:nvCxnSpPr>
@@ -10211,7 +10469,7 @@
       </p:cxnSp>
       <p:cxnSp>
         <p:nvCxnSpPr>
-          <p:cNvPr id="216" name="Google Shape;216;p29"/>
+          <p:cNvPr id="226" name="Google Shape;226;p30"/>
           <p:cNvCxnSpPr/>
           <p:nvPr/>
         </p:nvCxnSpPr>
@@ -10237,7 +10495,7 @@
       </p:cxnSp>
       <p:cxnSp>
         <p:nvCxnSpPr>
-          <p:cNvPr id="217" name="Google Shape;217;p29"/>
+          <p:cNvPr id="227" name="Google Shape;227;p30"/>
           <p:cNvCxnSpPr/>
           <p:nvPr/>
         </p:nvCxnSpPr>
@@ -10263,7 +10521,7 @@
       </p:cxnSp>
       <p:cxnSp>
         <p:nvCxnSpPr>
-          <p:cNvPr id="218" name="Google Shape;218;p29"/>
+          <p:cNvPr id="228" name="Google Shape;228;p30"/>
           <p:cNvCxnSpPr/>
           <p:nvPr/>
         </p:nvCxnSpPr>
@@ -10289,7 +10547,7 @@
       </p:cxnSp>
       <p:sp>
         <p:nvSpPr>
-          <p:cNvPr id="219" name="Google Shape;219;p29"/>
+          <p:cNvPr id="229" name="Google Shape;229;p30"/>
           <p:cNvSpPr txBox="1"/>
           <p:nvPr/>
         </p:nvSpPr>
@@ -10426,7 +10684,7 @@
       </p:sp>
       <p:sp>
         <p:nvSpPr>
-          <p:cNvPr id="220" name="Google Shape;220;p29"/>
+          <p:cNvPr id="230" name="Google Shape;230;p30"/>
           <p:cNvSpPr txBox="1"/>
           <p:nvPr/>
         </p:nvSpPr>
@@ -10628,34 +10886,30 @@
               <a:buChar char="-"/>
             </a:pPr>
             <a:r>
-              <a:rPr lang="en" sz="1300"/>
-              <a:t>Backprop math through batch/layer norm layers</a:t>
-            </a:r>
-            <a:endParaRPr sz="1300"/>
-          </a:p>
-          <a:p>
-            <a:pPr indent="-311150" lvl="0" marL="457200" rtl="0" algn="l">
-              <a:spcBef>
-                <a:spcPts val="0"/>
-              </a:spcBef>
-              <a:spcAft>
-                <a:spcPts val="0"/>
-              </a:spcAft>
-              <a:buSzPts val="1300"/>
-              <a:buChar char="-"/>
-            </a:pPr>
-            <a:r>
               <a:rPr lang="en" sz="1300" u="sng">
                 <a:solidFill>
                   <a:schemeClr val="hlink"/>
                 </a:solidFill>
                 <a:hlinkClick r:id="rId5"/>
               </a:rPr>
-              <a:t>Residual learning</a:t>
-            </a:r>
+              <a:t>RMSNorm</a:t>
+            </a:r>
+            <a:endParaRPr sz="1300"/>
+          </a:p>
+          <a:p>
+            <a:pPr indent="-311150" lvl="0" marL="457200" rtl="0" algn="l">
+              <a:spcBef>
+                <a:spcPts val="0"/>
+              </a:spcBef>
+              <a:spcAft>
+                <a:spcPts val="0"/>
+              </a:spcAft>
+              <a:buSzPts val="1300"/>
+              <a:buChar char="-"/>
+            </a:pPr>
             <a:r>
               <a:rPr lang="en" sz="1300"/>
-              <a:t> and Resnets</a:t>
+              <a:t>Backprop math through batch/layer norm layers</a:t>
             </a:r>
             <a:endParaRPr sz="1300"/>
           </a:p>
@@ -10677,28 +10931,11 @@
                 </a:solidFill>
                 <a:hlinkClick r:id="rId6"/>
               </a:rPr>
-              <a:t>Data augmentation techniques</a:t>
+              <a:t>Residual learning</a:t>
             </a:r>
             <a:r>
               <a:rPr lang="en" sz="1300"/>
-              <a:t> in computer vision</a:t>
-            </a:r>
-            <a:endParaRPr sz="1300"/>
-          </a:p>
-          <a:p>
-            <a:pPr indent="-311150" lvl="0" marL="457200" rtl="0" algn="l">
-              <a:spcBef>
-                <a:spcPts val="0"/>
-              </a:spcBef>
-              <a:spcAft>
-                <a:spcPts val="0"/>
-              </a:spcAft>
-              <a:buSzPts val="1300"/>
-              <a:buChar char="-"/>
-            </a:pPr>
-            <a:r>
-              <a:rPr lang="en" sz="1300"/>
-              <a:t>Training a Resnet on Cifar 10 with/out Batch norm and Residual connections</a:t>
+              <a:t> and Resnets</a:t>
             </a:r>
             <a:endParaRPr sz="1300"/>
           </a:p>
@@ -10719,6 +10956,49 @@
                   <a:schemeClr val="hlink"/>
                 </a:solidFill>
                 <a:hlinkClick r:id="rId7"/>
+              </a:rPr>
+              <a:t>Data augmentation techniques</a:t>
+            </a:r>
+            <a:r>
+              <a:rPr lang="en" sz="1300"/>
+              <a:t> in computer vision</a:t>
+            </a:r>
+            <a:endParaRPr sz="1300"/>
+          </a:p>
+          <a:p>
+            <a:pPr indent="-311150" lvl="0" marL="457200" rtl="0" algn="l">
+              <a:spcBef>
+                <a:spcPts val="0"/>
+              </a:spcBef>
+              <a:spcAft>
+                <a:spcPts val="0"/>
+              </a:spcAft>
+              <a:buSzPts val="1300"/>
+              <a:buChar char="-"/>
+            </a:pPr>
+            <a:r>
+              <a:rPr lang="en" sz="1300"/>
+              <a:t>Training a Resnet on Cifar 10 with/out Batch norm and Residual connections</a:t>
+            </a:r>
+            <a:endParaRPr sz="1300"/>
+          </a:p>
+          <a:p>
+            <a:pPr indent="-311150" lvl="0" marL="457200" rtl="0" algn="l">
+              <a:spcBef>
+                <a:spcPts val="0"/>
+              </a:spcBef>
+              <a:spcAft>
+                <a:spcPts val="0"/>
+              </a:spcAft>
+              <a:buSzPts val="1300"/>
+              <a:buChar char="-"/>
+            </a:pPr>
+            <a:r>
+              <a:rPr lang="en" sz="1300" u="sng">
+                <a:solidFill>
+                  <a:schemeClr val="hlink"/>
+                </a:solidFill>
+                <a:hlinkClick r:id="rId8"/>
               </a:rPr>
               <a:t>Forward and backward pass in low precision</a:t>
             </a:r>
@@ -10938,7 +11218,7 @@
             </a:pPr>
             <a:r>
               <a:rPr lang="en"/>
-              <a:t>Batch and Layer normalization</a:t>
+              <a:t>GPT 20b OSS Model</a:t>
             </a:r>
             <a:endParaRPr/>
           </a:p>
@@ -10946,7 +11226,7 @@
       </p:sp>
       <p:pic>
         <p:nvPicPr>
-          <p:cNvPr descr="{&quot;backgroundColorModified&quot;:false,&quot;type&quot;:&quot;gather*&quot;,&quot;backgroundColor&quot;:&quot;#FFFFFF&quot;,&quot;font&quot;:{&quot;color&quot;:&quot;#595959&quot;,&quot;size&quot;:11,&quot;family&quot;:&quot;Arial&quot;},&quot;id&quot;:&quot;8&quot;,&quot;code&quot;:&quot;\\begin{gather*}\n{\\text{Let}\\;\\text{the}\\;\\text{activations}\\;x\\,\\text{be}\\;\\text{a}\\;\\text{tensor:}}\\\\\n{MLP:B\\times D\\,\\left(\\text{batch,}\\;\\text{features}\\right)}\\\\\n{CNN:\\,\\,B\\times C\\times H\\times W\\,\\left(\\text{batch,}\\;\\text{channel,}\\;\\text{height,}\\;\\text{width}\\right)}\\\\\n{\\text{Transformer:}\\;B\\times T\\times H\\,\\left(\\text{batch,}\\;\\text{tokens,}\\;\\text{hidden}\\right)}\\\\\n{\\text{Normalize:}}\\\\\n{\\text{Norm(}x\\text{)=}\\lambda\\frac{x-\\mu}{{\\sqrt[]{\\sigma^{2}+\\epsilon}}}+\\beta}\\\\\n{\\lambda,\\,\\beta\\,\\text{are}\\;\\text{learned}\\;\\text{parameters}}\\\\\n{\\text{The}\\;\\text{statistics}\\;\\mu\\,\\text{and}\\;\\sigma\\,\\text{are}\\;\\text{calculated}\\;\\text{over}\\;\\text{different}\\;\\text{dimensions}\\;\\text{in}\\;\\text{}}\\\\\n{\\text{batch}\\;\\text{vs.}\\;\\text{layer}\\;\\text{normalization}}\t\n\\end{gather*}&quot;,&quot;aid&quot;:null,&quot;ts&quot;:1771804922083,&quot;cs&quot;:&quot;eA/5/pYizsvcq+RUJ903Sw==&quot;,&quot;size&quot;:{&quot;width&quot;:497.5513078740158,&quot;height&quot;:225.6955419947507}}" id="73" name="Google Shape;73;p16"/>
+          <p:cNvPr id="73" name="Google Shape;73;p16"/>
           <p:cNvPicPr preferRelativeResize="0"/>
           <p:nvPr/>
         </p:nvPicPr>
@@ -10960,8 +11240,8 @@
         </p:blipFill>
         <p:spPr>
           <a:xfrm>
-            <a:off x="483145" y="1334225"/>
-            <a:ext cx="4739176" cy="2149750"/>
+            <a:off x="152400" y="1170125"/>
+            <a:ext cx="4006201" cy="3820974"/>
           </a:xfrm>
           <a:prstGeom prst="rect">
             <a:avLst/>
@@ -10975,23 +11255,64 @@
       <p:sp>
         <p:nvSpPr>
           <p:cNvPr id="74" name="Google Shape;74;p16"/>
+          <p:cNvSpPr txBox="1"/>
+          <p:nvPr/>
+        </p:nvSpPr>
+        <p:spPr>
+          <a:xfrm>
+            <a:off x="1255875" y="2682550"/>
+            <a:ext cx="720300" cy="240000"/>
+          </a:xfrm>
+          <a:prstGeom prst="rect">
+            <a:avLst/>
+          </a:prstGeom>
+          <a:noFill/>
+          <a:ln>
+            <a:noFill/>
+          </a:ln>
+        </p:spPr>
+        <p:txBody>
+          <a:bodyPr anchorCtr="0" anchor="t" bIns="91425" lIns="91425" spcFirstLastPara="1" rIns="91425" wrap="square" tIns="91425">
+            <a:noAutofit/>
+          </a:bodyPr>
+          <a:lstStyle/>
+          <a:p>
+            <a:pPr indent="0" lvl="0" marL="0" rtl="0" algn="l">
+              <a:spcBef>
+                <a:spcPts val="0"/>
+              </a:spcBef>
+              <a:spcAft>
+                <a:spcPts val="0"/>
+              </a:spcAft>
+              <a:buNone/>
+            </a:pPr>
+            <a:r>
+              <a:t/>
+            </a:r>
+            <a:endParaRPr sz="1800">
+              <a:solidFill>
+                <a:schemeClr val="dk2"/>
+              </a:solidFill>
+            </a:endParaRPr>
+          </a:p>
+        </p:txBody>
+      </p:sp>
+      <p:sp>
+        <p:nvSpPr>
+          <p:cNvPr id="75" name="Google Shape;75;p16"/>
           <p:cNvSpPr/>
           <p:nvPr/>
         </p:nvSpPr>
         <p:spPr>
           <a:xfrm>
-            <a:off x="796500" y="3727700"/>
-            <a:ext cx="2891400" cy="1298400"/>
-          </a:xfrm>
-          <a:prstGeom prst="roundRect">
-            <a:avLst>
-              <a:gd fmla="val 16667" name="adj"/>
-            </a:avLst>
-          </a:prstGeom>
-          <a:solidFill>
-            <a:schemeClr val="lt2"/>
-          </a:solidFill>
-          <a:ln cap="flat" cmpd="sng" w="9525">
+            <a:off x="1209700" y="2641000"/>
+            <a:ext cx="766500" cy="281700"/>
+          </a:xfrm>
+          <a:prstGeom prst="rect">
+            <a:avLst/>
+          </a:prstGeom>
+          <a:noFill/>
+          <a:ln cap="flat" cmpd="sng" w="28575">
             <a:solidFill>
               <a:schemeClr val="dk2"/>
             </a:solidFill>
@@ -11025,419 +11346,20 @@
       </p:sp>
       <p:sp>
         <p:nvSpPr>
-          <p:cNvPr id="75" name="Google Shape;75;p16"/>
-          <p:cNvSpPr/>
-          <p:nvPr/>
-        </p:nvSpPr>
-        <p:spPr>
-          <a:xfrm>
-            <a:off x="1011575" y="3958675"/>
-            <a:ext cx="1003500" cy="828300"/>
-          </a:xfrm>
-          <a:prstGeom prst="roundRect">
-            <a:avLst>
-              <a:gd fmla="val 16667" name="adj"/>
-            </a:avLst>
-          </a:prstGeom>
-          <a:solidFill>
-            <a:srgbClr val="9FC5E8"/>
-          </a:solidFill>
-          <a:ln cap="flat" cmpd="sng" w="9525">
-            <a:solidFill>
-              <a:schemeClr val="accent1"/>
-            </a:solidFill>
-            <a:prstDash val="solid"/>
-            <a:round/>
-            <a:headEnd len="sm" w="sm" type="none"/>
-            <a:tailEnd len="sm" w="sm" type="none"/>
-          </a:ln>
-        </p:spPr>
-        <p:txBody>
-          <a:bodyPr anchorCtr="0" anchor="ctr" bIns="91425" lIns="91425" spcFirstLastPara="1" rIns="91425" wrap="square" tIns="91425">
-            <a:noAutofit/>
-          </a:bodyPr>
-          <a:lstStyle/>
-          <a:p>
-            <a:pPr indent="0" lvl="0" marL="0" rtl="0" algn="ctr">
-              <a:spcBef>
-                <a:spcPts val="0"/>
-              </a:spcBef>
-              <a:spcAft>
-                <a:spcPts val="0"/>
-              </a:spcAft>
-              <a:buNone/>
-            </a:pPr>
-            <a:r>
-              <a:rPr lang="en"/>
-              <a:t>Linear</a:t>
-            </a:r>
-            <a:endParaRPr/>
-          </a:p>
-        </p:txBody>
-      </p:sp>
-      <p:sp>
-        <p:nvSpPr>
           <p:cNvPr id="76" name="Google Shape;76;p16"/>
           <p:cNvSpPr/>
           <p:nvPr/>
         </p:nvSpPr>
         <p:spPr>
           <a:xfrm>
-            <a:off x="2414500" y="3958675"/>
-            <a:ext cx="1050300" cy="828300"/>
-          </a:xfrm>
-          <a:prstGeom prst="roundRect">
-            <a:avLst>
-              <a:gd fmla="val 16667" name="adj"/>
-            </a:avLst>
-          </a:prstGeom>
-          <a:solidFill>
-            <a:srgbClr val="9FC5E8"/>
-          </a:solidFill>
-          <a:ln cap="flat" cmpd="sng" w="9525">
-            <a:solidFill>
-              <a:schemeClr val="accent1"/>
-            </a:solidFill>
-            <a:prstDash val="solid"/>
-            <a:round/>
-            <a:headEnd len="sm" w="sm" type="none"/>
-            <a:tailEnd len="sm" w="sm" type="none"/>
-          </a:ln>
-        </p:spPr>
-        <p:txBody>
-          <a:bodyPr anchorCtr="0" anchor="ctr" bIns="91425" lIns="91425" spcFirstLastPara="1" rIns="91425" wrap="square" tIns="91425">
-            <a:noAutofit/>
-          </a:bodyPr>
-          <a:lstStyle/>
-          <a:p>
-            <a:pPr indent="0" lvl="0" marL="0" rtl="0" algn="ctr">
-              <a:spcBef>
-                <a:spcPts val="0"/>
-              </a:spcBef>
-              <a:spcAft>
-                <a:spcPts val="0"/>
-              </a:spcAft>
-              <a:buNone/>
-            </a:pPr>
-            <a:r>
-              <a:rPr lang="en"/>
-              <a:t>Activation</a:t>
-            </a:r>
-            <a:endParaRPr/>
-          </a:p>
-        </p:txBody>
-      </p:sp>
-      <p:sp>
-        <p:nvSpPr>
-          <p:cNvPr id="77" name="Google Shape;77;p16"/>
-          <p:cNvSpPr/>
-          <p:nvPr/>
-        </p:nvSpPr>
-        <p:spPr>
-          <a:xfrm>
-            <a:off x="4581000" y="3727700"/>
-            <a:ext cx="3870000" cy="1298400"/>
-          </a:xfrm>
-          <a:prstGeom prst="roundRect">
-            <a:avLst>
-              <a:gd fmla="val 16667" name="adj"/>
-            </a:avLst>
-          </a:prstGeom>
-          <a:solidFill>
-            <a:schemeClr val="lt2"/>
-          </a:solidFill>
-          <a:ln cap="flat" cmpd="sng" w="9525">
-            <a:solidFill>
-              <a:schemeClr val="dk2"/>
-            </a:solidFill>
-            <a:prstDash val="solid"/>
-            <a:round/>
-            <a:headEnd len="sm" w="sm" type="none"/>
-            <a:tailEnd len="sm" w="sm" type="none"/>
-          </a:ln>
-        </p:spPr>
-        <p:txBody>
-          <a:bodyPr anchorCtr="0" anchor="ctr" bIns="91425" lIns="91425" spcFirstLastPara="1" rIns="91425" wrap="square" tIns="91425">
-            <a:noAutofit/>
-          </a:bodyPr>
-          <a:lstStyle/>
-          <a:p>
-            <a:pPr indent="0" lvl="0" marL="0" rtl="0" algn="ctr">
-              <a:spcBef>
-                <a:spcPts val="0"/>
-              </a:spcBef>
-              <a:spcAft>
-                <a:spcPts val="0"/>
-              </a:spcAft>
-              <a:buNone/>
-            </a:pPr>
-            <a:r>
-              <a:t/>
-            </a:r>
-            <a:endParaRPr/>
-          </a:p>
-        </p:txBody>
-      </p:sp>
-      <p:sp>
-        <p:nvSpPr>
-          <p:cNvPr id="78" name="Google Shape;78;p16"/>
-          <p:cNvSpPr/>
-          <p:nvPr/>
-        </p:nvSpPr>
-        <p:spPr>
-          <a:xfrm>
-            <a:off x="4843977" y="3958675"/>
-            <a:ext cx="1003500" cy="828300"/>
-          </a:xfrm>
-          <a:prstGeom prst="roundRect">
-            <a:avLst>
-              <a:gd fmla="val 16667" name="adj"/>
-            </a:avLst>
-          </a:prstGeom>
-          <a:solidFill>
-            <a:srgbClr val="9FC5E8"/>
-          </a:solidFill>
-          <a:ln cap="flat" cmpd="sng" w="9525">
-            <a:solidFill>
-              <a:schemeClr val="accent1"/>
-            </a:solidFill>
-            <a:prstDash val="solid"/>
-            <a:round/>
-            <a:headEnd len="sm" w="sm" type="none"/>
-            <a:tailEnd len="sm" w="sm" type="none"/>
-          </a:ln>
-        </p:spPr>
-        <p:txBody>
-          <a:bodyPr anchorCtr="0" anchor="ctr" bIns="91425" lIns="91425" spcFirstLastPara="1" rIns="91425" wrap="square" tIns="91425">
-            <a:noAutofit/>
-          </a:bodyPr>
-          <a:lstStyle/>
-          <a:p>
-            <a:pPr indent="0" lvl="0" marL="0" rtl="0" algn="ctr">
-              <a:spcBef>
-                <a:spcPts val="0"/>
-              </a:spcBef>
-              <a:spcAft>
-                <a:spcPts val="0"/>
-              </a:spcAft>
-              <a:buNone/>
-            </a:pPr>
-            <a:r>
-              <a:rPr lang="en"/>
-              <a:t>Linear</a:t>
-            </a:r>
-            <a:endParaRPr/>
-          </a:p>
-        </p:txBody>
-      </p:sp>
-      <p:sp>
-        <p:nvSpPr>
-          <p:cNvPr id="79" name="Google Shape;79;p16"/>
-          <p:cNvSpPr/>
-          <p:nvPr/>
-        </p:nvSpPr>
-        <p:spPr>
-          <a:xfrm>
-            <a:off x="7104899" y="3958675"/>
-            <a:ext cx="1185000" cy="828300"/>
-          </a:xfrm>
-          <a:prstGeom prst="roundRect">
-            <a:avLst>
-              <a:gd fmla="val 16667" name="adj"/>
-            </a:avLst>
-          </a:prstGeom>
-          <a:solidFill>
-            <a:srgbClr val="9FC5E8"/>
-          </a:solidFill>
-          <a:ln cap="flat" cmpd="sng" w="9525">
-            <a:solidFill>
-              <a:schemeClr val="accent1"/>
-            </a:solidFill>
-            <a:prstDash val="solid"/>
-            <a:round/>
-            <a:headEnd len="sm" w="sm" type="none"/>
-            <a:tailEnd len="sm" w="sm" type="none"/>
-          </a:ln>
-        </p:spPr>
-        <p:txBody>
-          <a:bodyPr anchorCtr="0" anchor="ctr" bIns="91425" lIns="91425" spcFirstLastPara="1" rIns="91425" wrap="square" tIns="91425">
-            <a:noAutofit/>
-          </a:bodyPr>
-          <a:lstStyle/>
-          <a:p>
-            <a:pPr indent="0" lvl="0" marL="0" rtl="0" algn="ctr">
-              <a:spcBef>
-                <a:spcPts val="0"/>
-              </a:spcBef>
-              <a:spcAft>
-                <a:spcPts val="0"/>
-              </a:spcAft>
-              <a:buNone/>
-            </a:pPr>
-            <a:r>
-              <a:rPr lang="en"/>
-              <a:t>Activation</a:t>
-            </a:r>
-            <a:endParaRPr/>
-          </a:p>
-        </p:txBody>
-      </p:sp>
-      <p:sp>
-        <p:nvSpPr>
-          <p:cNvPr id="80" name="Google Shape;80;p16"/>
-          <p:cNvSpPr/>
-          <p:nvPr/>
-        </p:nvSpPr>
-        <p:spPr>
-          <a:xfrm>
-            <a:off x="6106275" y="3958675"/>
-            <a:ext cx="739800" cy="828300"/>
-          </a:xfrm>
-          <a:prstGeom prst="roundRect">
-            <a:avLst>
-              <a:gd fmla="val 16667" name="adj"/>
-            </a:avLst>
-          </a:prstGeom>
-          <a:solidFill>
-            <a:srgbClr val="9FC5E8"/>
-          </a:solidFill>
-          <a:ln cap="flat" cmpd="sng" w="9525">
-            <a:solidFill>
-              <a:schemeClr val="accent1"/>
-            </a:solidFill>
-            <a:prstDash val="solid"/>
-            <a:round/>
-            <a:headEnd len="sm" w="sm" type="none"/>
-            <a:tailEnd len="sm" w="sm" type="none"/>
-          </a:ln>
-        </p:spPr>
-        <p:txBody>
-          <a:bodyPr anchorCtr="0" anchor="ctr" bIns="91425" lIns="91425" spcFirstLastPara="1" rIns="91425" wrap="square" tIns="91425">
-            <a:noAutofit/>
-          </a:bodyPr>
-          <a:lstStyle/>
-          <a:p>
-            <a:pPr indent="0" lvl="0" marL="0" rtl="0" algn="ctr">
-              <a:spcBef>
-                <a:spcPts val="0"/>
-              </a:spcBef>
-              <a:spcAft>
-                <a:spcPts val="0"/>
-              </a:spcAft>
-              <a:buNone/>
-            </a:pPr>
-            <a:r>
-              <a:rPr lang="en"/>
-              <a:t>Norm</a:t>
-            </a:r>
-            <a:endParaRPr/>
-          </a:p>
-        </p:txBody>
-      </p:sp>
-      <p:cxnSp>
-        <p:nvCxnSpPr>
-          <p:cNvPr id="81" name="Google Shape;81;p16"/>
-          <p:cNvCxnSpPr>
-            <a:stCxn id="75" idx="3"/>
-            <a:endCxn id="76" idx="1"/>
-          </p:cNvCxnSpPr>
-          <p:nvPr/>
-        </p:nvCxnSpPr>
-        <p:spPr>
-          <a:xfrm>
-            <a:off x="2015075" y="4372825"/>
-            <a:ext cx="399300" cy="0"/>
-          </a:xfrm>
-          <a:prstGeom prst="straightConnector1">
+            <a:off x="1209700" y="3435175"/>
+            <a:ext cx="766500" cy="281700"/>
+          </a:xfrm>
+          <a:prstGeom prst="rect">
             <a:avLst/>
           </a:prstGeom>
           <a:noFill/>
-          <a:ln cap="flat" cmpd="sng" w="9525">
-            <a:solidFill>
-              <a:schemeClr val="dk2"/>
-            </a:solidFill>
-            <a:prstDash val="solid"/>
-            <a:round/>
-            <a:headEnd len="med" w="med" type="none"/>
-            <a:tailEnd len="med" w="med" type="triangle"/>
-          </a:ln>
-        </p:spPr>
-      </p:cxnSp>
-      <p:cxnSp>
-        <p:nvCxnSpPr>
-          <p:cNvPr id="82" name="Google Shape;82;p16"/>
-          <p:cNvCxnSpPr>
-            <a:endCxn id="80" idx="1"/>
-          </p:cNvCxnSpPr>
-          <p:nvPr/>
-        </p:nvCxnSpPr>
-        <p:spPr>
-          <a:xfrm>
-            <a:off x="5847375" y="4372825"/>
-            <a:ext cx="258900" cy="0"/>
-          </a:xfrm>
-          <a:prstGeom prst="straightConnector1">
-            <a:avLst/>
-          </a:prstGeom>
-          <a:noFill/>
-          <a:ln cap="flat" cmpd="sng" w="9525">
-            <a:solidFill>
-              <a:schemeClr val="dk2"/>
-            </a:solidFill>
-            <a:prstDash val="solid"/>
-            <a:round/>
-            <a:headEnd len="med" w="med" type="none"/>
-            <a:tailEnd len="med" w="med" type="triangle"/>
-          </a:ln>
-        </p:spPr>
-      </p:cxnSp>
-      <p:cxnSp>
-        <p:nvCxnSpPr>
-          <p:cNvPr id="83" name="Google Shape;83;p16"/>
-          <p:cNvCxnSpPr/>
-          <p:nvPr/>
-        </p:nvCxnSpPr>
-        <p:spPr>
-          <a:xfrm>
-            <a:off x="6846075" y="4372825"/>
-            <a:ext cx="258900" cy="0"/>
-          </a:xfrm>
-          <a:prstGeom prst="straightConnector1">
-            <a:avLst/>
-          </a:prstGeom>
-          <a:noFill/>
-          <a:ln cap="flat" cmpd="sng" w="9525">
-            <a:solidFill>
-              <a:schemeClr val="dk2"/>
-            </a:solidFill>
-            <a:prstDash val="solid"/>
-            <a:round/>
-            <a:headEnd len="med" w="med" type="none"/>
-            <a:tailEnd len="med" w="med" type="triangle"/>
-          </a:ln>
-        </p:spPr>
-      </p:cxnSp>
-      <p:sp>
-        <p:nvSpPr>
-          <p:cNvPr id="84" name="Google Shape;84;p16"/>
-          <p:cNvSpPr/>
-          <p:nvPr/>
-        </p:nvSpPr>
-        <p:spPr>
-          <a:xfrm>
-            <a:off x="3847175" y="4197650"/>
-            <a:ext cx="558000" cy="326700"/>
-          </a:xfrm>
-          <a:prstGeom prst="rightArrow">
-            <a:avLst>
-              <a:gd fmla="val 50000" name="adj1"/>
-              <a:gd fmla="val 50000" name="adj2"/>
-            </a:avLst>
-          </a:prstGeom>
-          <a:solidFill>
-            <a:schemeClr val="lt2"/>
-          </a:solidFill>
-          <a:ln cap="flat" cmpd="sng" w="9525">
+          <a:ln cap="flat" cmpd="sng" w="28575">
             <a:solidFill>
               <a:schemeClr val="dk2"/>
             </a:solidFill>
@@ -11482,7 +11404,7 @@
   <p:cSld>
     <p:spTree>
       <p:nvGrpSpPr>
-        <p:cNvPr id="88" name="Shape 88"/>
+        <p:cNvPr id="80" name="Shape 80"/>
         <p:cNvGrpSpPr/>
         <p:nvPr/>
       </p:nvGrpSpPr>
@@ -11496,7 +11418,7 @@
       </p:grpSpPr>
       <p:sp>
         <p:nvSpPr>
-          <p:cNvPr id="89" name="Google Shape;89;p17"/>
+          <p:cNvPr id="81" name="Google Shape;81;p17"/>
           <p:cNvSpPr txBox="1"/>
           <p:nvPr>
             <p:ph type="title"/>
@@ -11528,7 +11450,7 @@
             </a:pPr>
             <a:r>
               <a:rPr lang="en"/>
-              <a:t>Batch Normalization</a:t>
+              <a:t>Batch and Layer normalization</a:t>
             </a:r>
             <a:endParaRPr/>
           </a:p>
@@ -11536,7 +11458,7 @@
       </p:sp>
       <p:pic>
         <p:nvPicPr>
-          <p:cNvPr descr="{&quot;code&quot;:&quot;\\begin{gather*}\n{\\text{We}\\;\\text{hav}\\text{e}\\;\\text{a}\\;\\text{batch}\\;\\text{(size}\\;\\text{B)}\\;\\text{of}\\;\\text{D}\\;\\text{dimensional}\\;\\text{features}\\;\\text{}\\;\\text{}}\\\\\n{\\text{Define}\\;\\text{feature}\\;\\text{vector}\\;\\text{for}\\;\\text{feature}\\;\\text{d}\\;\\text{(B}\\;\\text{dim}\\;\\text{vector}\\;\\text{across}\\;\\text{the}\\;\\text{batch)}}\\\\\n{x_{d}:\\,\\left[x_{1d},\\,x_{2d},\\,...\\,x_{Bd}\\right]}\\\\\n{\\text{We}\\;\\text{calculate}\\;\\text{batch}\\;\\text{statistics}\\;\\text{independently}\\;\\text{along}\\;\\text{each}\\;\\text{dimension}}\\\\\n{\\mu_{d}=\\frac{1}{B}\\sum_{i=1}^{B}x_{id}}\\\\\n{\\sigma_{d}^{2}=\\frac{1}{B}\\sum_{i=1}^{B}\\left(x_{id}-\\mu_{d}\\right)^{2}}\\\\\n{s_{d}={\\sqrt[]{\\sigma_{d}^{2}+\\epsilon}}}\\\\\n{\\text{Then}\\;\\text{the}\\;\\text{normalized}\\;\\text{feature}\\;\\text{vector}\\;\\text{is:}}\\\\\n{y_{d}=\\lambda_{d}\\frac{x_{d}-\\mu_{d}}{s_{d}}+\\beta_{d}}\\\\\n{\\text{Here}\\;\\lambda _{d}\\,\\text{and}\\;\\beta_{d}\\,\\text{are}\\;\\text{per}\\;\\text{feature}\\;\\text{learnable}\\;\\text{parameters}.\\,\\,}\\\\\n{x_{d}\\,\\text{is}\\;\\text{a}\\;\\text{vector}\\;\\text{along}\\;\\text{the}\\;\\text{batch}\\;\\text{dimension}\\;\\text{and}\\;\\mu_{d}\\,\\text{and}\\;s_{d}\\,\\text{are}\\;\\text{scalars}}\\\\\n{\\text{For}\\;\\text{the}\\;\\text{full}\\;\\text{batch}\\;\\text{of}\\;\\text{features,}\\;\\mu,\\,\\sigma^{2},\\,\\lambda,\\,\\beta\\,\\text{are}\\;\\text{D}\\;\\text{dimensional}\\;\\text{vectors.}\\;\\text{}}\\\\\n{\\text{We'll}\\;\\text{consider}\\;\\text{a}\\;\\text{single}\\;\\text{dimension}\\;\\text{of}\\;\\text{the}\\;\\text{features},\\,\\text{which}\\;\\text{is}\\;\\text{a}\\;\\text{vector}\\;\\text{along}\\;\\text{the}\\;\\text{batch}\\;\\text{dimension}}\t\n\\end{gather*}&quot;,&quot;backgroundColorModified&quot;:false,&quot;aid&quot;:null,&quot;id&quot;:&quot;3&quot;,&quot;type&quot;:&quot;gather*&quot;,&quot;backgroundColor&quot;:&quot;#FFFFFF&quot;,&quot;font&quot;:{&quot;family&quot;:&quot;Arial&quot;,&quot;color&quot;:&quot;#000000&quot;,&quot;size&quot;:9},&quot;ts&quot;:1771786872801,&quot;cs&quot;:&quot;Y5cfXNsmWVQT2CcqRqdAZA==&quot;,&quot;size&quot;:{&quot;width&quot;:578.8713086614174,&quot;height&quot;:324.7428430446194}}" id="90" name="Google Shape;90;p17"/>
+          <p:cNvPr descr="{&quot;backgroundColorModified&quot;:false,&quot;type&quot;:&quot;gather*&quot;,&quot;backgroundColor&quot;:&quot;#FFFFFF&quot;,&quot;font&quot;:{&quot;color&quot;:&quot;#595959&quot;,&quot;size&quot;:11,&quot;family&quot;:&quot;Arial&quot;},&quot;id&quot;:&quot;8&quot;,&quot;code&quot;:&quot;\\begin{gather*}\n{\\text{Let}\\;\\text{the}\\;\\text{activations}\\;x\\,\\text{be}\\;\\text{a}\\;\\text{tensor:}}\\\\\n{MLP:B\\times D\\,\\left(\\text{batch,}\\;\\text{features}\\right)}\\\\\n{CNN:\\,\\,B\\times C\\times H\\times W\\,\\left(\\text{batch,}\\;\\text{channel,}\\;\\text{height,}\\;\\text{width}\\right)}\\\\\n{\\text{Transformer:}\\;B\\times T\\times H\\,\\left(\\text{batch,}\\;\\text{tokens,}\\;\\text{hidden}\\right)}\\\\\n{\\text{Normalize:}}\\\\\n{\\text{Norm(}x\\text{)=}\\lambda\\frac{x-\\mu}{{\\sqrt[]{\\sigma^{2}+\\epsilon}}}+\\beta}\\\\\n{\\lambda,\\,\\beta\\,\\text{are}\\;\\text{learned}\\;\\text{parameters}}\\\\\n{\\text{The}\\;\\text{statistics}\\;\\mu\\,\\text{and}\\;\\sigma\\,\\text{are}\\;\\text{calculated}\\;\\text{over}\\;\\text{different}\\;\\text{dimensions}\\;\\text{in}\\;\\text{}}\\\\\n{\\text{batch}\\;\\text{vs.}\\;\\text{layer}\\;\\text{normalization}}\t\n\\end{gather*}&quot;,&quot;aid&quot;:null,&quot;ts&quot;:1771804922083,&quot;cs&quot;:&quot;eA/5/pYizsvcq+RUJ903Sw==&quot;,&quot;size&quot;:{&quot;width&quot;:497.5513078740158,&quot;height&quot;:225.6955419947507}}" id="82" name="Google Shape;82;p17"/>
           <p:cNvPicPr preferRelativeResize="0"/>
           <p:nvPr/>
         </p:nvPicPr>
@@ -11550,8 +11472,8 @@
         </p:blipFill>
         <p:spPr>
           <a:xfrm>
-            <a:off x="470075" y="1100849"/>
-            <a:ext cx="5513749" cy="3093176"/>
+            <a:off x="483145" y="1334225"/>
+            <a:ext cx="4739176" cy="2149750"/>
           </a:xfrm>
           <a:prstGeom prst="rect">
             <a:avLst/>
@@ -11562,60 +11484,42 @@
           </a:ln>
         </p:spPr>
       </p:pic>
-      <p:pic>
-        <p:nvPicPr>
-          <p:cNvPr descr="{&quot;type&quot;:&quot;gather*&quot;,&quot;aid&quot;:null,&quot;id&quot;:&quot;9&quot;,&quot;backgroundColor&quot;:&quot;#FFFFFF&quot;,&quot;code&quot;:&quot;\\begin{gather*}\n{\\text{For}\\;\\text{CNN,}\\;\\text{we}\\;\\text{average}\\;\\text{over}\\;\\text{B,}\\;\\text{H,}\\;\\text{W}}\\\\\n{\\mu_{c}=\\frac{1}{BHW}\\sum_{b,h,w}^{}x_{b,h,w}}\t\n\\end{gather*}&quot;,&quot;font&quot;:{&quot;color&quot;:&quot;#000000&quot;,&quot;family&quot;:&quot;Arial&quot;,&quot;size&quot;:9},&quot;backgroundColorModified&quot;:false,&quot;ts&quot;:1771787168096,&quot;cs&quot;:&quot;EIo/+XcvpKdlvV4PO8sDFw==&quot;,&quot;size&quot;:{&quot;width&quot;:216,&quot;height&quot;:54.333333333333336}}" id="91" name="Google Shape;91;p17"/>
-          <p:cNvPicPr preferRelativeResize="0"/>
+      <p:sp>
+        <p:nvSpPr>
+          <p:cNvPr id="83" name="Google Shape;83;p17"/>
+          <p:cNvSpPr/>
           <p:nvPr/>
-        </p:nvPicPr>
-        <p:blipFill>
-          <a:blip r:embed="rId4">
-            <a:alphaModFix/>
-          </a:blip>
-          <a:stretch>
-            <a:fillRect/>
-          </a:stretch>
-        </p:blipFill>
-        <p:spPr>
-          <a:xfrm>
-            <a:off x="5983825" y="1017725"/>
-            <a:ext cx="2057400" cy="517525"/>
-          </a:xfrm>
-          <a:prstGeom prst="rect">
-            <a:avLst/>
-          </a:prstGeom>
-          <a:noFill/>
-          <a:ln>
-            <a:noFill/>
+        </p:nvSpPr>
+        <p:spPr>
+          <a:xfrm>
+            <a:off x="796500" y="3727700"/>
+            <a:ext cx="2891400" cy="1298400"/>
+          </a:xfrm>
+          <a:prstGeom prst="roundRect">
+            <a:avLst>
+              <a:gd fmla="val 16667" name="adj"/>
+            </a:avLst>
+          </a:prstGeom>
+          <a:solidFill>
+            <a:schemeClr val="lt2"/>
+          </a:solidFill>
+          <a:ln cap="flat" cmpd="sng" w="9525">
+            <a:solidFill>
+              <a:schemeClr val="dk2"/>
+            </a:solidFill>
+            <a:prstDash val="solid"/>
+            <a:round/>
+            <a:headEnd len="sm" w="sm" type="none"/>
+            <a:tailEnd len="sm" w="sm" type="none"/>
           </a:ln>
         </p:spPr>
-      </p:pic>
-      <p:sp>
-        <p:nvSpPr>
-          <p:cNvPr id="92" name="Google Shape;92;p17"/>
-          <p:cNvSpPr txBox="1"/>
-          <p:nvPr/>
-        </p:nvSpPr>
-        <p:spPr>
-          <a:xfrm>
-            <a:off x="5575600" y="1911650"/>
-            <a:ext cx="3305400" cy="1847100"/>
-          </a:xfrm>
-          <a:prstGeom prst="rect">
-            <a:avLst/>
-          </a:prstGeom>
-          <a:noFill/>
-          <a:ln>
-            <a:noFill/>
-          </a:ln>
-        </p:spPr>
         <p:txBody>
-          <a:bodyPr anchorCtr="0" anchor="t" bIns="91425" lIns="91425" spcFirstLastPara="1" rIns="91425" wrap="square" tIns="91425">
-            <a:spAutoFit/>
+          <a:bodyPr anchorCtr="0" anchor="ctr" bIns="91425" lIns="91425" spcFirstLastPara="1" rIns="91425" wrap="square" tIns="91425">
+            <a:noAutofit/>
           </a:bodyPr>
           <a:lstStyle/>
           <a:p>
-            <a:pPr indent="0" lvl="0" marL="0" rtl="0" algn="l">
+            <a:pPr indent="0" lvl="0" marL="0" rtl="0" algn="ctr">
               <a:spcBef>
                 <a:spcPts val="0"/>
               </a:spcBef>
@@ -11625,18 +11529,455 @@
               <a:buNone/>
             </a:pPr>
             <a:r>
-              <a:rPr lang="en" sz="1800">
-                <a:solidFill>
-                  <a:schemeClr val="dk2"/>
-                </a:solidFill>
-              </a:rPr>
-              <a:t>During inference, we typically don’t have a batch.. So we use running averages for mu and sigma calculated during training. These are saved along the model parameters</a:t>
-            </a:r>
-            <a:endParaRPr sz="1800">
-              <a:solidFill>
-                <a:schemeClr val="dk2"/>
-              </a:solidFill>
-            </a:endParaRPr>
+              <a:t/>
+            </a:r>
+            <a:endParaRPr/>
+          </a:p>
+        </p:txBody>
+      </p:sp>
+      <p:sp>
+        <p:nvSpPr>
+          <p:cNvPr id="84" name="Google Shape;84;p17"/>
+          <p:cNvSpPr/>
+          <p:nvPr/>
+        </p:nvSpPr>
+        <p:spPr>
+          <a:xfrm>
+            <a:off x="1011575" y="3958675"/>
+            <a:ext cx="1003500" cy="828300"/>
+          </a:xfrm>
+          <a:prstGeom prst="roundRect">
+            <a:avLst>
+              <a:gd fmla="val 16667" name="adj"/>
+            </a:avLst>
+          </a:prstGeom>
+          <a:solidFill>
+            <a:srgbClr val="9FC5E8"/>
+          </a:solidFill>
+          <a:ln cap="flat" cmpd="sng" w="9525">
+            <a:solidFill>
+              <a:schemeClr val="accent1"/>
+            </a:solidFill>
+            <a:prstDash val="solid"/>
+            <a:round/>
+            <a:headEnd len="sm" w="sm" type="none"/>
+            <a:tailEnd len="sm" w="sm" type="none"/>
+          </a:ln>
+        </p:spPr>
+        <p:txBody>
+          <a:bodyPr anchorCtr="0" anchor="ctr" bIns="91425" lIns="91425" spcFirstLastPara="1" rIns="91425" wrap="square" tIns="91425">
+            <a:noAutofit/>
+          </a:bodyPr>
+          <a:lstStyle/>
+          <a:p>
+            <a:pPr indent="0" lvl="0" marL="0" rtl="0" algn="ctr">
+              <a:spcBef>
+                <a:spcPts val="0"/>
+              </a:spcBef>
+              <a:spcAft>
+                <a:spcPts val="0"/>
+              </a:spcAft>
+              <a:buNone/>
+            </a:pPr>
+            <a:r>
+              <a:rPr lang="en"/>
+              <a:t>Linear</a:t>
+            </a:r>
+            <a:endParaRPr/>
+          </a:p>
+        </p:txBody>
+      </p:sp>
+      <p:sp>
+        <p:nvSpPr>
+          <p:cNvPr id="85" name="Google Shape;85;p17"/>
+          <p:cNvSpPr/>
+          <p:nvPr/>
+        </p:nvSpPr>
+        <p:spPr>
+          <a:xfrm>
+            <a:off x="2414500" y="3958675"/>
+            <a:ext cx="1050300" cy="828300"/>
+          </a:xfrm>
+          <a:prstGeom prst="roundRect">
+            <a:avLst>
+              <a:gd fmla="val 16667" name="adj"/>
+            </a:avLst>
+          </a:prstGeom>
+          <a:solidFill>
+            <a:srgbClr val="9FC5E8"/>
+          </a:solidFill>
+          <a:ln cap="flat" cmpd="sng" w="9525">
+            <a:solidFill>
+              <a:schemeClr val="accent1"/>
+            </a:solidFill>
+            <a:prstDash val="solid"/>
+            <a:round/>
+            <a:headEnd len="sm" w="sm" type="none"/>
+            <a:tailEnd len="sm" w="sm" type="none"/>
+          </a:ln>
+        </p:spPr>
+        <p:txBody>
+          <a:bodyPr anchorCtr="0" anchor="ctr" bIns="91425" lIns="91425" spcFirstLastPara="1" rIns="91425" wrap="square" tIns="91425">
+            <a:noAutofit/>
+          </a:bodyPr>
+          <a:lstStyle/>
+          <a:p>
+            <a:pPr indent="0" lvl="0" marL="0" rtl="0" algn="ctr">
+              <a:spcBef>
+                <a:spcPts val="0"/>
+              </a:spcBef>
+              <a:spcAft>
+                <a:spcPts val="0"/>
+              </a:spcAft>
+              <a:buNone/>
+            </a:pPr>
+            <a:r>
+              <a:rPr lang="en"/>
+              <a:t>Activation</a:t>
+            </a:r>
+            <a:endParaRPr/>
+          </a:p>
+        </p:txBody>
+      </p:sp>
+      <p:sp>
+        <p:nvSpPr>
+          <p:cNvPr id="86" name="Google Shape;86;p17"/>
+          <p:cNvSpPr/>
+          <p:nvPr/>
+        </p:nvSpPr>
+        <p:spPr>
+          <a:xfrm>
+            <a:off x="4581000" y="3727700"/>
+            <a:ext cx="3870000" cy="1298400"/>
+          </a:xfrm>
+          <a:prstGeom prst="roundRect">
+            <a:avLst>
+              <a:gd fmla="val 16667" name="adj"/>
+            </a:avLst>
+          </a:prstGeom>
+          <a:solidFill>
+            <a:schemeClr val="lt2"/>
+          </a:solidFill>
+          <a:ln cap="flat" cmpd="sng" w="9525">
+            <a:solidFill>
+              <a:schemeClr val="dk2"/>
+            </a:solidFill>
+            <a:prstDash val="solid"/>
+            <a:round/>
+            <a:headEnd len="sm" w="sm" type="none"/>
+            <a:tailEnd len="sm" w="sm" type="none"/>
+          </a:ln>
+        </p:spPr>
+        <p:txBody>
+          <a:bodyPr anchorCtr="0" anchor="ctr" bIns="91425" lIns="91425" spcFirstLastPara="1" rIns="91425" wrap="square" tIns="91425">
+            <a:noAutofit/>
+          </a:bodyPr>
+          <a:lstStyle/>
+          <a:p>
+            <a:pPr indent="0" lvl="0" marL="0" rtl="0" algn="ctr">
+              <a:spcBef>
+                <a:spcPts val="0"/>
+              </a:spcBef>
+              <a:spcAft>
+                <a:spcPts val="0"/>
+              </a:spcAft>
+              <a:buNone/>
+            </a:pPr>
+            <a:r>
+              <a:t/>
+            </a:r>
+            <a:endParaRPr/>
+          </a:p>
+        </p:txBody>
+      </p:sp>
+      <p:sp>
+        <p:nvSpPr>
+          <p:cNvPr id="87" name="Google Shape;87;p17"/>
+          <p:cNvSpPr/>
+          <p:nvPr/>
+        </p:nvSpPr>
+        <p:spPr>
+          <a:xfrm>
+            <a:off x="4843977" y="3958675"/>
+            <a:ext cx="1003500" cy="828300"/>
+          </a:xfrm>
+          <a:prstGeom prst="roundRect">
+            <a:avLst>
+              <a:gd fmla="val 16667" name="adj"/>
+            </a:avLst>
+          </a:prstGeom>
+          <a:solidFill>
+            <a:srgbClr val="9FC5E8"/>
+          </a:solidFill>
+          <a:ln cap="flat" cmpd="sng" w="9525">
+            <a:solidFill>
+              <a:schemeClr val="accent1"/>
+            </a:solidFill>
+            <a:prstDash val="solid"/>
+            <a:round/>
+            <a:headEnd len="sm" w="sm" type="none"/>
+            <a:tailEnd len="sm" w="sm" type="none"/>
+          </a:ln>
+        </p:spPr>
+        <p:txBody>
+          <a:bodyPr anchorCtr="0" anchor="ctr" bIns="91425" lIns="91425" spcFirstLastPara="1" rIns="91425" wrap="square" tIns="91425">
+            <a:noAutofit/>
+          </a:bodyPr>
+          <a:lstStyle/>
+          <a:p>
+            <a:pPr indent="0" lvl="0" marL="0" rtl="0" algn="ctr">
+              <a:spcBef>
+                <a:spcPts val="0"/>
+              </a:spcBef>
+              <a:spcAft>
+                <a:spcPts val="0"/>
+              </a:spcAft>
+              <a:buNone/>
+            </a:pPr>
+            <a:r>
+              <a:rPr lang="en"/>
+              <a:t>Linear</a:t>
+            </a:r>
+            <a:endParaRPr/>
+          </a:p>
+        </p:txBody>
+      </p:sp>
+      <p:sp>
+        <p:nvSpPr>
+          <p:cNvPr id="88" name="Google Shape;88;p17"/>
+          <p:cNvSpPr/>
+          <p:nvPr/>
+        </p:nvSpPr>
+        <p:spPr>
+          <a:xfrm>
+            <a:off x="7104899" y="3958675"/>
+            <a:ext cx="1185000" cy="828300"/>
+          </a:xfrm>
+          <a:prstGeom prst="roundRect">
+            <a:avLst>
+              <a:gd fmla="val 16667" name="adj"/>
+            </a:avLst>
+          </a:prstGeom>
+          <a:solidFill>
+            <a:srgbClr val="9FC5E8"/>
+          </a:solidFill>
+          <a:ln cap="flat" cmpd="sng" w="9525">
+            <a:solidFill>
+              <a:schemeClr val="accent1"/>
+            </a:solidFill>
+            <a:prstDash val="solid"/>
+            <a:round/>
+            <a:headEnd len="sm" w="sm" type="none"/>
+            <a:tailEnd len="sm" w="sm" type="none"/>
+          </a:ln>
+        </p:spPr>
+        <p:txBody>
+          <a:bodyPr anchorCtr="0" anchor="ctr" bIns="91425" lIns="91425" spcFirstLastPara="1" rIns="91425" wrap="square" tIns="91425">
+            <a:noAutofit/>
+          </a:bodyPr>
+          <a:lstStyle/>
+          <a:p>
+            <a:pPr indent="0" lvl="0" marL="0" rtl="0" algn="ctr">
+              <a:spcBef>
+                <a:spcPts val="0"/>
+              </a:spcBef>
+              <a:spcAft>
+                <a:spcPts val="0"/>
+              </a:spcAft>
+              <a:buNone/>
+            </a:pPr>
+            <a:r>
+              <a:rPr lang="en"/>
+              <a:t>Activation</a:t>
+            </a:r>
+            <a:endParaRPr/>
+          </a:p>
+        </p:txBody>
+      </p:sp>
+      <p:sp>
+        <p:nvSpPr>
+          <p:cNvPr id="89" name="Google Shape;89;p17"/>
+          <p:cNvSpPr/>
+          <p:nvPr/>
+        </p:nvSpPr>
+        <p:spPr>
+          <a:xfrm>
+            <a:off x="6106275" y="3958675"/>
+            <a:ext cx="739800" cy="828300"/>
+          </a:xfrm>
+          <a:prstGeom prst="roundRect">
+            <a:avLst>
+              <a:gd fmla="val 16667" name="adj"/>
+            </a:avLst>
+          </a:prstGeom>
+          <a:solidFill>
+            <a:srgbClr val="9FC5E8"/>
+          </a:solidFill>
+          <a:ln cap="flat" cmpd="sng" w="9525">
+            <a:solidFill>
+              <a:schemeClr val="accent1"/>
+            </a:solidFill>
+            <a:prstDash val="solid"/>
+            <a:round/>
+            <a:headEnd len="sm" w="sm" type="none"/>
+            <a:tailEnd len="sm" w="sm" type="none"/>
+          </a:ln>
+        </p:spPr>
+        <p:txBody>
+          <a:bodyPr anchorCtr="0" anchor="ctr" bIns="91425" lIns="91425" spcFirstLastPara="1" rIns="91425" wrap="square" tIns="91425">
+            <a:noAutofit/>
+          </a:bodyPr>
+          <a:lstStyle/>
+          <a:p>
+            <a:pPr indent="0" lvl="0" marL="0" rtl="0" algn="ctr">
+              <a:spcBef>
+                <a:spcPts val="0"/>
+              </a:spcBef>
+              <a:spcAft>
+                <a:spcPts val="0"/>
+              </a:spcAft>
+              <a:buNone/>
+            </a:pPr>
+            <a:r>
+              <a:rPr lang="en"/>
+              <a:t>Norm</a:t>
+            </a:r>
+            <a:endParaRPr/>
+          </a:p>
+        </p:txBody>
+      </p:sp>
+      <p:cxnSp>
+        <p:nvCxnSpPr>
+          <p:cNvPr id="90" name="Google Shape;90;p17"/>
+          <p:cNvCxnSpPr>
+            <a:stCxn id="84" idx="3"/>
+            <a:endCxn id="85" idx="1"/>
+          </p:cNvCxnSpPr>
+          <p:nvPr/>
+        </p:nvCxnSpPr>
+        <p:spPr>
+          <a:xfrm>
+            <a:off x="2015075" y="4372825"/>
+            <a:ext cx="399300" cy="0"/>
+          </a:xfrm>
+          <a:prstGeom prst="straightConnector1">
+            <a:avLst/>
+          </a:prstGeom>
+          <a:noFill/>
+          <a:ln cap="flat" cmpd="sng" w="9525">
+            <a:solidFill>
+              <a:schemeClr val="dk2"/>
+            </a:solidFill>
+            <a:prstDash val="solid"/>
+            <a:round/>
+            <a:headEnd len="med" w="med" type="none"/>
+            <a:tailEnd len="med" w="med" type="triangle"/>
+          </a:ln>
+        </p:spPr>
+      </p:cxnSp>
+      <p:cxnSp>
+        <p:nvCxnSpPr>
+          <p:cNvPr id="91" name="Google Shape;91;p17"/>
+          <p:cNvCxnSpPr>
+            <a:endCxn id="89" idx="1"/>
+          </p:cNvCxnSpPr>
+          <p:nvPr/>
+        </p:nvCxnSpPr>
+        <p:spPr>
+          <a:xfrm>
+            <a:off x="5847375" y="4372825"/>
+            <a:ext cx="258900" cy="0"/>
+          </a:xfrm>
+          <a:prstGeom prst="straightConnector1">
+            <a:avLst/>
+          </a:prstGeom>
+          <a:noFill/>
+          <a:ln cap="flat" cmpd="sng" w="9525">
+            <a:solidFill>
+              <a:schemeClr val="dk2"/>
+            </a:solidFill>
+            <a:prstDash val="solid"/>
+            <a:round/>
+            <a:headEnd len="med" w="med" type="none"/>
+            <a:tailEnd len="med" w="med" type="triangle"/>
+          </a:ln>
+        </p:spPr>
+      </p:cxnSp>
+      <p:cxnSp>
+        <p:nvCxnSpPr>
+          <p:cNvPr id="92" name="Google Shape;92;p17"/>
+          <p:cNvCxnSpPr/>
+          <p:nvPr/>
+        </p:nvCxnSpPr>
+        <p:spPr>
+          <a:xfrm>
+            <a:off x="6846075" y="4372825"/>
+            <a:ext cx="258900" cy="0"/>
+          </a:xfrm>
+          <a:prstGeom prst="straightConnector1">
+            <a:avLst/>
+          </a:prstGeom>
+          <a:noFill/>
+          <a:ln cap="flat" cmpd="sng" w="9525">
+            <a:solidFill>
+              <a:schemeClr val="dk2"/>
+            </a:solidFill>
+            <a:prstDash val="solid"/>
+            <a:round/>
+            <a:headEnd len="med" w="med" type="none"/>
+            <a:tailEnd len="med" w="med" type="triangle"/>
+          </a:ln>
+        </p:spPr>
+      </p:cxnSp>
+      <p:sp>
+        <p:nvSpPr>
+          <p:cNvPr id="93" name="Google Shape;93;p17"/>
+          <p:cNvSpPr/>
+          <p:nvPr/>
+        </p:nvSpPr>
+        <p:spPr>
+          <a:xfrm>
+            <a:off x="3847175" y="4197650"/>
+            <a:ext cx="558000" cy="326700"/>
+          </a:xfrm>
+          <a:prstGeom prst="rightArrow">
+            <a:avLst>
+              <a:gd fmla="val 50000" name="adj1"/>
+              <a:gd fmla="val 50000" name="adj2"/>
+            </a:avLst>
+          </a:prstGeom>
+          <a:solidFill>
+            <a:schemeClr val="lt2"/>
+          </a:solidFill>
+          <a:ln cap="flat" cmpd="sng" w="9525">
+            <a:solidFill>
+              <a:schemeClr val="dk2"/>
+            </a:solidFill>
+            <a:prstDash val="solid"/>
+            <a:round/>
+            <a:headEnd len="sm" w="sm" type="none"/>
+            <a:tailEnd len="sm" w="sm" type="none"/>
+          </a:ln>
+        </p:spPr>
+        <p:txBody>
+          <a:bodyPr anchorCtr="0" anchor="ctr" bIns="91425" lIns="91425" spcFirstLastPara="1" rIns="91425" wrap="square" tIns="91425">
+            <a:noAutofit/>
+          </a:bodyPr>
+          <a:lstStyle/>
+          <a:p>
+            <a:pPr indent="0" lvl="0" marL="0" rtl="0" algn="ctr">
+              <a:spcBef>
+                <a:spcPts val="0"/>
+              </a:spcBef>
+              <a:spcAft>
+                <a:spcPts val="0"/>
+              </a:spcAft>
+              <a:buNone/>
+            </a:pPr>
+            <a:r>
+              <a:t/>
+            </a:r>
+            <a:endParaRPr/>
           </a:p>
         </p:txBody>
       </p:sp>
@@ -11653,7 +11994,7 @@
   <p:cSld>
     <p:spTree>
       <p:nvGrpSpPr>
-        <p:cNvPr id="96" name="Shape 96"/>
+        <p:cNvPr id="97" name="Shape 97"/>
         <p:cNvGrpSpPr/>
         <p:nvPr/>
       </p:nvGrpSpPr>
@@ -11667,7 +12008,7 @@
       </p:grpSpPr>
       <p:sp>
         <p:nvSpPr>
-          <p:cNvPr id="97" name="Google Shape;97;p18"/>
+          <p:cNvPr id="98" name="Google Shape;98;p18"/>
           <p:cNvSpPr txBox="1"/>
           <p:nvPr>
             <p:ph type="title"/>
@@ -11699,7 +12040,7 @@
             </a:pPr>
             <a:r>
               <a:rPr lang="en"/>
-              <a:t>Batch normalization: Calculating gradients</a:t>
+              <a:t>Batch Normalization</a:t>
             </a:r>
             <a:endParaRPr/>
           </a:p>
@@ -11707,7 +12048,7 @@
       </p:sp>
       <p:pic>
         <p:nvPicPr>
-          <p:cNvPr descr="{&quot;font&quot;:{&quot;color&quot;:&quot;#000000&quot;,&quot;size&quot;:8,&quot;family&quot;:&quot;Arial&quot;},&quot;type&quot;:&quot;gather*&quot;,&quot;backgroundColorModified&quot;:false,&quot;backgroundColor&quot;:&quot;#FFFFFF&quot;,&quot;aid&quot;:null,&quot;id&quot;:&quot;5&quot;,&quot;code&quot;:&quot;\\begin{gather*}\n{\\text{We}\\;\\text{need}\\;\\text{to}\\;\\text{calculate}\\;\\text{gradient}\\;\\text{of}\\;\\text{the}\\;\\text{loss}\\;\\text{L}\\;\\text{wrt}\\;\\lambda,\\,\\beta\\,\\text{and}\\;x\\text{}}\\\\\n{\\text{In}\\;\\text{the}\\;\\text{batch}\\;\\text{normalization}\\;\\text{transformation,}\\;\\text{the}\\;\\text{feature}\\;\\text{dimensions}\\;\\text{don't}\\;\\text{interact}\\;\\text{with}\\;\\text{each}\\;\\text{other}}\\\\\n{\\text{as}\\;\\text{the}\\;\\text{statistics}\\;\\text{are}\\;\\text{calculated}\\;\\text{across}\\;\\text{the}\\;\\text{batch.}\\;\\text{So}\\;\\text{it}\\;\\text{is}\\;\\text{suficient}\\;\\text{to}\\;\\text{consider}\\;\\text{any}\\;\\text{component}\\;\\text{of}\\;x}\\\\\n{\\text{Let's}\\;\\text{this}\\;\\text{component}\\;\\text{by}\\;\\text{d.}\\;\\text{}}\\\\\n{x_{i}:i^{th\\,}\\text{batch}\\;\\text{element}\\;\\text{of}\\;\\text{the}\\;d^{th}\\,\\text{feature}}\\\\\n{\\mu,\\,\\sigma:\\,\\text{Batch}\\;\\text{statistics}\\;\\text{for}\\;\\text{the}\\;d^{th}\\,\\text{feature,}\\;\\text{dropping}\\;\\text{the}\\;\\text{subscript}\\;\\text{d}\\;\\text{for}\\;\\text{convenience}}\\\\\n{\\lambda,\\,\\beta:\\,\\text{Learnable}\\;\\text{params}\\;\\text{for}\\;\\text{the}\\;d^{th}\\,\\text{feature,}\\;\\text{dropping}\\;\\text{the}\\;\\text{subscript}\\;\\text{d}\\;\\text{for}\\;\\text{convenience}}\\\\\n{\\text{Assume}\\;\\text{upstream}\\;\\text{gradient}\\;\\text{from}\\;\\text{loss}\\;\\text{L}\\;\\text{is}}\\\\\n{g_{i}\\::=\\pdf{L}{y_{i}},\\,i:\\,i^{th}\\,\\text{batch}\\;\\text{element}\\;\\text{of}\\;\\text{the}\\;d^{th}\\,\\text{feature}}\\\\\n{\\text{Let's}\\;\\text{first}\\;\\text{calculate}\\;\\pdf{L}{\\lambda}\\,\\text{and}\\;\\pdf{L}{\\beta}}\\\\\n{\\text{Since}\\;\\text{L}\\;\\text{depends}\\;\\text{on}\\;\\lambda\\,\\text{and}\\;\\beta\\text{through}\\;\\text{all}\\;\\text{the}\\;y_{i},\\,i:\\left[1,2,...,B\\right]}\\\\\n{\\pdf{L}{\\lambda}=\\sum_{i=1}^{B}\\pdf{L}{y_{i}}\\pdf{y_{i}}{\\lambda}}\\\\\n{\\text{Since}}\\\\\n{y_{i}=\\lambda\\frac{x_{i}-\\mu}{s}+\\beta}\\\\\n{\\pdf{y_{i}}{\\lambda}=\\frac{x_{i}-\\mu}{s}\\,\\text{and}\\;\\pdf{y_{i}}{\\beta}=1}\\\\\n{\\text{So}}\\\\\n{\\pdf{L}{\\lambda}=\\sum_{i=1}^{B}g_{i}\\frac{x_{i}-\\mu}{s}\\,\\text{and}\\;\\pdf{L}{\\beta}=\\sum_{i=1}^{B}g_{i}}\t\n\\end{gather*}&quot;,&quot;ts&quot;:1771701061330,&quot;cs&quot;:&quot;0WX8vCcrBrv39x9bcvytow==&quot;,&quot;size&quot;:{&quot;width&quot;:524,&quot;height&quot;:385.5}}" id="98" name="Google Shape;98;p18"/>
+          <p:cNvPr descr="{&quot;code&quot;:&quot;\\begin{gather*}\n{\\text{We}\\;\\text{hav}\\text{e}\\;\\text{a}\\;\\text{batch}\\;\\text{(size}\\;\\text{B)}\\;\\text{of}\\;\\text{D}\\;\\text{dimensional}\\;\\text{features}\\;\\text{}\\;\\text{}}\\\\\n{\\text{Define}\\;\\text{feature}\\;\\text{vector}\\;\\text{for}\\;\\text{feature}\\;\\text{d}\\;\\text{(B}\\;\\text{dim}\\;\\text{vector}\\;\\text{across}\\;\\text{the}\\;\\text{batch)}}\\\\\n{x_{d}:\\,\\left[x_{1d},\\,x_{2d},\\,...\\,x_{Bd}\\right]}\\\\\n{\\text{We}\\;\\text{calculate}\\;\\text{batch}\\;\\text{statistics}\\;\\text{independently}\\;\\text{along}\\;\\text{each}\\;\\text{dimension}}\\\\\n{\\mu_{d}=\\frac{1}{B}\\sum_{i=1}^{B}x_{id}}\\\\\n{\\sigma_{d}^{2}=\\frac{1}{B}\\sum_{i=1}^{B}\\left(x_{id}-\\mu_{d}\\right)^{2}}\\\\\n{s_{d}={\\sqrt[]{\\sigma_{d}^{2}+\\epsilon}}}\\\\\n{\\text{Then}\\;\\text{the}\\;\\text{normalized}\\;\\text{feature}\\;\\text{vector}\\;\\text{is:}}\\\\\n{y_{d}=\\lambda_{d}\\frac{x_{d}-\\mu_{d}}{s_{d}}+\\beta_{d}}\\\\\n{\\text{Here}\\;\\lambda _{d}\\,\\text{and}\\;\\beta_{d}\\,\\text{are}\\;\\text{per}\\;\\text{feature}\\;\\text{learnable}\\;\\text{parameters}.\\,\\,}\\\\\n{x_{d}\\,\\text{is}\\;\\text{a}\\;\\text{vector}\\;\\text{along}\\;\\text{the}\\;\\text{batch}\\;\\text{dimension}\\;\\text{and}\\;\\mu_{d}\\,\\text{and}\\;s_{d}\\,\\text{are}\\;\\text{scalars}}\\\\\n{\\text{For}\\;\\text{the}\\;\\text{full}\\;\\text{batch}\\;\\text{of}\\;\\text{features,}\\;\\mu,\\,\\sigma^{2},\\,\\lambda,\\,\\beta\\,\\text{are}\\;\\text{D}\\;\\text{dimensional}\\;\\text{vectors.}\\;\\text{}}\\\\\n{\\text{We'll}\\;\\text{consider}\\;\\text{a}\\;\\text{single}\\;\\text{dimension}\\;\\text{of}\\;\\text{the}\\;\\text{features},\\,\\text{which}\\;\\text{is}\\;\\text{a}\\;\\text{vector}\\;\\text{along}\\;\\text{the}\\;\\text{batch}\\;\\text{dimension}}\t\n\\end{gather*}&quot;,&quot;backgroundColorModified&quot;:false,&quot;aid&quot;:null,&quot;id&quot;:&quot;3&quot;,&quot;type&quot;:&quot;gather*&quot;,&quot;backgroundColor&quot;:&quot;#FFFFFF&quot;,&quot;font&quot;:{&quot;family&quot;:&quot;Arial&quot;,&quot;color&quot;:&quot;#000000&quot;,&quot;size&quot;:9},&quot;ts&quot;:1771786872801,&quot;cs&quot;:&quot;Y5cfXNsmWVQT2CcqRqdAZA==&quot;,&quot;size&quot;:{&quot;width&quot;:578.8713086614174,&quot;height&quot;:324.7428430446194}}" id="99" name="Google Shape;99;p18"/>
           <p:cNvPicPr preferRelativeResize="0"/>
           <p:nvPr/>
         </p:nvPicPr>
@@ -11721,8 +12062,8 @@
         </p:blipFill>
         <p:spPr>
           <a:xfrm>
-            <a:off x="705175" y="1205050"/>
-            <a:ext cx="4991100" cy="3671888"/>
+            <a:off x="470075" y="1100849"/>
+            <a:ext cx="5513749" cy="3093176"/>
           </a:xfrm>
           <a:prstGeom prst="rect">
             <a:avLst/>
@@ -11733,6 +12074,84 @@
           </a:ln>
         </p:spPr>
       </p:pic>
+      <p:pic>
+        <p:nvPicPr>
+          <p:cNvPr descr="{&quot;type&quot;:&quot;gather*&quot;,&quot;aid&quot;:null,&quot;id&quot;:&quot;9&quot;,&quot;backgroundColor&quot;:&quot;#FFFFFF&quot;,&quot;code&quot;:&quot;\\begin{gather*}\n{\\text{For}\\;\\text{CNN,}\\;\\text{we}\\;\\text{average}\\;\\text{over}\\;\\text{B,}\\;\\text{H,}\\;\\text{W}}\\\\\n{\\mu_{c}=\\frac{1}{BHW}\\sum_{b,h,w}^{}x_{b,h,w}}\t\n\\end{gather*}&quot;,&quot;font&quot;:{&quot;color&quot;:&quot;#000000&quot;,&quot;family&quot;:&quot;Arial&quot;,&quot;size&quot;:9},&quot;backgroundColorModified&quot;:false,&quot;ts&quot;:1771787168096,&quot;cs&quot;:&quot;EIo/+XcvpKdlvV4PO8sDFw==&quot;,&quot;size&quot;:{&quot;width&quot;:216,&quot;height&quot;:54.333333333333336}}" id="100" name="Google Shape;100;p18"/>
+          <p:cNvPicPr preferRelativeResize="0"/>
+          <p:nvPr/>
+        </p:nvPicPr>
+        <p:blipFill>
+          <a:blip r:embed="rId4">
+            <a:alphaModFix/>
+          </a:blip>
+          <a:stretch>
+            <a:fillRect/>
+          </a:stretch>
+        </p:blipFill>
+        <p:spPr>
+          <a:xfrm>
+            <a:off x="5983825" y="1017725"/>
+            <a:ext cx="2057400" cy="517525"/>
+          </a:xfrm>
+          <a:prstGeom prst="rect">
+            <a:avLst/>
+          </a:prstGeom>
+          <a:noFill/>
+          <a:ln>
+            <a:noFill/>
+          </a:ln>
+        </p:spPr>
+      </p:pic>
+      <p:sp>
+        <p:nvSpPr>
+          <p:cNvPr id="101" name="Google Shape;101;p18"/>
+          <p:cNvSpPr txBox="1"/>
+          <p:nvPr/>
+        </p:nvSpPr>
+        <p:spPr>
+          <a:xfrm>
+            <a:off x="5575600" y="1911650"/>
+            <a:ext cx="3305400" cy="1847100"/>
+          </a:xfrm>
+          <a:prstGeom prst="rect">
+            <a:avLst/>
+          </a:prstGeom>
+          <a:noFill/>
+          <a:ln>
+            <a:noFill/>
+          </a:ln>
+        </p:spPr>
+        <p:txBody>
+          <a:bodyPr anchorCtr="0" anchor="t" bIns="91425" lIns="91425" spcFirstLastPara="1" rIns="91425" wrap="square" tIns="91425">
+            <a:spAutoFit/>
+          </a:bodyPr>
+          <a:lstStyle/>
+          <a:p>
+            <a:pPr indent="0" lvl="0" marL="0" rtl="0" algn="l">
+              <a:spcBef>
+                <a:spcPts val="0"/>
+              </a:spcBef>
+              <a:spcAft>
+                <a:spcPts val="0"/>
+              </a:spcAft>
+              <a:buNone/>
+            </a:pPr>
+            <a:r>
+              <a:rPr lang="en" sz="1800">
+                <a:solidFill>
+                  <a:schemeClr val="dk2"/>
+                </a:solidFill>
+              </a:rPr>
+              <a:t>During inference, we typically don’t have a batch.. So we use running averages for mu and sigma calculated during training. These are saved along the model parameters</a:t>
+            </a:r>
+            <a:endParaRPr sz="1800">
+              <a:solidFill>
+                <a:schemeClr val="dk2"/>
+              </a:solidFill>
+            </a:endParaRPr>
+          </a:p>
+        </p:txBody>
+      </p:sp>
     </p:spTree>
   </p:cSld>
   <p:clrMapOvr>
@@ -11746,7 +12165,7 @@
   <p:cSld>
     <p:spTree>
       <p:nvGrpSpPr>
-        <p:cNvPr id="102" name="Shape 102"/>
+        <p:cNvPr id="105" name="Shape 105"/>
         <p:cNvGrpSpPr/>
         <p:nvPr/>
       </p:nvGrpSpPr>
@@ -11760,7 +12179,7 @@
       </p:grpSpPr>
       <p:sp>
         <p:nvSpPr>
-          <p:cNvPr id="103" name="Google Shape;103;p19"/>
+          <p:cNvPr id="106" name="Google Shape;106;p19"/>
           <p:cNvSpPr txBox="1"/>
           <p:nvPr>
             <p:ph type="title"/>
@@ -11788,31 +12207,11 @@
               <a:spcAft>
                 <a:spcPts val="0"/>
               </a:spcAft>
-              <a:buClr>
-                <a:schemeClr val="dk1"/>
-              </a:buClr>
-              <a:buSzPct val="39285"/>
-              <a:buFont typeface="Arial"/>
               <a:buNone/>
             </a:pPr>
             <a:r>
               <a:rPr lang="en"/>
               <a:t>Batch normalization: Calculating gradients</a:t>
-            </a:r>
-            <a:endParaRPr/>
-          </a:p>
-          <a:p>
-            <a:pPr indent="0" lvl="0" marL="0" rtl="0" algn="l">
-              <a:spcBef>
-                <a:spcPts val="0"/>
-              </a:spcBef>
-              <a:spcAft>
-                <a:spcPts val="0"/>
-              </a:spcAft>
-              <a:buNone/>
-            </a:pPr>
-            <a:r>
-              <a:t/>
             </a:r>
             <a:endParaRPr/>
           </a:p>
@@ -11820,7 +12219,7 @@
       </p:sp>
       <p:pic>
         <p:nvPicPr>
-          <p:cNvPr descr="{&quot;type&quot;:&quot;gather*&quot;,&quot;font&quot;:{&quot;family&quot;:&quot;Arial&quot;,&quot;color&quot;:&quot;#000000&quot;,&quot;size&quot;:7},&quot;backgroundColorModified&quot;:false,&quot;id&quot;:&quot;4&quot;,&quot;aid&quot;:null,&quot;backgroundColor&quot;:&quot;#FFFFFF&quot;,&quot;code&quot;:&quot;\\begin{gather*}\n{\\text{Now}\\;\\text{let's}\\;\\text{calculate}\\;\\text{gradient}\\;\\text{of}\\;\\text{L}\\;\\text{wrt}\\;x_{i}}\\\\\n{\\text{As}\\;\\text{before,}\\;x_{i\\,}\\text{affects}\\;\\text{L}\\;\\text{through}\\;\\text{all}\\;\\text{the}\\;y_{j}}\\\\\n{\\pdf{L}{x_{i}}=\\sum_{j=1}^{B}g_{j}\\pdf{y_{j}}{x_{i}}}\\\\\n{\\text{By}\\;\\text{definition,}}\\\\\n{y_{i}=\\lambda\\frac{x_{i}-\\mu}{s}+\\beta}\\\\\n{\\text{Notice}\\;\\text{that}\\;\\text{because}\\;\\mu=f\\left(x_{i}\\right)\\,\\text{and}\\;s=g\\left(x_{i},\\,\\mu\\right)\\text{,}\\;}\\\\\n{y_{i}\\,\\text{is}\\;\\text{affected}\\;\\text{by}\\;\\text{all}\\;x_{j}\\,,\\,j:1:B}\\\\\n{\\mu=1/B\\sum_{i=1}^{B}x_{i},\\,\\text{so}\\;\\pdf{\\mu}{x_{i}}=1/B}\\\\\n{s=\\left(\\sum_{i=1}^{B}\\frac{\\left(x_{i}-\\mu\\right)^{2}}{B}+\\epsilon\\right)^{1/2}}\\\\\n{\\pdf{s}{x_{i}}=\\frac{1}{2s}\\left(2/B\\sum_{j=1}^{B}\\left(x_{j}-\\mu\\right)\\pdf{\\left(x_{j}-\\mu\\right)}{x_{i}}\\right)}\\\\\n{\\text{split}\\;\\text{the}\\;\\text{sum}\\;\\text{into}\\;\\text{j=i}\\;\\text{and}\\;j\\neq i}\\\\\n{\\pdf{s}{x_{i}}=\\frac{1}{Bs}\\left(\\sum_{j=1,\\,j\\neq i}^{B}\\frac{\\left(x_{j}-\\mu\\right)}{B}+\\left(x_{i}-\\mu\\right)\\left(1-1/B\\right)\\right)}\\\\\n{=\\frac{1}{Bs}\\left(\\sum_{j=1,\\,j\\neq i}^{B}\\frac{-\\left(x_{j}-\\mu\\right)}{B}+\\left(x_{i}-\\mu\\right)\\left(1-1/B\\right)\\right)}\\\\\n{\\text{With}\\;\\text{some}\\;\\text{algebra,}\\;\\text{this}\\;\\text{simplifies}\\;\\text{to:}}\\\\\n{\\frac{\\left(x_{i}-\\mu\\right)}{Bs}}\t\n\\end{gather*}&quot;,&quot;ts&quot;:1771703675275,&quot;cs&quot;:&quot;xv8zk23SUqsK6F4GGwQSoA==&quot;,&quot;size&quot;:{&quot;width&quot;:242,&quot;height&quot;:372.3333333333333}}" id="104" name="Google Shape;104;p19"/>
+          <p:cNvPr descr="{&quot;font&quot;:{&quot;color&quot;:&quot;#000000&quot;,&quot;size&quot;:8,&quot;family&quot;:&quot;Arial&quot;},&quot;type&quot;:&quot;gather*&quot;,&quot;backgroundColorModified&quot;:false,&quot;backgroundColor&quot;:&quot;#FFFFFF&quot;,&quot;aid&quot;:null,&quot;id&quot;:&quot;5&quot;,&quot;code&quot;:&quot;\\begin{gather*}\n{\\text{We}\\;\\text{need}\\;\\text{to}\\;\\text{calculate}\\;\\text{gradient}\\;\\text{of}\\;\\text{the}\\;\\text{loss}\\;\\text{L}\\;\\text{wrt}\\;\\lambda,\\,\\beta\\,\\text{and}\\;x\\text{}}\\\\\n{\\text{In}\\;\\text{the}\\;\\text{batch}\\;\\text{normalization}\\;\\text{transformation,}\\;\\text{the}\\;\\text{feature}\\;\\text{dimensions}\\;\\text{don't}\\;\\text{interact}\\;\\text{with}\\;\\text{each}\\;\\text{other}}\\\\\n{\\text{as}\\;\\text{the}\\;\\text{statistics}\\;\\text{are}\\;\\text{calculated}\\;\\text{across}\\;\\text{the}\\;\\text{batch.}\\;\\text{So}\\;\\text{it}\\;\\text{is}\\;\\text{suficient}\\;\\text{to}\\;\\text{consider}\\;\\text{any}\\;\\text{component}\\;\\text{of}\\;x}\\\\\n{\\text{Let's}\\;\\text{this}\\;\\text{component}\\;\\text{by}\\;\\text{d.}\\;\\text{}}\\\\\n{x_{i}:i^{th\\,}\\text{batch}\\;\\text{element}\\;\\text{of}\\;\\text{the}\\;d^{th}\\,\\text{feature}}\\\\\n{\\mu,\\,\\sigma:\\,\\text{Batch}\\;\\text{statistics}\\;\\text{for}\\;\\text{the}\\;d^{th}\\,\\text{feature,}\\;\\text{dropping}\\;\\text{the}\\;\\text{subscript}\\;\\text{d}\\;\\text{for}\\;\\text{convenience}}\\\\\n{\\lambda,\\,\\beta:\\,\\text{Learnable}\\;\\text{params}\\;\\text{for}\\;\\text{the}\\;d^{th}\\,\\text{feature,}\\;\\text{dropping}\\;\\text{the}\\;\\text{subscript}\\;\\text{d}\\;\\text{for}\\;\\text{convenience}}\\\\\n{\\text{Assume}\\;\\text{upstream}\\;\\text{gradient}\\;\\text{from}\\;\\text{loss}\\;\\text{L}\\;\\text{is}}\\\\\n{g_{i}\\::=\\pdf{L}{y_{i}},\\,i:\\,i^{th}\\,\\text{batch}\\;\\text{element}\\;\\text{of}\\;\\text{the}\\;d^{th}\\,\\text{feature}}\\\\\n{\\text{Let's}\\;\\text{first}\\;\\text{calculate}\\;\\pdf{L}{\\lambda}\\,\\text{and}\\;\\pdf{L}{\\beta}}\\\\\n{\\text{Since}\\;\\text{L}\\;\\text{depends}\\;\\text{on}\\;\\lambda\\,\\text{and}\\;\\beta\\text{through}\\;\\text{all}\\;\\text{the}\\;y_{i},\\,i:\\left[1,2,...,B\\right]}\\\\\n{\\pdf{L}{\\lambda}=\\sum_{i=1}^{B}\\pdf{L}{y_{i}}\\pdf{y_{i}}{\\lambda}}\\\\\n{\\text{Since}}\\\\\n{y_{i}=\\lambda\\frac{x_{i}-\\mu}{s}+\\beta}\\\\\n{\\pdf{y_{i}}{\\lambda}=\\frac{x_{i}-\\mu}{s}\\,\\text{and}\\;\\pdf{y_{i}}{\\beta}=1}\\\\\n{\\text{So}}\\\\\n{\\pdf{L}{\\lambda}=\\sum_{i=1}^{B}g_{i}\\frac{x_{i}-\\mu}{s}\\,\\text{and}\\;\\pdf{L}{\\beta}=\\sum_{i=1}^{B}g_{i}}\t\n\\end{gather*}&quot;,&quot;ts&quot;:1771701061330,&quot;cs&quot;:&quot;0WX8vCcrBrv39x9bcvytow==&quot;,&quot;size&quot;:{&quot;width&quot;:524,&quot;height&quot;:385.5}}" id="107" name="Google Shape;107;p19"/>
           <p:cNvPicPr preferRelativeResize="0"/>
           <p:nvPr/>
         </p:nvPicPr>
@@ -11834,8 +12233,8 @@
         </p:blipFill>
         <p:spPr>
           <a:xfrm>
-            <a:off x="1275748" y="1143150"/>
-            <a:ext cx="2305050" cy="3546475"/>
+            <a:off x="705175" y="1205050"/>
+            <a:ext cx="4991100" cy="3671888"/>
           </a:xfrm>
           <a:prstGeom prst="rect">
             <a:avLst/>
@@ -11846,59 +12245,6 @@
           </a:ln>
         </p:spPr>
       </p:pic>
-      <p:sp>
-        <p:nvSpPr>
-          <p:cNvPr id="105" name="Google Shape;105;p19"/>
-          <p:cNvSpPr txBox="1"/>
-          <p:nvPr/>
-        </p:nvSpPr>
-        <p:spPr>
-          <a:xfrm>
-            <a:off x="50800" y="4764900"/>
-            <a:ext cx="3000000" cy="338700"/>
-          </a:xfrm>
-          <a:prstGeom prst="rect">
-            <a:avLst/>
-          </a:prstGeom>
-          <a:noFill/>
-          <a:ln>
-            <a:noFill/>
-          </a:ln>
-        </p:spPr>
-        <p:txBody>
-          <a:bodyPr anchorCtr="0" anchor="t" bIns="91425" lIns="91425" spcFirstLastPara="1" rIns="91425" wrap="square" tIns="91425">
-            <a:spAutoFit/>
-          </a:bodyPr>
-          <a:lstStyle/>
-          <a:p>
-            <a:pPr indent="0" lvl="0" marL="0" rtl="0" algn="l">
-              <a:spcBef>
-                <a:spcPts val="0"/>
-              </a:spcBef>
-              <a:spcAft>
-                <a:spcPts val="0"/>
-              </a:spcAft>
-              <a:buNone/>
-            </a:pPr>
-            <a:r>
-              <a:rPr lang="en" sz="1000">
-                <a:solidFill>
-                  <a:schemeClr val="dk1"/>
-                </a:solidFill>
-              </a:rPr>
-              <a:t>derivative_mu_std.py</a:t>
-            </a:r>
-            <a:endParaRPr sz="1000">
-              <a:solidFill>
-                <a:srgbClr val="BCBEC4"/>
-              </a:solidFill>
-              <a:highlight>
-                <a:srgbClr val="1E1F22"/>
-              </a:highlight>
-            </a:endParaRPr>
-          </a:p>
-        </p:txBody>
-      </p:sp>
     </p:spTree>
   </p:cSld>
   <p:clrMapOvr>
@@ -11912,7 +12258,7 @@
   <p:cSld>
     <p:spTree>
       <p:nvGrpSpPr>
-        <p:cNvPr id="109" name="Shape 109"/>
+        <p:cNvPr id="111" name="Shape 111"/>
         <p:cNvGrpSpPr/>
         <p:nvPr/>
       </p:nvGrpSpPr>
@@ -11926,7 +12272,7 @@
       </p:grpSpPr>
       <p:sp>
         <p:nvSpPr>
-          <p:cNvPr id="110" name="Google Shape;110;p20"/>
+          <p:cNvPr id="112" name="Google Shape;112;p20"/>
           <p:cNvSpPr txBox="1"/>
           <p:nvPr>
             <p:ph type="title"/>
@@ -11986,7 +12332,7 @@
       </p:sp>
       <p:pic>
         <p:nvPicPr>
-          <p:cNvPr descr="{&quot;id&quot;:&quot;4&quot;,&quot;backgroundColor&quot;:&quot;#FFFFFF&quot;,&quot;backgroundColorModified&quot;:false,&quot;font&quot;:{&quot;color&quot;:&quot;#000000&quot;,&quot;family&quot;:&quot;Arial&quot;,&quot;size&quot;:10},&quot;aid&quot;:null,&quot;type&quot;:&quot;gather*&quot;,&quot;code&quot;:&quot;\\begin{gather*}\n{\\pdf{L}{x_{i}}=\\sum_{j=1}^{B}\\pdf{L}{y_{j}}\\pdf{y_{j}}{x_{i}}}\\\\\n{\\text{Let}\\;g_{j}=\\pdf{L}{y_{j}}}\\\\\n{\\pdf{L}{x_{i}}=\\frac{\\lambda}{Bs}\\left(g_{i}\\left(B-1\\right)-\\frac{\\left(x_{i}-1\\right)\\left(x_{i}-1\\right)g_{i}}{s^{2}}+\\sum_{j\\neq i}^{}g_{j}\\left(-1-\\frac{\\left(x_{i}-\\mu\\right)\\left(x_{j}-\\mu\\right)}{s^{2}}\\right)\\right)\\left[\\right]}\\\\\n{=\\frac{\\lambda}{Bs}\\left(g_{i}B-g_{i}-\\sum_{j\\neq i}^{}g_{j}\\,-\\frac{1}{s^{2}}\\sum_{j=i}^{B}\\left(x_{i}-\\mu\\right)\\left(x_{j}-\\mu\\right)g_{j}\\right)}\\\\\n{\\frac{\\lambda}{Bs}\\left(g_{i}B-\\sum_{j=1}^{B}g_{j}\\,-\\frac{1}{s^{2}}\\sum_{j=1}^{B}\\left(x_{i}-\\mu\\right)\\left(x_{j}-\\mu\\right)g_{j}\\right)}\t\n\\end{gather*}&quot;,&quot;ts&quot;:1771782609005,&quot;cs&quot;:&quot;X8cnPLiHrILWkar7BAOWJQ==&quot;,&quot;size&quot;:{&quot;width&quot;:565.5000000000001,&quot;height&quot;:247}}" id="111" name="Google Shape;111;p20"/>
+          <p:cNvPr descr="{&quot;id&quot;:&quot;4&quot;,&quot;backgroundColorModified&quot;:false,&quot;type&quot;:&quot;gather*&quot;,&quot;font&quot;:{&quot;family&quot;:&quot;Arial&quot;,&quot;size&quot;:12,&quot;color&quot;:&quot;#000000&quot;},&quot;code&quot;:&quot;\\begin{gather*}\n{\\text{Now}\\;\\text{let's}\\;\\text{calculate}\\;\\text{gradient}\\;\\text{of}\\;\\text{L}\\;\\text{wrt}\\;x_{i}}\\\\\n{\\text{As}\\;\\text{before,}\\;x_{i\\,}\\text{affects}\\;\\text{L}\\;\\text{through}\\;\\text{all}\\;\\text{the}\\;y_{j}}\\\\\n{\\pdf{L}{x_{i}}=\\sum_{j=1}^{B}g_{j}\\pdf{y_{j}}{x_{i}}}\\\\\n{\\text{By}\\;\\text{definition,}}\\\\\n{y_{i}=\\lambda\\frac{x_{i}-\\mu}{s}+\\beta}\\\\\n{\\text{Notice}\\;\\text{that}\\;\\text{because}\\;\\mu=f\\left(x_{i}\\right)\\,\\text{and}\\;s=g\\left(x_{i},\\,\\mu\\right)\\text{,}\\;}\\\\\n{\\text{All}\\;y_{j}\\,\\text{are}\\;\\text{affected}\\;\\text{by}\\;x_{i}\\,,\\,j:1:B}\\\\\n{\\text{From}\\;\\text{chain}\\;\\text{rule:}}\\\\\n{\\pdf{y_{j}}{x_{i}}=\\lambda\\left[\\frac{\\left(\\pdf{x_{j}}{x_{i}}-\\pdf{\\mu}{x_{i}}\\right)-\\pdf{s}{x_{i}}}{s^{2}}\\right]}\t\n\\end{gather*}&quot;,&quot;aid&quot;:null,&quot;backgroundColor&quot;:&quot;#FFFFFF&quot;,&quot;ts&quot;:1772801431345,&quot;cs&quot;:&quot;ekzdWxPFiHXOSot4P2xN8g==&quot;,&quot;size&quot;:{&quot;width&quot;:389.3333333333333,&quot;height&quot;:328.3333333333333}}" id="113" name="Google Shape;113;p20"/>
           <p:cNvPicPr preferRelativeResize="0"/>
           <p:nvPr/>
         </p:nvPicPr>
@@ -12000,8 +12346,8 @@
         </p:blipFill>
         <p:spPr>
           <a:xfrm>
-            <a:off x="3445923" y="1167552"/>
-            <a:ext cx="5386388" cy="2352675"/>
+            <a:off x="364944" y="1297501"/>
+            <a:ext cx="3708400" cy="3127375"/>
           </a:xfrm>
           <a:prstGeom prst="rect">
             <a:avLst/>
@@ -12012,9 +12358,62 @@
           </a:ln>
         </p:spPr>
       </p:pic>
+      <p:sp>
+        <p:nvSpPr>
+          <p:cNvPr id="114" name="Google Shape;114;p20"/>
+          <p:cNvSpPr txBox="1"/>
+          <p:nvPr/>
+        </p:nvSpPr>
+        <p:spPr>
+          <a:xfrm>
+            <a:off x="50800" y="4764900"/>
+            <a:ext cx="3000000" cy="338700"/>
+          </a:xfrm>
+          <a:prstGeom prst="rect">
+            <a:avLst/>
+          </a:prstGeom>
+          <a:noFill/>
+          <a:ln>
+            <a:noFill/>
+          </a:ln>
+        </p:spPr>
+        <p:txBody>
+          <a:bodyPr anchorCtr="0" anchor="t" bIns="91425" lIns="91425" spcFirstLastPara="1" rIns="91425" wrap="square" tIns="91425">
+            <a:spAutoFit/>
+          </a:bodyPr>
+          <a:lstStyle/>
+          <a:p>
+            <a:pPr indent="0" lvl="0" marL="0" rtl="0" algn="l">
+              <a:spcBef>
+                <a:spcPts val="0"/>
+              </a:spcBef>
+              <a:spcAft>
+                <a:spcPts val="0"/>
+              </a:spcAft>
+              <a:buNone/>
+            </a:pPr>
+            <a:r>
+              <a:rPr lang="en" sz="1000">
+                <a:solidFill>
+                  <a:schemeClr val="dk1"/>
+                </a:solidFill>
+              </a:rPr>
+              <a:t>derivative_mu_std.py</a:t>
+            </a:r>
+            <a:endParaRPr sz="1000">
+              <a:solidFill>
+                <a:srgbClr val="BCBEC4"/>
+              </a:solidFill>
+              <a:highlight>
+                <a:srgbClr val="1E1F22"/>
+              </a:highlight>
+            </a:endParaRPr>
+          </a:p>
+        </p:txBody>
+      </p:sp>
       <p:pic>
         <p:nvPicPr>
-          <p:cNvPr descr="{&quot;backgroundColorModified&quot;:false,&quot;backgroundColor&quot;:&quot;#FFFFFF&quot;,&quot;code&quot;:&quot;\\begin{gather*}\n{\\text{Now}\\;\\text{let's}\\;\\text{calculate}\\;\\text{gradient}\\;\\text{of}\\;y_{j}\\,\\text{wrt}\\;x_{i}}\\\\\n{\\text{Let'}\\text{s}\\;\\text{partition}\\;\\text{the}\\;\\text{j's}\\;\\text{into}\\;\\text{j=i}\\;\\text{and}\\;j\\neq i}\\\\\n{\\text{When}\\;\\text{j=i}}\\\\\n{\\pdf{y_{i}}{x_{i}}=\\lambda\\left[\\frac{s\\pdf{\\left(x_{i}-\\mu\\right)}{x_{i}}-\\left(x_{i}-\\mu\\right)\\pdf{s}{x_{i}}}{s^{2}}\\right]}\\\\\n{=\\lambda\\left[\\frac{s\\left(1-1/B\\right)-\\frac{\\left(x_{i}-\\mu\\right)^{2}}{Bs}}{s^{2}}\\right]}\\\\\n{=\\lambda\\left[\\frac{1}{s}-\\frac{1}{Bs}-\\frac{\\left(x_{i}-\\mu\\right)^{2}}{Bs^{3}}\\right]}\\\\\n{\\text{When}\\;j\\neq i,}\\\\\n{\\pdf{y_{j}}{x_{i}}=\\lambda\\left[\\frac{s\\pdf{\\left(x_{j}-\\mu\\right)}{x_{i}}-\\left(x_{j}-\\mu\\right)\\pdf{s}{x_{i}}}{s^{2}}\\right]}\\\\\n{\\text{Which}\\;\\text{simplifies}\\;\\text{to:}}\\\\\n{\\pdf{y_{j}}{x_{i}}=\\lambda\\left[-\\frac{1}{Bs}-\\frac{\\left(x_{j}-\\mu\\right)\\left(x_{i}-\\mu\\right)}{Bs^{3}}\\right]}\t\n\\end{gather*}&quot;,&quot;type&quot;:&quot;gather*&quot;,&quot;font&quot;:{&quot;size&quot;:10,&quot;family&quot;:&quot;Arial&quot;,&quot;color&quot;:&quot;#000000&quot;},&quot;aid&quot;:null,&quot;id&quot;:&quot;4&quot;,&quot;ts&quot;:1771774455144,&quot;cs&quot;:&quot;GzaEYj5a9A7IZSnJGgJquA==&quot;,&quot;size&quot;:{&quot;width&quot;:266.6666666666667,&quot;height&quot;:369}}" id="112" name="Google Shape;112;p20"/>
+          <p:cNvPr descr="{&quot;type&quot;:&quot;gather*&quot;,&quot;font&quot;:{&quot;family&quot;:&quot;Arial&quot;,&quot;size&quot;:12,&quot;color&quot;:&quot;#000000&quot;},&quot;backgroundColor&quot;:&quot;#FFFFFF&quot;,&quot;backgroundColorModified&quot;:false,&quot;aid&quot;:null,&quot;id&quot;:&quot;4&quot;,&quot;code&quot;:&quot;\\begin{gather*}\n{\\text{Now}\\;\\text{let's}\\;\\text{calculate}\\;\\text{gradient}\\;\\text{of}\\;\\mu\\,\\text{and}\\;s\\;\\text{wrt}\\;x_{i}}\\\\\n{\\mu=1/B\\sum_{i=1}^{B}x_{i},\\,\\text{so}\\;\\pdf{\\mu}{x_{i}}=1/B}\\\\\n{s=\\left(\\sum_{i=1}^{B}\\frac{\\left(x_{i}-\\mu\\right)^{2}}{B}+\\epsilon\\right)^{1/2}}\\\\\n{\\pdf{s}{x_{i}}=\\frac{1}{2s}\\left(2/B\\sum_{j=1}^{B}\\left(x_{j}-\\mu\\right)\\pdf{\\left(x_{j}-\\mu\\right)}{x_{i}}\\right)}\\\\\n{\\text{split}\\;\\text{the}\\;\\text{sum}\\;\\text{into}\\;\\text{j=i}\\;\\text{and}\\;j\\neq i}\\\\\n{\\pdf{s}{x_{i}}=\\frac{1}{Bs}\\left(\\sum_{j=1,\\,j\\neq i}^{B}\\frac{\\left(x_{j}-\\mu\\right)}{B}+\\left(x_{i}-\\mu\\right)\\left(1-1/B\\right)\\right)}\\\\\n{=\\frac{1}{Bs}\\left(\\sum_{j=1,\\,j\\neq i}^{B}\\frac{-\\left(x_{j}-\\mu\\right)}{B}+\\left(x_{i}-\\mu\\right)\\left(1-1/B\\right)\\right)}\\\\\n{\\text{With}\\;\\text{some}\\;\\text{algebra,}\\;\\text{this}\\;\\text{simplifies}\\;\\text{to:}}\\\\\n{\\frac{\\left(x_{i}-\\mu\\right)}{Bs}}\t\n\\end{gather*}&quot;,&quot;ts&quot;:1772801397837,&quot;cs&quot;:&quot;SIXnbxpQHytwJncDEG43xg==&quot;,&quot;size&quot;:{&quot;width&quot;:415,&quot;height&quot;:433.3333333333333}}" id="115" name="Google Shape;115;p20"/>
           <p:cNvPicPr preferRelativeResize="0"/>
           <p:nvPr/>
         </p:nvPicPr>
@@ -12028,36 +12427,8 @@
         </p:blipFill>
         <p:spPr>
           <a:xfrm>
-            <a:off x="345948" y="1217102"/>
-            <a:ext cx="2540000" cy="3514725"/>
-          </a:xfrm>
-          <a:prstGeom prst="rect">
-            <a:avLst/>
-          </a:prstGeom>
-          <a:noFill/>
-          <a:ln>
-            <a:noFill/>
-          </a:ln>
-        </p:spPr>
-      </p:pic>
-      <p:pic>
-        <p:nvPicPr>
-          <p:cNvPr descr="{&quot;code&quot;:&quot;\\begin{gather*}\n{\\text{This}\\;\\text{is}\\;\\text{the}\\;\\text{gradient}\\;\\text{of}\\;\\text{the}\\;\\text{loss}\\;\\text{against}\\;\\text{feature}\\;\\text{d.}\\;}\\\\\n{\\text{The}\\;\\text{result}\\;\\text{can}\\;\\text{be}\\;\\text{easily}\\;\\text{extended}\\;\\text{across}\\;\\text{all}\\;\\text{dimensions}}\t\n\\end{gather*}&quot;,&quot;font&quot;:{&quot;size&quot;:10,&quot;family&quot;:&quot;Arial&quot;,&quot;color&quot;:&quot;#000000&quot;},&quot;aid&quot;:null,&quot;backgroundColorModified&quot;:false,&quot;backgroundColor&quot;:&quot;#FFFFFF&quot;,&quot;type&quot;:&quot;gather*&quot;,&quot;id&quot;:&quot;6&quot;,&quot;ts&quot;:1771782580326,&quot;cs&quot;:&quot;WTrmQoD3p0AiAJ8UuCAfTg==&quot;,&quot;size&quot;:{&quot;width&quot;:370,&quot;height&quot;:34.666666666666664}}" id="113" name="Google Shape;113;p20"/>
-          <p:cNvPicPr preferRelativeResize="0"/>
-          <p:nvPr/>
-        </p:nvPicPr>
-        <p:blipFill>
-          <a:blip r:embed="rId5">
-            <a:alphaModFix/>
-          </a:blip>
-          <a:stretch>
-            <a:fillRect/>
-          </a:stretch>
-        </p:blipFill>
-        <p:spPr>
-          <a:xfrm>
-            <a:off x="4376988" y="3899850"/>
-            <a:ext cx="3524250" cy="330200"/>
+            <a:off x="4985150" y="1017725"/>
+            <a:ext cx="3819725" cy="3988475"/>
           </a:xfrm>
           <a:prstGeom prst="rect">
             <a:avLst/>
@@ -12081,7 +12452,7 @@
   <p:cSld>
     <p:spTree>
       <p:nvGrpSpPr>
-        <p:cNvPr id="117" name="Shape 117"/>
+        <p:cNvPr id="119" name="Shape 119"/>
         <p:cNvGrpSpPr/>
         <p:nvPr/>
       </p:nvGrpSpPr>
@@ -12095,7 +12466,7 @@
       </p:grpSpPr>
       <p:sp>
         <p:nvSpPr>
-          <p:cNvPr id="118" name="Google Shape;118;p21"/>
+          <p:cNvPr id="120" name="Google Shape;120;p21"/>
           <p:cNvSpPr txBox="1"/>
           <p:nvPr>
             <p:ph type="title"/>
@@ -12123,6 +12494,11 @@
               <a:spcAft>
                 <a:spcPts val="0"/>
               </a:spcAft>
+              <a:buClr>
+                <a:schemeClr val="dk1"/>
+              </a:buClr>
+              <a:buSzPct val="39285"/>
+              <a:buFont typeface="Arial"/>
               <a:buNone/>
             </a:pPr>
             <a:r>
@@ -12150,7 +12526,7 @@
       </p:sp>
       <p:pic>
         <p:nvPicPr>
-          <p:cNvPr descr="{&quot;type&quot;:&quot;gather*&quot;,&quot;code&quot;:&quot;\\begin{gather*}\n{\\pdf{L}{x_{i}}=\\frac{\\lambda}{Bs}\\left(g_{i}B-\\sum_{j=1}^{B}g_{j}\\,-\\frac{1}{s^{2}}\\sum_{j=1}^{B}\\left(x_{i}-\\mu\\right)\\left(x_{j}-\\mu\\right)g_{j}\\right)}\\\\\n{\\text{Define:}}\\\\\n{\\hat{x_{i}}=\\frac{x_{i}-\\mu}{s},\\,\\hat{g}_{i}=g_{i}\\lambda ,\\,S_{1}=\\sum_{j=1}^{B}\\hat{g_{j}},\\,S_{2}=\\sum_{j=1}^{B}\\hat{x}_{j}\\hat{g_{j}}}\\\\\n{\\pdf{L}{x_{i}}=\\frac{1}{Bs}\\left(\\hat{g_{i}}B-S_{1}\\,-\\hat{x_{i}}S_{2}\\right)}\t\n\\end{gather*}&quot;,&quot;backgroundColorModified&quot;:false,&quot;font&quot;:{&quot;size&quot;:10,&quot;color&quot;:&quot;#000000&quot;,&quot;family&quot;:&quot;Arial&quot;},&quot;backgroundColor&quot;:&quot;#FFFFFF&quot;,&quot;id&quot;:&quot;4&quot;,&quot;aid&quot;:null,&quot;ts&quot;:1771850130071,&quot;cs&quot;:&quot;V8qI+O0+2d/ZTpcwMgzhOg==&quot;,&quot;size&quot;:{&quot;width&quot;:375,&quot;height&quot;:161}}" id="119" name="Google Shape;119;p21"/>
+          <p:cNvPr descr="{&quot;id&quot;:&quot;4&quot;,&quot;backgroundColor&quot;:&quot;#FFFFFF&quot;,&quot;backgroundColorModified&quot;:false,&quot;font&quot;:{&quot;color&quot;:&quot;#000000&quot;,&quot;family&quot;:&quot;Arial&quot;,&quot;size&quot;:10},&quot;aid&quot;:null,&quot;type&quot;:&quot;gather*&quot;,&quot;code&quot;:&quot;\\begin{gather*}\n{\\pdf{L}{x_{i}}=\\sum_{j=1}^{B}\\pdf{L}{y_{j}}\\pdf{y_{j}}{x_{i}}}\\\\\n{\\text{Let}\\;g_{j}=\\pdf{L}{y_{j}}}\\\\\n{\\pdf{L}{x_{i}}=\\frac{\\lambda}{Bs}\\left(g_{i}\\left(B-1\\right)-\\frac{\\left(x_{i}-1\\right)\\left(x_{i}-1\\right)g_{i}}{s^{2}}+\\sum_{j\\neq i}^{}g_{j}\\left(-1-\\frac{\\left(x_{i}-\\mu\\right)\\left(x_{j}-\\mu\\right)}{s^{2}}\\right)\\right)\\left[\\right]}\\\\\n{=\\frac{\\lambda}{Bs}\\left(g_{i}B-g_{i}-\\sum_{j\\neq i}^{}g_{j}\\,-\\frac{1}{s^{2}}\\sum_{j=i}^{B}\\left(x_{i}-\\mu\\right)\\left(x_{j}-\\mu\\right)g_{j}\\right)}\\\\\n{\\frac{\\lambda}{Bs}\\left(g_{i}B-\\sum_{j=1}^{B}g_{j}\\,-\\frac{1}{s^{2}}\\sum_{j=1}^{B}\\left(x_{i}-\\mu\\right)\\left(x_{j}-\\mu\\right)g_{j}\\right)}\t\n\\end{gather*}&quot;,&quot;ts&quot;:1771782609005,&quot;cs&quot;:&quot;X8cnPLiHrILWkar7BAOWJQ==&quot;,&quot;size&quot;:{&quot;width&quot;:565.5000000000001,&quot;height&quot;:247}}" id="121" name="Google Shape;121;p21"/>
           <p:cNvPicPr preferRelativeResize="0"/>
           <p:nvPr/>
         </p:nvPicPr>
@@ -12164,8 +12540,8 @@
         </p:blipFill>
         <p:spPr>
           <a:xfrm>
-            <a:off x="530673" y="1346911"/>
-            <a:ext cx="3571875" cy="1533525"/>
+            <a:off x="3658323" y="1135227"/>
+            <a:ext cx="5386388" cy="2352675"/>
           </a:xfrm>
           <a:prstGeom prst="rect">
             <a:avLst/>
@@ -12176,16 +12552,24 @@
           </a:ln>
         </p:spPr>
       </p:pic>
-      <p:sp>
-        <p:nvSpPr>
-          <p:cNvPr id="120" name="Google Shape;120;p21"/>
-          <p:cNvSpPr txBox="1"/>
+      <p:pic>
+        <p:nvPicPr>
+          <p:cNvPr descr="{&quot;id&quot;:&quot;4&quot;,&quot;aid&quot;:null,&quot;code&quot;:&quot;\\begin{gather*}\n{\\text{Let's}\\;\\text{now}\\;\\text{plug}\\;\\text{these}\\;\\text{results}\\;\\text{into}\\;\\text{expression}\\;\\text{for}\\;\\text{}\\pdf{y_{j}}{x_{i}}}\\\\\n{\\text{Let'}\\text{s}\\;\\text{partition}\\;\\text{the}\\;\\text{j's}\\;\\text{into}\\;\\text{j=i}\\;\\text{and}\\;j\\neq i}\\\\\n{\\text{When}\\;\\text{j=i}}\\\\\n{\\pdf{y_{i}}{x_{i}}=\\lambda\\left[\\frac{s\\pdf{\\left(x_{i}-\\mu\\right)}{x_{i}}-\\left(x_{i}-\\mu\\right)\\pdf{s}{x_{i}}}{s^{2}}\\right]}\\\\\n{=\\lambda\\left[\\frac{s\\left(1-1/B\\right)-\\frac{\\left(x_{i}-\\mu\\right)^{2}}{Bs}}{s^{2}}\\right]}\\\\\n{=\\lambda\\left[\\frac{1}{s}-\\frac{1}{Bs}-\\frac{\\left(x_{i}-\\mu\\right)^{2}}{Bs^{3}}\\right]}\\\\\n{\\text{When}\\;j\\neq i,}\\\\\n{\\pdf{y_{j}}{x_{i}}=\\lambda\\left[\\frac{s\\pdf{\\left(x_{j}-\\mu\\right)}{x_{i}}-\\left(x_{j}-\\mu\\right)\\pdf{s}{x_{i}}}{s^{2}}\\right]}\\\\\n{\\text{Which}\\;\\text{simplifies}\\;\\text{to:}}\\\\\n{\\pdf{y_{j}}{x_{i}}=\\lambda\\left[-\\frac{1}{Bs}-\\frac{\\left(x_{j}-\\mu\\right)\\left(x_{i}-\\mu\\right)}{Bs^{3}}\\right]}\t\n\\end{gather*}&quot;,&quot;type&quot;:&quot;gather*&quot;,&quot;backgroundColorModified&quot;:false,&quot;backgroundColor&quot;:&quot;#FFFFFF&quot;,&quot;font&quot;:{&quot;size&quot;:10,&quot;color&quot;:&quot;#000000&quot;,&quot;family&quot;:&quot;Arial&quot;},&quot;ts&quot;:1772801525145,&quot;cs&quot;:&quot;YUes0iwh6gk43fAF3ygmuQ==&quot;,&quot;size&quot;:{&quot;width&quot;:348.6666666666667,&quot;height&quot;:389.3333333333333}}" id="122" name="Google Shape;122;p21"/>
+          <p:cNvPicPr preferRelativeResize="0"/>
           <p:nvPr/>
-        </p:nvSpPr>
-        <p:spPr>
-          <a:xfrm>
-            <a:off x="46175" y="4755650"/>
-            <a:ext cx="3000000" cy="338700"/>
+        </p:nvPicPr>
+        <p:blipFill>
+          <a:blip r:embed="rId4">
+            <a:alphaModFix/>
+          </a:blip>
+          <a:stretch>
+            <a:fillRect/>
+          </a:stretch>
+        </p:blipFill>
+        <p:spPr>
+          <a:xfrm>
+            <a:off x="311698" y="1113088"/>
+            <a:ext cx="3321050" cy="3708400"/>
           </a:xfrm>
           <a:prstGeom prst="rect">
             <a:avLst/>
@@ -12195,37 +12579,35 @@
             <a:noFill/>
           </a:ln>
         </p:spPr>
-        <p:txBody>
-          <a:bodyPr anchorCtr="0" anchor="t" bIns="91425" lIns="91425" spcFirstLastPara="1" rIns="91425" wrap="square" tIns="91425">
-            <a:spAutoFit/>
-          </a:bodyPr>
-          <a:lstStyle/>
-          <a:p>
-            <a:pPr indent="0" lvl="0" marL="0" rtl="0" algn="l">
-              <a:spcBef>
-                <a:spcPts val="0"/>
-              </a:spcBef>
-              <a:spcAft>
-                <a:spcPts val="0"/>
-              </a:spcAft>
-              <a:buNone/>
-            </a:pPr>
-            <a:r>
-              <a:rPr lang="en" sz="1000">
-                <a:solidFill>
-                  <a:schemeClr val="dk1"/>
-                </a:solidFill>
-              </a:rPr>
-              <a:t>batch_norm_derivatives.py</a:t>
-            </a:r>
-            <a:endParaRPr sz="1000">
-              <a:solidFill>
-                <a:schemeClr val="dk1"/>
-              </a:solidFill>
-            </a:endParaRPr>
-          </a:p>
-        </p:txBody>
-      </p:sp>
+      </p:pic>
+      <p:pic>
+        <p:nvPicPr>
+          <p:cNvPr descr="{&quot;code&quot;:&quot;\\begin{gather*}\n{\\text{This}\\;\\text{is}\\;\\text{the}\\;\\text{gradient}\\;\\text{of}\\;\\text{the}\\;\\text{loss}\\;\\text{against}\\;\\text{feature}\\;\\text{d.}\\;}\\\\\n{\\text{The}\\;\\text{result}\\;\\text{can}\\;\\text{be}\\;\\text{easily}\\;\\text{extended}\\;\\text{across}\\;\\text{all}\\;\\text{dimensions}}\t\n\\end{gather*}&quot;,&quot;font&quot;:{&quot;size&quot;:10,&quot;family&quot;:&quot;Arial&quot;,&quot;color&quot;:&quot;#000000&quot;},&quot;aid&quot;:null,&quot;backgroundColorModified&quot;:false,&quot;backgroundColor&quot;:&quot;#FFFFFF&quot;,&quot;type&quot;:&quot;gather*&quot;,&quot;id&quot;:&quot;6&quot;,&quot;ts&quot;:1771782580326,&quot;cs&quot;:&quot;WTrmQoD3p0AiAJ8UuCAfTg==&quot;,&quot;size&quot;:{&quot;width&quot;:370,&quot;height&quot;:34.666666666666664}}" id="123" name="Google Shape;123;p21"/>
+          <p:cNvPicPr preferRelativeResize="0"/>
+          <p:nvPr/>
+        </p:nvPicPr>
+        <p:blipFill>
+          <a:blip r:embed="rId5">
+            <a:alphaModFix/>
+          </a:blip>
+          <a:stretch>
+            <a:fillRect/>
+          </a:stretch>
+        </p:blipFill>
+        <p:spPr>
+          <a:xfrm>
+            <a:off x="4376988" y="3899850"/>
+            <a:ext cx="3524250" cy="330200"/>
+          </a:xfrm>
+          <a:prstGeom prst="rect">
+            <a:avLst/>
+          </a:prstGeom>
+          <a:noFill/>
+          <a:ln>
+            <a:noFill/>
+          </a:ln>
+        </p:spPr>
+      </p:pic>
     </p:spTree>
   </p:cSld>
   <p:clrMapOvr>

--- a/Module 5/class_5.2/deep_learning_course_class_5.2.pptx
+++ b/Module 5/class_5.2/deep_learning_course_class_5.2.pptx
@@ -26,16 +26,18 @@
     <p:sldId id="271" r:id="rId21"/>
     <p:sldId id="272" r:id="rId22"/>
     <p:sldId id="273" r:id="rId23"/>
+    <p:sldId id="274" r:id="rId24"/>
+    <p:sldId id="275" r:id="rId25"/>
   </p:sldIdLst>
   <p:sldSz cy="5143500" cx="9144000"/>
   <p:notesSz cx="6858000" cy="9144000"/>
   <p:embeddedFontLst>
     <p:embeddedFont>
       <p:font typeface="Roboto Mono"/>
-      <p:regular r:id="rId24"/>
-      <p:bold r:id="rId25"/>
-      <p:italic r:id="rId26"/>
-      <p:boldItalic r:id="rId27"/>
+      <p:regular r:id="rId26"/>
+      <p:bold r:id="rId27"/>
+      <p:italic r:id="rId28"/>
+      <p:boldItalic r:id="rId29"/>
     </p:embeddedFont>
   </p:embeddedFontLst>
   <p:defaultTextStyle>
@@ -1523,7 +1525,7 @@
       </p:grpSpPr>
       <p:sp>
         <p:nvSpPr>
-          <p:cNvPr id="206" name="Google Shape;206;g3957f4c9d0f_0_0:notes"/>
+          <p:cNvPr id="206" name="Google Shape;206;g395cb806990_0_15:notes"/>
           <p:cNvSpPr/>
           <p:nvPr>
             <p:ph idx="2" type="sldImg"/>
@@ -1558,7 +1560,7 @@
       </p:sp>
       <p:sp>
         <p:nvSpPr>
-          <p:cNvPr id="207" name="Google Shape;207;g3957f4c9d0f_0_0:notes"/>
+          <p:cNvPr id="207" name="Google Shape;207;g395cb806990_0_15:notes"/>
           <p:cNvSpPr txBox="1"/>
           <p:nvPr>
             <p:ph idx="1" type="body"/>
@@ -1608,7 +1610,7 @@
   <p:cSld>
     <p:spTree>
       <p:nvGrpSpPr>
-        <p:cNvPr id="211" name="Shape 211"/>
+        <p:cNvPr id="212" name="Shape 212"/>
         <p:cNvGrpSpPr/>
         <p:nvPr/>
       </p:nvGrpSpPr>
@@ -1622,7 +1624,7 @@
       </p:grpSpPr>
       <p:sp>
         <p:nvSpPr>
-          <p:cNvPr id="212" name="Google Shape;212;g3957f86a122_1_12:notes"/>
+          <p:cNvPr id="213" name="Google Shape;213;g395cb806990_0_22:notes"/>
           <p:cNvSpPr/>
           <p:nvPr>
             <p:ph idx="2" type="sldImg"/>
@@ -1657,7 +1659,106 @@
       </p:sp>
       <p:sp>
         <p:nvSpPr>
-          <p:cNvPr id="213" name="Google Shape;213;g3957f86a122_1_12:notes"/>
+          <p:cNvPr id="214" name="Google Shape;214;g395cb806990_0_22:notes"/>
+          <p:cNvSpPr txBox="1"/>
+          <p:nvPr>
+            <p:ph idx="1" type="body"/>
+          </p:nvPr>
+        </p:nvSpPr>
+        <p:spPr>
+          <a:xfrm>
+            <a:off x="685800" y="4343400"/>
+            <a:ext cx="5486400" cy="4114800"/>
+          </a:xfrm>
+          <a:prstGeom prst="rect">
+            <a:avLst/>
+          </a:prstGeom>
+        </p:spPr>
+        <p:txBody>
+          <a:bodyPr anchorCtr="0" anchor="t" bIns="91425" lIns="91425" spcFirstLastPara="1" rIns="91425" wrap="square" tIns="91425">
+            <a:noAutofit/>
+          </a:bodyPr>
+          <a:lstStyle/>
+          <a:p>
+            <a:pPr indent="0" lvl="0" marL="0" rtl="0" algn="l">
+              <a:spcBef>
+                <a:spcPts val="0"/>
+              </a:spcBef>
+              <a:spcAft>
+                <a:spcPts val="0"/>
+              </a:spcAft>
+              <a:buNone/>
+            </a:pPr>
+            <a:r>
+              <a:t/>
+            </a:r>
+            <a:endParaRPr/>
+          </a:p>
+        </p:txBody>
+      </p:sp>
+    </p:spTree>
+  </p:cSld>
+  <p:clrMapOvr>
+    <a:masterClrMapping/>
+  </p:clrMapOvr>
+</p:notes>
+</file>
+
+<file path=ppt/notesSlides/notesSlide19.xml><?xml version="1.0" encoding="utf-8"?>
+<p:notes xmlns:a="http://schemas.openxmlformats.org/drawingml/2006/main" xmlns:r="http://schemas.openxmlformats.org/officeDocument/2006/relationships" xmlns:mc="http://schemas.openxmlformats.org/markup-compatibility/2006" xmlns:mv="urn:schemas-microsoft-com:mac:vml" xmlns:p="http://schemas.openxmlformats.org/presentationml/2006/main" xmlns:c="http://schemas.openxmlformats.org/drawingml/2006/chart" xmlns:dgm="http://schemas.openxmlformats.org/drawingml/2006/diagram" xmlns:o="urn:schemas-microsoft-com:office:office" xmlns:v="urn:schemas-microsoft-com:vml" xmlns:pvml="urn:schemas-microsoft-com:office:powerpoint" xmlns:com="http://schemas.openxmlformats.org/drawingml/2006/compatibility" xmlns:p14="http://schemas.microsoft.com/office/powerpoint/2010/main" xmlns:p15="http://schemas.microsoft.com/office/powerpoint/2012/main" xmlns:ahyp="http://schemas.microsoft.com/office/drawing/2018/hyperlinkcolor" showMasterPhAnim="0" showMasterSp="0">
+  <p:cSld>
+    <p:spTree>
+      <p:nvGrpSpPr>
+        <p:cNvPr id="219" name="Shape 219"/>
+        <p:cNvGrpSpPr/>
+        <p:nvPr/>
+      </p:nvGrpSpPr>
+      <p:grpSpPr>
+        <a:xfrm>
+          <a:off x="0" y="0"/>
+          <a:ext cx="0" cy="0"/>
+          <a:chOff x="0" y="0"/>
+          <a:chExt cx="0" cy="0"/>
+        </a:xfrm>
+      </p:grpSpPr>
+      <p:sp>
+        <p:nvSpPr>
+          <p:cNvPr id="220" name="Google Shape;220;g3957f4c9d0f_0_0:notes"/>
+          <p:cNvSpPr/>
+          <p:nvPr>
+            <p:ph idx="2" type="sldImg"/>
+          </p:nvPr>
+        </p:nvSpPr>
+        <p:spPr>
+          <a:xfrm>
+            <a:off x="381300" y="685800"/>
+            <a:ext cx="6096000" cy="3429000"/>
+          </a:xfrm>
+          <a:custGeom>
+            <a:rect b="b" l="l" r="r" t="t"/>
+            <a:pathLst>
+              <a:path extrusionOk="0" h="120000" w="120000">
+                <a:moveTo>
+                  <a:pt x="0" y="0"/>
+                </a:moveTo>
+                <a:lnTo>
+                  <a:pt x="120000" y="0"/>
+                </a:lnTo>
+                <a:lnTo>
+                  <a:pt x="120000" y="120000"/>
+                </a:lnTo>
+                <a:lnTo>
+                  <a:pt x="0" y="120000"/>
+                </a:lnTo>
+                <a:close/>
+              </a:path>
+            </a:pathLst>
+          </a:custGeom>
+        </p:spPr>
+      </p:sp>
+      <p:sp>
+        <p:nvSpPr>
+          <p:cNvPr id="221" name="Google Shape;221;g3957f4c9d0f_0_0:notes"/>
           <p:cNvSpPr txBox="1"/>
           <p:nvPr>
             <p:ph idx="1" type="body"/>
@@ -1757,6 +1858,105 @@
       <p:sp>
         <p:nvSpPr>
           <p:cNvPr id="58" name="Google Shape;58;g3c887823e2c_0_0:notes"/>
+          <p:cNvSpPr txBox="1"/>
+          <p:nvPr>
+            <p:ph idx="1" type="body"/>
+          </p:nvPr>
+        </p:nvSpPr>
+        <p:spPr>
+          <a:xfrm>
+            <a:off x="685800" y="4343400"/>
+            <a:ext cx="5486400" cy="4114800"/>
+          </a:xfrm>
+          <a:prstGeom prst="rect">
+            <a:avLst/>
+          </a:prstGeom>
+        </p:spPr>
+        <p:txBody>
+          <a:bodyPr anchorCtr="0" anchor="t" bIns="91425" lIns="91425" spcFirstLastPara="1" rIns="91425" wrap="square" tIns="91425">
+            <a:noAutofit/>
+          </a:bodyPr>
+          <a:lstStyle/>
+          <a:p>
+            <a:pPr indent="0" lvl="0" marL="0" rtl="0" algn="l">
+              <a:spcBef>
+                <a:spcPts val="0"/>
+              </a:spcBef>
+              <a:spcAft>
+                <a:spcPts val="0"/>
+              </a:spcAft>
+              <a:buNone/>
+            </a:pPr>
+            <a:r>
+              <a:t/>
+            </a:r>
+            <a:endParaRPr/>
+          </a:p>
+        </p:txBody>
+      </p:sp>
+    </p:spTree>
+  </p:cSld>
+  <p:clrMapOvr>
+    <a:masterClrMapping/>
+  </p:clrMapOvr>
+</p:notes>
+</file>
+
+<file path=ppt/notesSlides/notesSlide20.xml><?xml version="1.0" encoding="utf-8"?>
+<p:notes xmlns:a="http://schemas.openxmlformats.org/drawingml/2006/main" xmlns:r="http://schemas.openxmlformats.org/officeDocument/2006/relationships" xmlns:mc="http://schemas.openxmlformats.org/markup-compatibility/2006" xmlns:mv="urn:schemas-microsoft-com:mac:vml" xmlns:p="http://schemas.openxmlformats.org/presentationml/2006/main" xmlns:c="http://schemas.openxmlformats.org/drawingml/2006/chart" xmlns:dgm="http://schemas.openxmlformats.org/drawingml/2006/diagram" xmlns:o="urn:schemas-microsoft-com:office:office" xmlns:v="urn:schemas-microsoft-com:vml" xmlns:pvml="urn:schemas-microsoft-com:office:powerpoint" xmlns:com="http://schemas.openxmlformats.org/drawingml/2006/compatibility" xmlns:p14="http://schemas.microsoft.com/office/powerpoint/2010/main" xmlns:p15="http://schemas.microsoft.com/office/powerpoint/2012/main" xmlns:ahyp="http://schemas.microsoft.com/office/drawing/2018/hyperlinkcolor" showMasterPhAnim="0" showMasterSp="0">
+  <p:cSld>
+    <p:spTree>
+      <p:nvGrpSpPr>
+        <p:cNvPr id="225" name="Shape 225"/>
+        <p:cNvGrpSpPr/>
+        <p:nvPr/>
+      </p:nvGrpSpPr>
+      <p:grpSpPr>
+        <a:xfrm>
+          <a:off x="0" y="0"/>
+          <a:ext cx="0" cy="0"/>
+          <a:chOff x="0" y="0"/>
+          <a:chExt cx="0" cy="0"/>
+        </a:xfrm>
+      </p:grpSpPr>
+      <p:sp>
+        <p:nvSpPr>
+          <p:cNvPr id="226" name="Google Shape;226;g3957f86a122_1_12:notes"/>
+          <p:cNvSpPr/>
+          <p:nvPr>
+            <p:ph idx="2" type="sldImg"/>
+          </p:nvPr>
+        </p:nvSpPr>
+        <p:spPr>
+          <a:xfrm>
+            <a:off x="381300" y="685800"/>
+            <a:ext cx="6096000" cy="3429000"/>
+          </a:xfrm>
+          <a:custGeom>
+            <a:rect b="b" l="l" r="r" t="t"/>
+            <a:pathLst>
+              <a:path extrusionOk="0" h="120000" w="120000">
+                <a:moveTo>
+                  <a:pt x="0" y="0"/>
+                </a:moveTo>
+                <a:lnTo>
+                  <a:pt x="120000" y="0"/>
+                </a:lnTo>
+                <a:lnTo>
+                  <a:pt x="120000" y="120000"/>
+                </a:lnTo>
+                <a:lnTo>
+                  <a:pt x="0" y="120000"/>
+                </a:lnTo>
+                <a:close/>
+              </a:path>
+            </a:pathLst>
+          </a:custGeom>
+        </p:spPr>
+      </p:sp>
+      <p:sp>
+        <p:nvSpPr>
+          <p:cNvPr id="227" name="Google Shape;227;g3957f86a122_1_12:notes"/>
           <p:cNvSpPr txBox="1"/>
           <p:nvPr>
             <p:ph idx="1" type="body"/>
@@ -9720,7 +9920,7 @@
             </a:pPr>
             <a:r>
               <a:rPr lang="en"/>
-              <a:t>Common tricks..</a:t>
+              <a:t>RMS Normalization (RMSNorm)	</a:t>
             </a:r>
             <a:endParaRPr/>
           </a:p>
@@ -9737,7 +9937,7 @@
         <p:spPr>
           <a:xfrm>
             <a:off x="311700" y="1152475"/>
-            <a:ext cx="8520600" cy="3416400"/>
+            <a:ext cx="8520600" cy="990300"/>
           </a:xfrm>
           <a:prstGeom prst="rect">
             <a:avLst/>
@@ -9749,91 +9949,51 @@
           </a:bodyPr>
           <a:lstStyle/>
           <a:p>
-            <a:pPr indent="-342900" lvl="0" marL="457200" rtl="0" algn="l">
-              <a:spcBef>
-                <a:spcPts val="0"/>
-              </a:spcBef>
-              <a:spcAft>
-                <a:spcPts val="0"/>
-              </a:spcAft>
-              <a:buSzPts val="1800"/>
-              <a:buChar char="-"/>
+            <a:pPr indent="0" lvl="0" marL="0" rtl="0" algn="l">
+              <a:spcBef>
+                <a:spcPts val="0"/>
+              </a:spcBef>
+              <a:spcAft>
+                <a:spcPts val="1200"/>
+              </a:spcAft>
+              <a:buNone/>
             </a:pPr>
             <a:r>
               <a:rPr lang="en"/>
-              <a:t>Data augmentation</a:t>
-            </a:r>
-            <a:endParaRPr/>
-          </a:p>
-          <a:p>
-            <a:pPr indent="-342900" lvl="0" marL="457200" rtl="0" algn="l">
-              <a:spcBef>
-                <a:spcPts val="0"/>
-              </a:spcBef>
-              <a:spcAft>
-                <a:spcPts val="0"/>
-              </a:spcAft>
-              <a:buSzPts val="1800"/>
-              <a:buChar char="-"/>
-            </a:pPr>
-            <a:r>
-              <a:rPr lang="en"/>
-              <a:t>Setting up a convolutional network with downsampling points (using striding) accompanied by increase in channels</a:t>
-            </a:r>
-            <a:endParaRPr/>
-          </a:p>
-          <a:p>
-            <a:pPr indent="-342900" lvl="0" marL="457200" rtl="0" algn="l">
-              <a:spcBef>
-                <a:spcPts val="0"/>
-              </a:spcBef>
-              <a:spcAft>
-                <a:spcPts val="0"/>
-              </a:spcAft>
-              <a:buSzPts val="1800"/>
-              <a:buChar char="-"/>
-            </a:pPr>
-            <a:r>
-              <a:rPr lang="en"/>
-              <a:t>In the </a:t>
-            </a:r>
-            <a:r>
-              <a:rPr lang="en"/>
-              <a:t>batch</a:t>
-            </a:r>
-            <a:r>
-              <a:rPr lang="en"/>
-              <a:t> normalization + residual connection implementation, using the concept of blocks. Each block has several convolutional layers. First convolutional layer halves the spatial dimension and doubles the number of channels.</a:t>
-            </a:r>
-            <a:endParaRPr/>
-          </a:p>
-          <a:p>
-            <a:pPr indent="-342900" lvl="0" marL="457200" rtl="0" algn="l">
-              <a:spcBef>
-                <a:spcPts val="0"/>
-              </a:spcBef>
-              <a:spcAft>
-                <a:spcPts val="0"/>
-              </a:spcAft>
-              <a:buSzPts val="1800"/>
-              <a:buChar char="-"/>
-            </a:pPr>
-            <a:r>
-              <a:rPr lang="en"/>
-              <a:t>In the </a:t>
-            </a:r>
-            <a:r>
-              <a:rPr lang="en"/>
-              <a:t>residual</a:t>
-            </a:r>
-            <a:r>
-              <a:rPr lang="en"/>
-              <a:t> connection, add a 1d conv if spatial dimension change</a:t>
+              <a:t>Modern transformers use a simpler version of Layernorm called RMSNorm. RMSNorm removes the centering by the mean..</a:t>
             </a:r>
             <a:endParaRPr/>
           </a:p>
         </p:txBody>
       </p:sp>
+      <p:pic>
+        <p:nvPicPr>
+          <p:cNvPr descr="{&quot;backgroundColorModified&quot;:false,&quot;id&quot;:&quot;7&quot;,&quot;font&quot;:{&quot;family&quot;:&quot;Arial&quot;,&quot;size&quot;:12,&quot;color&quot;:&quot;#000000&quot;},&quot;backgroundColor&quot;:&quot;#FFFFFF&quot;,&quot;code&quot;:&quot;\\begin{gather*}\n{\\text{For}\\;\\text{eac}\\text{h}\\;\\text{sample}\\;x_{b}\\,\\text{(a}\\;\\text{D}\\;\\text{dimensional}\\;\\text{vector)}\\;\\text{in}\\;\\text{a}\\;\\text{batch}\\;\\text{of}\\;\\text{size}\\;\\text{B,}\\text{}}\\\\\n{\\sigma_{b}^{2}=\\frac{1}{D}\\sum_{i=1}^{D}\\left(x_{bi}\\right)^{2}}\\\\\n{r_{b}={\\sqrt[]{\\sigma_{b}^{2}+\\epsilon}}}\\\\\n{r_{b}:\\,\\text{RMSNorm}}\\\\\n{\\text{Normalized}\\;\\text{coordinates:}}\\\\\n{y_{bi}=\\lambda_{i}\\frac{x_{bi}}{r_{b}}}\t\n\\end{gather*}&quot;,&quot;aid&quot;:null,&quot;type&quot;:&quot;gather*&quot;,&quot;ts&quot;:1772896681877,&quot;cs&quot;:&quot;FeyBFSYuQ2EzGsbq37ILKA==&quot;,&quot;size&quot;:{&quot;width&quot;:524.5,&quot;height&quot;:212.5}}" id="211" name="Google Shape;211;p29"/>
+          <p:cNvPicPr preferRelativeResize="0"/>
+          <p:nvPr/>
+        </p:nvPicPr>
+        <p:blipFill>
+          <a:blip r:embed="rId3">
+            <a:alphaModFix/>
+          </a:blip>
+          <a:stretch>
+            <a:fillRect/>
+          </a:stretch>
+        </p:blipFill>
+        <p:spPr>
+          <a:xfrm>
+            <a:off x="417879" y="2277519"/>
+            <a:ext cx="4995863" cy="2024063"/>
+          </a:xfrm>
+          <a:prstGeom prst="rect">
+            <a:avLst/>
+          </a:prstGeom>
+          <a:noFill/>
+          <a:ln>
+            <a:noFill/>
+          </a:ln>
+        </p:spPr>
+      </p:pic>
     </p:spTree>
   </p:cSld>
   <p:clrMapOvr>
@@ -9847,7 +10007,7 @@
   <p:cSld>
     <p:spTree>
       <p:nvGrpSpPr>
-        <p:cNvPr id="214" name="Shape 214"/>
+        <p:cNvPr id="215" name="Shape 215"/>
         <p:cNvGrpSpPr/>
         <p:nvPr/>
       </p:nvGrpSpPr>
@@ -9861,7 +10021,7 @@
       </p:grpSpPr>
       <p:sp>
         <p:nvSpPr>
-          <p:cNvPr id="215" name="Google Shape;215;p30"/>
+          <p:cNvPr id="216" name="Google Shape;216;p30"/>
           <p:cNvSpPr txBox="1"/>
           <p:nvPr>
             <p:ph type="title"/>
@@ -9893,15 +10053,7 @@
             </a:pPr>
             <a:r>
               <a:rPr lang="en"/>
-              <a:t>Using lower precision data types in the </a:t>
-            </a:r>
-            <a:r>
-              <a:rPr lang="en"/>
-              <a:t>training</a:t>
-            </a:r>
-            <a:r>
-              <a:rPr lang="en"/>
-              <a:t> loop</a:t>
+              <a:t>RMSNorm: Backprop</a:t>
             </a:r>
             <a:endParaRPr/>
           </a:p>
@@ -9909,26 +10061,24 @@
       </p:sp>
       <p:sp>
         <p:nvSpPr>
-          <p:cNvPr id="216" name="Google Shape;216;p30"/>
+          <p:cNvPr id="217" name="Google Shape;217;p30"/>
           <p:cNvSpPr txBox="1"/>
-          <p:nvPr/>
-        </p:nvSpPr>
-        <p:spPr>
-          <a:xfrm>
-            <a:off x="5454900" y="1156275"/>
-            <a:ext cx="3585600" cy="600300"/>
+          <p:nvPr>
+            <p:ph idx="1" type="body"/>
+          </p:nvPr>
+        </p:nvSpPr>
+        <p:spPr>
+          <a:xfrm>
+            <a:off x="311700" y="1152475"/>
+            <a:ext cx="2361600" cy="532800"/>
           </a:xfrm>
           <a:prstGeom prst="rect">
             <a:avLst/>
           </a:prstGeom>
-          <a:noFill/>
-          <a:ln>
-            <a:noFill/>
-          </a:ln>
         </p:spPr>
         <p:txBody>
           <a:bodyPr anchorCtr="0" anchor="t" bIns="91425" lIns="91425" spcFirstLastPara="1" rIns="91425" wrap="square" tIns="91425">
-            <a:spAutoFit/>
+            <a:normAutofit fontScale="62500" lnSpcReduction="20000"/>
           </a:bodyPr>
           <a:lstStyle/>
           <a:p>
@@ -9937,431 +10087,21 @@
                 <a:spcPts val="0"/>
               </a:spcBef>
               <a:spcAft>
-                <a:spcPts val="0"/>
+                <a:spcPts val="1200"/>
               </a:spcAft>
               <a:buNone/>
             </a:pPr>
             <a:r>
-              <a:rPr lang="en" sz="900">
-                <a:solidFill>
-                  <a:schemeClr val="dk1"/>
-                </a:solidFill>
-              </a:rPr>
-              <a:t>A</a:t>
-            </a:r>
-            <a:r>
-              <a:rPr lang="en" sz="900">
-                <a:solidFill>
-                  <a:schemeClr val="dk1"/>
-                </a:solidFill>
-              </a:rPr>
-              <a:t>ffects </a:t>
-            </a:r>
-            <a:r>
-              <a:rPr b="1" lang="en" sz="900">
-                <a:solidFill>
-                  <a:schemeClr val="dk1"/>
-                </a:solidFill>
-              </a:rPr>
-              <a:t>ops executed inside the context</a:t>
-            </a:r>
-            <a:r>
-              <a:rPr lang="en" sz="900">
-                <a:solidFill>
-                  <a:schemeClr val="dk1"/>
-                </a:solidFill>
-              </a:rPr>
-              <a:t> by choosing a “fast” dtype for each op (fp16/bf16 for many GEMMs/convs, fp32 for numerically sensitive ops like some reductions/softmax parts, etc.)</a:t>
-            </a:r>
-            <a:endParaRPr sz="1200"/>
+              <a:rPr lang="en"/>
+              <a:t>The derivative of loss against lambda is identical to Layernorm.</a:t>
+            </a:r>
+            <a:endParaRPr/>
           </a:p>
         </p:txBody>
       </p:sp>
-      <p:sp>
-        <p:nvSpPr>
-          <p:cNvPr id="217" name="Google Shape;217;p30"/>
-          <p:cNvSpPr txBox="1"/>
-          <p:nvPr/>
-        </p:nvSpPr>
-        <p:spPr>
-          <a:xfrm>
-            <a:off x="5557800" y="1978100"/>
-            <a:ext cx="3379800" cy="1262100"/>
-          </a:xfrm>
-          <a:prstGeom prst="rect">
-            <a:avLst/>
-          </a:prstGeom>
-          <a:noFill/>
-          <a:ln>
-            <a:noFill/>
-          </a:ln>
-        </p:spPr>
-        <p:txBody>
-          <a:bodyPr anchorCtr="0" anchor="t" bIns="91425" lIns="91425" spcFirstLastPara="1" rIns="91425" wrap="square" tIns="91425">
-            <a:spAutoFit/>
-          </a:bodyPr>
-          <a:lstStyle/>
-          <a:p>
-            <a:pPr indent="0" lvl="0" marL="0" rtl="0" algn="l">
-              <a:spcBef>
-                <a:spcPts val="0"/>
-              </a:spcBef>
-              <a:spcAft>
-                <a:spcPts val="0"/>
-              </a:spcAft>
-              <a:buNone/>
-            </a:pPr>
-            <a:r>
-              <a:rPr lang="en" sz="1000">
-                <a:solidFill>
-                  <a:schemeClr val="dk1"/>
-                </a:solidFill>
-              </a:rPr>
-              <a:t>If we computed gradients also in a lower dtype (eg., fp16), small gradients might underflow to 0. So, we scale up the loss and then calculate the gradients. This way gradient flow is preserved. Also, gradients often sum many contributions. In low precision, when you add a tiny number to a running total, the tiny increment can get rounded away. </a:t>
-            </a:r>
-            <a:endParaRPr sz="1300"/>
-          </a:p>
-        </p:txBody>
-      </p:sp>
-      <p:sp>
-        <p:nvSpPr>
-          <p:cNvPr id="218" name="Google Shape;218;p30"/>
-          <p:cNvSpPr txBox="1"/>
-          <p:nvPr/>
-        </p:nvSpPr>
-        <p:spPr>
-          <a:xfrm>
-            <a:off x="97975" y="1177700"/>
-            <a:ext cx="2916900" cy="800400"/>
-          </a:xfrm>
-          <a:prstGeom prst="rect">
-            <a:avLst/>
-          </a:prstGeom>
-          <a:noFill/>
-          <a:ln>
-            <a:noFill/>
-          </a:ln>
-        </p:spPr>
-        <p:txBody>
-          <a:bodyPr anchorCtr="0" anchor="t" bIns="91425" lIns="91425" spcFirstLastPara="1" rIns="91425" wrap="square" tIns="91425">
-            <a:spAutoFit/>
-          </a:bodyPr>
-          <a:lstStyle/>
-          <a:p>
-            <a:pPr indent="0" lvl="0" marL="0" rtl="0" algn="l">
-              <a:spcBef>
-                <a:spcPts val="0"/>
-              </a:spcBef>
-              <a:spcAft>
-                <a:spcPts val="0"/>
-              </a:spcAft>
-              <a:buNone/>
-            </a:pPr>
-            <a:r>
-              <a:rPr lang="en" sz="1000">
-                <a:solidFill>
-                  <a:schemeClr val="dk1"/>
-                </a:solidFill>
-              </a:rPr>
-              <a:t>Once the gradients have been calculated, we scale them back to the original scale. Generally gradients are represented in full precision at this step, so underflow isn’t an issue </a:t>
-            </a:r>
-            <a:endParaRPr sz="1300"/>
-          </a:p>
-        </p:txBody>
-      </p:sp>
-      <p:sp>
-        <p:nvSpPr>
-          <p:cNvPr id="219" name="Google Shape;219;p30"/>
-          <p:cNvSpPr txBox="1"/>
-          <p:nvPr/>
-        </p:nvSpPr>
-        <p:spPr>
-          <a:xfrm>
-            <a:off x="235500" y="3945225"/>
-            <a:ext cx="3000000" cy="461700"/>
-          </a:xfrm>
-          <a:prstGeom prst="rect">
-            <a:avLst/>
-          </a:prstGeom>
-          <a:noFill/>
-          <a:ln>
-            <a:noFill/>
-          </a:ln>
-        </p:spPr>
-        <p:txBody>
-          <a:bodyPr anchorCtr="0" anchor="t" bIns="91425" lIns="91425" spcFirstLastPara="1" rIns="91425" wrap="square" tIns="91425">
-            <a:spAutoFit/>
-          </a:bodyPr>
-          <a:lstStyle/>
-          <a:p>
-            <a:pPr indent="0" lvl="0" marL="0" rtl="0" algn="l">
-              <a:spcBef>
-                <a:spcPts val="0"/>
-              </a:spcBef>
-              <a:spcAft>
-                <a:spcPts val="0"/>
-              </a:spcAft>
-              <a:buNone/>
-            </a:pPr>
-            <a:r>
-              <a:rPr lang="en" sz="900">
-                <a:solidFill>
-                  <a:schemeClr val="dk1"/>
-                </a:solidFill>
-              </a:rPr>
-              <a:t>checks if any grads are inf/nan. If yes, it </a:t>
-            </a:r>
-            <a:r>
-              <a:rPr b="1" lang="en" sz="900">
-                <a:solidFill>
-                  <a:schemeClr val="dk1"/>
-                </a:solidFill>
-              </a:rPr>
-              <a:t>skips</a:t>
-            </a:r>
-            <a:r>
-              <a:rPr lang="en" sz="900">
-                <a:solidFill>
-                  <a:schemeClr val="dk1"/>
-                </a:solidFill>
-              </a:rPr>
-              <a:t> </a:t>
-            </a:r>
-            <a:r>
-              <a:rPr lang="en" sz="900">
-                <a:solidFill>
-                  <a:schemeClr val="dk1"/>
-                </a:solidFill>
-              </a:rPr>
-              <a:t>optimizer.step().</a:t>
-            </a:r>
-            <a:endParaRPr sz="900">
-              <a:solidFill>
-                <a:schemeClr val="dk1"/>
-              </a:solidFill>
-            </a:endParaRPr>
-          </a:p>
-        </p:txBody>
-      </p:sp>
-      <p:sp>
-        <p:nvSpPr>
-          <p:cNvPr id="220" name="Google Shape;220;p30"/>
-          <p:cNvSpPr txBox="1"/>
-          <p:nvPr/>
-        </p:nvSpPr>
-        <p:spPr>
-          <a:xfrm>
-            <a:off x="3323700" y="4200575"/>
-            <a:ext cx="2496600" cy="492600"/>
-          </a:xfrm>
-          <a:prstGeom prst="rect">
-            <a:avLst/>
-          </a:prstGeom>
-          <a:noFill/>
-          <a:ln>
-            <a:noFill/>
-          </a:ln>
-        </p:spPr>
-        <p:txBody>
-          <a:bodyPr anchorCtr="0" anchor="t" bIns="91425" lIns="91425" spcFirstLastPara="1" rIns="91425" wrap="square" tIns="91425">
-            <a:spAutoFit/>
-          </a:bodyPr>
-          <a:lstStyle/>
-          <a:p>
-            <a:pPr indent="0" lvl="0" marL="0" rtl="0" algn="l">
-              <a:spcBef>
-                <a:spcPts val="0"/>
-              </a:spcBef>
-              <a:spcAft>
-                <a:spcPts val="0"/>
-              </a:spcAft>
-              <a:buNone/>
-            </a:pPr>
-            <a:r>
-              <a:rPr lang="en" sz="1000">
-                <a:solidFill>
-                  <a:schemeClr val="dk1"/>
-                </a:solidFill>
-              </a:rPr>
-              <a:t>A</a:t>
-            </a:r>
-            <a:r>
-              <a:rPr lang="en" sz="1000">
-                <a:solidFill>
-                  <a:schemeClr val="dk1"/>
-                </a:solidFill>
-              </a:rPr>
-              <a:t>djusts </a:t>
-            </a:r>
-            <a:r>
-              <a:rPr lang="en" sz="1000">
-                <a:solidFill>
-                  <a:srgbClr val="188038"/>
-                </a:solidFill>
-                <a:latin typeface="Roboto Mono"/>
-                <a:ea typeface="Roboto Mono"/>
-                <a:cs typeface="Roboto Mono"/>
-                <a:sym typeface="Roboto Mono"/>
-              </a:rPr>
-              <a:t>S</a:t>
-            </a:r>
-            <a:r>
-              <a:rPr lang="en" sz="1000">
-                <a:solidFill>
-                  <a:schemeClr val="dk1"/>
-                </a:solidFill>
-              </a:rPr>
-              <a:t> (down if overflow happened; up slowly if things are stable)</a:t>
-            </a:r>
-            <a:endParaRPr sz="1300"/>
-          </a:p>
-        </p:txBody>
-      </p:sp>
-      <p:sp>
-        <p:nvSpPr>
-          <p:cNvPr id="221" name="Google Shape;221;p30"/>
-          <p:cNvSpPr txBox="1"/>
-          <p:nvPr/>
-        </p:nvSpPr>
-        <p:spPr>
-          <a:xfrm>
-            <a:off x="0" y="2220850"/>
-            <a:ext cx="2396400" cy="1339200"/>
-          </a:xfrm>
-          <a:prstGeom prst="rect">
-            <a:avLst/>
-          </a:prstGeom>
-          <a:noFill/>
-          <a:ln>
-            <a:noFill/>
-          </a:ln>
-        </p:spPr>
-        <p:txBody>
-          <a:bodyPr anchorCtr="0" anchor="t" bIns="91425" lIns="91425" spcFirstLastPara="1" rIns="91425" wrap="square" tIns="91425">
-            <a:spAutoFit/>
-          </a:bodyPr>
-          <a:lstStyle/>
-          <a:p>
-            <a:pPr indent="0" lvl="0" marL="0" rtl="0" algn="l">
-              <a:spcBef>
-                <a:spcPts val="0"/>
-              </a:spcBef>
-              <a:spcAft>
-                <a:spcPts val="0"/>
-              </a:spcAft>
-              <a:buNone/>
-            </a:pPr>
-            <a:r>
-              <a:rPr lang="en" sz="900">
-                <a:solidFill>
-                  <a:schemeClr val="dk1"/>
-                </a:solidFill>
-              </a:rPr>
-              <a:t>It looks at </a:t>
-            </a:r>
-            <a:r>
-              <a:rPr b="1" lang="en" sz="900">
-                <a:solidFill>
-                  <a:schemeClr val="dk1"/>
-                </a:solidFill>
-              </a:rPr>
-              <a:t>all gradients together</a:t>
-            </a:r>
-            <a:r>
-              <a:rPr lang="en" sz="900">
-                <a:solidFill>
-                  <a:schemeClr val="dk1"/>
-                </a:solidFill>
-              </a:rPr>
-              <a:t> (over all parameters), computes a </a:t>
-            </a:r>
-            <a:r>
-              <a:rPr b="1" lang="en" sz="900">
-                <a:solidFill>
-                  <a:schemeClr val="dk1"/>
-                </a:solidFill>
-              </a:rPr>
-              <a:t>global norm</a:t>
-            </a:r>
-            <a:r>
-              <a:rPr lang="en" sz="900">
-                <a:solidFill>
-                  <a:schemeClr val="dk1"/>
-                </a:solidFill>
-              </a:rPr>
-              <a:t> (usually L2), and if that norm is bigger than your threshold </a:t>
-            </a:r>
-            <a:r>
-              <a:rPr lang="en" sz="900">
-                <a:solidFill>
-                  <a:srgbClr val="188038"/>
-                </a:solidFill>
-                <a:latin typeface="Roboto Mono"/>
-                <a:ea typeface="Roboto Mono"/>
-                <a:cs typeface="Roboto Mono"/>
-                <a:sym typeface="Roboto Mono"/>
-              </a:rPr>
-              <a:t>grad_clip</a:t>
-            </a:r>
-            <a:r>
-              <a:rPr lang="en" sz="900">
-                <a:solidFill>
-                  <a:schemeClr val="dk1"/>
-                </a:solidFill>
-              </a:rPr>
-              <a:t>, it multiplies </a:t>
-            </a:r>
-            <a:r>
-              <a:rPr lang="en" sz="900">
-                <a:solidFill>
-                  <a:schemeClr val="dk1"/>
-                </a:solidFill>
-              </a:rPr>
-              <a:t>every gradient tensor</a:t>
-            </a:r>
-            <a:r>
-              <a:rPr lang="en" sz="900">
-                <a:solidFill>
-                  <a:schemeClr val="dk1"/>
-                </a:solidFill>
-              </a:rPr>
-              <a:t> by the same factor so the global norm becomes </a:t>
-            </a:r>
-            <a:r>
-              <a:rPr lang="en" sz="900">
-                <a:solidFill>
-                  <a:srgbClr val="188038"/>
-                </a:solidFill>
-                <a:latin typeface="Roboto Mono"/>
-                <a:ea typeface="Roboto Mono"/>
-                <a:cs typeface="Roboto Mono"/>
-                <a:sym typeface="Roboto Mono"/>
-              </a:rPr>
-              <a:t>grad_clip.</a:t>
-            </a:r>
-            <a:r>
-              <a:rPr lang="en" sz="900">
-                <a:solidFill>
-                  <a:schemeClr val="dk1"/>
-                </a:solidFill>
-              </a:rPr>
-              <a:t>It prevents large parameter updates due to gradient spikes. </a:t>
-            </a:r>
-            <a:r>
-              <a:rPr lang="en" sz="1200">
-                <a:solidFill>
-                  <a:schemeClr val="dk1"/>
-                </a:solidFill>
-              </a:rPr>
-              <a:t> </a:t>
-            </a:r>
-            <a:endParaRPr sz="1500"/>
-          </a:p>
-        </p:txBody>
-      </p:sp>
       <p:pic>
         <p:nvPicPr>
-          <p:cNvPr id="222" name="Google Shape;222;p30"/>
+          <p:cNvPr descr="{&quot;code&quot;:&quot;\\begin{gather*}\n{\\text{Let's}\\;\\text{calculate}\\;\\pdf{L}{x_{i}}}\\\\\n{\\pdf{L}{x_{i}}=\\sum_{j=1}^{D}\\pdf{L}{y_{j}}\\pdf{y_{j}}{x_{i}}}\\\\\n{\\text{As}\\;\\text{before,}\\;\\text{we}\\;\\text{denote}\\;\\pdf{L}{y_{j}}\\,\\text{by}\\;g_{j}}\\\\\n{\\pdf{y_{j}}{x_{i}}=\\lambda_{j}\\left[\\frac{r\\pdf{x_{j}}{x_{i}}-x_{j}\\pdf{r}{x_{i}}}{r^{2}}\\right]}\\\\\n{\\text{It}\\;\\text{is}\\;\\text{easy}\\;\\text{to}\\;\\text{verify}\\;\\text{that}\\;\\pdf{r}{x_{i}}=\\frac{x_{i}}{r}}\\\\\n{\\pdf{y_{j}}{x_{i}}=\\lambda_{j}\\left[\\frac{r\\pdf{x_{j}}{x_{i}}-x_{j}\\frac{x_{i}}{r}}{r^{2}}\\right]}\\\\\n{\\pdf{L}{x_{i}}=\\sum_{j=1,\\,j\\neq i}^{D}\\frac{-g_{j}\\lambda_{j}x_{j}x_{i}}{r^{3}}+\\lambda_{i}g_{i}\\left[\\frac{1}{r}-\\frac{x_{i}^{2}}{r^{3}}\\right]}\\\\\n{=\\frac{\\lambda_{i}g_{i}}{r}-\\sum_{j=1}^{D}\\frac{g_{j}\\lambda_{j}x_{j}x_{i}}{r^{3}}}\\\\\n{\\text{Denoting}\\;\\text{u=g}\\odot\\lambda}\\\\\n{\\pdf{L}{x}=\\frac{u}{r}-\\frac{x}{r^{3}}u^{T}x,\\,\\text{here}\\;x\\,\\text{is}\\;\\text{the}\\;\\text{entire}\\;\\text{feature}\\;\\text{vector}}\t\n\\end{gather*}&quot;,&quot;backgroundColorModified&quot;:false,&quot;id&quot;:&quot;13&quot;,&quot;backgroundColor&quot;:&quot;#FFFFFF&quot;,&quot;type&quot;:&quot;gather*&quot;,&quot;aid&quot;:null,&quot;font&quot;:{&quot;family&quot;:&quot;Arial&quot;,&quot;color&quot;:&quot;#000000&quot;,&quot;size&quot;:11},&quot;ts&quot;:1772898003840,&quot;cs&quot;:&quot;zn+9u9YdzdsMgNRfplaAwg==&quot;,&quot;size&quot;:{&quot;width&quot;:401.1023162729659,&quot;height&quot;:501.7216960629921}}" id="218" name="Google Shape;218;p30"/>
           <p:cNvPicPr preferRelativeResize="0"/>
           <p:nvPr/>
         </p:nvPicPr>
@@ -10375,8 +10115,8 @@
         </p:blipFill>
         <p:spPr>
           <a:xfrm>
-            <a:off x="2651272" y="1830947"/>
-            <a:ext cx="2833025" cy="1872700"/>
+            <a:off x="3670626" y="161575"/>
+            <a:ext cx="3820500" cy="4778899"/>
           </a:xfrm>
           <a:prstGeom prst="rect">
             <a:avLst/>
@@ -10387,186 +10127,51 @@
           </a:ln>
         </p:spPr>
       </p:pic>
-      <p:cxnSp>
-        <p:nvCxnSpPr>
-          <p:cNvPr id="223" name="Google Shape;223;p30"/>
-          <p:cNvCxnSpPr>
-            <a:stCxn id="216" idx="1"/>
-          </p:cNvCxnSpPr>
-          <p:nvPr/>
-        </p:nvCxnSpPr>
-        <p:spPr>
-          <a:xfrm flipH="1">
-            <a:off x="4903500" y="1456425"/>
-            <a:ext cx="551400" cy="413400"/>
-          </a:xfrm>
-          <a:prstGeom prst="straightConnector1">
-            <a:avLst/>
-          </a:prstGeom>
-          <a:noFill/>
-          <a:ln cap="flat" cmpd="sng" w="9525">
-            <a:solidFill>
-              <a:schemeClr val="dk2"/>
-            </a:solidFill>
-            <a:prstDash val="solid"/>
-            <a:round/>
-            <a:headEnd len="med" w="med" type="none"/>
-            <a:tailEnd len="med" w="med" type="triangle"/>
-          </a:ln>
-        </p:spPr>
-      </p:cxnSp>
-      <p:cxnSp>
-        <p:nvCxnSpPr>
-          <p:cNvPr id="224" name="Google Shape;224;p30"/>
-          <p:cNvCxnSpPr/>
-          <p:nvPr/>
-        </p:nvCxnSpPr>
-        <p:spPr>
-          <a:xfrm flipH="1">
-            <a:off x="4492350" y="2273675"/>
-            <a:ext cx="1093800" cy="252000"/>
-          </a:xfrm>
-          <a:prstGeom prst="straightConnector1">
-            <a:avLst/>
-          </a:prstGeom>
-          <a:noFill/>
-          <a:ln cap="flat" cmpd="sng" w="9525">
-            <a:solidFill>
-              <a:schemeClr val="dk2"/>
-            </a:solidFill>
-            <a:prstDash val="solid"/>
-            <a:round/>
-            <a:headEnd len="med" w="med" type="none"/>
-            <a:tailEnd len="med" w="med" type="triangle"/>
-          </a:ln>
-        </p:spPr>
-      </p:cxnSp>
-      <p:cxnSp>
-        <p:nvCxnSpPr>
-          <p:cNvPr id="225" name="Google Shape;225;p30"/>
-          <p:cNvCxnSpPr/>
-          <p:nvPr/>
-        </p:nvCxnSpPr>
-        <p:spPr>
-          <a:xfrm>
-            <a:off x="2308025" y="1830950"/>
-            <a:ext cx="739200" cy="953100"/>
-          </a:xfrm>
-          <a:prstGeom prst="straightConnector1">
-            <a:avLst/>
-          </a:prstGeom>
-          <a:noFill/>
-          <a:ln cap="flat" cmpd="sng" w="9525">
-            <a:solidFill>
-              <a:schemeClr val="dk2"/>
-            </a:solidFill>
-            <a:prstDash val="solid"/>
-            <a:round/>
-            <a:headEnd len="med" w="med" type="none"/>
-            <a:tailEnd len="med" w="med" type="triangle"/>
-          </a:ln>
-        </p:spPr>
-      </p:cxnSp>
-      <p:cxnSp>
-        <p:nvCxnSpPr>
-          <p:cNvPr id="226" name="Google Shape;226;p30"/>
-          <p:cNvCxnSpPr/>
-          <p:nvPr/>
-        </p:nvCxnSpPr>
-        <p:spPr>
-          <a:xfrm flipH="1" rot="10800000">
-            <a:off x="2276250" y="3024225"/>
-            <a:ext cx="401700" cy="23100"/>
-          </a:xfrm>
-          <a:prstGeom prst="straightConnector1">
-            <a:avLst/>
-          </a:prstGeom>
-          <a:noFill/>
-          <a:ln cap="flat" cmpd="sng" w="9525">
-            <a:solidFill>
-              <a:schemeClr val="dk2"/>
-            </a:solidFill>
-            <a:prstDash val="solid"/>
-            <a:round/>
-            <a:headEnd len="med" w="med" type="none"/>
-            <a:tailEnd len="med" w="med" type="triangle"/>
-          </a:ln>
-        </p:spPr>
-      </p:cxnSp>
-      <p:cxnSp>
-        <p:nvCxnSpPr>
-          <p:cNvPr id="227" name="Google Shape;227;p30"/>
-          <p:cNvCxnSpPr/>
-          <p:nvPr/>
-        </p:nvCxnSpPr>
-        <p:spPr>
-          <a:xfrm flipH="1" rot="10800000">
-            <a:off x="1906325" y="3472125"/>
-            <a:ext cx="780900" cy="496200"/>
-          </a:xfrm>
-          <a:prstGeom prst="straightConnector1">
-            <a:avLst/>
-          </a:prstGeom>
-          <a:noFill/>
-          <a:ln cap="flat" cmpd="sng" w="9525">
-            <a:solidFill>
-              <a:schemeClr val="dk2"/>
-            </a:solidFill>
-            <a:prstDash val="solid"/>
-            <a:round/>
-            <a:headEnd len="med" w="med" type="none"/>
-            <a:tailEnd len="med" w="med" type="triangle"/>
-          </a:ln>
-        </p:spPr>
-      </p:cxnSp>
-      <p:cxnSp>
-        <p:nvCxnSpPr>
-          <p:cNvPr id="228" name="Google Shape;228;p30"/>
-          <p:cNvCxnSpPr/>
-          <p:nvPr/>
-        </p:nvCxnSpPr>
-        <p:spPr>
-          <a:xfrm rot="10800000">
-            <a:off x="3287550" y="3675250"/>
-            <a:ext cx="451800" cy="505500"/>
-          </a:xfrm>
-          <a:prstGeom prst="straightConnector1">
-            <a:avLst/>
-          </a:prstGeom>
-          <a:noFill/>
-          <a:ln cap="flat" cmpd="sng" w="9525">
-            <a:solidFill>
-              <a:schemeClr val="dk2"/>
-            </a:solidFill>
-            <a:prstDash val="solid"/>
-            <a:round/>
-            <a:headEnd len="med" w="med" type="none"/>
-            <a:tailEnd len="med" w="med" type="triangle"/>
-          </a:ln>
-        </p:spPr>
-      </p:cxnSp>
-      <p:sp>
-        <p:nvSpPr>
-          <p:cNvPr id="229" name="Google Shape;229;p30"/>
+    </p:spTree>
+  </p:cSld>
+  <p:clrMapOvr>
+    <a:masterClrMapping/>
+  </p:clrMapOvr>
+</p:sld>
+</file>
+
+<file path=ppt/slides/slide19.xml><?xml version="1.0" encoding="utf-8"?>
+<p:sld xmlns:a="http://schemas.openxmlformats.org/drawingml/2006/main" xmlns:r="http://schemas.openxmlformats.org/officeDocument/2006/relationships" xmlns:mc="http://schemas.openxmlformats.org/markup-compatibility/2006" xmlns:mv="urn:schemas-microsoft-com:mac:vml" xmlns:p="http://schemas.openxmlformats.org/presentationml/2006/main" xmlns:c="http://schemas.openxmlformats.org/drawingml/2006/chart" xmlns:dgm="http://schemas.openxmlformats.org/drawingml/2006/diagram" xmlns:o="urn:schemas-microsoft-com:office:office" xmlns:v="urn:schemas-microsoft-com:vml" xmlns:pvml="urn:schemas-microsoft-com:office:powerpoint" xmlns:com="http://schemas.openxmlformats.org/drawingml/2006/compatibility" xmlns:p14="http://schemas.microsoft.com/office/powerpoint/2010/main" xmlns:p15="http://schemas.microsoft.com/office/powerpoint/2012/main" xmlns:ahyp="http://schemas.microsoft.com/office/drawing/2018/hyperlinkcolor">
+  <p:cSld>
+    <p:spTree>
+      <p:nvGrpSpPr>
+        <p:cNvPr id="222" name="Shape 222"/>
+        <p:cNvGrpSpPr/>
+        <p:nvPr/>
+      </p:nvGrpSpPr>
+      <p:grpSpPr>
+        <a:xfrm>
+          <a:off x="0" y="0"/>
+          <a:ext cx="0" cy="0"/>
+          <a:chOff x="0" y="0"/>
+          <a:chExt cx="0" cy="0"/>
+        </a:xfrm>
+      </p:grpSpPr>
+      <p:sp>
+        <p:nvSpPr>
+          <p:cNvPr id="223" name="Google Shape;223;p31"/>
           <p:cNvSpPr txBox="1"/>
-          <p:nvPr/>
-        </p:nvSpPr>
-        <p:spPr>
-          <a:xfrm>
-            <a:off x="5937600" y="3601250"/>
-            <a:ext cx="3000000" cy="1262100"/>
+          <p:nvPr>
+            <p:ph type="title"/>
+          </p:nvPr>
+        </p:nvSpPr>
+        <p:spPr>
+          <a:xfrm>
+            <a:off x="311700" y="445025"/>
+            <a:ext cx="8520600" cy="572700"/>
           </a:xfrm>
           <a:prstGeom prst="rect">
             <a:avLst/>
           </a:prstGeom>
-          <a:noFill/>
-          <a:ln>
-            <a:noFill/>
-          </a:ln>
         </p:spPr>
         <p:txBody>
           <a:bodyPr anchorCtr="0" anchor="t" bIns="91425" lIns="91425" spcFirstLastPara="1" rIns="91425" wrap="square" tIns="91425">
-            <a:spAutoFit/>
+            <a:normAutofit fontScale="90000"/>
           </a:bodyPr>
           <a:lstStyle/>
           <a:p>
@@ -10580,155 +10185,118 @@
               <a:buNone/>
             </a:pPr>
             <a:r>
-              <a:rPr b="1" lang="en" sz="1000"/>
-              <a:t>Default precision:</a:t>
-            </a:r>
-            <a:endParaRPr b="1" sz="1000"/>
-          </a:p>
-          <a:p>
-            <a:pPr indent="0" lvl="0" marL="0" rtl="0" algn="l">
-              <a:spcBef>
-                <a:spcPts val="0"/>
-              </a:spcBef>
-              <a:spcAft>
-                <a:spcPts val="0"/>
-              </a:spcAft>
-              <a:buNone/>
-            </a:pPr>
-            <a:r>
-              <a:rPr lang="en" sz="1000"/>
-              <a:t>Total execution time = 2.549 sec</a:t>
-            </a:r>
-            <a:endParaRPr sz="1000"/>
-          </a:p>
-          <a:p>
-            <a:pPr indent="0" lvl="0" marL="0" rtl="0" algn="l">
-              <a:spcBef>
-                <a:spcPts val="0"/>
-              </a:spcBef>
-              <a:spcAft>
-                <a:spcPts val="0"/>
-              </a:spcAft>
-              <a:buNone/>
-            </a:pPr>
-            <a:r>
-              <a:rPr lang="en" sz="1000"/>
-              <a:t>Max memory used by tensors = 2.78 GB</a:t>
-            </a:r>
-            <a:endParaRPr sz="1000"/>
-          </a:p>
-          <a:p>
-            <a:pPr indent="0" lvl="0" marL="0" rtl="0" algn="l">
-              <a:spcBef>
-                <a:spcPts val="0"/>
-              </a:spcBef>
-              <a:spcAft>
-                <a:spcPts val="0"/>
-              </a:spcAft>
-              <a:buNone/>
-            </a:pPr>
-            <a:r>
-              <a:t/>
-            </a:r>
-            <a:endParaRPr sz="1000"/>
-          </a:p>
-          <a:p>
-            <a:pPr indent="0" lvl="0" marL="0" rtl="0" algn="l">
-              <a:spcBef>
-                <a:spcPts val="0"/>
-              </a:spcBef>
-              <a:spcAft>
-                <a:spcPts val="0"/>
-              </a:spcAft>
-              <a:buNone/>
-            </a:pPr>
-            <a:r>
-              <a:rPr b="1" lang="en" sz="1000"/>
-              <a:t>Mixed precision:</a:t>
-            </a:r>
-            <a:endParaRPr b="1" sz="1000"/>
-          </a:p>
-          <a:p>
-            <a:pPr indent="0" lvl="0" marL="0" rtl="0" algn="l">
-              <a:spcBef>
-                <a:spcPts val="0"/>
-              </a:spcBef>
-              <a:spcAft>
-                <a:spcPts val="0"/>
-              </a:spcAft>
-              <a:buNone/>
-            </a:pPr>
-            <a:r>
-              <a:rPr lang="en" sz="1000"/>
-              <a:t>Total execution time = 1.354 sec</a:t>
-            </a:r>
-            <a:endParaRPr sz="1000"/>
-          </a:p>
-          <a:p>
-            <a:pPr indent="0" lvl="0" marL="0" rtl="0" algn="l">
-              <a:spcBef>
-                <a:spcPts val="0"/>
-              </a:spcBef>
-              <a:spcAft>
-                <a:spcPts val="0"/>
-              </a:spcAft>
-              <a:buNone/>
-            </a:pPr>
-            <a:r>
-              <a:rPr lang="en" sz="1000"/>
-              <a:t>Max memory used by tensors = 2.76 GB</a:t>
-            </a:r>
-            <a:endParaRPr sz="1000"/>
+              <a:rPr lang="en"/>
+              <a:t>Common tricks..</a:t>
+            </a:r>
+            <a:endParaRPr/>
           </a:p>
         </p:txBody>
       </p:sp>
       <p:sp>
         <p:nvSpPr>
-          <p:cNvPr id="230" name="Google Shape;230;p30"/>
+          <p:cNvPr id="224" name="Google Shape;224;p31"/>
           <p:cNvSpPr txBox="1"/>
-          <p:nvPr/>
-        </p:nvSpPr>
-        <p:spPr>
-          <a:xfrm>
-            <a:off x="56425" y="4723350"/>
-            <a:ext cx="3000000" cy="338700"/>
+          <p:nvPr>
+            <p:ph idx="1" type="body"/>
+          </p:nvPr>
+        </p:nvSpPr>
+        <p:spPr>
+          <a:xfrm>
+            <a:off x="311700" y="1152475"/>
+            <a:ext cx="8520600" cy="3416400"/>
           </a:xfrm>
           <a:prstGeom prst="rect">
             <a:avLst/>
           </a:prstGeom>
-          <a:noFill/>
-          <a:ln>
-            <a:noFill/>
-          </a:ln>
         </p:spPr>
         <p:txBody>
           <a:bodyPr anchorCtr="0" anchor="t" bIns="91425" lIns="91425" spcFirstLastPara="1" rIns="91425" wrap="square" tIns="91425">
-            <a:spAutoFit/>
+            <a:normAutofit/>
           </a:bodyPr>
           <a:lstStyle/>
           <a:p>
-            <a:pPr indent="0" lvl="0" marL="0" rtl="0" algn="l">
-              <a:spcBef>
-                <a:spcPts val="0"/>
-              </a:spcBef>
-              <a:spcAft>
-                <a:spcPts val="0"/>
-              </a:spcAft>
-              <a:buNone/>
+            <a:pPr indent="-342900" lvl="0" marL="457200" rtl="0" algn="l">
+              <a:spcBef>
+                <a:spcPts val="0"/>
+              </a:spcBef>
+              <a:spcAft>
+                <a:spcPts val="0"/>
+              </a:spcAft>
+              <a:buSzPts val="1800"/>
+              <a:buChar char="-"/>
             </a:pPr>
             <a:r>
-              <a:rPr lang="en" sz="1000">
-                <a:solidFill>
-                  <a:schemeClr val="dk1"/>
-                </a:solidFill>
-              </a:rPr>
-              <a:t>full_vs_mixed_precision_timing.py</a:t>
-            </a:r>
-            <a:endParaRPr sz="1000">
-              <a:solidFill>
-                <a:srgbClr val="BCBEC4"/>
-              </a:solidFill>
-            </a:endParaRPr>
+              <a:rPr lang="en"/>
+              <a:t>Data augmentation</a:t>
+            </a:r>
+            <a:endParaRPr/>
+          </a:p>
+          <a:p>
+            <a:pPr indent="-342900" lvl="0" marL="457200" rtl="0" algn="l">
+              <a:spcBef>
+                <a:spcPts val="0"/>
+              </a:spcBef>
+              <a:spcAft>
+                <a:spcPts val="0"/>
+              </a:spcAft>
+              <a:buSzPts val="1800"/>
+              <a:buChar char="-"/>
+            </a:pPr>
+            <a:r>
+              <a:rPr lang="en"/>
+              <a:t>Setting up a convolutional network with downsampling points (using striding) accompanied by increase in channels</a:t>
+            </a:r>
+            <a:endParaRPr/>
+          </a:p>
+          <a:p>
+            <a:pPr indent="-342900" lvl="0" marL="457200" rtl="0" algn="l">
+              <a:spcBef>
+                <a:spcPts val="0"/>
+              </a:spcBef>
+              <a:spcAft>
+                <a:spcPts val="0"/>
+              </a:spcAft>
+              <a:buSzPts val="1800"/>
+              <a:buChar char="-"/>
+            </a:pPr>
+            <a:r>
+              <a:rPr lang="en"/>
+              <a:t>In the </a:t>
+            </a:r>
+            <a:r>
+              <a:rPr lang="en"/>
+              <a:t>batch</a:t>
+            </a:r>
+            <a:r>
+              <a:rPr lang="en"/>
+              <a:t> normalization + residual connection implementation, using the concept of blocks. Each block has several convolutional layers. First convolutional layer halves the spatial dimension and doubles the number of channels.</a:t>
+            </a:r>
+            <a:endParaRPr/>
+          </a:p>
+          <a:p>
+            <a:pPr indent="-342900" lvl="0" marL="457200" rtl="0" algn="l">
+              <a:spcBef>
+                <a:spcPts val="0"/>
+              </a:spcBef>
+              <a:spcAft>
+                <a:spcPts val="0"/>
+              </a:spcAft>
+              <a:buSzPts val="1800"/>
+              <a:buChar char="-"/>
+            </a:pPr>
+            <a:r>
+              <a:rPr lang="en"/>
+              <a:t>In the </a:t>
+            </a:r>
+            <a:r>
+              <a:rPr lang="en"/>
+              <a:t>residual</a:t>
+            </a:r>
+            <a:r>
+              <a:rPr lang="en"/>
+              <a:t> connection, add a 1d conv if spatial dimension change</a:t>
+            </a:r>
+            <a:endParaRPr/>
           </a:p>
         </p:txBody>
       </p:sp>
@@ -11003,6 +10571,904 @@
               <a:t>Forward and backward pass in low precision</a:t>
             </a:r>
             <a:endParaRPr sz="1300"/>
+          </a:p>
+        </p:txBody>
+      </p:sp>
+    </p:spTree>
+  </p:cSld>
+  <p:clrMapOvr>
+    <a:masterClrMapping/>
+  </p:clrMapOvr>
+</p:sld>
+</file>
+
+<file path=ppt/slides/slide20.xml><?xml version="1.0" encoding="utf-8"?>
+<p:sld xmlns:a="http://schemas.openxmlformats.org/drawingml/2006/main" xmlns:r="http://schemas.openxmlformats.org/officeDocument/2006/relationships" xmlns:mc="http://schemas.openxmlformats.org/markup-compatibility/2006" xmlns:mv="urn:schemas-microsoft-com:mac:vml" xmlns:p="http://schemas.openxmlformats.org/presentationml/2006/main" xmlns:c="http://schemas.openxmlformats.org/drawingml/2006/chart" xmlns:dgm="http://schemas.openxmlformats.org/drawingml/2006/diagram" xmlns:o="urn:schemas-microsoft-com:office:office" xmlns:v="urn:schemas-microsoft-com:vml" xmlns:pvml="urn:schemas-microsoft-com:office:powerpoint" xmlns:com="http://schemas.openxmlformats.org/drawingml/2006/compatibility" xmlns:p14="http://schemas.microsoft.com/office/powerpoint/2010/main" xmlns:p15="http://schemas.microsoft.com/office/powerpoint/2012/main" xmlns:ahyp="http://schemas.microsoft.com/office/drawing/2018/hyperlinkcolor">
+  <p:cSld>
+    <p:spTree>
+      <p:nvGrpSpPr>
+        <p:cNvPr id="228" name="Shape 228"/>
+        <p:cNvGrpSpPr/>
+        <p:nvPr/>
+      </p:nvGrpSpPr>
+      <p:grpSpPr>
+        <a:xfrm>
+          <a:off x="0" y="0"/>
+          <a:ext cx="0" cy="0"/>
+          <a:chOff x="0" y="0"/>
+          <a:chExt cx="0" cy="0"/>
+        </a:xfrm>
+      </p:grpSpPr>
+      <p:sp>
+        <p:nvSpPr>
+          <p:cNvPr id="229" name="Google Shape;229;p32"/>
+          <p:cNvSpPr txBox="1"/>
+          <p:nvPr>
+            <p:ph type="title"/>
+          </p:nvPr>
+        </p:nvSpPr>
+        <p:spPr>
+          <a:xfrm>
+            <a:off x="311700" y="445025"/>
+            <a:ext cx="8520600" cy="572700"/>
+          </a:xfrm>
+          <a:prstGeom prst="rect">
+            <a:avLst/>
+          </a:prstGeom>
+        </p:spPr>
+        <p:txBody>
+          <a:bodyPr anchorCtr="0" anchor="t" bIns="91425" lIns="91425" spcFirstLastPara="1" rIns="91425" wrap="square" tIns="91425">
+            <a:normAutofit fontScale="90000"/>
+          </a:bodyPr>
+          <a:lstStyle/>
+          <a:p>
+            <a:pPr indent="0" lvl="0" marL="0" rtl="0" algn="l">
+              <a:spcBef>
+                <a:spcPts val="0"/>
+              </a:spcBef>
+              <a:spcAft>
+                <a:spcPts val="0"/>
+              </a:spcAft>
+              <a:buNone/>
+            </a:pPr>
+            <a:r>
+              <a:rPr lang="en"/>
+              <a:t>Using lower precision data types in the </a:t>
+            </a:r>
+            <a:r>
+              <a:rPr lang="en"/>
+              <a:t>training</a:t>
+            </a:r>
+            <a:r>
+              <a:rPr lang="en"/>
+              <a:t> loop</a:t>
+            </a:r>
+            <a:endParaRPr/>
+          </a:p>
+        </p:txBody>
+      </p:sp>
+      <p:sp>
+        <p:nvSpPr>
+          <p:cNvPr id="230" name="Google Shape;230;p32"/>
+          <p:cNvSpPr txBox="1"/>
+          <p:nvPr/>
+        </p:nvSpPr>
+        <p:spPr>
+          <a:xfrm>
+            <a:off x="5454900" y="1156275"/>
+            <a:ext cx="3585600" cy="600300"/>
+          </a:xfrm>
+          <a:prstGeom prst="rect">
+            <a:avLst/>
+          </a:prstGeom>
+          <a:noFill/>
+          <a:ln>
+            <a:noFill/>
+          </a:ln>
+        </p:spPr>
+        <p:txBody>
+          <a:bodyPr anchorCtr="0" anchor="t" bIns="91425" lIns="91425" spcFirstLastPara="1" rIns="91425" wrap="square" tIns="91425">
+            <a:spAutoFit/>
+          </a:bodyPr>
+          <a:lstStyle/>
+          <a:p>
+            <a:pPr indent="0" lvl="0" marL="0" rtl="0" algn="l">
+              <a:spcBef>
+                <a:spcPts val="0"/>
+              </a:spcBef>
+              <a:spcAft>
+                <a:spcPts val="0"/>
+              </a:spcAft>
+              <a:buNone/>
+            </a:pPr>
+            <a:r>
+              <a:rPr lang="en" sz="900">
+                <a:solidFill>
+                  <a:schemeClr val="dk1"/>
+                </a:solidFill>
+              </a:rPr>
+              <a:t>A</a:t>
+            </a:r>
+            <a:r>
+              <a:rPr lang="en" sz="900">
+                <a:solidFill>
+                  <a:schemeClr val="dk1"/>
+                </a:solidFill>
+              </a:rPr>
+              <a:t>ffects </a:t>
+            </a:r>
+            <a:r>
+              <a:rPr b="1" lang="en" sz="900">
+                <a:solidFill>
+                  <a:schemeClr val="dk1"/>
+                </a:solidFill>
+              </a:rPr>
+              <a:t>ops executed inside the context</a:t>
+            </a:r>
+            <a:r>
+              <a:rPr lang="en" sz="900">
+                <a:solidFill>
+                  <a:schemeClr val="dk1"/>
+                </a:solidFill>
+              </a:rPr>
+              <a:t> by choosing a “fast” dtype for each op (fp16/bf16 for many GEMMs/convs, fp32 for numerically sensitive ops like some reductions/softmax parts, etc.)</a:t>
+            </a:r>
+            <a:endParaRPr sz="1200"/>
+          </a:p>
+        </p:txBody>
+      </p:sp>
+      <p:sp>
+        <p:nvSpPr>
+          <p:cNvPr id="231" name="Google Shape;231;p32"/>
+          <p:cNvSpPr txBox="1"/>
+          <p:nvPr/>
+        </p:nvSpPr>
+        <p:spPr>
+          <a:xfrm>
+            <a:off x="5557800" y="1978100"/>
+            <a:ext cx="3379800" cy="1262100"/>
+          </a:xfrm>
+          <a:prstGeom prst="rect">
+            <a:avLst/>
+          </a:prstGeom>
+          <a:noFill/>
+          <a:ln>
+            <a:noFill/>
+          </a:ln>
+        </p:spPr>
+        <p:txBody>
+          <a:bodyPr anchorCtr="0" anchor="t" bIns="91425" lIns="91425" spcFirstLastPara="1" rIns="91425" wrap="square" tIns="91425">
+            <a:spAutoFit/>
+          </a:bodyPr>
+          <a:lstStyle/>
+          <a:p>
+            <a:pPr indent="0" lvl="0" marL="0" rtl="0" algn="l">
+              <a:spcBef>
+                <a:spcPts val="0"/>
+              </a:spcBef>
+              <a:spcAft>
+                <a:spcPts val="0"/>
+              </a:spcAft>
+              <a:buNone/>
+            </a:pPr>
+            <a:r>
+              <a:rPr lang="en" sz="1000">
+                <a:solidFill>
+                  <a:schemeClr val="dk1"/>
+                </a:solidFill>
+              </a:rPr>
+              <a:t>If we computed gradients also in a lower dtype (eg., fp16), small gradients might underflow to 0. So, we scale up the loss and then calculate the gradients. This way gradient flow is preserved. Also, gradients often sum many contributions. In low precision, when you add a tiny number to a running total, the tiny increment can get rounded away. </a:t>
+            </a:r>
+            <a:endParaRPr sz="1300"/>
+          </a:p>
+        </p:txBody>
+      </p:sp>
+      <p:sp>
+        <p:nvSpPr>
+          <p:cNvPr id="232" name="Google Shape;232;p32"/>
+          <p:cNvSpPr txBox="1"/>
+          <p:nvPr/>
+        </p:nvSpPr>
+        <p:spPr>
+          <a:xfrm>
+            <a:off x="97975" y="1177700"/>
+            <a:ext cx="2916900" cy="800400"/>
+          </a:xfrm>
+          <a:prstGeom prst="rect">
+            <a:avLst/>
+          </a:prstGeom>
+          <a:noFill/>
+          <a:ln>
+            <a:noFill/>
+          </a:ln>
+        </p:spPr>
+        <p:txBody>
+          <a:bodyPr anchorCtr="0" anchor="t" bIns="91425" lIns="91425" spcFirstLastPara="1" rIns="91425" wrap="square" tIns="91425">
+            <a:spAutoFit/>
+          </a:bodyPr>
+          <a:lstStyle/>
+          <a:p>
+            <a:pPr indent="0" lvl="0" marL="0" rtl="0" algn="l">
+              <a:spcBef>
+                <a:spcPts val="0"/>
+              </a:spcBef>
+              <a:spcAft>
+                <a:spcPts val="0"/>
+              </a:spcAft>
+              <a:buNone/>
+            </a:pPr>
+            <a:r>
+              <a:rPr lang="en" sz="1000">
+                <a:solidFill>
+                  <a:schemeClr val="dk1"/>
+                </a:solidFill>
+              </a:rPr>
+              <a:t>Once the gradients have been calculated, we scale them back to the original scale. Generally gradients are represented in full precision at this step, so underflow isn’t an issue </a:t>
+            </a:r>
+            <a:endParaRPr sz="1300"/>
+          </a:p>
+        </p:txBody>
+      </p:sp>
+      <p:sp>
+        <p:nvSpPr>
+          <p:cNvPr id="233" name="Google Shape;233;p32"/>
+          <p:cNvSpPr txBox="1"/>
+          <p:nvPr/>
+        </p:nvSpPr>
+        <p:spPr>
+          <a:xfrm>
+            <a:off x="235500" y="3945225"/>
+            <a:ext cx="3000000" cy="461700"/>
+          </a:xfrm>
+          <a:prstGeom prst="rect">
+            <a:avLst/>
+          </a:prstGeom>
+          <a:noFill/>
+          <a:ln>
+            <a:noFill/>
+          </a:ln>
+        </p:spPr>
+        <p:txBody>
+          <a:bodyPr anchorCtr="0" anchor="t" bIns="91425" lIns="91425" spcFirstLastPara="1" rIns="91425" wrap="square" tIns="91425">
+            <a:spAutoFit/>
+          </a:bodyPr>
+          <a:lstStyle/>
+          <a:p>
+            <a:pPr indent="0" lvl="0" marL="0" rtl="0" algn="l">
+              <a:spcBef>
+                <a:spcPts val="0"/>
+              </a:spcBef>
+              <a:spcAft>
+                <a:spcPts val="0"/>
+              </a:spcAft>
+              <a:buNone/>
+            </a:pPr>
+            <a:r>
+              <a:rPr lang="en" sz="900">
+                <a:solidFill>
+                  <a:schemeClr val="dk1"/>
+                </a:solidFill>
+              </a:rPr>
+              <a:t>checks if any grads are inf/nan. If yes, it </a:t>
+            </a:r>
+            <a:r>
+              <a:rPr b="1" lang="en" sz="900">
+                <a:solidFill>
+                  <a:schemeClr val="dk1"/>
+                </a:solidFill>
+              </a:rPr>
+              <a:t>skips</a:t>
+            </a:r>
+            <a:r>
+              <a:rPr lang="en" sz="900">
+                <a:solidFill>
+                  <a:schemeClr val="dk1"/>
+                </a:solidFill>
+              </a:rPr>
+              <a:t> </a:t>
+            </a:r>
+            <a:r>
+              <a:rPr lang="en" sz="900">
+                <a:solidFill>
+                  <a:schemeClr val="dk1"/>
+                </a:solidFill>
+              </a:rPr>
+              <a:t>optimizer.step().</a:t>
+            </a:r>
+            <a:endParaRPr sz="900">
+              <a:solidFill>
+                <a:schemeClr val="dk1"/>
+              </a:solidFill>
+            </a:endParaRPr>
+          </a:p>
+        </p:txBody>
+      </p:sp>
+      <p:sp>
+        <p:nvSpPr>
+          <p:cNvPr id="234" name="Google Shape;234;p32"/>
+          <p:cNvSpPr txBox="1"/>
+          <p:nvPr/>
+        </p:nvSpPr>
+        <p:spPr>
+          <a:xfrm>
+            <a:off x="3323700" y="4200575"/>
+            <a:ext cx="2496600" cy="492600"/>
+          </a:xfrm>
+          <a:prstGeom prst="rect">
+            <a:avLst/>
+          </a:prstGeom>
+          <a:noFill/>
+          <a:ln>
+            <a:noFill/>
+          </a:ln>
+        </p:spPr>
+        <p:txBody>
+          <a:bodyPr anchorCtr="0" anchor="t" bIns="91425" lIns="91425" spcFirstLastPara="1" rIns="91425" wrap="square" tIns="91425">
+            <a:spAutoFit/>
+          </a:bodyPr>
+          <a:lstStyle/>
+          <a:p>
+            <a:pPr indent="0" lvl="0" marL="0" rtl="0" algn="l">
+              <a:spcBef>
+                <a:spcPts val="0"/>
+              </a:spcBef>
+              <a:spcAft>
+                <a:spcPts val="0"/>
+              </a:spcAft>
+              <a:buNone/>
+            </a:pPr>
+            <a:r>
+              <a:rPr lang="en" sz="1000">
+                <a:solidFill>
+                  <a:schemeClr val="dk1"/>
+                </a:solidFill>
+              </a:rPr>
+              <a:t>A</a:t>
+            </a:r>
+            <a:r>
+              <a:rPr lang="en" sz="1000">
+                <a:solidFill>
+                  <a:schemeClr val="dk1"/>
+                </a:solidFill>
+              </a:rPr>
+              <a:t>djusts </a:t>
+            </a:r>
+            <a:r>
+              <a:rPr lang="en" sz="1000">
+                <a:solidFill>
+                  <a:srgbClr val="188038"/>
+                </a:solidFill>
+                <a:latin typeface="Roboto Mono"/>
+                <a:ea typeface="Roboto Mono"/>
+                <a:cs typeface="Roboto Mono"/>
+                <a:sym typeface="Roboto Mono"/>
+              </a:rPr>
+              <a:t>S</a:t>
+            </a:r>
+            <a:r>
+              <a:rPr lang="en" sz="1000">
+                <a:solidFill>
+                  <a:schemeClr val="dk1"/>
+                </a:solidFill>
+              </a:rPr>
+              <a:t> (down if overflow happened; up slowly if things are stable)</a:t>
+            </a:r>
+            <a:endParaRPr sz="1300"/>
+          </a:p>
+        </p:txBody>
+      </p:sp>
+      <p:sp>
+        <p:nvSpPr>
+          <p:cNvPr id="235" name="Google Shape;235;p32"/>
+          <p:cNvSpPr txBox="1"/>
+          <p:nvPr/>
+        </p:nvSpPr>
+        <p:spPr>
+          <a:xfrm>
+            <a:off x="0" y="2220850"/>
+            <a:ext cx="2396400" cy="1339200"/>
+          </a:xfrm>
+          <a:prstGeom prst="rect">
+            <a:avLst/>
+          </a:prstGeom>
+          <a:noFill/>
+          <a:ln>
+            <a:noFill/>
+          </a:ln>
+        </p:spPr>
+        <p:txBody>
+          <a:bodyPr anchorCtr="0" anchor="t" bIns="91425" lIns="91425" spcFirstLastPara="1" rIns="91425" wrap="square" tIns="91425">
+            <a:spAutoFit/>
+          </a:bodyPr>
+          <a:lstStyle/>
+          <a:p>
+            <a:pPr indent="0" lvl="0" marL="0" rtl="0" algn="l">
+              <a:spcBef>
+                <a:spcPts val="0"/>
+              </a:spcBef>
+              <a:spcAft>
+                <a:spcPts val="0"/>
+              </a:spcAft>
+              <a:buNone/>
+            </a:pPr>
+            <a:r>
+              <a:rPr lang="en" sz="900">
+                <a:solidFill>
+                  <a:schemeClr val="dk1"/>
+                </a:solidFill>
+              </a:rPr>
+              <a:t>It looks at </a:t>
+            </a:r>
+            <a:r>
+              <a:rPr b="1" lang="en" sz="900">
+                <a:solidFill>
+                  <a:schemeClr val="dk1"/>
+                </a:solidFill>
+              </a:rPr>
+              <a:t>all gradients together</a:t>
+            </a:r>
+            <a:r>
+              <a:rPr lang="en" sz="900">
+                <a:solidFill>
+                  <a:schemeClr val="dk1"/>
+                </a:solidFill>
+              </a:rPr>
+              <a:t> (over all parameters), computes a </a:t>
+            </a:r>
+            <a:r>
+              <a:rPr b="1" lang="en" sz="900">
+                <a:solidFill>
+                  <a:schemeClr val="dk1"/>
+                </a:solidFill>
+              </a:rPr>
+              <a:t>global norm</a:t>
+            </a:r>
+            <a:r>
+              <a:rPr lang="en" sz="900">
+                <a:solidFill>
+                  <a:schemeClr val="dk1"/>
+                </a:solidFill>
+              </a:rPr>
+              <a:t> (usually L2), and if that norm is bigger than your threshold </a:t>
+            </a:r>
+            <a:r>
+              <a:rPr lang="en" sz="900">
+                <a:solidFill>
+                  <a:srgbClr val="188038"/>
+                </a:solidFill>
+                <a:latin typeface="Roboto Mono"/>
+                <a:ea typeface="Roboto Mono"/>
+                <a:cs typeface="Roboto Mono"/>
+                <a:sym typeface="Roboto Mono"/>
+              </a:rPr>
+              <a:t>grad_clip</a:t>
+            </a:r>
+            <a:r>
+              <a:rPr lang="en" sz="900">
+                <a:solidFill>
+                  <a:schemeClr val="dk1"/>
+                </a:solidFill>
+              </a:rPr>
+              <a:t>, it multiplies </a:t>
+            </a:r>
+            <a:r>
+              <a:rPr lang="en" sz="900">
+                <a:solidFill>
+                  <a:schemeClr val="dk1"/>
+                </a:solidFill>
+              </a:rPr>
+              <a:t>every gradient tensor</a:t>
+            </a:r>
+            <a:r>
+              <a:rPr lang="en" sz="900">
+                <a:solidFill>
+                  <a:schemeClr val="dk1"/>
+                </a:solidFill>
+              </a:rPr>
+              <a:t> by the same factor so the global norm becomes </a:t>
+            </a:r>
+            <a:r>
+              <a:rPr lang="en" sz="900">
+                <a:solidFill>
+                  <a:srgbClr val="188038"/>
+                </a:solidFill>
+                <a:latin typeface="Roboto Mono"/>
+                <a:ea typeface="Roboto Mono"/>
+                <a:cs typeface="Roboto Mono"/>
+                <a:sym typeface="Roboto Mono"/>
+              </a:rPr>
+              <a:t>grad_clip.</a:t>
+            </a:r>
+            <a:r>
+              <a:rPr lang="en" sz="900">
+                <a:solidFill>
+                  <a:schemeClr val="dk1"/>
+                </a:solidFill>
+              </a:rPr>
+              <a:t>It prevents large parameter updates due to gradient spikes. </a:t>
+            </a:r>
+            <a:r>
+              <a:rPr lang="en" sz="1200">
+                <a:solidFill>
+                  <a:schemeClr val="dk1"/>
+                </a:solidFill>
+              </a:rPr>
+              <a:t> </a:t>
+            </a:r>
+            <a:endParaRPr sz="1500"/>
+          </a:p>
+        </p:txBody>
+      </p:sp>
+      <p:pic>
+        <p:nvPicPr>
+          <p:cNvPr id="236" name="Google Shape;236;p32"/>
+          <p:cNvPicPr preferRelativeResize="0"/>
+          <p:nvPr/>
+        </p:nvPicPr>
+        <p:blipFill>
+          <a:blip r:embed="rId3">
+            <a:alphaModFix/>
+          </a:blip>
+          <a:stretch>
+            <a:fillRect/>
+          </a:stretch>
+        </p:blipFill>
+        <p:spPr>
+          <a:xfrm>
+            <a:off x="2651272" y="1830947"/>
+            <a:ext cx="2833025" cy="1872700"/>
+          </a:xfrm>
+          <a:prstGeom prst="rect">
+            <a:avLst/>
+          </a:prstGeom>
+          <a:noFill/>
+          <a:ln>
+            <a:noFill/>
+          </a:ln>
+        </p:spPr>
+      </p:pic>
+      <p:cxnSp>
+        <p:nvCxnSpPr>
+          <p:cNvPr id="237" name="Google Shape;237;p32"/>
+          <p:cNvCxnSpPr>
+            <a:stCxn id="230" idx="1"/>
+          </p:cNvCxnSpPr>
+          <p:nvPr/>
+        </p:nvCxnSpPr>
+        <p:spPr>
+          <a:xfrm flipH="1">
+            <a:off x="4903500" y="1456425"/>
+            <a:ext cx="551400" cy="413400"/>
+          </a:xfrm>
+          <a:prstGeom prst="straightConnector1">
+            <a:avLst/>
+          </a:prstGeom>
+          <a:noFill/>
+          <a:ln cap="flat" cmpd="sng" w="9525">
+            <a:solidFill>
+              <a:schemeClr val="dk2"/>
+            </a:solidFill>
+            <a:prstDash val="solid"/>
+            <a:round/>
+            <a:headEnd len="med" w="med" type="none"/>
+            <a:tailEnd len="med" w="med" type="triangle"/>
+          </a:ln>
+        </p:spPr>
+      </p:cxnSp>
+      <p:cxnSp>
+        <p:nvCxnSpPr>
+          <p:cNvPr id="238" name="Google Shape;238;p32"/>
+          <p:cNvCxnSpPr/>
+          <p:nvPr/>
+        </p:nvCxnSpPr>
+        <p:spPr>
+          <a:xfrm flipH="1">
+            <a:off x="4492350" y="2273675"/>
+            <a:ext cx="1093800" cy="252000"/>
+          </a:xfrm>
+          <a:prstGeom prst="straightConnector1">
+            <a:avLst/>
+          </a:prstGeom>
+          <a:noFill/>
+          <a:ln cap="flat" cmpd="sng" w="9525">
+            <a:solidFill>
+              <a:schemeClr val="dk2"/>
+            </a:solidFill>
+            <a:prstDash val="solid"/>
+            <a:round/>
+            <a:headEnd len="med" w="med" type="none"/>
+            <a:tailEnd len="med" w="med" type="triangle"/>
+          </a:ln>
+        </p:spPr>
+      </p:cxnSp>
+      <p:cxnSp>
+        <p:nvCxnSpPr>
+          <p:cNvPr id="239" name="Google Shape;239;p32"/>
+          <p:cNvCxnSpPr/>
+          <p:nvPr/>
+        </p:nvCxnSpPr>
+        <p:spPr>
+          <a:xfrm>
+            <a:off x="2308025" y="1830950"/>
+            <a:ext cx="739200" cy="953100"/>
+          </a:xfrm>
+          <a:prstGeom prst="straightConnector1">
+            <a:avLst/>
+          </a:prstGeom>
+          <a:noFill/>
+          <a:ln cap="flat" cmpd="sng" w="9525">
+            <a:solidFill>
+              <a:schemeClr val="dk2"/>
+            </a:solidFill>
+            <a:prstDash val="solid"/>
+            <a:round/>
+            <a:headEnd len="med" w="med" type="none"/>
+            <a:tailEnd len="med" w="med" type="triangle"/>
+          </a:ln>
+        </p:spPr>
+      </p:cxnSp>
+      <p:cxnSp>
+        <p:nvCxnSpPr>
+          <p:cNvPr id="240" name="Google Shape;240;p32"/>
+          <p:cNvCxnSpPr/>
+          <p:nvPr/>
+        </p:nvCxnSpPr>
+        <p:spPr>
+          <a:xfrm flipH="1" rot="10800000">
+            <a:off x="2276250" y="3024225"/>
+            <a:ext cx="401700" cy="23100"/>
+          </a:xfrm>
+          <a:prstGeom prst="straightConnector1">
+            <a:avLst/>
+          </a:prstGeom>
+          <a:noFill/>
+          <a:ln cap="flat" cmpd="sng" w="9525">
+            <a:solidFill>
+              <a:schemeClr val="dk2"/>
+            </a:solidFill>
+            <a:prstDash val="solid"/>
+            <a:round/>
+            <a:headEnd len="med" w="med" type="none"/>
+            <a:tailEnd len="med" w="med" type="triangle"/>
+          </a:ln>
+        </p:spPr>
+      </p:cxnSp>
+      <p:cxnSp>
+        <p:nvCxnSpPr>
+          <p:cNvPr id="241" name="Google Shape;241;p32"/>
+          <p:cNvCxnSpPr/>
+          <p:nvPr/>
+        </p:nvCxnSpPr>
+        <p:spPr>
+          <a:xfrm flipH="1" rot="10800000">
+            <a:off x="1906325" y="3472125"/>
+            <a:ext cx="780900" cy="496200"/>
+          </a:xfrm>
+          <a:prstGeom prst="straightConnector1">
+            <a:avLst/>
+          </a:prstGeom>
+          <a:noFill/>
+          <a:ln cap="flat" cmpd="sng" w="9525">
+            <a:solidFill>
+              <a:schemeClr val="dk2"/>
+            </a:solidFill>
+            <a:prstDash val="solid"/>
+            <a:round/>
+            <a:headEnd len="med" w="med" type="none"/>
+            <a:tailEnd len="med" w="med" type="triangle"/>
+          </a:ln>
+        </p:spPr>
+      </p:cxnSp>
+      <p:cxnSp>
+        <p:nvCxnSpPr>
+          <p:cNvPr id="242" name="Google Shape;242;p32"/>
+          <p:cNvCxnSpPr/>
+          <p:nvPr/>
+        </p:nvCxnSpPr>
+        <p:spPr>
+          <a:xfrm rot="10800000">
+            <a:off x="3287550" y="3675250"/>
+            <a:ext cx="451800" cy="505500"/>
+          </a:xfrm>
+          <a:prstGeom prst="straightConnector1">
+            <a:avLst/>
+          </a:prstGeom>
+          <a:noFill/>
+          <a:ln cap="flat" cmpd="sng" w="9525">
+            <a:solidFill>
+              <a:schemeClr val="dk2"/>
+            </a:solidFill>
+            <a:prstDash val="solid"/>
+            <a:round/>
+            <a:headEnd len="med" w="med" type="none"/>
+            <a:tailEnd len="med" w="med" type="triangle"/>
+          </a:ln>
+        </p:spPr>
+      </p:cxnSp>
+      <p:sp>
+        <p:nvSpPr>
+          <p:cNvPr id="243" name="Google Shape;243;p32"/>
+          <p:cNvSpPr txBox="1"/>
+          <p:nvPr/>
+        </p:nvSpPr>
+        <p:spPr>
+          <a:xfrm>
+            <a:off x="5937600" y="3601250"/>
+            <a:ext cx="3000000" cy="1262100"/>
+          </a:xfrm>
+          <a:prstGeom prst="rect">
+            <a:avLst/>
+          </a:prstGeom>
+          <a:noFill/>
+          <a:ln>
+            <a:noFill/>
+          </a:ln>
+        </p:spPr>
+        <p:txBody>
+          <a:bodyPr anchorCtr="0" anchor="t" bIns="91425" lIns="91425" spcFirstLastPara="1" rIns="91425" wrap="square" tIns="91425">
+            <a:spAutoFit/>
+          </a:bodyPr>
+          <a:lstStyle/>
+          <a:p>
+            <a:pPr indent="0" lvl="0" marL="0" rtl="0" algn="l">
+              <a:spcBef>
+                <a:spcPts val="0"/>
+              </a:spcBef>
+              <a:spcAft>
+                <a:spcPts val="0"/>
+              </a:spcAft>
+              <a:buNone/>
+            </a:pPr>
+            <a:r>
+              <a:rPr b="1" lang="en" sz="1000"/>
+              <a:t>Default precision:</a:t>
+            </a:r>
+            <a:endParaRPr b="1" sz="1000"/>
+          </a:p>
+          <a:p>
+            <a:pPr indent="0" lvl="0" marL="0" rtl="0" algn="l">
+              <a:spcBef>
+                <a:spcPts val="0"/>
+              </a:spcBef>
+              <a:spcAft>
+                <a:spcPts val="0"/>
+              </a:spcAft>
+              <a:buNone/>
+            </a:pPr>
+            <a:r>
+              <a:rPr lang="en" sz="1000"/>
+              <a:t>Total execution time = 2.549 sec</a:t>
+            </a:r>
+            <a:endParaRPr sz="1000"/>
+          </a:p>
+          <a:p>
+            <a:pPr indent="0" lvl="0" marL="0" rtl="0" algn="l">
+              <a:spcBef>
+                <a:spcPts val="0"/>
+              </a:spcBef>
+              <a:spcAft>
+                <a:spcPts val="0"/>
+              </a:spcAft>
+              <a:buNone/>
+            </a:pPr>
+            <a:r>
+              <a:rPr lang="en" sz="1000"/>
+              <a:t>Max memory used by tensors = 2.78 GB</a:t>
+            </a:r>
+            <a:endParaRPr sz="1000"/>
+          </a:p>
+          <a:p>
+            <a:pPr indent="0" lvl="0" marL="0" rtl="0" algn="l">
+              <a:spcBef>
+                <a:spcPts val="0"/>
+              </a:spcBef>
+              <a:spcAft>
+                <a:spcPts val="0"/>
+              </a:spcAft>
+              <a:buNone/>
+            </a:pPr>
+            <a:r>
+              <a:t/>
+            </a:r>
+            <a:endParaRPr sz="1000"/>
+          </a:p>
+          <a:p>
+            <a:pPr indent="0" lvl="0" marL="0" rtl="0" algn="l">
+              <a:spcBef>
+                <a:spcPts val="0"/>
+              </a:spcBef>
+              <a:spcAft>
+                <a:spcPts val="0"/>
+              </a:spcAft>
+              <a:buNone/>
+            </a:pPr>
+            <a:r>
+              <a:rPr b="1" lang="en" sz="1000"/>
+              <a:t>Mixed precision:</a:t>
+            </a:r>
+            <a:endParaRPr b="1" sz="1000"/>
+          </a:p>
+          <a:p>
+            <a:pPr indent="0" lvl="0" marL="0" rtl="0" algn="l">
+              <a:spcBef>
+                <a:spcPts val="0"/>
+              </a:spcBef>
+              <a:spcAft>
+                <a:spcPts val="0"/>
+              </a:spcAft>
+              <a:buNone/>
+            </a:pPr>
+            <a:r>
+              <a:rPr lang="en" sz="1000"/>
+              <a:t>Total execution time = 1.354 sec</a:t>
+            </a:r>
+            <a:endParaRPr sz="1000"/>
+          </a:p>
+          <a:p>
+            <a:pPr indent="0" lvl="0" marL="0" rtl="0" algn="l">
+              <a:spcBef>
+                <a:spcPts val="0"/>
+              </a:spcBef>
+              <a:spcAft>
+                <a:spcPts val="0"/>
+              </a:spcAft>
+              <a:buNone/>
+            </a:pPr>
+            <a:r>
+              <a:rPr lang="en" sz="1000"/>
+              <a:t>Max memory used by tensors = 2.76 GB</a:t>
+            </a:r>
+            <a:endParaRPr sz="1000"/>
+          </a:p>
+        </p:txBody>
+      </p:sp>
+      <p:sp>
+        <p:nvSpPr>
+          <p:cNvPr id="244" name="Google Shape;244;p32"/>
+          <p:cNvSpPr txBox="1"/>
+          <p:nvPr/>
+        </p:nvSpPr>
+        <p:spPr>
+          <a:xfrm>
+            <a:off x="56425" y="4723350"/>
+            <a:ext cx="3000000" cy="338700"/>
+          </a:xfrm>
+          <a:prstGeom prst="rect">
+            <a:avLst/>
+          </a:prstGeom>
+          <a:noFill/>
+          <a:ln>
+            <a:noFill/>
+          </a:ln>
+        </p:spPr>
+        <p:txBody>
+          <a:bodyPr anchorCtr="0" anchor="t" bIns="91425" lIns="91425" spcFirstLastPara="1" rIns="91425" wrap="square" tIns="91425">
+            <a:spAutoFit/>
+          </a:bodyPr>
+          <a:lstStyle/>
+          <a:p>
+            <a:pPr indent="0" lvl="0" marL="0" rtl="0" algn="l">
+              <a:spcBef>
+                <a:spcPts val="0"/>
+              </a:spcBef>
+              <a:spcAft>
+                <a:spcPts val="0"/>
+              </a:spcAft>
+              <a:buNone/>
+            </a:pPr>
+            <a:r>
+              <a:rPr lang="en" sz="1000">
+                <a:solidFill>
+                  <a:schemeClr val="dk1"/>
+                </a:solidFill>
+              </a:rPr>
+              <a:t>full_vs_mixed_precision_timing.py</a:t>
+            </a:r>
+            <a:endParaRPr sz="1000">
+              <a:solidFill>
+                <a:srgbClr val="BCBEC4"/>
+              </a:solidFill>
+            </a:endParaRPr>
           </a:p>
         </p:txBody>
       </p:sp>
@@ -12617,6 +13083,285 @@
 </file>
 
 <file path=ppt/theme/theme1.xml><?xml version="1.0" encoding="utf-8"?>
+<a:theme xmlns:a="http://schemas.openxmlformats.org/drawingml/2006/main" xmlns:r="http://schemas.openxmlformats.org/officeDocument/2006/relationships">
+  <a:themeElements>
+    <a:clrScheme name="Default">
+      <a:dk1>
+        <a:srgbClr val="000000"/>
+      </a:dk1>
+      <a:lt1>
+        <a:srgbClr val="FFFFFF"/>
+      </a:lt1>
+      <a:dk2>
+        <a:srgbClr val="158158"/>
+      </a:dk2>
+      <a:lt2>
+        <a:srgbClr val="F3F3F3"/>
+      </a:lt2>
+      <a:accent1>
+        <a:srgbClr val="058DC7"/>
+      </a:accent1>
+      <a:accent2>
+        <a:srgbClr val="50B432"/>
+      </a:accent2>
+      <a:accent3>
+        <a:srgbClr val="ED561B"/>
+      </a:accent3>
+      <a:accent4>
+        <a:srgbClr val="EDEF00"/>
+      </a:accent4>
+      <a:accent5>
+        <a:srgbClr val="24CBE5"/>
+      </a:accent5>
+      <a:accent6>
+        <a:srgbClr val="64E572"/>
+      </a:accent6>
+      <a:hlink>
+        <a:srgbClr val="2200CC"/>
+      </a:hlink>
+      <a:folHlink>
+        <a:srgbClr val="551A8B"/>
+      </a:folHlink>
+    </a:clrScheme>
+    <a:fontScheme name="Office">
+      <a:majorFont>
+        <a:latin typeface="Arial"/>
+        <a:ea typeface=""/>
+        <a:cs typeface=""/>
+        <a:font script="Jpan" typeface="ＭＳ Ｐゴシック"/>
+        <a:font script="Hang" typeface="맑은 고딕"/>
+        <a:font script="Hans" typeface="宋体"/>
+        <a:font script="Hant" typeface="新細明體"/>
+        <a:font script="Arab" typeface="Times New Roman"/>
+        <a:font script="Hebr" typeface="Times New Roman"/>
+        <a:font script="Thai" typeface="Angsana New"/>
+        <a:font script="Ethi" typeface="Nyala"/>
+        <a:font script="Beng" typeface="Vrinda"/>
+        <a:font script="Gujr" typeface="Shruti"/>
+        <a:font script="Khmr" typeface="MoolBoran"/>
+        <a:font script="Knda" typeface="Tunga"/>
+        <a:font script="Guru" typeface="Raavi"/>
+        <a:font script="Cans" typeface="Euphemia"/>
+        <a:font script="Cher" typeface="Plantagenet Cherokee"/>
+        <a:font script="Yiii" typeface="Microsoft Yi Baiti"/>
+        <a:font script="Tibt" typeface="Microsoft Himalaya"/>
+        <a:font script="Thaa" typeface="MV Boli"/>
+        <a:font script="Deva" typeface="Mangal"/>
+        <a:font script="Telu" typeface="Gautami"/>
+        <a:font script="Taml" typeface="Latha"/>
+        <a:font script="Syrc" typeface="Estrangelo Edessa"/>
+        <a:font script="Orya" typeface="Kalinga"/>
+        <a:font script="Mlym" typeface="Kartika"/>
+        <a:font script="Laoo" typeface="DokChampa"/>
+        <a:font script="Sinh" typeface="Iskoola Pota"/>
+        <a:font script="Mong" typeface="Mongolian Baiti"/>
+        <a:font script="Viet" typeface="Times New Roman"/>
+        <a:font script="Uigh" typeface="Microsoft Uighur"/>
+        <a:font script="Geor" typeface="Sylfaen"/>
+      </a:majorFont>
+      <a:minorFont>
+        <a:latin typeface="Arial"/>
+        <a:ea typeface=""/>
+        <a:cs typeface=""/>
+        <a:font script="Jpan" typeface="ＭＳ Ｐゴシック"/>
+        <a:font script="Hang" typeface="맑은 고딕"/>
+        <a:font script="Hans" typeface="宋体"/>
+        <a:font script="Hant" typeface="新細明體"/>
+        <a:font script="Arab" typeface="Arial"/>
+        <a:font script="Hebr" typeface="Arial"/>
+        <a:font script="Thai" typeface="Cordia New"/>
+        <a:font script="Ethi" typeface="Nyala"/>
+        <a:font script="Beng" typeface="Vrinda"/>
+        <a:font script="Gujr" typeface="Shruti"/>
+        <a:font script="Khmr" typeface="DaunPenh"/>
+        <a:font script="Knda" typeface="Tunga"/>
+        <a:font script="Guru" typeface="Raavi"/>
+        <a:font script="Cans" typeface="Euphemia"/>
+        <a:font script="Cher" typeface="Plantagenet Cherokee"/>
+        <a:font script="Yiii" typeface="Microsoft Yi Baiti"/>
+        <a:font script="Tibt" typeface="Microsoft Himalaya"/>
+        <a:font script="Thaa" typeface="MV Boli"/>
+        <a:font script="Deva" typeface="Mangal"/>
+        <a:font script="Telu" typeface="Gautami"/>
+        <a:font script="Taml" typeface="Latha"/>
+        <a:font script="Syrc" typeface="Estrangelo Edessa"/>
+        <a:font script="Orya" typeface="Kalinga"/>
+        <a:font script="Mlym" typeface="Kartika"/>
+        <a:font script="Laoo" typeface="DokChampa"/>
+        <a:font script="Sinh" typeface="Iskoola Pota"/>
+        <a:font script="Mong" typeface="Mongolian Baiti"/>
+        <a:font script="Viet" typeface="Arial"/>
+        <a:font script="Uigh" typeface="Microsoft Uighur"/>
+        <a:font script="Geor" typeface="Sylfaen"/>
+      </a:minorFont>
+    </a:fontScheme>
+    <a:fmtScheme name="Office">
+      <a:fillStyleLst>
+        <a:solidFill>
+          <a:schemeClr val="phClr"/>
+        </a:solidFill>
+        <a:gradFill rotWithShape="1">
+          <a:gsLst>
+            <a:gs pos="0">
+              <a:schemeClr val="phClr">
+                <a:tint val="50000"/>
+                <a:satMod val="300000"/>
+              </a:schemeClr>
+            </a:gs>
+            <a:gs pos="35000">
+              <a:schemeClr val="phClr">
+                <a:tint val="37000"/>
+                <a:satMod val="300000"/>
+              </a:schemeClr>
+            </a:gs>
+            <a:gs pos="100000">
+              <a:schemeClr val="phClr">
+                <a:tint val="15000"/>
+                <a:satMod val="350000"/>
+              </a:schemeClr>
+            </a:gs>
+          </a:gsLst>
+          <a:lin ang="16200000" scaled="1"/>
+        </a:gradFill>
+        <a:gradFill rotWithShape="1">
+          <a:gsLst>
+            <a:gs pos="0">
+              <a:schemeClr val="phClr">
+                <a:tint val="100000"/>
+                <a:shade val="100000"/>
+                <a:satMod val="130000"/>
+              </a:schemeClr>
+            </a:gs>
+            <a:gs pos="100000">
+              <a:schemeClr val="phClr">
+                <a:tint val="50000"/>
+                <a:shade val="100000"/>
+                <a:satMod val="350000"/>
+              </a:schemeClr>
+            </a:gs>
+          </a:gsLst>
+          <a:lin ang="16200000" scaled="0"/>
+        </a:gradFill>
+      </a:fillStyleLst>
+      <a:lnStyleLst>
+        <a:ln w="9525" cap="flat" cmpd="sng" algn="ctr">
+          <a:solidFill>
+            <a:schemeClr val="phClr">
+              <a:shade val="95000"/>
+              <a:satMod val="105000"/>
+            </a:schemeClr>
+          </a:solidFill>
+          <a:prstDash val="solid"/>
+        </a:ln>
+        <a:ln w="25400" cap="flat" cmpd="sng" algn="ctr">
+          <a:solidFill>
+            <a:schemeClr val="phClr"/>
+          </a:solidFill>
+          <a:prstDash val="solid"/>
+        </a:ln>
+        <a:ln w="38100" cap="flat" cmpd="sng" algn="ctr">
+          <a:solidFill>
+            <a:schemeClr val="phClr"/>
+          </a:solidFill>
+          <a:prstDash val="solid"/>
+        </a:ln>
+      </a:lnStyleLst>
+      <a:effectStyleLst>
+        <a:effectStyle>
+          <a:effectLst>
+            <a:outerShdw blurRad="40000" dist="20000" dir="5400000" rotWithShape="0">
+              <a:srgbClr val="000000">
+                <a:alpha val="38000"/>
+              </a:srgbClr>
+            </a:outerShdw>
+          </a:effectLst>
+        </a:effectStyle>
+        <a:effectStyle>
+          <a:effectLst>
+            <a:outerShdw blurRad="40000" dist="23000" dir="5400000" rotWithShape="0">
+              <a:srgbClr val="000000">
+                <a:alpha val="35000"/>
+              </a:srgbClr>
+            </a:outerShdw>
+          </a:effectLst>
+        </a:effectStyle>
+        <a:effectStyle>
+          <a:effectLst>
+            <a:outerShdw blurRad="40000" dist="23000" dir="5400000" rotWithShape="0">
+              <a:srgbClr val="000000">
+                <a:alpha val="35000"/>
+              </a:srgbClr>
+            </a:outerShdw>
+          </a:effectLst>
+          <a:scene3d>
+            <a:camera prst="orthographicFront">
+              <a:rot lat="0" lon="0" rev="0"/>
+            </a:camera>
+            <a:lightRig rig="threePt" dir="t">
+              <a:rot lat="0" lon="0" rev="1200000"/>
+            </a:lightRig>
+          </a:scene3d>
+          <a:sp3d>
+            <a:bevelT w="63500" h="25400"/>
+          </a:sp3d>
+        </a:effectStyle>
+      </a:effectStyleLst>
+      <a:bgFillStyleLst>
+        <a:solidFill>
+          <a:schemeClr val="phClr"/>
+        </a:solidFill>
+        <a:gradFill rotWithShape="1">
+          <a:gsLst>
+            <a:gs pos="0">
+              <a:schemeClr val="phClr">
+                <a:tint val="40000"/>
+                <a:satMod val="350000"/>
+              </a:schemeClr>
+            </a:gs>
+            <a:gs pos="40000">
+              <a:schemeClr val="phClr">
+                <a:tint val="45000"/>
+                <a:shade val="99000"/>
+                <a:satMod val="350000"/>
+              </a:schemeClr>
+            </a:gs>
+            <a:gs pos="100000">
+              <a:schemeClr val="phClr">
+                <a:shade val="20000"/>
+                <a:satMod val="255000"/>
+              </a:schemeClr>
+            </a:gs>
+          </a:gsLst>
+          <a:path path="circle">
+            <a:fillToRect l="50000" t="-80000" r="50000" b="180000"/>
+          </a:path>
+        </a:gradFill>
+        <a:gradFill rotWithShape="1">
+          <a:gsLst>
+            <a:gs pos="0">
+              <a:schemeClr val="phClr">
+                <a:tint val="80000"/>
+                <a:satMod val="300000"/>
+              </a:schemeClr>
+            </a:gs>
+            <a:gs pos="100000">
+              <a:schemeClr val="phClr">
+                <a:shade val="30000"/>
+                <a:satMod val="200000"/>
+              </a:schemeClr>
+            </a:gs>
+          </a:gsLst>
+          <a:path path="circle">
+            <a:fillToRect l="50000" t="50000" r="50000" b="50000"/>
+          </a:path>
+        </a:gradFill>
+      </a:bgFillStyleLst>
+    </a:fmtScheme>
+  </a:themeElements>
+</a:theme>
+</file>
+
+<file path=ppt/theme/theme2.xml><?xml version="1.0" encoding="utf-8"?>
 <a:theme xmlns:a="http://schemas.openxmlformats.org/drawingml/2006/main" xmlns:r="http://schemas.openxmlformats.org/officeDocument/2006/relationships" name="Simple Light">
   <a:themeElements>
     <a:clrScheme name="Simple Light">
@@ -12893,283 +13638,4 @@
     </a:fmtScheme>
   </a:themeElements>
 </a:theme>
-</file>
-
-<file path=ppt/theme/theme2.xml><?xml version="1.0" encoding="utf-8"?>
-<a:theme xmlns:a="http://schemas.openxmlformats.org/drawingml/2006/main" xmlns:r="http://schemas.openxmlformats.org/officeDocument/2006/relationships">
-  <a:themeElements>
-    <a:clrScheme name="Default">
-      <a:dk1>
-        <a:srgbClr val="000000"/>
-      </a:dk1>
-      <a:lt1>
-        <a:srgbClr val="FFFFFF"/>
-      </a:lt1>
-      <a:dk2>
-        <a:srgbClr val="158158"/>
-      </a:dk2>
-      <a:lt2>
-        <a:srgbClr val="F3F3F3"/>
-      </a:lt2>
-      <a:accent1>
-        <a:srgbClr val="058DC7"/>
-      </a:accent1>
-      <a:accent2>
-        <a:srgbClr val="50B432"/>
-      </a:accent2>
-      <a:accent3>
-        <a:srgbClr val="ED561B"/>
-      </a:accent3>
-      <a:accent4>
-        <a:srgbClr val="EDEF00"/>
-      </a:accent4>
-      <a:accent5>
-        <a:srgbClr val="24CBE5"/>
-      </a:accent5>
-      <a:accent6>
-        <a:srgbClr val="64E572"/>
-      </a:accent6>
-      <a:hlink>
-        <a:srgbClr val="2200CC"/>
-      </a:hlink>
-      <a:folHlink>
-        <a:srgbClr val="551A8B"/>
-      </a:folHlink>
-    </a:clrScheme>
-    <a:fontScheme name="Office">
-      <a:majorFont>
-        <a:latin typeface="Arial"/>
-        <a:ea typeface=""/>
-        <a:cs typeface=""/>
-        <a:font script="Jpan" typeface="ＭＳ Ｐゴシック"/>
-        <a:font script="Hang" typeface="맑은 고딕"/>
-        <a:font script="Hans" typeface="宋体"/>
-        <a:font script="Hant" typeface="新細明體"/>
-        <a:font script="Arab" typeface="Times New Roman"/>
-        <a:font script="Hebr" typeface="Times New Roman"/>
-        <a:font script="Thai" typeface="Angsana New"/>
-        <a:font script="Ethi" typeface="Nyala"/>
-        <a:font script="Beng" typeface="Vrinda"/>
-        <a:font script="Gujr" typeface="Shruti"/>
-        <a:font script="Khmr" typeface="MoolBoran"/>
-        <a:font script="Knda" typeface="Tunga"/>
-        <a:font script="Guru" typeface="Raavi"/>
-        <a:font script="Cans" typeface="Euphemia"/>
-        <a:font script="Cher" typeface="Plantagenet Cherokee"/>
-        <a:font script="Yiii" typeface="Microsoft Yi Baiti"/>
-        <a:font script="Tibt" typeface="Microsoft Himalaya"/>
-        <a:font script="Thaa" typeface="MV Boli"/>
-        <a:font script="Deva" typeface="Mangal"/>
-        <a:font script="Telu" typeface="Gautami"/>
-        <a:font script="Taml" typeface="Latha"/>
-        <a:font script="Syrc" typeface="Estrangelo Edessa"/>
-        <a:font script="Orya" typeface="Kalinga"/>
-        <a:font script="Mlym" typeface="Kartika"/>
-        <a:font script="Laoo" typeface="DokChampa"/>
-        <a:font script="Sinh" typeface="Iskoola Pota"/>
-        <a:font script="Mong" typeface="Mongolian Baiti"/>
-        <a:font script="Viet" typeface="Times New Roman"/>
-        <a:font script="Uigh" typeface="Microsoft Uighur"/>
-        <a:font script="Geor" typeface="Sylfaen"/>
-      </a:majorFont>
-      <a:minorFont>
-        <a:latin typeface="Arial"/>
-        <a:ea typeface=""/>
-        <a:cs typeface=""/>
-        <a:font script="Jpan" typeface="ＭＳ Ｐゴシック"/>
-        <a:font script="Hang" typeface="맑은 고딕"/>
-        <a:font script="Hans" typeface="宋体"/>
-        <a:font script="Hant" typeface="新細明體"/>
-        <a:font script="Arab" typeface="Arial"/>
-        <a:font script="Hebr" typeface="Arial"/>
-        <a:font script="Thai" typeface="Cordia New"/>
-        <a:font script="Ethi" typeface="Nyala"/>
-        <a:font script="Beng" typeface="Vrinda"/>
-        <a:font script="Gujr" typeface="Shruti"/>
-        <a:font script="Khmr" typeface="DaunPenh"/>
-        <a:font script="Knda" typeface="Tunga"/>
-        <a:font script="Guru" typeface="Raavi"/>
-        <a:font script="Cans" typeface="Euphemia"/>
-        <a:font script="Cher" typeface="Plantagenet Cherokee"/>
-        <a:font script="Yiii" typeface="Microsoft Yi Baiti"/>
-        <a:font script="Tibt" typeface="Microsoft Himalaya"/>
-        <a:font script="Thaa" typeface="MV Boli"/>
-        <a:font script="Deva" typeface="Mangal"/>
-        <a:font script="Telu" typeface="Gautami"/>
-        <a:font script="Taml" typeface="Latha"/>
-        <a:font script="Syrc" typeface="Estrangelo Edessa"/>
-        <a:font script="Orya" typeface="Kalinga"/>
-        <a:font script="Mlym" typeface="Kartika"/>
-        <a:font script="Laoo" typeface="DokChampa"/>
-        <a:font script="Sinh" typeface="Iskoola Pota"/>
-        <a:font script="Mong" typeface="Mongolian Baiti"/>
-        <a:font script="Viet" typeface="Arial"/>
-        <a:font script="Uigh" typeface="Microsoft Uighur"/>
-        <a:font script="Geor" typeface="Sylfaen"/>
-      </a:minorFont>
-    </a:fontScheme>
-    <a:fmtScheme name="Office">
-      <a:fillStyleLst>
-        <a:solidFill>
-          <a:schemeClr val="phClr"/>
-        </a:solidFill>
-        <a:gradFill rotWithShape="1">
-          <a:gsLst>
-            <a:gs pos="0">
-              <a:schemeClr val="phClr">
-                <a:tint val="50000"/>
-                <a:satMod val="300000"/>
-              </a:schemeClr>
-            </a:gs>
-            <a:gs pos="35000">
-              <a:schemeClr val="phClr">
-                <a:tint val="37000"/>
-                <a:satMod val="300000"/>
-              </a:schemeClr>
-            </a:gs>
-            <a:gs pos="100000">
-              <a:schemeClr val="phClr">
-                <a:tint val="15000"/>
-                <a:satMod val="350000"/>
-              </a:schemeClr>
-            </a:gs>
-          </a:gsLst>
-          <a:lin ang="16200000" scaled="1"/>
-        </a:gradFill>
-        <a:gradFill rotWithShape="1">
-          <a:gsLst>
-            <a:gs pos="0">
-              <a:schemeClr val="phClr">
-                <a:tint val="100000"/>
-                <a:shade val="100000"/>
-                <a:satMod val="130000"/>
-              </a:schemeClr>
-            </a:gs>
-            <a:gs pos="100000">
-              <a:schemeClr val="phClr">
-                <a:tint val="50000"/>
-                <a:shade val="100000"/>
-                <a:satMod val="350000"/>
-              </a:schemeClr>
-            </a:gs>
-          </a:gsLst>
-          <a:lin ang="16200000" scaled="0"/>
-        </a:gradFill>
-      </a:fillStyleLst>
-      <a:lnStyleLst>
-        <a:ln w="9525" cap="flat" cmpd="sng" algn="ctr">
-          <a:solidFill>
-            <a:schemeClr val="phClr">
-              <a:shade val="95000"/>
-              <a:satMod val="105000"/>
-            </a:schemeClr>
-          </a:solidFill>
-          <a:prstDash val="solid"/>
-        </a:ln>
-        <a:ln w="25400" cap="flat" cmpd="sng" algn="ctr">
-          <a:solidFill>
-            <a:schemeClr val="phClr"/>
-          </a:solidFill>
-          <a:prstDash val="solid"/>
-        </a:ln>
-        <a:ln w="38100" cap="flat" cmpd="sng" algn="ctr">
-          <a:solidFill>
-            <a:schemeClr val="phClr"/>
-          </a:solidFill>
-          <a:prstDash val="solid"/>
-        </a:ln>
-      </a:lnStyleLst>
-      <a:effectStyleLst>
-        <a:effectStyle>
-          <a:effectLst>
-            <a:outerShdw blurRad="40000" dist="20000" dir="5400000" rotWithShape="0">
-              <a:srgbClr val="000000">
-                <a:alpha val="38000"/>
-              </a:srgbClr>
-            </a:outerShdw>
-          </a:effectLst>
-        </a:effectStyle>
-        <a:effectStyle>
-          <a:effectLst>
-            <a:outerShdw blurRad="40000" dist="23000" dir="5400000" rotWithShape="0">
-              <a:srgbClr val="000000">
-                <a:alpha val="35000"/>
-              </a:srgbClr>
-            </a:outerShdw>
-          </a:effectLst>
-        </a:effectStyle>
-        <a:effectStyle>
-          <a:effectLst>
-            <a:outerShdw blurRad="40000" dist="23000" dir="5400000" rotWithShape="0">
-              <a:srgbClr val="000000">
-                <a:alpha val="35000"/>
-              </a:srgbClr>
-            </a:outerShdw>
-          </a:effectLst>
-          <a:scene3d>
-            <a:camera prst="orthographicFront">
-              <a:rot lat="0" lon="0" rev="0"/>
-            </a:camera>
-            <a:lightRig rig="threePt" dir="t">
-              <a:rot lat="0" lon="0" rev="1200000"/>
-            </a:lightRig>
-          </a:scene3d>
-          <a:sp3d>
-            <a:bevelT w="63500" h="25400"/>
-          </a:sp3d>
-        </a:effectStyle>
-      </a:effectStyleLst>
-      <a:bgFillStyleLst>
-        <a:solidFill>
-          <a:schemeClr val="phClr"/>
-        </a:solidFill>
-        <a:gradFill rotWithShape="1">
-          <a:gsLst>
-            <a:gs pos="0">
-              <a:schemeClr val="phClr">
-                <a:tint val="40000"/>
-                <a:satMod val="350000"/>
-              </a:schemeClr>
-            </a:gs>
-            <a:gs pos="40000">
-              <a:schemeClr val="phClr">
-                <a:tint val="45000"/>
-                <a:shade val="99000"/>
-                <a:satMod val="350000"/>
-              </a:schemeClr>
-            </a:gs>
-            <a:gs pos="100000">
-              <a:schemeClr val="phClr">
-                <a:shade val="20000"/>
-                <a:satMod val="255000"/>
-              </a:schemeClr>
-            </a:gs>
-          </a:gsLst>
-          <a:path path="circle">
-            <a:fillToRect l="50000" t="-80000" r="50000" b="180000"/>
-          </a:path>
-        </a:gradFill>
-        <a:gradFill rotWithShape="1">
-          <a:gsLst>
-            <a:gs pos="0">
-              <a:schemeClr val="phClr">
-                <a:tint val="80000"/>
-                <a:satMod val="300000"/>
-              </a:schemeClr>
-            </a:gs>
-            <a:gs pos="100000">
-              <a:schemeClr val="phClr">
-                <a:shade val="30000"/>
-                <a:satMod val="200000"/>
-              </a:schemeClr>
-            </a:gs>
-          </a:gsLst>
-          <a:path path="circle">
-            <a:fillToRect l="50000" t="50000" r="50000" b="50000"/>
-          </a:path>
-        </a:gradFill>
-      </a:bgFillStyleLst>
-    </a:fmtScheme>
-  </a:themeElements>
-</a:theme>
 </file>